--- a/UDE_Argentina_2050.pptx
+++ b/UDE_Argentina_2050.pptx
@@ -2681,6 +2681,13 @@
             </a:solidFill>
           </a:ln>
         </p:spPr>
+        <p:txBody>
+          <a:bodyPr/>
+          <a:lstStyle/>
+          <a:p>
+            <a:endParaRPr lang="es-AR"/>
+          </a:p>
+        </p:txBody>
       </p:sp>
       <p:sp>
         <p:nvSpPr>
@@ -2707,8 +2714,48 @@
           <a:p>
             <a:r>
               <a:rPr lang="es-AR" dirty="0"/>
-              <a:t>Agregar discrepancia entre la curva con sólo ODE y la curva implementada con UDE</a:t>
-            </a:r>
+              <a:t>1er grafico: </a:t>
+            </a:r>
+          </a:p>
+          <a:p>
+            <a:r>
+              <a:rPr lang="es-AR" sz="1200" b="0" kern="1200" dirty="0">
+                <a:solidFill>
+                  <a:schemeClr val="tx1"/>
+                </a:solidFill>
+                <a:effectLst/>
+                <a:latin typeface="+mn-lt"/>
+                <a:ea typeface="+mn-ea"/>
+                <a:cs typeface="+mn-cs"/>
+              </a:rPr>
+              <a:t>- La red aprendió a capturar la dinámica real.</a:t>
+            </a:r>
+          </a:p>
+          <a:p>
+            <a:r>
+              <a:rPr lang="es-AR" sz="1200" b="0" kern="1200" dirty="0">
+                <a:solidFill>
+                  <a:schemeClr val="tx1"/>
+                </a:solidFill>
+                <a:effectLst/>
+                <a:latin typeface="+mn-lt"/>
+                <a:ea typeface="+mn-ea"/>
+                <a:cs typeface="+mn-cs"/>
+              </a:rPr>
+              <a:t>- Los pesos aleatorios (rojo punteado) producen una solución absurda, lo que muestra que el entrenamiento fue esencial y funcionó correctamente.</a:t>
+            </a:r>
+          </a:p>
+          <a:p>
+            <a:endParaRPr lang="es-AR" dirty="0"/>
+          </a:p>
+          <a:p>
+            <a:r>
+              <a:rPr lang="es-AR" dirty="0"/>
+              <a:t>2do grafico:</a:t>
+            </a:r>
+          </a:p>
+          <a:p>
+            <a:endParaRPr lang="es-AR" dirty="0"/>
           </a:p>
         </p:txBody>
       </p:sp>
@@ -5743,7 +5790,29 @@
                 <a:ea typeface="Calibri" pitchFamily="34" charset="-122"/>
                 <a:cs typeface="Calibri" pitchFamily="34" charset="-120"/>
               </a:rPr>
-              <a:t>La loss cae de ~10⁻² a ~10⁻⁸ en 3.000 épocas. El entrenamiento es estable con el esquema Adam → L-BFGS.</a:t>
+              <a:t>La loss cae de ~10⁻² a ~10⁻⁸ en 3.000 épocas. El entrenamiento es </a:t>
+            </a:r>
+            <a:r>
+              <a:rPr lang="en-US" sz="1200" dirty="0" err="1">
+                <a:solidFill>
+                  <a:srgbClr val="1B2A4A"/>
+                </a:solidFill>
+                <a:latin typeface="Calibri" pitchFamily="34" charset="0"/>
+                <a:ea typeface="Calibri" pitchFamily="34" charset="-122"/>
+                <a:cs typeface="Calibri" pitchFamily="34" charset="-120"/>
+              </a:rPr>
+              <a:t>estable</a:t>
+            </a:r>
+            <a:r>
+              <a:rPr lang="en-US" sz="1200" dirty="0">
+                <a:solidFill>
+                  <a:srgbClr val="1B2A4A"/>
+                </a:solidFill>
+                <a:latin typeface="Calibri" pitchFamily="34" charset="0"/>
+                <a:ea typeface="Calibri" pitchFamily="34" charset="-122"/>
+                <a:cs typeface="Calibri" pitchFamily="34" charset="-120"/>
+              </a:rPr>
+              <a:t>.</a:t>
             </a:r>
             <a:endParaRPr lang="en-US" sz="1200" dirty="0"/>
           </a:p>
@@ -5886,7 +5955,29 @@
                 <a:ea typeface="Calibri" pitchFamily="34" charset="-122"/>
                 <a:cs typeface="Calibri" pitchFamily="34" charset="-120"/>
               </a:rPr>
-              <a:t>La red aprende una corrección decreciente en el tiempo, capturando la caída secular de la </a:t>
+              <a:t>La red aprende una corrección decreciente en el tiempo, capturando la </a:t>
+            </a:r>
+            <a:r>
+              <a:rPr lang="en-US" sz="1200" dirty="0" err="1">
+                <a:solidFill>
+                  <a:srgbClr val="1B2A4A"/>
+                </a:solidFill>
+                <a:latin typeface="Calibri" pitchFamily="34" charset="0"/>
+                <a:ea typeface="Calibri" pitchFamily="34" charset="-122"/>
+                <a:cs typeface="Calibri" pitchFamily="34" charset="-120"/>
+              </a:rPr>
+              <a:t>caída</a:t>
+            </a:r>
+            <a:r>
+              <a:rPr lang="en-US" sz="1200" dirty="0">
+                <a:solidFill>
+                  <a:srgbClr val="1B2A4A"/>
+                </a:solidFill>
+                <a:latin typeface="Calibri" pitchFamily="34" charset="0"/>
+                <a:ea typeface="Calibri" pitchFamily="34" charset="-122"/>
+                <a:cs typeface="Calibri" pitchFamily="34" charset="-120"/>
+              </a:rPr>
+              <a:t> de la </a:t>
             </a:r>
             <a:r>
               <a:rPr lang="en-US" sz="1200" dirty="0" err="1">
@@ -5939,6 +6030,1118 @@
           <a:chExt cx="0" cy="0"/>
         </a:xfrm>
       </p:grpSpPr>
+      <p:sp>
+        <p:nvSpPr>
+          <p:cNvPr id="2" name="Text 0">
+            <a:extLst>
+              <a:ext uri="{FF2B5EF4-FFF2-40B4-BE49-F238E27FC236}">
+                <a16:creationId xmlns:a16="http://schemas.microsoft.com/office/drawing/2014/main" id="{1C356303-CBA6-2197-DEA1-0DD7ED94C0DE}"/>
+              </a:ext>
+            </a:extLst>
+          </p:cNvPr>
+          <p:cNvSpPr/>
+          <p:nvPr/>
+        </p:nvSpPr>
+        <p:spPr>
+          <a:xfrm>
+            <a:off x="457200" y="32709"/>
+            <a:ext cx="8229600" cy="594360"/>
+          </a:xfrm>
+          <a:prstGeom prst="rect">
+            <a:avLst/>
+          </a:prstGeom>
+          <a:noFill/>
+          <a:ln/>
+        </p:spPr>
+        <p:txBody>
+          <a:bodyPr wrap="square" lIns="0" tIns="0" rIns="0" bIns="0" rtlCol="0" anchor="ctr"/>
+          <a:lstStyle/>
+          <a:p>
+            <a:pPr marL="0" indent="0" algn="l">
+              <a:buNone/>
+            </a:pPr>
+            <a:r>
+              <a:rPr lang="en-US" sz="2600" b="1" dirty="0">
+                <a:solidFill>
+                  <a:srgbClr val="1B2A4A"/>
+                </a:solidFill>
+                <a:latin typeface="Calibri" pitchFamily="34" charset="0"/>
+                <a:ea typeface="Calibri" pitchFamily="34" charset="-122"/>
+                <a:cs typeface="Calibri" pitchFamily="34" charset="-120"/>
+              </a:rPr>
+              <a:t>Resultados — ODE Clásica vs. UDE Entrenada</a:t>
+            </a:r>
+            <a:endParaRPr lang="en-US" sz="2600" dirty="0"/>
+          </a:p>
+        </p:txBody>
+      </p:sp>
+      <p:sp>
+        <p:nvSpPr>
+          <p:cNvPr id="3" name="Shape 1">
+            <a:extLst>
+              <a:ext uri="{FF2B5EF4-FFF2-40B4-BE49-F238E27FC236}">
+                <a16:creationId xmlns:a16="http://schemas.microsoft.com/office/drawing/2014/main" id="{08AE5B50-FA4B-0396-F0A8-10FDB251F9CA}"/>
+              </a:ext>
+            </a:extLst>
+          </p:cNvPr>
+          <p:cNvSpPr/>
+          <p:nvPr/>
+        </p:nvSpPr>
+        <p:spPr>
+          <a:xfrm>
+            <a:off x="457200" y="672789"/>
+            <a:ext cx="8229600" cy="18288"/>
+          </a:xfrm>
+          <a:prstGeom prst="rect">
+            <a:avLst/>
+          </a:prstGeom>
+          <a:solidFill>
+            <a:srgbClr val="1D7A8C"/>
+          </a:solidFill>
+          <a:ln w="12700">
+            <a:solidFill>
+              <a:srgbClr val="1D7A8C"/>
+            </a:solidFill>
+            <a:prstDash val="solid"/>
+          </a:ln>
+        </p:spPr>
+        <p:txBody>
+          <a:bodyPr/>
+          <a:lstStyle/>
+          <a:p>
+            <a:endParaRPr lang="es-AR"/>
+          </a:p>
+        </p:txBody>
+      </p:sp>
+      <p:pic>
+        <p:nvPicPr>
+          <p:cNvPr id="4" name="Image 0" descr="preencoded.png">
+            <a:extLst>
+              <a:ext uri="{FF2B5EF4-FFF2-40B4-BE49-F238E27FC236}">
+                <a16:creationId xmlns:a16="http://schemas.microsoft.com/office/drawing/2014/main" id="{734C1354-9AB1-F6F6-6F6D-71091498215A}"/>
+              </a:ext>
+            </a:extLst>
+          </p:cNvPr>
+          <p:cNvPicPr>
+            <a:picLocks noChangeAspect="1"/>
+          </p:cNvPicPr>
+          <p:nvPr/>
+        </p:nvPicPr>
+        <p:blipFill>
+          <a:blip r:embed="rId3"/>
+          <a:stretch>
+            <a:fillRect/>
+          </a:stretch>
+        </p:blipFill>
+        <p:spPr>
+          <a:xfrm>
+            <a:off x="365760" y="782517"/>
+            <a:ext cx="8412480" cy="2578608"/>
+          </a:xfrm>
+          <a:prstGeom prst="rect">
+            <a:avLst/>
+          </a:prstGeom>
+        </p:spPr>
+      </p:pic>
+      <p:sp>
+        <p:nvSpPr>
+          <p:cNvPr id="5" name="Shape 2">
+            <a:extLst>
+              <a:ext uri="{FF2B5EF4-FFF2-40B4-BE49-F238E27FC236}">
+                <a16:creationId xmlns:a16="http://schemas.microsoft.com/office/drawing/2014/main" id="{84B9B3A4-ECAE-58DF-F187-9629044FA0AE}"/>
+              </a:ext>
+            </a:extLst>
+          </p:cNvPr>
+          <p:cNvSpPr/>
+          <p:nvPr/>
+        </p:nvSpPr>
+        <p:spPr>
+          <a:xfrm>
+            <a:off x="365760" y="3436037"/>
+            <a:ext cx="2697480" cy="1600200"/>
+          </a:xfrm>
+          <a:prstGeom prst="roundRect">
+            <a:avLst>
+              <a:gd name="adj" fmla="val 5714"/>
+            </a:avLst>
+          </a:prstGeom>
+          <a:solidFill>
+            <a:srgbClr val="F1F5F9"/>
+          </a:solidFill>
+          <a:ln w="10160">
+            <a:solidFill>
+              <a:srgbClr val="D1E9F0"/>
+            </a:solidFill>
+            <a:prstDash val="solid"/>
+          </a:ln>
+          <a:effectLst>
+            <a:outerShdw blurRad="76200" dist="25400" dir="2700000" algn="bl" rotWithShape="0">
+              <a:srgbClr val="000000">
+                <a:alpha val="10000"/>
+              </a:srgbClr>
+            </a:outerShdw>
+          </a:effectLst>
+        </p:spPr>
+        <p:txBody>
+          <a:bodyPr/>
+          <a:lstStyle/>
+          <a:p>
+            <a:endParaRPr lang="es-AR"/>
+          </a:p>
+        </p:txBody>
+      </p:sp>
+      <p:sp>
+        <p:nvSpPr>
+          <p:cNvPr id="6" name="Shape 3">
+            <a:extLst>
+              <a:ext uri="{FF2B5EF4-FFF2-40B4-BE49-F238E27FC236}">
+                <a16:creationId xmlns:a16="http://schemas.microsoft.com/office/drawing/2014/main" id="{00F9D285-6237-BFB9-2071-A69081AC2AC7}"/>
+              </a:ext>
+            </a:extLst>
+          </p:cNvPr>
+          <p:cNvSpPr/>
+          <p:nvPr/>
+        </p:nvSpPr>
+        <p:spPr>
+          <a:xfrm>
+            <a:off x="548640" y="3646349"/>
+            <a:ext cx="457200" cy="0"/>
+          </a:xfrm>
+          <a:prstGeom prst="line">
+            <a:avLst/>
+          </a:prstGeom>
+          <a:noFill/>
+          <a:ln w="25400">
+            <a:solidFill>
+              <a:srgbClr val="4472C4"/>
+            </a:solidFill>
+            <a:prstDash val="dash"/>
+          </a:ln>
+        </p:spPr>
+        <p:txBody>
+          <a:bodyPr/>
+          <a:lstStyle/>
+          <a:p>
+            <a:endParaRPr lang="es-AR"/>
+          </a:p>
+        </p:txBody>
+      </p:sp>
+      <p:sp>
+        <p:nvSpPr>
+          <p:cNvPr id="7" name="Text 4">
+            <a:extLst>
+              <a:ext uri="{FF2B5EF4-FFF2-40B4-BE49-F238E27FC236}">
+                <a16:creationId xmlns:a16="http://schemas.microsoft.com/office/drawing/2014/main" id="{255543B7-C942-E2E0-8B3F-B1FEDBEA4A52}"/>
+              </a:ext>
+            </a:extLst>
+          </p:cNvPr>
+          <p:cNvSpPr/>
+          <p:nvPr/>
+        </p:nvSpPr>
+        <p:spPr>
+          <a:xfrm>
+            <a:off x="1051560" y="3521242"/>
+            <a:ext cx="1737360" cy="274320"/>
+          </a:xfrm>
+          <a:prstGeom prst="rect">
+            <a:avLst/>
+          </a:prstGeom>
+          <a:noFill/>
+          <a:ln/>
+        </p:spPr>
+        <p:txBody>
+          <a:bodyPr wrap="square" lIns="0" tIns="0" rIns="0" bIns="0" rtlCol="0" anchor="ctr"/>
+          <a:lstStyle/>
+          <a:p>
+            <a:pPr marL="0" indent="0" algn="l">
+              <a:buNone/>
+            </a:pPr>
+            <a:r>
+              <a:rPr lang="en-US" sz="1000" b="1" dirty="0">
+                <a:solidFill>
+                  <a:srgbClr val="4472C4"/>
+                </a:solidFill>
+                <a:latin typeface="Calibri" pitchFamily="34" charset="0"/>
+                <a:ea typeface="Calibri" pitchFamily="34" charset="-122"/>
+                <a:cs typeface="Calibri" pitchFamily="34" charset="-120"/>
+              </a:rPr>
+              <a:t>ODE clásica</a:t>
+            </a:r>
+            <a:endParaRPr lang="en-US" sz="1000" dirty="0"/>
+          </a:p>
+        </p:txBody>
+      </p:sp>
+      <p:sp>
+        <p:nvSpPr>
+          <p:cNvPr id="8" name="Shape 5">
+            <a:extLst>
+              <a:ext uri="{FF2B5EF4-FFF2-40B4-BE49-F238E27FC236}">
+                <a16:creationId xmlns:a16="http://schemas.microsoft.com/office/drawing/2014/main" id="{5425FB55-214A-0E04-312E-656ACBAB1F79}"/>
+              </a:ext>
+            </a:extLst>
+          </p:cNvPr>
+          <p:cNvSpPr/>
+          <p:nvPr/>
+        </p:nvSpPr>
+        <p:spPr>
+          <a:xfrm>
+            <a:off x="548640" y="3938957"/>
+            <a:ext cx="457200" cy="0"/>
+          </a:xfrm>
+          <a:prstGeom prst="line">
+            <a:avLst/>
+          </a:prstGeom>
+          <a:noFill/>
+          <a:ln w="31750">
+            <a:solidFill>
+              <a:srgbClr val="2E8B57"/>
+            </a:solidFill>
+            <a:prstDash val="solid"/>
+          </a:ln>
+        </p:spPr>
+        <p:txBody>
+          <a:bodyPr/>
+          <a:lstStyle/>
+          <a:p>
+            <a:endParaRPr lang="es-AR"/>
+          </a:p>
+        </p:txBody>
+      </p:sp>
+      <p:sp>
+        <p:nvSpPr>
+          <p:cNvPr id="9" name="Text 6">
+            <a:extLst>
+              <a:ext uri="{FF2B5EF4-FFF2-40B4-BE49-F238E27FC236}">
+                <a16:creationId xmlns:a16="http://schemas.microsoft.com/office/drawing/2014/main" id="{52893562-1EFA-42E3-859C-F012315A2BF7}"/>
+              </a:ext>
+            </a:extLst>
+          </p:cNvPr>
+          <p:cNvSpPr/>
+          <p:nvPr/>
+        </p:nvSpPr>
+        <p:spPr>
+          <a:xfrm>
+            <a:off x="1051560" y="3813850"/>
+            <a:ext cx="1737360" cy="274320"/>
+          </a:xfrm>
+          <a:prstGeom prst="rect">
+            <a:avLst/>
+          </a:prstGeom>
+          <a:noFill/>
+          <a:ln/>
+        </p:spPr>
+        <p:txBody>
+          <a:bodyPr wrap="square" lIns="0" tIns="0" rIns="0" bIns="0" rtlCol="0" anchor="ctr"/>
+          <a:lstStyle/>
+          <a:p>
+            <a:pPr marL="0" indent="0" algn="l">
+              <a:buNone/>
+            </a:pPr>
+            <a:r>
+              <a:rPr lang="en-US" sz="1000" b="1" dirty="0">
+                <a:solidFill>
+                  <a:srgbClr val="2E8B57"/>
+                </a:solidFill>
+                <a:latin typeface="Calibri" pitchFamily="34" charset="0"/>
+                <a:ea typeface="Calibri" pitchFamily="34" charset="-122"/>
+                <a:cs typeface="Calibri" pitchFamily="34" charset="-120"/>
+              </a:rPr>
+              <a:t>UDE entrenada</a:t>
+            </a:r>
+            <a:endParaRPr lang="en-US" sz="1000" dirty="0"/>
+          </a:p>
+        </p:txBody>
+      </p:sp>
+      <p:sp>
+        <p:nvSpPr>
+          <p:cNvPr id="10" name="Shape 7">
+            <a:extLst>
+              <a:ext uri="{FF2B5EF4-FFF2-40B4-BE49-F238E27FC236}">
+                <a16:creationId xmlns:a16="http://schemas.microsoft.com/office/drawing/2014/main" id="{D58AA46B-7DA0-50EF-4154-789FC43615E3}"/>
+              </a:ext>
+            </a:extLst>
+          </p:cNvPr>
+          <p:cNvSpPr/>
+          <p:nvPr/>
+        </p:nvSpPr>
+        <p:spPr>
+          <a:xfrm>
+            <a:off x="457200" y="4149269"/>
+            <a:ext cx="2514600" cy="18288"/>
+          </a:xfrm>
+          <a:prstGeom prst="rect">
+            <a:avLst/>
+          </a:prstGeom>
+          <a:solidFill>
+            <a:srgbClr val="DDDDDD"/>
+          </a:solidFill>
+          <a:ln w="12700">
+            <a:solidFill>
+              <a:srgbClr val="DDDDDD"/>
+            </a:solidFill>
+            <a:prstDash val="solid"/>
+          </a:ln>
+        </p:spPr>
+        <p:txBody>
+          <a:bodyPr/>
+          <a:lstStyle/>
+          <a:p>
+            <a:endParaRPr lang="es-AR"/>
+          </a:p>
+        </p:txBody>
+      </p:sp>
+      <p:sp>
+        <p:nvSpPr>
+          <p:cNvPr id="11" name="Text 8">
+            <a:extLst>
+              <a:ext uri="{FF2B5EF4-FFF2-40B4-BE49-F238E27FC236}">
+                <a16:creationId xmlns:a16="http://schemas.microsoft.com/office/drawing/2014/main" id="{F1C863EA-C639-C2C3-6B77-BA63D6842AA8}"/>
+              </a:ext>
+            </a:extLst>
+          </p:cNvPr>
+          <p:cNvSpPr/>
+          <p:nvPr/>
+        </p:nvSpPr>
+        <p:spPr>
+          <a:xfrm>
+            <a:off x="502920" y="4213277"/>
+            <a:ext cx="2487168" cy="749808"/>
+          </a:xfrm>
+          <a:prstGeom prst="rect">
+            <a:avLst/>
+          </a:prstGeom>
+          <a:noFill/>
+          <a:ln/>
+        </p:spPr>
+        <p:txBody>
+          <a:bodyPr wrap="square" lIns="0" tIns="0" rIns="0" bIns="0" rtlCol="0" anchor="t"/>
+          <a:lstStyle/>
+          <a:p>
+            <a:r>
+              <a:rPr lang="es-AR" sz="1000" dirty="0">
+                <a:solidFill>
+                  <a:srgbClr val="1B2A4A"/>
+                </a:solidFill>
+                <a:latin typeface="Calibri" pitchFamily="34" charset="0"/>
+                <a:cs typeface="Calibri" pitchFamily="34" charset="-120"/>
+              </a:rPr>
+              <a:t>La </a:t>
+            </a:r>
+            <a:r>
+              <a:rPr lang="en-US" sz="1000" b="1" dirty="0">
+                <a:solidFill>
+                  <a:srgbClr val="2E8B57"/>
+                </a:solidFill>
+                <a:latin typeface="Calibri" pitchFamily="34" charset="0"/>
+                <a:ea typeface="Calibri" pitchFamily="34" charset="-122"/>
+                <a:cs typeface="Calibri" pitchFamily="34" charset="-120"/>
+              </a:rPr>
+              <a:t>UDE entrenada</a:t>
+            </a:r>
+            <a:r>
+              <a:rPr lang="en-US" sz="1000" b="1" dirty="0">
+                <a:ea typeface="Calibri" pitchFamily="34" charset="-122"/>
+              </a:rPr>
+              <a:t> </a:t>
+            </a:r>
+            <a:r>
+              <a:rPr lang="es-AR" sz="1000" dirty="0">
+                <a:solidFill>
+                  <a:srgbClr val="1B2A4A"/>
+                </a:solidFill>
+                <a:latin typeface="Calibri" pitchFamily="34" charset="0"/>
+                <a:cs typeface="Calibri" pitchFamily="34" charset="-120"/>
+              </a:rPr>
+              <a:t>se superpone casi perfectamente con los datos observados, mientras que la </a:t>
+            </a:r>
+            <a:r>
+              <a:rPr lang="en-US" sz="1000" b="1" dirty="0">
+                <a:solidFill>
+                  <a:srgbClr val="4472C4"/>
+                </a:solidFill>
+                <a:latin typeface="Calibri" pitchFamily="34" charset="0"/>
+                <a:ea typeface="Calibri" pitchFamily="34" charset="-122"/>
+                <a:cs typeface="Calibri" pitchFamily="34" charset="-120"/>
+              </a:rPr>
+              <a:t>ODE clásica</a:t>
+            </a:r>
+            <a:r>
+              <a:rPr lang="en-US" sz="1000" b="1" dirty="0">
+                <a:ea typeface="Calibri" pitchFamily="34" charset="-122"/>
+              </a:rPr>
+              <a:t> </a:t>
+            </a:r>
+            <a:r>
+              <a:rPr lang="es-AR" sz="1000" dirty="0">
+                <a:solidFill>
+                  <a:srgbClr val="1B2A4A"/>
+                </a:solidFill>
+                <a:latin typeface="Calibri" pitchFamily="34" charset="0"/>
+                <a:cs typeface="Calibri" pitchFamily="34" charset="-120"/>
+              </a:rPr>
+              <a:t>queda sistemáticamente por debajo.</a:t>
+            </a:r>
+          </a:p>
+        </p:txBody>
+      </p:sp>
+      <p:sp>
+        <p:nvSpPr>
+          <p:cNvPr id="12" name="Shape 9">
+            <a:extLst>
+              <a:ext uri="{FF2B5EF4-FFF2-40B4-BE49-F238E27FC236}">
+                <a16:creationId xmlns:a16="http://schemas.microsoft.com/office/drawing/2014/main" id="{B260D7EF-7499-810F-3F11-19D39E611EDD}"/>
+              </a:ext>
+            </a:extLst>
+          </p:cNvPr>
+          <p:cNvSpPr/>
+          <p:nvPr/>
+        </p:nvSpPr>
+        <p:spPr>
+          <a:xfrm>
+            <a:off x="3227832" y="3436037"/>
+            <a:ext cx="2697480" cy="1600200"/>
+          </a:xfrm>
+          <a:prstGeom prst="roundRect">
+            <a:avLst>
+              <a:gd name="adj" fmla="val 5714"/>
+            </a:avLst>
+          </a:prstGeom>
+          <a:solidFill>
+            <a:srgbClr val="F1F5F9"/>
+          </a:solidFill>
+          <a:ln w="10160">
+            <a:solidFill>
+              <a:srgbClr val="D1E9F0"/>
+            </a:solidFill>
+            <a:prstDash val="solid"/>
+          </a:ln>
+          <a:effectLst>
+            <a:outerShdw blurRad="76200" dist="25400" dir="2700000" algn="bl" rotWithShape="0">
+              <a:srgbClr val="000000">
+                <a:alpha val="10000"/>
+              </a:srgbClr>
+            </a:outerShdw>
+          </a:effectLst>
+        </p:spPr>
+        <p:txBody>
+          <a:bodyPr/>
+          <a:lstStyle/>
+          <a:p>
+            <a:endParaRPr lang="es-AR"/>
+          </a:p>
+        </p:txBody>
+      </p:sp>
+      <p:sp>
+        <p:nvSpPr>
+          <p:cNvPr id="13" name="Shape 10">
+            <a:extLst>
+              <a:ext uri="{FF2B5EF4-FFF2-40B4-BE49-F238E27FC236}">
+                <a16:creationId xmlns:a16="http://schemas.microsoft.com/office/drawing/2014/main" id="{BFF777FC-B1F2-7339-62EE-6C98509623A2}"/>
+              </a:ext>
+            </a:extLst>
+          </p:cNvPr>
+          <p:cNvSpPr/>
+          <p:nvPr/>
+        </p:nvSpPr>
+        <p:spPr>
+          <a:xfrm>
+            <a:off x="3410712" y="3646349"/>
+            <a:ext cx="457200" cy="0"/>
+          </a:xfrm>
+          <a:prstGeom prst="line">
+            <a:avLst/>
+          </a:prstGeom>
+          <a:noFill/>
+          <a:ln w="31750">
+            <a:solidFill>
+              <a:srgbClr val="7B2D8B"/>
+            </a:solidFill>
+            <a:prstDash val="solid"/>
+          </a:ln>
+        </p:spPr>
+        <p:txBody>
+          <a:bodyPr/>
+          <a:lstStyle/>
+          <a:p>
+            <a:endParaRPr lang="es-AR"/>
+          </a:p>
+        </p:txBody>
+      </p:sp>
+      <p:sp>
+        <p:nvSpPr>
+          <p:cNvPr id="14" name="Text 11">
+            <a:extLst>
+              <a:ext uri="{FF2B5EF4-FFF2-40B4-BE49-F238E27FC236}">
+                <a16:creationId xmlns:a16="http://schemas.microsoft.com/office/drawing/2014/main" id="{670ACB37-7918-9D5F-C5C5-3EA63C785128}"/>
+              </a:ext>
+            </a:extLst>
+          </p:cNvPr>
+          <p:cNvSpPr/>
+          <p:nvPr/>
+        </p:nvSpPr>
+        <p:spPr>
+          <a:xfrm>
+            <a:off x="3913632" y="3521242"/>
+            <a:ext cx="1737360" cy="274320"/>
+          </a:xfrm>
+          <a:prstGeom prst="rect">
+            <a:avLst/>
+          </a:prstGeom>
+          <a:noFill/>
+          <a:ln/>
+        </p:spPr>
+        <p:txBody>
+          <a:bodyPr wrap="square" lIns="0" tIns="0" rIns="0" bIns="0" rtlCol="0" anchor="ctr"/>
+          <a:lstStyle/>
+          <a:p>
+            <a:pPr marL="0" indent="0" algn="l">
+              <a:buNone/>
+            </a:pPr>
+            <a:r>
+              <a:rPr lang="en-US" sz="1000" b="1" dirty="0">
+                <a:solidFill>
+                  <a:srgbClr val="7B2D8B"/>
+                </a:solidFill>
+                <a:latin typeface="Calibri" pitchFamily="34" charset="0"/>
+                <a:ea typeface="Calibri" pitchFamily="34" charset="-122"/>
+                <a:cs typeface="Calibri" pitchFamily="34" charset="-120"/>
+              </a:rPr>
+              <a:t>Corrección nn(τ)</a:t>
+            </a:r>
+            <a:endParaRPr lang="en-US" sz="1000" dirty="0"/>
+          </a:p>
+        </p:txBody>
+      </p:sp>
+      <p:sp>
+        <p:nvSpPr>
+          <p:cNvPr id="15" name="Shape 12">
+            <a:extLst>
+              <a:ext uri="{FF2B5EF4-FFF2-40B4-BE49-F238E27FC236}">
+                <a16:creationId xmlns:a16="http://schemas.microsoft.com/office/drawing/2014/main" id="{E0713F99-725B-8B17-55F7-7B30BF05F0FC}"/>
+              </a:ext>
+            </a:extLst>
+          </p:cNvPr>
+          <p:cNvSpPr/>
+          <p:nvPr/>
+        </p:nvSpPr>
+        <p:spPr>
+          <a:xfrm>
+            <a:off x="3410712" y="3938957"/>
+            <a:ext cx="457200" cy="0"/>
+          </a:xfrm>
+          <a:prstGeom prst="line">
+            <a:avLst/>
+          </a:prstGeom>
+          <a:noFill/>
+          <a:ln w="15240">
+            <a:solidFill>
+              <a:srgbClr val="333333"/>
+            </a:solidFill>
+            <a:prstDash val="dash"/>
+          </a:ln>
+        </p:spPr>
+        <p:txBody>
+          <a:bodyPr/>
+          <a:lstStyle/>
+          <a:p>
+            <a:endParaRPr lang="es-AR"/>
+          </a:p>
+        </p:txBody>
+      </p:sp>
+      <p:sp>
+        <p:nvSpPr>
+          <p:cNvPr id="16" name="Text 13">
+            <a:extLst>
+              <a:ext uri="{FF2B5EF4-FFF2-40B4-BE49-F238E27FC236}">
+                <a16:creationId xmlns:a16="http://schemas.microsoft.com/office/drawing/2014/main" id="{3BF283DB-50A8-16BF-5985-1D7F0408303D}"/>
+              </a:ext>
+            </a:extLst>
+          </p:cNvPr>
+          <p:cNvSpPr/>
+          <p:nvPr/>
+        </p:nvSpPr>
+        <p:spPr>
+          <a:xfrm>
+            <a:off x="3913632" y="3803459"/>
+            <a:ext cx="1828800" cy="274320"/>
+          </a:xfrm>
+          <a:prstGeom prst="rect">
+            <a:avLst/>
+          </a:prstGeom>
+          <a:noFill/>
+          <a:ln/>
+        </p:spPr>
+        <p:txBody>
+          <a:bodyPr wrap="square" lIns="0" tIns="0" rIns="0" bIns="0" rtlCol="0" anchor="ctr"/>
+          <a:lstStyle/>
+          <a:p>
+            <a:pPr marL="0" indent="0" algn="l">
+              <a:buNone/>
+            </a:pPr>
+            <a:r>
+              <a:rPr lang="en-US" sz="1000" b="1" dirty="0">
+                <a:solidFill>
+                  <a:srgbClr val="666666"/>
+                </a:solidFill>
+                <a:latin typeface="Calibri" pitchFamily="34" charset="0"/>
+                <a:ea typeface="Calibri" pitchFamily="34" charset="-122"/>
+                <a:cs typeface="Calibri" pitchFamily="34" charset="-120"/>
+              </a:rPr>
+              <a:t>Baseline (sin corrección)</a:t>
+            </a:r>
+            <a:endParaRPr lang="en-US" sz="1000" dirty="0"/>
+          </a:p>
+        </p:txBody>
+      </p:sp>
+      <p:sp>
+        <p:nvSpPr>
+          <p:cNvPr id="17" name="Shape 14">
+            <a:extLst>
+              <a:ext uri="{FF2B5EF4-FFF2-40B4-BE49-F238E27FC236}">
+                <a16:creationId xmlns:a16="http://schemas.microsoft.com/office/drawing/2014/main" id="{94CF7387-F4DF-6FB0-3F39-403F7C5E8C2C}"/>
+              </a:ext>
+            </a:extLst>
+          </p:cNvPr>
+          <p:cNvSpPr/>
+          <p:nvPr/>
+        </p:nvSpPr>
+        <p:spPr>
+          <a:xfrm>
+            <a:off x="3319272" y="4149269"/>
+            <a:ext cx="2514600" cy="18288"/>
+          </a:xfrm>
+          <a:prstGeom prst="rect">
+            <a:avLst/>
+          </a:prstGeom>
+          <a:solidFill>
+            <a:srgbClr val="DDDDDD"/>
+          </a:solidFill>
+          <a:ln w="12700">
+            <a:solidFill>
+              <a:srgbClr val="DDDDDD"/>
+            </a:solidFill>
+            <a:prstDash val="solid"/>
+          </a:ln>
+        </p:spPr>
+        <p:txBody>
+          <a:bodyPr/>
+          <a:lstStyle/>
+          <a:p>
+            <a:endParaRPr lang="es-AR"/>
+          </a:p>
+        </p:txBody>
+      </p:sp>
+      <p:sp>
+        <p:nvSpPr>
+          <p:cNvPr id="18" name="Text 15">
+            <a:extLst>
+              <a:ext uri="{FF2B5EF4-FFF2-40B4-BE49-F238E27FC236}">
+                <a16:creationId xmlns:a16="http://schemas.microsoft.com/office/drawing/2014/main" id="{C304DB1F-6984-D758-45CB-B12C60FE0ED4}"/>
+              </a:ext>
+            </a:extLst>
+          </p:cNvPr>
+          <p:cNvSpPr/>
+          <p:nvPr/>
+        </p:nvSpPr>
+        <p:spPr>
+          <a:xfrm>
+            <a:off x="3364992" y="4213277"/>
+            <a:ext cx="2487168" cy="749808"/>
+          </a:xfrm>
+          <a:prstGeom prst="rect">
+            <a:avLst/>
+          </a:prstGeom>
+          <a:noFill/>
+          <a:ln/>
+        </p:spPr>
+        <p:txBody>
+          <a:bodyPr wrap="square" lIns="0" tIns="0" rIns="0" bIns="0" rtlCol="0" anchor="t"/>
+          <a:lstStyle/>
+          <a:p>
+            <a:r>
+              <a:rPr lang="es-AR" sz="1000" dirty="0">
+                <a:solidFill>
+                  <a:srgbClr val="1B2A4A"/>
+                </a:solidFill>
+                <a:latin typeface="Calibri" pitchFamily="34" charset="0"/>
+                <a:cs typeface="Calibri" pitchFamily="34" charset="-120"/>
+              </a:rPr>
+              <a:t>La corrección es siempre positiva y decreciente.</a:t>
+            </a:r>
+          </a:p>
+        </p:txBody>
+      </p:sp>
+      <p:sp>
+        <p:nvSpPr>
+          <p:cNvPr id="19" name="Shape 16">
+            <a:extLst>
+              <a:ext uri="{FF2B5EF4-FFF2-40B4-BE49-F238E27FC236}">
+                <a16:creationId xmlns:a16="http://schemas.microsoft.com/office/drawing/2014/main" id="{799031BC-9D62-10FA-2BAA-CA60F189C276}"/>
+              </a:ext>
+            </a:extLst>
+          </p:cNvPr>
+          <p:cNvSpPr/>
+          <p:nvPr/>
+        </p:nvSpPr>
+        <p:spPr>
+          <a:xfrm>
+            <a:off x="6080760" y="3436037"/>
+            <a:ext cx="2697480" cy="1600200"/>
+          </a:xfrm>
+          <a:prstGeom prst="roundRect">
+            <a:avLst>
+              <a:gd name="adj" fmla="val 5714"/>
+            </a:avLst>
+          </a:prstGeom>
+          <a:solidFill>
+            <a:srgbClr val="F1F5F9"/>
+          </a:solidFill>
+          <a:ln w="10160">
+            <a:solidFill>
+              <a:srgbClr val="D1E9F0"/>
+            </a:solidFill>
+            <a:prstDash val="solid"/>
+          </a:ln>
+          <a:effectLst>
+            <a:outerShdw blurRad="76200" dist="25400" dir="2700000" algn="bl" rotWithShape="0">
+              <a:srgbClr val="000000">
+                <a:alpha val="10000"/>
+              </a:srgbClr>
+            </a:outerShdw>
+          </a:effectLst>
+        </p:spPr>
+        <p:txBody>
+          <a:bodyPr/>
+          <a:lstStyle/>
+          <a:p>
+            <a:endParaRPr lang="es-AR"/>
+          </a:p>
+        </p:txBody>
+      </p:sp>
+      <p:sp>
+        <p:nvSpPr>
+          <p:cNvPr id="20" name="Shape 17">
+            <a:extLst>
+              <a:ext uri="{FF2B5EF4-FFF2-40B4-BE49-F238E27FC236}">
+                <a16:creationId xmlns:a16="http://schemas.microsoft.com/office/drawing/2014/main" id="{289A7513-06B2-904E-6D3E-6970686AF866}"/>
+              </a:ext>
+            </a:extLst>
+          </p:cNvPr>
+          <p:cNvSpPr/>
+          <p:nvPr/>
+        </p:nvSpPr>
+        <p:spPr>
+          <a:xfrm>
+            <a:off x="6263640" y="3802214"/>
+            <a:ext cx="457200" cy="0"/>
+          </a:xfrm>
+          <a:prstGeom prst="line">
+            <a:avLst/>
+          </a:prstGeom>
+          <a:noFill/>
+          <a:ln w="25400">
+            <a:solidFill>
+              <a:srgbClr val="4472C4"/>
+            </a:solidFill>
+            <a:prstDash val="solid"/>
+          </a:ln>
+        </p:spPr>
+        <p:txBody>
+          <a:bodyPr/>
+          <a:lstStyle/>
+          <a:p>
+            <a:endParaRPr lang="es-AR"/>
+          </a:p>
+        </p:txBody>
+      </p:sp>
+      <p:sp>
+        <p:nvSpPr>
+          <p:cNvPr id="21" name="Text 18">
+            <a:extLst>
+              <a:ext uri="{FF2B5EF4-FFF2-40B4-BE49-F238E27FC236}">
+                <a16:creationId xmlns:a16="http://schemas.microsoft.com/office/drawing/2014/main" id="{B8B3494B-E728-9784-BC78-9A17FB086B19}"/>
+              </a:ext>
+            </a:extLst>
+          </p:cNvPr>
+          <p:cNvSpPr/>
+          <p:nvPr/>
+        </p:nvSpPr>
+        <p:spPr>
+          <a:xfrm>
+            <a:off x="6766560" y="3656325"/>
+            <a:ext cx="1737360" cy="274320"/>
+          </a:xfrm>
+          <a:prstGeom prst="rect">
+            <a:avLst/>
+          </a:prstGeom>
+          <a:noFill/>
+          <a:ln/>
+        </p:spPr>
+        <p:txBody>
+          <a:bodyPr wrap="square" lIns="0" tIns="0" rIns="0" bIns="0" rtlCol="0" anchor="ctr"/>
+          <a:lstStyle/>
+          <a:p>
+            <a:pPr marL="0" indent="0" algn="l">
+              <a:buNone/>
+            </a:pPr>
+            <a:r>
+              <a:rPr lang="en-US" sz="1000" b="1" dirty="0">
+                <a:solidFill>
+                  <a:srgbClr val="4472C4"/>
+                </a:solidFill>
+                <a:latin typeface="Calibri" pitchFamily="34" charset="0"/>
+                <a:ea typeface="Calibri" pitchFamily="34" charset="-122"/>
+                <a:cs typeface="Calibri" pitchFamily="34" charset="-120"/>
+              </a:rPr>
+              <a:t>Loss (MSE)</a:t>
+            </a:r>
+            <a:endParaRPr lang="en-US" sz="1000" dirty="0"/>
+          </a:p>
+        </p:txBody>
+      </p:sp>
+      <p:sp>
+        <p:nvSpPr>
+          <p:cNvPr id="24" name="Shape 21">
+            <a:extLst>
+              <a:ext uri="{FF2B5EF4-FFF2-40B4-BE49-F238E27FC236}">
+                <a16:creationId xmlns:a16="http://schemas.microsoft.com/office/drawing/2014/main" id="{16C4B903-0C0F-F232-6371-D42563421AEF}"/>
+              </a:ext>
+            </a:extLst>
+          </p:cNvPr>
+          <p:cNvSpPr/>
+          <p:nvPr/>
+        </p:nvSpPr>
+        <p:spPr>
+          <a:xfrm>
+            <a:off x="6172200" y="4149269"/>
+            <a:ext cx="2514600" cy="18288"/>
+          </a:xfrm>
+          <a:prstGeom prst="rect">
+            <a:avLst/>
+          </a:prstGeom>
+          <a:solidFill>
+            <a:srgbClr val="DDDDDD"/>
+          </a:solidFill>
+          <a:ln w="12700">
+            <a:solidFill>
+              <a:srgbClr val="DDDDDD"/>
+            </a:solidFill>
+            <a:prstDash val="solid"/>
+          </a:ln>
+        </p:spPr>
+        <p:txBody>
+          <a:bodyPr/>
+          <a:lstStyle/>
+          <a:p>
+            <a:endParaRPr lang="es-AR"/>
+          </a:p>
+        </p:txBody>
+      </p:sp>
+      <p:sp>
+        <p:nvSpPr>
+          <p:cNvPr id="25" name="Text 22">
+            <a:extLst>
+              <a:ext uri="{FF2B5EF4-FFF2-40B4-BE49-F238E27FC236}">
+                <a16:creationId xmlns:a16="http://schemas.microsoft.com/office/drawing/2014/main" id="{3728364F-EA50-E5B7-F57C-F37296BFC96A}"/>
+              </a:ext>
+            </a:extLst>
+          </p:cNvPr>
+          <p:cNvSpPr/>
+          <p:nvPr/>
+        </p:nvSpPr>
+        <p:spPr>
+          <a:xfrm>
+            <a:off x="6217920" y="4213277"/>
+            <a:ext cx="2487168" cy="749808"/>
+          </a:xfrm>
+          <a:prstGeom prst="rect">
+            <a:avLst/>
+          </a:prstGeom>
+          <a:noFill/>
+          <a:ln/>
+        </p:spPr>
+        <p:txBody>
+          <a:bodyPr wrap="square" lIns="0" tIns="0" rIns="0" bIns="0" rtlCol="0" anchor="t"/>
+          <a:lstStyle/>
+          <a:p>
+            <a:r>
+              <a:rPr lang="es-AR" sz="1000" dirty="0">
+                <a:solidFill>
+                  <a:srgbClr val="1B2A4A"/>
+                </a:solidFill>
+                <a:latin typeface="Calibri" pitchFamily="34" charset="0"/>
+                <a:cs typeface="Calibri" pitchFamily="34" charset="-120"/>
+              </a:rPr>
+              <a:t>La </a:t>
+            </a:r>
+            <a:r>
+              <a:rPr lang="es-AR" sz="1000" dirty="0" err="1">
+                <a:solidFill>
+                  <a:srgbClr val="1B2A4A"/>
+                </a:solidFill>
+                <a:latin typeface="Calibri" pitchFamily="34" charset="0"/>
+                <a:cs typeface="Calibri" pitchFamily="34" charset="-120"/>
+              </a:rPr>
+              <a:t>loss</a:t>
+            </a:r>
+            <a:r>
+              <a:rPr lang="es-AR" sz="1000" dirty="0">
+                <a:solidFill>
+                  <a:srgbClr val="1B2A4A"/>
+                </a:solidFill>
+                <a:latin typeface="Calibri" pitchFamily="34" charset="0"/>
+                <a:cs typeface="Calibri" pitchFamily="34" charset="-120"/>
+              </a:rPr>
+              <a:t> cae abruptamente en pocas épocas. La </a:t>
+            </a:r>
+            <a:r>
+              <a:rPr lang="es-AR" sz="1000" dirty="0" err="1">
+                <a:solidFill>
+                  <a:srgbClr val="1B2A4A"/>
+                </a:solidFill>
+                <a:latin typeface="Calibri" pitchFamily="34" charset="0"/>
+                <a:cs typeface="Calibri" pitchFamily="34" charset="-120"/>
+              </a:rPr>
+              <a:t>loss</a:t>
+            </a:r>
+            <a:r>
+              <a:rPr lang="es-AR" sz="1000" dirty="0">
+                <a:solidFill>
+                  <a:srgbClr val="1B2A4A"/>
+                </a:solidFill>
+                <a:latin typeface="Calibri" pitchFamily="34" charset="0"/>
+                <a:cs typeface="Calibri" pitchFamily="34" charset="-120"/>
+              </a:rPr>
+              <a:t> final es extremadamente baja, lo que valida el ajuste casi perfecto del 1er gráfico</a:t>
+            </a:r>
+          </a:p>
+          <a:p>
+            <a:pPr marL="0" indent="0" algn="l">
+              <a:buNone/>
+            </a:pPr>
+            <a:r>
+              <a:rPr lang="en-US" sz="1000" dirty="0">
+                <a:solidFill>
+                  <a:srgbClr val="1B2A4A"/>
+                </a:solidFill>
+                <a:latin typeface="Calibri" pitchFamily="34" charset="0"/>
+                <a:ea typeface="Calibri" pitchFamily="34" charset="-122"/>
+                <a:cs typeface="Calibri" pitchFamily="34" charset="-120"/>
+              </a:rPr>
+              <a:t>.</a:t>
+            </a:r>
+            <a:endParaRPr lang="en-US" sz="1000" dirty="0"/>
+          </a:p>
+        </p:txBody>
+      </p:sp>
+      <p:sp>
+        <p:nvSpPr>
+          <p:cNvPr id="26" name="Shape 23">
+            <a:extLst>
+              <a:ext uri="{FF2B5EF4-FFF2-40B4-BE49-F238E27FC236}">
+                <a16:creationId xmlns:a16="http://schemas.microsoft.com/office/drawing/2014/main" id="{0DE2A1DC-26EC-447B-5428-619D8646DE69}"/>
+              </a:ext>
+            </a:extLst>
+          </p:cNvPr>
+          <p:cNvSpPr/>
+          <p:nvPr/>
+        </p:nvSpPr>
+        <p:spPr>
+          <a:xfrm>
+            <a:off x="1709928" y="3436037"/>
+            <a:ext cx="0" cy="0"/>
+          </a:xfrm>
+          <a:prstGeom prst="line">
+            <a:avLst/>
+          </a:prstGeom>
+          <a:noFill/>
+          <a:ln w="12700">
+            <a:solidFill>
+              <a:srgbClr val="BBBBBB"/>
+            </a:solidFill>
+            <a:prstDash val="dash"/>
+          </a:ln>
+        </p:spPr>
+        <p:txBody>
+          <a:bodyPr/>
+          <a:lstStyle/>
+          <a:p>
+            <a:endParaRPr lang="es-AR"/>
+          </a:p>
+        </p:txBody>
+      </p:sp>
+      <p:sp>
+        <p:nvSpPr>
+          <p:cNvPr id="27" name="Shape 24">
+            <a:extLst>
+              <a:ext uri="{FF2B5EF4-FFF2-40B4-BE49-F238E27FC236}">
+                <a16:creationId xmlns:a16="http://schemas.microsoft.com/office/drawing/2014/main" id="{6F4EBE39-A005-61D7-FEA6-624C26D0894B}"/>
+              </a:ext>
+            </a:extLst>
+          </p:cNvPr>
+          <p:cNvSpPr/>
+          <p:nvPr/>
+        </p:nvSpPr>
+        <p:spPr>
+          <a:xfrm>
+            <a:off x="4572000" y="3436037"/>
+            <a:ext cx="0" cy="0"/>
+          </a:xfrm>
+          <a:prstGeom prst="line">
+            <a:avLst/>
+          </a:prstGeom>
+          <a:noFill/>
+          <a:ln w="12700">
+            <a:solidFill>
+              <a:srgbClr val="BBBBBB"/>
+            </a:solidFill>
+            <a:prstDash val="dash"/>
+          </a:ln>
+        </p:spPr>
+        <p:txBody>
+          <a:bodyPr/>
+          <a:lstStyle/>
+          <a:p>
+            <a:endParaRPr lang="es-AR"/>
+          </a:p>
+        </p:txBody>
+      </p:sp>
+      <p:sp>
+        <p:nvSpPr>
+          <p:cNvPr id="28" name="Shape 25">
+            <a:extLst>
+              <a:ext uri="{FF2B5EF4-FFF2-40B4-BE49-F238E27FC236}">
+                <a16:creationId xmlns:a16="http://schemas.microsoft.com/office/drawing/2014/main" id="{EB82E781-AB3B-53C7-6FF4-167E24EE388B}"/>
+              </a:ext>
+            </a:extLst>
+          </p:cNvPr>
+          <p:cNvSpPr/>
+          <p:nvPr/>
+        </p:nvSpPr>
+        <p:spPr>
+          <a:xfrm>
+            <a:off x="7424928" y="3436037"/>
+            <a:ext cx="0" cy="0"/>
+          </a:xfrm>
+          <a:prstGeom prst="line">
+            <a:avLst/>
+          </a:prstGeom>
+          <a:noFill/>
+          <a:ln w="12700">
+            <a:solidFill>
+              <a:srgbClr val="BBBBBB"/>
+            </a:solidFill>
+            <a:prstDash val="dash"/>
+          </a:ln>
+        </p:spPr>
+        <p:txBody>
+          <a:bodyPr/>
+          <a:lstStyle/>
+          <a:p>
+            <a:endParaRPr lang="es-AR"/>
+          </a:p>
+        </p:txBody>
+      </p:sp>
     </p:spTree>
     <p:extLst>
       <p:ext uri="{BB962C8B-B14F-4D97-AF65-F5344CB8AC3E}">

--- a/UDE_Argentina_2050.pptx
+++ b/UDE_Argentina_2050.pptx
@@ -5,23 +5,22 @@
     <p:sldMasterId id="2147483648" r:id="rId1"/>
   </p:sldMasterIdLst>
   <p:notesMasterIdLst>
-    <p:notesMasterId r:id="rId16"/>
+    <p:notesMasterId r:id="rId15"/>
   </p:notesMasterIdLst>
   <p:sldIdLst>
     <p:sldId id="256" r:id="rId2"/>
     <p:sldId id="257" r:id="rId3"/>
     <p:sldId id="258" r:id="rId4"/>
     <p:sldId id="259" r:id="rId5"/>
-    <p:sldId id="260" r:id="rId6"/>
-    <p:sldId id="261" r:id="rId7"/>
+    <p:sldId id="261" r:id="rId6"/>
+    <p:sldId id="260" r:id="rId7"/>
     <p:sldId id="262" r:id="rId8"/>
     <p:sldId id="264" r:id="rId9"/>
     <p:sldId id="263" r:id="rId10"/>
     <p:sldId id="269" r:id="rId11"/>
-    <p:sldId id="265" r:id="rId12"/>
-    <p:sldId id="270" r:id="rId13"/>
-    <p:sldId id="266" r:id="rId14"/>
-    <p:sldId id="267" r:id="rId15"/>
+    <p:sldId id="270" r:id="rId12"/>
+    <p:sldId id="266" r:id="rId13"/>
+    <p:sldId id="267" r:id="rId14"/>
   </p:sldIdLst>
   <p:sldSz cx="9144000" cy="5143500" type="screen16x9"/>
   <p:notesSz cx="5143500" cy="9144000"/>
@@ -267,25 +266,25 @@
                   <c:v>17.399999999999999</c:v>
                 </c:pt>
                 <c:pt idx="4">
-                  <c:v>16.5</c:v>
+                  <c:v>16.399999999999999</c:v>
                 </c:pt>
                 <c:pt idx="5">
-                  <c:v>15.9</c:v>
+                  <c:v>15.8</c:v>
                 </c:pt>
                 <c:pt idx="6">
                   <c:v>15.3</c:v>
                 </c:pt>
                 <c:pt idx="7">
-                  <c:v>13.8</c:v>
+                  <c:v>13.7</c:v>
                 </c:pt>
                 <c:pt idx="8">
-                  <c:v>12.1</c:v>
+                  <c:v>12</c:v>
                 </c:pt>
                 <c:pt idx="9">
                   <c:v>11</c:v>
                 </c:pt>
                 <c:pt idx="10">
-                  <c:v>10.1</c:v>
+                  <c:v>10</c:v>
                 </c:pt>
               </c:numCache>
             </c:numRef>
@@ -386,7 +385,7 @@
                 <c:formatCode>General</c:formatCode>
                 <c:ptCount val="11"/>
                 <c:pt idx="0">
-                  <c:v>7.6</c:v>
+                  <c:v>7.7</c:v>
                 </c:pt>
                 <c:pt idx="1">
                   <c:v>7.7</c:v>
@@ -398,7 +397,7 @@
                   <c:v>7.7</c:v>
                 </c:pt>
                 <c:pt idx="4">
-                  <c:v>8</c:v>
+                  <c:v>8.1</c:v>
                 </c:pt>
                 <c:pt idx="5">
                   <c:v>7.7</c:v>
@@ -410,7 +409,7 @@
                   <c:v>7.6</c:v>
                 </c:pt>
                 <c:pt idx="8">
-                  <c:v>8.1999999999999993</c:v>
+                  <c:v>8.3000000000000007</c:v>
                 </c:pt>
                 <c:pt idx="9">
                   <c:v>9.5</c:v>
@@ -604,457 +603,6 @@
                 </a:solidFill>
                 <a:latin typeface="Arial"/>
               </a:rPr>
-              <a:t>hijos por mujer</a:t>
-            </a:r>
-          </a:p>
-        </c:rich>
-      </c:tx>
-      <c:overlay val="0"/>
-    </c:title>
-    <c:autoTitleDeleted val="0"/>
-    <c:plotArea>
-      <c:layout/>
-      <c:lineChart>
-        <c:grouping val="standard"/>
-        <c:varyColors val="0"/>
-        <c:ser>
-          <c:idx val="0"/>
-          <c:order val="0"/>
-          <c:tx>
-            <c:strRef>
-              <c:f>Sheet1!$B$1</c:f>
-              <c:strCache>
-                <c:ptCount val="1"/>
-                <c:pt idx="0">
-                  <c:v>TGF</c:v>
-                </c:pt>
-              </c:strCache>
-            </c:strRef>
-          </c:tx>
-          <c:spPr>
-            <a:ln w="31750" cap="flat">
-              <a:solidFill>
-                <a:srgbClr val="7B2D8B"/>
-              </a:solidFill>
-              <a:prstDash val="solid"/>
-              <a:round/>
-            </a:ln>
-            <a:effectLst/>
-          </c:spPr>
-          <c:marker>
-            <c:symbol val="circle"/>
-            <c:size val="6"/>
-            <c:spPr>
-              <a:solidFill>
-                <a:srgbClr val="7B2D8B"/>
-              </a:solidFill>
-              <a:ln w="9525" cap="flat">
-                <a:solidFill>
-                  <a:srgbClr val="7B2D8B"/>
-                </a:solidFill>
-                <a:prstDash val="solid"/>
-                <a:round/>
-              </a:ln>
-              <a:effectLst/>
-            </c:spPr>
-          </c:marker>
-          <c:cat>
-            <c:strRef>
-              <c:f>Sheet1!$A$2:$A$12</c:f>
-              <c:strCache>
-                <c:ptCount val="11"/>
-                <c:pt idx="0">
-                  <c:v>2012</c:v>
-                </c:pt>
-                <c:pt idx="1">
-                  <c:v>2013</c:v>
-                </c:pt>
-                <c:pt idx="2">
-                  <c:v>2014</c:v>
-                </c:pt>
-                <c:pt idx="3">
-                  <c:v>2015</c:v>
-                </c:pt>
-                <c:pt idx="4">
-                  <c:v>2016</c:v>
-                </c:pt>
-                <c:pt idx="5">
-                  <c:v>2017</c:v>
-                </c:pt>
-                <c:pt idx="6">
-                  <c:v>2018</c:v>
-                </c:pt>
-                <c:pt idx="7">
-                  <c:v>2019</c:v>
-                </c:pt>
-                <c:pt idx="8">
-                  <c:v>2020</c:v>
-                </c:pt>
-                <c:pt idx="9">
-                  <c:v>2021</c:v>
-                </c:pt>
-                <c:pt idx="10">
-                  <c:v>2022</c:v>
-                </c:pt>
-              </c:strCache>
-            </c:strRef>
-          </c:cat>
-          <c:val>
-            <c:numRef>
-              <c:f>Sheet1!$B$2:$B$12</c:f>
-              <c:numCache>
-                <c:formatCode>General</c:formatCode>
-                <c:ptCount val="11"/>
-                <c:pt idx="0">
-                  <c:v>2.62</c:v>
-                </c:pt>
-                <c:pt idx="1">
-                  <c:v>2.58</c:v>
-                </c:pt>
-                <c:pt idx="2">
-                  <c:v>2.65</c:v>
-                </c:pt>
-                <c:pt idx="3">
-                  <c:v>2.5</c:v>
-                </c:pt>
-                <c:pt idx="4">
-                  <c:v>2.33</c:v>
-                </c:pt>
-                <c:pt idx="5">
-                  <c:v>2.1800000000000002</c:v>
-                </c:pt>
-                <c:pt idx="6">
-                  <c:v>2.15</c:v>
-                </c:pt>
-                <c:pt idx="7">
-                  <c:v>2.08</c:v>
-                </c:pt>
-                <c:pt idx="8">
-                  <c:v>1.95</c:v>
-                </c:pt>
-                <c:pt idx="9">
-                  <c:v>1.78</c:v>
-                </c:pt>
-                <c:pt idx="10">
-                  <c:v>1.45</c:v>
-                </c:pt>
-              </c:numCache>
-            </c:numRef>
-          </c:val>
-          <c:smooth val="0"/>
-          <c:extLst>
-            <c:ext xmlns:c16="http://schemas.microsoft.com/office/drawing/2014/chart" uri="{C3380CC4-5D6E-409C-BE32-E72D297353CC}">
-              <c16:uniqueId val="{00000000-EA53-4ACF-ACEE-0FE8ECB3A576}"/>
-            </c:ext>
-          </c:extLst>
-        </c:ser>
-        <c:ser>
-          <c:idx val="1"/>
-          <c:order val="1"/>
-          <c:tx>
-            <c:strRef>
-              <c:f>Sheet1!$C$1</c:f>
-              <c:strCache>
-                <c:ptCount val="1"/>
-                <c:pt idx="0">
-                  <c:v>Umbral de reemplazo (2,1)</c:v>
-                </c:pt>
-              </c:strCache>
-            </c:strRef>
-          </c:tx>
-          <c:spPr>
-            <a:ln w="31750" cap="flat">
-              <a:solidFill>
-                <a:srgbClr val="999999"/>
-              </a:solidFill>
-              <a:prstDash val="solid"/>
-              <a:round/>
-            </a:ln>
-            <a:effectLst/>
-          </c:spPr>
-          <c:marker>
-            <c:symbol val="circle"/>
-            <c:size val="6"/>
-            <c:spPr>
-              <a:solidFill>
-                <a:srgbClr val="999999"/>
-              </a:solidFill>
-              <a:ln w="9525" cap="flat">
-                <a:solidFill>
-                  <a:srgbClr val="999999"/>
-                </a:solidFill>
-                <a:prstDash val="solid"/>
-                <a:round/>
-              </a:ln>
-              <a:effectLst/>
-            </c:spPr>
-          </c:marker>
-          <c:cat>
-            <c:strRef>
-              <c:f>Sheet1!$A$2:$A$12</c:f>
-              <c:strCache>
-                <c:ptCount val="11"/>
-                <c:pt idx="0">
-                  <c:v>2012</c:v>
-                </c:pt>
-                <c:pt idx="1">
-                  <c:v>2013</c:v>
-                </c:pt>
-                <c:pt idx="2">
-                  <c:v>2014</c:v>
-                </c:pt>
-                <c:pt idx="3">
-                  <c:v>2015</c:v>
-                </c:pt>
-                <c:pt idx="4">
-                  <c:v>2016</c:v>
-                </c:pt>
-                <c:pt idx="5">
-                  <c:v>2017</c:v>
-                </c:pt>
-                <c:pt idx="6">
-                  <c:v>2018</c:v>
-                </c:pt>
-                <c:pt idx="7">
-                  <c:v>2019</c:v>
-                </c:pt>
-                <c:pt idx="8">
-                  <c:v>2020</c:v>
-                </c:pt>
-                <c:pt idx="9">
-                  <c:v>2021</c:v>
-                </c:pt>
-                <c:pt idx="10">
-                  <c:v>2022</c:v>
-                </c:pt>
-              </c:strCache>
-            </c:strRef>
-          </c:cat>
-          <c:val>
-            <c:numRef>
-              <c:f>Sheet1!$C$2:$C$12</c:f>
-              <c:numCache>
-                <c:formatCode>General</c:formatCode>
-                <c:ptCount val="11"/>
-                <c:pt idx="0">
-                  <c:v>2.1</c:v>
-                </c:pt>
-                <c:pt idx="1">
-                  <c:v>2.1</c:v>
-                </c:pt>
-                <c:pt idx="2">
-                  <c:v>2.1</c:v>
-                </c:pt>
-                <c:pt idx="3">
-                  <c:v>2.1</c:v>
-                </c:pt>
-                <c:pt idx="4">
-                  <c:v>2.1</c:v>
-                </c:pt>
-                <c:pt idx="5">
-                  <c:v>2.1</c:v>
-                </c:pt>
-                <c:pt idx="6">
-                  <c:v>2.1</c:v>
-                </c:pt>
-                <c:pt idx="7">
-                  <c:v>2.1</c:v>
-                </c:pt>
-                <c:pt idx="8">
-                  <c:v>2.1</c:v>
-                </c:pt>
-                <c:pt idx="9">
-                  <c:v>2.1</c:v>
-                </c:pt>
-                <c:pt idx="10">
-                  <c:v>2.1</c:v>
-                </c:pt>
-              </c:numCache>
-            </c:numRef>
-          </c:val>
-          <c:smooth val="0"/>
-          <c:extLst>
-            <c:ext xmlns:c16="http://schemas.microsoft.com/office/drawing/2014/chart" uri="{C3380CC4-5D6E-409C-BE32-E72D297353CC}">
-              <c16:uniqueId val="{00000001-EA53-4ACF-ACEE-0FE8ECB3A576}"/>
-            </c:ext>
-          </c:extLst>
-        </c:ser>
-        <c:dLbls>
-          <c:showLegendKey val="0"/>
-          <c:showVal val="0"/>
-          <c:showCatName val="0"/>
-          <c:showSerName val="0"/>
-          <c:showPercent val="0"/>
-          <c:showBubbleSize val="0"/>
-        </c:dLbls>
-        <c:marker val="1"/>
-        <c:smooth val="0"/>
-        <c:axId val="2094734554"/>
-        <c:axId val="2094734552"/>
-      </c:lineChart>
-      <c:catAx>
-        <c:axId val="2094734554"/>
-        <c:scaling>
-          <c:orientation val="minMax"/>
-        </c:scaling>
-        <c:delete val="0"/>
-        <c:axPos val="b"/>
-        <c:numFmt formatCode="General" sourceLinked="1"/>
-        <c:majorTickMark val="out"/>
-        <c:minorTickMark val="none"/>
-        <c:tickLblPos val="low"/>
-        <c:spPr>
-          <a:ln w="12700" cap="flat">
-            <a:solidFill>
-              <a:srgbClr val="888888"/>
-            </a:solidFill>
-            <a:prstDash val="solid"/>
-            <a:round/>
-          </a:ln>
-        </c:spPr>
-        <c:txPr>
-          <a:bodyPr/>
-          <a:lstStyle/>
-          <a:p>
-            <a:pPr>
-              <a:defRPr sz="1000" b="0" i="0" u="none" strike="noStrike">
-                <a:solidFill>
-                  <a:srgbClr val="64748B"/>
-                </a:solidFill>
-                <a:latin typeface="Arial"/>
-              </a:defRPr>
-            </a:pPr>
-            <a:endParaRPr lang="en-US"/>
-          </a:p>
-        </c:txPr>
-        <c:crossAx val="2094734552"/>
-        <c:crosses val="autoZero"/>
-        <c:auto val="1"/>
-        <c:lblAlgn val="ctr"/>
-        <c:lblOffset val="100"/>
-        <c:noMultiLvlLbl val="1"/>
-      </c:catAx>
-      <c:valAx>
-        <c:axId val="2094734552"/>
-        <c:scaling>
-          <c:orientation val="minMax"/>
-          <c:max val="3"/>
-          <c:min val="1"/>
-        </c:scaling>
-        <c:delete val="0"/>
-        <c:axPos val="l"/>
-        <c:majorGridlines>
-          <c:spPr>
-            <a:ln w="6350" cap="flat">
-              <a:solidFill>
-                <a:srgbClr val="E2E8F0"/>
-              </a:solidFill>
-              <a:prstDash val="solid"/>
-              <a:round/>
-            </a:ln>
-          </c:spPr>
-        </c:majorGridlines>
-        <c:numFmt formatCode="General" sourceLinked="0"/>
-        <c:majorTickMark val="out"/>
-        <c:minorTickMark val="none"/>
-        <c:tickLblPos val="nextTo"/>
-        <c:spPr>
-          <a:ln w="12700" cap="flat">
-            <a:solidFill>
-              <a:srgbClr val="888888"/>
-            </a:solidFill>
-            <a:prstDash val="solid"/>
-            <a:round/>
-          </a:ln>
-        </c:spPr>
-        <c:txPr>
-          <a:bodyPr/>
-          <a:lstStyle/>
-          <a:p>
-            <a:pPr>
-              <a:defRPr sz="1000" b="0" i="0" u="none" strike="noStrike">
-                <a:solidFill>
-                  <a:srgbClr val="64748B"/>
-                </a:solidFill>
-                <a:latin typeface="Arial"/>
-              </a:defRPr>
-            </a:pPr>
-            <a:endParaRPr lang="en-US"/>
-          </a:p>
-        </c:txPr>
-        <c:crossAx val="2094734554"/>
-        <c:crosses val="autoZero"/>
-        <c:crossBetween val="between"/>
-      </c:valAx>
-      <c:spPr>
-        <a:noFill/>
-        <a:ln>
-          <a:noFill/>
-        </a:ln>
-        <a:effectLst/>
-      </c:spPr>
-    </c:plotArea>
-    <c:legend>
-      <c:legendPos val="b"/>
-      <c:overlay val="0"/>
-      <c:txPr>
-        <a:bodyPr/>
-        <a:lstStyle/>
-        <a:p>
-          <a:pPr>
-            <a:defRPr sz="1100"/>
-          </a:pPr>
-          <a:endParaRPr lang="en-US"/>
-        </a:p>
-      </c:txPr>
-    </c:legend>
-    <c:plotVisOnly val="1"/>
-    <c:dispBlanksAs val="span"/>
-    <c:showDLblsOverMax val="1"/>
-  </c:chart>
-  <c:spPr>
-    <a:solidFill>
-      <a:srgbClr val="FFFFFF"/>
-    </a:solidFill>
-    <a:ln>
-      <a:noFill/>
-    </a:ln>
-    <a:effectLst/>
-  </c:spPr>
-  <c:externalData r:id="rId1">
-    <c:autoUpdate val="0"/>
-  </c:externalData>
-</c:chartSpace>
-</file>
-
-<file path=ppt/charts/chart3.xml><?xml version="1.0" encoding="utf-8"?>
-<c:chartSpace xmlns:c="http://schemas.openxmlformats.org/drawingml/2006/chart" xmlns:a="http://schemas.openxmlformats.org/drawingml/2006/main" xmlns:r="http://schemas.openxmlformats.org/officeDocument/2006/relationships" xmlns:c16r2="http://schemas.microsoft.com/office/drawing/2015/06/chart">
-  <c:date1904 val="0"/>
-  <c:lang val="es-MX"/>
-  <c:roundedCorners val="0"/>
-  <c:style val="2"/>
-  <c:chart>
-    <c:title>
-      <c:tx>
-        <c:rich>
-          <a:bodyPr/>
-          <a:lstStyle/>
-          <a:p>
-            <a:pPr>
-              <a:defRPr sz="1100" b="0" i="0" u="none" strike="noStrike">
-                <a:solidFill>
-                  <a:srgbClr val="64748B"/>
-                </a:solidFill>
-                <a:latin typeface="Arial"/>
-              </a:defRPr>
-            </a:pPr>
-            <a:r>
-              <a:rPr lang="es-AR" sz="1100" b="0" i="0" u="none" strike="noStrike">
-                <a:solidFill>
-                  <a:srgbClr val="64748B"/>
-                </a:solidFill>
-                <a:latin typeface="Arial"/>
-              </a:rPr>
               <a:t>miles de personas</a:t>
             </a:r>
           </a:p>
@@ -1349,6 +897,457 @@
 </c:chartSpace>
 </file>
 
+<file path=ppt/charts/chart3.xml><?xml version="1.0" encoding="utf-8"?>
+<c:chartSpace xmlns:c="http://schemas.openxmlformats.org/drawingml/2006/chart" xmlns:a="http://schemas.openxmlformats.org/drawingml/2006/main" xmlns:r="http://schemas.openxmlformats.org/officeDocument/2006/relationships" xmlns:c16r2="http://schemas.microsoft.com/office/drawing/2015/06/chart">
+  <c:date1904 val="0"/>
+  <c:lang val="es-MX"/>
+  <c:roundedCorners val="0"/>
+  <c:style val="2"/>
+  <c:chart>
+    <c:title>
+      <c:tx>
+        <c:rich>
+          <a:bodyPr/>
+          <a:lstStyle/>
+          <a:p>
+            <a:pPr>
+              <a:defRPr sz="1100" b="0" i="0" u="none" strike="noStrike">
+                <a:solidFill>
+                  <a:srgbClr val="64748B"/>
+                </a:solidFill>
+                <a:latin typeface="Arial"/>
+              </a:defRPr>
+            </a:pPr>
+            <a:r>
+              <a:rPr lang="es-AR" sz="1100" b="0" i="0" u="none" strike="noStrike">
+                <a:solidFill>
+                  <a:srgbClr val="64748B"/>
+                </a:solidFill>
+                <a:latin typeface="Arial"/>
+              </a:rPr>
+              <a:t>hijos por mujer</a:t>
+            </a:r>
+          </a:p>
+        </c:rich>
+      </c:tx>
+      <c:overlay val="0"/>
+    </c:title>
+    <c:autoTitleDeleted val="0"/>
+    <c:plotArea>
+      <c:layout/>
+      <c:lineChart>
+        <c:grouping val="standard"/>
+        <c:varyColors val="0"/>
+        <c:ser>
+          <c:idx val="0"/>
+          <c:order val="0"/>
+          <c:tx>
+            <c:strRef>
+              <c:f>Sheet1!$B$1</c:f>
+              <c:strCache>
+                <c:ptCount val="1"/>
+                <c:pt idx="0">
+                  <c:v>TGF</c:v>
+                </c:pt>
+              </c:strCache>
+            </c:strRef>
+          </c:tx>
+          <c:spPr>
+            <a:ln w="31750" cap="flat">
+              <a:solidFill>
+                <a:srgbClr val="7B2D8B"/>
+              </a:solidFill>
+              <a:prstDash val="solid"/>
+              <a:round/>
+            </a:ln>
+            <a:effectLst/>
+          </c:spPr>
+          <c:marker>
+            <c:symbol val="circle"/>
+            <c:size val="6"/>
+            <c:spPr>
+              <a:solidFill>
+                <a:srgbClr val="7B2D8B"/>
+              </a:solidFill>
+              <a:ln w="9525" cap="flat">
+                <a:solidFill>
+                  <a:srgbClr val="7B2D8B"/>
+                </a:solidFill>
+                <a:prstDash val="solid"/>
+                <a:round/>
+              </a:ln>
+              <a:effectLst/>
+            </c:spPr>
+          </c:marker>
+          <c:cat>
+            <c:strRef>
+              <c:f>Sheet1!$A$2:$A$12</c:f>
+              <c:strCache>
+                <c:ptCount val="11"/>
+                <c:pt idx="0">
+                  <c:v>2012</c:v>
+                </c:pt>
+                <c:pt idx="1">
+                  <c:v>2013</c:v>
+                </c:pt>
+                <c:pt idx="2">
+                  <c:v>2014</c:v>
+                </c:pt>
+                <c:pt idx="3">
+                  <c:v>2015</c:v>
+                </c:pt>
+                <c:pt idx="4">
+                  <c:v>2016</c:v>
+                </c:pt>
+                <c:pt idx="5">
+                  <c:v>2017</c:v>
+                </c:pt>
+                <c:pt idx="6">
+                  <c:v>2018</c:v>
+                </c:pt>
+                <c:pt idx="7">
+                  <c:v>2019</c:v>
+                </c:pt>
+                <c:pt idx="8">
+                  <c:v>2020</c:v>
+                </c:pt>
+                <c:pt idx="9">
+                  <c:v>2021</c:v>
+                </c:pt>
+                <c:pt idx="10">
+                  <c:v>2022</c:v>
+                </c:pt>
+              </c:strCache>
+            </c:strRef>
+          </c:cat>
+          <c:val>
+            <c:numRef>
+              <c:f>Sheet1!$B$2:$B$12</c:f>
+              <c:numCache>
+                <c:formatCode>General</c:formatCode>
+                <c:ptCount val="11"/>
+                <c:pt idx="0">
+                  <c:v>2.58</c:v>
+                </c:pt>
+                <c:pt idx="1">
+                  <c:v>2.57</c:v>
+                </c:pt>
+                <c:pt idx="2">
+                  <c:v>2.61</c:v>
+                </c:pt>
+                <c:pt idx="3">
+                  <c:v>2.4900000000000002</c:v>
+                </c:pt>
+                <c:pt idx="4">
+                  <c:v>2.35</c:v>
+                </c:pt>
+                <c:pt idx="5">
+                  <c:v>2.2599999999999998</c:v>
+                </c:pt>
+                <c:pt idx="6">
+                  <c:v>2.19</c:v>
+                </c:pt>
+                <c:pt idx="7">
+                  <c:v>1.96</c:v>
+                </c:pt>
+                <c:pt idx="8">
+                  <c:v>1.72</c:v>
+                </c:pt>
+                <c:pt idx="9">
+                  <c:v>1.57</c:v>
+                </c:pt>
+                <c:pt idx="10">
+                  <c:v>1.44</c:v>
+                </c:pt>
+              </c:numCache>
+            </c:numRef>
+          </c:val>
+          <c:smooth val="0"/>
+          <c:extLst>
+            <c:ext xmlns:c16="http://schemas.microsoft.com/office/drawing/2014/chart" uri="{C3380CC4-5D6E-409C-BE32-E72D297353CC}">
+              <c16:uniqueId val="{00000000-EA53-4ACF-ACEE-0FE8ECB3A576}"/>
+            </c:ext>
+          </c:extLst>
+        </c:ser>
+        <c:ser>
+          <c:idx val="1"/>
+          <c:order val="1"/>
+          <c:tx>
+            <c:strRef>
+              <c:f>Sheet1!$C$1</c:f>
+              <c:strCache>
+                <c:ptCount val="1"/>
+                <c:pt idx="0">
+                  <c:v>Umbral de reemplazo (2,1)</c:v>
+                </c:pt>
+              </c:strCache>
+            </c:strRef>
+          </c:tx>
+          <c:spPr>
+            <a:ln w="31750" cap="flat">
+              <a:solidFill>
+                <a:srgbClr val="999999"/>
+              </a:solidFill>
+              <a:prstDash val="solid"/>
+              <a:round/>
+            </a:ln>
+            <a:effectLst/>
+          </c:spPr>
+          <c:marker>
+            <c:symbol val="circle"/>
+            <c:size val="6"/>
+            <c:spPr>
+              <a:solidFill>
+                <a:srgbClr val="999999"/>
+              </a:solidFill>
+              <a:ln w="9525" cap="flat">
+                <a:solidFill>
+                  <a:srgbClr val="999999"/>
+                </a:solidFill>
+                <a:prstDash val="solid"/>
+                <a:round/>
+              </a:ln>
+              <a:effectLst/>
+            </c:spPr>
+          </c:marker>
+          <c:cat>
+            <c:strRef>
+              <c:f>Sheet1!$A$2:$A$12</c:f>
+              <c:strCache>
+                <c:ptCount val="11"/>
+                <c:pt idx="0">
+                  <c:v>2012</c:v>
+                </c:pt>
+                <c:pt idx="1">
+                  <c:v>2013</c:v>
+                </c:pt>
+                <c:pt idx="2">
+                  <c:v>2014</c:v>
+                </c:pt>
+                <c:pt idx="3">
+                  <c:v>2015</c:v>
+                </c:pt>
+                <c:pt idx="4">
+                  <c:v>2016</c:v>
+                </c:pt>
+                <c:pt idx="5">
+                  <c:v>2017</c:v>
+                </c:pt>
+                <c:pt idx="6">
+                  <c:v>2018</c:v>
+                </c:pt>
+                <c:pt idx="7">
+                  <c:v>2019</c:v>
+                </c:pt>
+                <c:pt idx="8">
+                  <c:v>2020</c:v>
+                </c:pt>
+                <c:pt idx="9">
+                  <c:v>2021</c:v>
+                </c:pt>
+                <c:pt idx="10">
+                  <c:v>2022</c:v>
+                </c:pt>
+              </c:strCache>
+            </c:strRef>
+          </c:cat>
+          <c:val>
+            <c:numRef>
+              <c:f>Sheet1!$C$2:$C$12</c:f>
+              <c:numCache>
+                <c:formatCode>General</c:formatCode>
+                <c:ptCount val="11"/>
+                <c:pt idx="0">
+                  <c:v>2.1</c:v>
+                </c:pt>
+                <c:pt idx="1">
+                  <c:v>2.1</c:v>
+                </c:pt>
+                <c:pt idx="2">
+                  <c:v>2.1</c:v>
+                </c:pt>
+                <c:pt idx="3">
+                  <c:v>2.1</c:v>
+                </c:pt>
+                <c:pt idx="4">
+                  <c:v>2.1</c:v>
+                </c:pt>
+                <c:pt idx="5">
+                  <c:v>2.1</c:v>
+                </c:pt>
+                <c:pt idx="6">
+                  <c:v>2.1</c:v>
+                </c:pt>
+                <c:pt idx="7">
+                  <c:v>2.1</c:v>
+                </c:pt>
+                <c:pt idx="8">
+                  <c:v>2.1</c:v>
+                </c:pt>
+                <c:pt idx="9">
+                  <c:v>2.1</c:v>
+                </c:pt>
+                <c:pt idx="10">
+                  <c:v>2.1</c:v>
+                </c:pt>
+              </c:numCache>
+            </c:numRef>
+          </c:val>
+          <c:smooth val="0"/>
+          <c:extLst>
+            <c:ext xmlns:c16="http://schemas.microsoft.com/office/drawing/2014/chart" uri="{C3380CC4-5D6E-409C-BE32-E72D297353CC}">
+              <c16:uniqueId val="{00000001-EA53-4ACF-ACEE-0FE8ECB3A576}"/>
+            </c:ext>
+          </c:extLst>
+        </c:ser>
+        <c:dLbls>
+          <c:showLegendKey val="0"/>
+          <c:showVal val="0"/>
+          <c:showCatName val="0"/>
+          <c:showSerName val="0"/>
+          <c:showPercent val="0"/>
+          <c:showBubbleSize val="0"/>
+        </c:dLbls>
+        <c:marker val="1"/>
+        <c:smooth val="0"/>
+        <c:axId val="2094734554"/>
+        <c:axId val="2094734552"/>
+      </c:lineChart>
+      <c:catAx>
+        <c:axId val="2094734554"/>
+        <c:scaling>
+          <c:orientation val="minMax"/>
+        </c:scaling>
+        <c:delete val="0"/>
+        <c:axPos val="b"/>
+        <c:numFmt formatCode="General" sourceLinked="1"/>
+        <c:majorTickMark val="out"/>
+        <c:minorTickMark val="none"/>
+        <c:tickLblPos val="low"/>
+        <c:spPr>
+          <a:ln w="12700" cap="flat">
+            <a:solidFill>
+              <a:srgbClr val="888888"/>
+            </a:solidFill>
+            <a:prstDash val="solid"/>
+            <a:round/>
+          </a:ln>
+        </c:spPr>
+        <c:txPr>
+          <a:bodyPr/>
+          <a:lstStyle/>
+          <a:p>
+            <a:pPr>
+              <a:defRPr sz="1000" b="0" i="0" u="none" strike="noStrike">
+                <a:solidFill>
+                  <a:srgbClr val="64748B"/>
+                </a:solidFill>
+                <a:latin typeface="Arial"/>
+              </a:defRPr>
+            </a:pPr>
+            <a:endParaRPr lang="en-US"/>
+          </a:p>
+        </c:txPr>
+        <c:crossAx val="2094734552"/>
+        <c:crosses val="autoZero"/>
+        <c:auto val="1"/>
+        <c:lblAlgn val="ctr"/>
+        <c:lblOffset val="100"/>
+        <c:noMultiLvlLbl val="1"/>
+      </c:catAx>
+      <c:valAx>
+        <c:axId val="2094734552"/>
+        <c:scaling>
+          <c:orientation val="minMax"/>
+          <c:max val="3"/>
+          <c:min val="1"/>
+        </c:scaling>
+        <c:delete val="0"/>
+        <c:axPos val="l"/>
+        <c:majorGridlines>
+          <c:spPr>
+            <a:ln w="6350" cap="flat">
+              <a:solidFill>
+                <a:srgbClr val="E2E8F0"/>
+              </a:solidFill>
+              <a:prstDash val="solid"/>
+              <a:round/>
+            </a:ln>
+          </c:spPr>
+        </c:majorGridlines>
+        <c:numFmt formatCode="General" sourceLinked="0"/>
+        <c:majorTickMark val="out"/>
+        <c:minorTickMark val="none"/>
+        <c:tickLblPos val="nextTo"/>
+        <c:spPr>
+          <a:ln w="12700" cap="flat">
+            <a:solidFill>
+              <a:srgbClr val="888888"/>
+            </a:solidFill>
+            <a:prstDash val="solid"/>
+            <a:round/>
+          </a:ln>
+        </c:spPr>
+        <c:txPr>
+          <a:bodyPr/>
+          <a:lstStyle/>
+          <a:p>
+            <a:pPr>
+              <a:defRPr sz="1000" b="0" i="0" u="none" strike="noStrike">
+                <a:solidFill>
+                  <a:srgbClr val="64748B"/>
+                </a:solidFill>
+                <a:latin typeface="Arial"/>
+              </a:defRPr>
+            </a:pPr>
+            <a:endParaRPr lang="en-US"/>
+          </a:p>
+        </c:txPr>
+        <c:crossAx val="2094734554"/>
+        <c:crosses val="autoZero"/>
+        <c:crossBetween val="between"/>
+      </c:valAx>
+      <c:spPr>
+        <a:noFill/>
+        <a:ln>
+          <a:noFill/>
+        </a:ln>
+        <a:effectLst/>
+      </c:spPr>
+    </c:plotArea>
+    <c:legend>
+      <c:legendPos val="b"/>
+      <c:overlay val="0"/>
+      <c:txPr>
+        <a:bodyPr/>
+        <a:lstStyle/>
+        <a:p>
+          <a:pPr>
+            <a:defRPr sz="1100"/>
+          </a:pPr>
+          <a:endParaRPr lang="en-US"/>
+        </a:p>
+      </c:txPr>
+    </c:legend>
+    <c:plotVisOnly val="1"/>
+    <c:dispBlanksAs val="span"/>
+    <c:showDLblsOverMax val="1"/>
+  </c:chart>
+  <c:spPr>
+    <a:solidFill>
+      <a:srgbClr val="FFFFFF"/>
+    </a:solidFill>
+    <a:ln>
+      <a:noFill/>
+    </a:ln>
+    <a:effectLst/>
+  </c:spPr>
+  <c:externalData r:id="rId1">
+    <c:autoUpdate val="0"/>
+  </c:externalData>
+</c:chartSpace>
+</file>
+
 <file path=ppt/charts/chart4.xml><?xml version="1.0" encoding="utf-8"?>
 <c:chartSpace xmlns:c="http://schemas.openxmlformats.org/drawingml/2006/chart" xmlns:a="http://schemas.openxmlformats.org/drawingml/2006/main" xmlns:r="http://schemas.openxmlformats.org/officeDocument/2006/relationships" xmlns:c16r2="http://schemas.microsoft.com/office/drawing/2015/06/chart">
   <c:date1904 val="0"/>
@@ -1775,22 +1774,22 @@
                   <c:v>46.2</c:v>
                 </c:pt>
                 <c:pt idx="1">
-                  <c:v>47.8</c:v>
+                  <c:v>48</c:v>
                 </c:pt>
                 <c:pt idx="2">
-                  <c:v>50.2</c:v>
+                  <c:v>51</c:v>
                 </c:pt>
                 <c:pt idx="3">
-                  <c:v>52.8</c:v>
+                  <c:v>54</c:v>
                 </c:pt>
                 <c:pt idx="4">
-                  <c:v>55.6</c:v>
+                  <c:v>56.5</c:v>
                 </c:pt>
                 <c:pt idx="5">
-                  <c:v>58.4</c:v>
+                  <c:v>59</c:v>
                 </c:pt>
                 <c:pt idx="6">
-                  <c:v>60.1</c:v>
+                  <c:v>61.3</c:v>
                 </c:pt>
               </c:numCache>
             </c:numRef>
@@ -1882,22 +1881,22 @@
                   <c:v>46.2</c:v>
                 </c:pt>
                 <c:pt idx="1">
-                  <c:v>47.4</c:v>
+                  <c:v>47.5</c:v>
                 </c:pt>
                 <c:pt idx="2">
-                  <c:v>49.2</c:v>
+                  <c:v>49.8</c:v>
                 </c:pt>
                 <c:pt idx="3">
-                  <c:v>51</c:v>
+                  <c:v>52.4</c:v>
                 </c:pt>
                 <c:pt idx="4">
-                  <c:v>52.9</c:v>
+                  <c:v>54.8</c:v>
                 </c:pt>
                 <c:pt idx="5">
-                  <c:v>54.9</c:v>
+                  <c:v>57.2</c:v>
                 </c:pt>
                 <c:pt idx="6">
-                  <c:v>58.2</c:v>
+                  <c:v>59.4</c:v>
                 </c:pt>
               </c:numCache>
             </c:numRef>
@@ -1989,22 +1988,22 @@
                   <c:v>46.2</c:v>
                 </c:pt>
                 <c:pt idx="1">
-                  <c:v>47.1</c:v>
+                  <c:v>46.8</c:v>
                 </c:pt>
                 <c:pt idx="2">
-                  <c:v>48.4</c:v>
+                  <c:v>48.2</c:v>
                 </c:pt>
                 <c:pt idx="3">
                   <c:v>49.9</c:v>
                 </c:pt>
                 <c:pt idx="4">
-                  <c:v>51.3</c:v>
+                  <c:v>51.5</c:v>
                 </c:pt>
                 <c:pt idx="5">
-                  <c:v>52.8</c:v>
+                  <c:v>53.2</c:v>
                 </c:pt>
                 <c:pt idx="6">
-                  <c:v>53.9</c:v>
+                  <c:v>54.7</c:v>
                 </c:pt>
               </c:numCache>
             </c:numRef>
@@ -2548,7 +2547,7 @@
       </p:grpSpPr>
       <p:sp>
         <p:nvSpPr>
-          <p:cNvPr id="2" name="Slide Image Placeholder 1"/>
+          <p:cNvPr id="2" name="Marcador de imagen de diapositiva 1"/>
           <p:cNvSpPr>
             <a:spLocks noGrp="1" noRot="1" noChangeAspect="1"/>
           </p:cNvSpPr>
@@ -2556,7 +2555,21 @@
             <p:ph type="sldImg"/>
           </p:nvPr>
         </p:nvSpPr>
-        <p:spPr/>
+        <p:spPr>
+          <a:xfrm>
+            <a:off x="-171450" y="1143000"/>
+            <a:ext cx="5486400" cy="3086100"/>
+          </a:xfrm>
+          <a:prstGeom prst="rect">
+            <a:avLst/>
+          </a:prstGeom>
+          <a:noFill/>
+          <a:ln w="12700">
+            <a:solidFill>
+              <a:prstClr val="black"/>
+            </a:solidFill>
+          </a:ln>
+        </p:spPr>
         <p:txBody>
           <a:bodyPr/>
           <a:lstStyle/>
@@ -2567,7 +2580,7 @@
       </p:sp>
       <p:sp>
         <p:nvSpPr>
-          <p:cNvPr id="3" name="Notes Placeholder 2"/>
+          <p:cNvPr id="3" name="Marcador de notas 2"/>
           <p:cNvSpPr>
             <a:spLocks noGrp="1"/>
           </p:cNvSpPr>
@@ -2575,61 +2588,70 @@
             <p:ph type="body" idx="1"/>
           </p:nvPr>
         </p:nvSpPr>
-        <p:spPr/>
+        <p:spPr>
+          <a:xfrm>
+            <a:off x="514350" y="4400550"/>
+            <a:ext cx="4114800" cy="3600450"/>
+          </a:xfrm>
+          <a:prstGeom prst="rect">
+            <a:avLst/>
+          </a:prstGeom>
+        </p:spPr>
         <p:txBody>
           <a:bodyPr/>
           <a:lstStyle/>
           <a:p>
             <a:r>
-              <a:rPr lang="en-US" dirty="0"/>
-              <a:t>El ajuste perfecto de la UDE vs. la falla de la ODE clásica es la prueba de concepto. La red aprende algo real. Mencionar que el segundo gráfico (corrección decreciente) muestra que los parámetros actuales son </a:t>
-            </a:r>
-            <a:r>
-              <a:rPr lang="en-US" dirty="0" err="1"/>
-              <a:t>insuficientes</a:t>
-            </a:r>
-            <a:r>
-              <a:rPr lang="en-US" dirty="0"/>
-              <a:t>. Nuestro </a:t>
-            </a:r>
-            <a:r>
-              <a:rPr lang="en-US" dirty="0" err="1"/>
-              <a:t>análisis</a:t>
-            </a:r>
-            <a:r>
-              <a:rPr lang="en-US" dirty="0"/>
-              <a:t> tiene límites reconocidos. </a:t>
-            </a:r>
-          </a:p>
-        </p:txBody>
-      </p:sp>
-      <p:sp>
-        <p:nvSpPr>
-          <p:cNvPr id="4" name="Slide Number Placeholder 3"/>
-          <p:cNvSpPr>
-            <a:spLocks noGrp="1"/>
-          </p:cNvSpPr>
-          <p:nvPr>
-            <p:ph type="sldNum" sz="quarter" idx="10"/>
-          </p:nvPr>
-        </p:nvSpPr>
-        <p:spPr/>
-        <p:txBody>
-          <a:bodyPr/>
-          <a:lstStyle/>
-          <a:p>
-            <a:fld id="{F7021451-1387-4CA6-816F-3879F97B5CBC}" type="slidenum">
-              <a:rPr lang="en-US"/>
-              <a:t>11</a:t>
-            </a:fld>
-            <a:endParaRPr lang="en-US"/>
+              <a:rPr lang="es-AR" dirty="0"/>
+              <a:t>1er grafico: </a:t>
+            </a:r>
+          </a:p>
+          <a:p>
+            <a:r>
+              <a:rPr lang="es-AR" sz="1200" b="0" kern="1200" dirty="0">
+                <a:solidFill>
+                  <a:schemeClr val="tx1"/>
+                </a:solidFill>
+                <a:effectLst/>
+                <a:latin typeface="+mn-lt"/>
+                <a:ea typeface="+mn-ea"/>
+                <a:cs typeface="+mn-cs"/>
+              </a:rPr>
+              <a:t>- La red aprendió a capturar la dinámica real.</a:t>
+            </a:r>
+          </a:p>
+          <a:p>
+            <a:r>
+              <a:rPr lang="es-AR" sz="1200" b="0" kern="1200" dirty="0">
+                <a:solidFill>
+                  <a:schemeClr val="tx1"/>
+                </a:solidFill>
+                <a:effectLst/>
+                <a:latin typeface="+mn-lt"/>
+                <a:ea typeface="+mn-ea"/>
+                <a:cs typeface="+mn-cs"/>
+              </a:rPr>
+              <a:t>- Los pesos aleatorios (rojo punteado) producen una solución absurda, lo que muestra que el entrenamiento fue esencial y funcionó correctamente.</a:t>
+            </a:r>
+          </a:p>
+          <a:p>
+            <a:endParaRPr lang="es-AR" dirty="0"/>
+          </a:p>
+          <a:p>
+            <a:r>
+              <a:rPr lang="es-AR" dirty="0"/>
+              <a:t>2do grafico:</a:t>
+            </a:r>
+          </a:p>
+          <a:p>
+            <a:endParaRPr lang="es-AR" dirty="0"/>
           </a:p>
         </p:txBody>
       </p:sp>
     </p:spTree>
     <p:extLst>
       <p:ext uri="{BB962C8B-B14F-4D97-AF65-F5344CB8AC3E}">
-        <p14:creationId xmlns:p14="http://schemas.microsoft.com/office/powerpoint/2010/main" val="1024086991"/>
+        <p14:creationId xmlns:p14="http://schemas.microsoft.com/office/powerpoint/2010/main" val="4038225779"/>
       </p:ext>
     </p:extLst>
   </p:cSld>
@@ -2658,7 +2680,7 @@
       </p:grpSpPr>
       <p:sp>
         <p:nvSpPr>
-          <p:cNvPr id="2" name="Marcador de imagen de diapositiva 1"/>
+          <p:cNvPr id="2" name="Slide Image Placeholder 1"/>
           <p:cNvSpPr>
             <a:spLocks noGrp="1" noRot="1" noChangeAspect="1"/>
           </p:cNvSpPr>
@@ -2666,21 +2688,7 @@
             <p:ph type="sldImg"/>
           </p:nvPr>
         </p:nvSpPr>
-        <p:spPr>
-          <a:xfrm>
-            <a:off x="-171450" y="1143000"/>
-            <a:ext cx="5486400" cy="3086100"/>
-          </a:xfrm>
-          <a:prstGeom prst="rect">
-            <a:avLst/>
-          </a:prstGeom>
-          <a:noFill/>
-          <a:ln w="12700">
-            <a:solidFill>
-              <a:prstClr val="black"/>
-            </a:solidFill>
-          </a:ln>
-        </p:spPr>
+        <p:spPr/>
         <p:txBody>
           <a:bodyPr/>
           <a:lstStyle/>
@@ -2691,7 +2699,7 @@
       </p:sp>
       <p:sp>
         <p:nvSpPr>
-          <p:cNvPr id="3" name="Marcador de notas 2"/>
+          <p:cNvPr id="3" name="Notes Placeholder 2"/>
           <p:cNvSpPr>
             <a:spLocks noGrp="1"/>
           </p:cNvSpPr>
@@ -2699,70 +2707,69 @@
             <p:ph type="body" idx="1"/>
           </p:nvPr>
         </p:nvSpPr>
-        <p:spPr>
-          <a:xfrm>
-            <a:off x="514350" y="4400550"/>
-            <a:ext cx="4114800" cy="3600450"/>
-          </a:xfrm>
-          <a:prstGeom prst="rect">
-            <a:avLst/>
-          </a:prstGeom>
-        </p:spPr>
+        <p:spPr/>
         <p:txBody>
           <a:bodyPr/>
           <a:lstStyle/>
           <a:p>
             <a:r>
-              <a:rPr lang="es-AR" dirty="0"/>
-              <a:t>1er grafico: </a:t>
-            </a:r>
-          </a:p>
-          <a:p>
-            <a:r>
-              <a:rPr lang="es-AR" sz="1200" b="0" kern="1200" dirty="0">
-                <a:solidFill>
-                  <a:schemeClr val="tx1"/>
-                </a:solidFill>
-                <a:effectLst/>
-                <a:latin typeface="+mn-lt"/>
-                <a:ea typeface="+mn-ea"/>
-                <a:cs typeface="+mn-cs"/>
-              </a:rPr>
-              <a:t>- La red aprendió a capturar la dinámica real.</a:t>
-            </a:r>
-          </a:p>
-          <a:p>
-            <a:r>
-              <a:rPr lang="es-AR" sz="1200" b="0" kern="1200" dirty="0">
-                <a:solidFill>
-                  <a:schemeClr val="tx1"/>
-                </a:solidFill>
-                <a:effectLst/>
-                <a:latin typeface="+mn-lt"/>
-                <a:ea typeface="+mn-ea"/>
-                <a:cs typeface="+mn-cs"/>
-              </a:rPr>
-              <a:t>- Los pesos aleatorios (rojo punteado) producen una solución absurda, lo que muestra que el entrenamiento fue esencial y funcionó correctamente.</a:t>
-            </a:r>
-          </a:p>
-          <a:p>
-            <a:endParaRPr lang="es-AR" dirty="0"/>
-          </a:p>
-          <a:p>
-            <a:r>
-              <a:rPr lang="es-AR" dirty="0"/>
-              <a:t>2do grafico:</a:t>
-            </a:r>
-          </a:p>
-          <a:p>
-            <a:endParaRPr lang="es-AR" dirty="0"/>
+              <a:rPr lang="en-US" dirty="0"/>
+              <a:t>Los tres escenarios modifican la tasa de </a:t>
+            </a:r>
+            <a:r>
+              <a:rPr lang="en-US" dirty="0" err="1"/>
+              <a:t>migración</a:t>
+            </a:r>
+            <a:r>
+              <a:rPr lang="en-US" dirty="0"/>
+              <a:t> y </a:t>
+            </a:r>
+            <a:r>
+              <a:rPr lang="en-US" dirty="0" err="1"/>
+              <a:t>natalidad</a:t>
+            </a:r>
+            <a:r>
+              <a:rPr lang="en-US" dirty="0"/>
+              <a:t> futura. Ninguno predice una reducción absoluta de población pero la desaceleración es clara. La pregunta ya no es si llegamos al pico sino </a:t>
+            </a:r>
+            <a:r>
+              <a:rPr lang="en-US" dirty="0" err="1"/>
+              <a:t>cuándo</a:t>
+            </a:r>
+            <a:r>
+              <a:rPr lang="en-US" dirty="0"/>
+              <a:t>.</a:t>
+            </a:r>
+          </a:p>
+        </p:txBody>
+      </p:sp>
+      <p:sp>
+        <p:nvSpPr>
+          <p:cNvPr id="4" name="Slide Number Placeholder 3"/>
+          <p:cNvSpPr>
+            <a:spLocks noGrp="1"/>
+          </p:cNvSpPr>
+          <p:nvPr>
+            <p:ph type="sldNum" sz="quarter" idx="10"/>
+          </p:nvPr>
+        </p:nvSpPr>
+        <p:spPr/>
+        <p:txBody>
+          <a:bodyPr/>
+          <a:lstStyle/>
+          <a:p>
+            <a:fld id="{F7021451-1387-4CA6-816F-3879F97B5CBC}" type="slidenum">
+              <a:rPr lang="en-US"/>
+              <a:t>12</a:t>
+            </a:fld>
+            <a:endParaRPr lang="en-US"/>
           </a:p>
         </p:txBody>
       </p:sp>
     </p:spTree>
     <p:extLst>
       <p:ext uri="{BB962C8B-B14F-4D97-AF65-F5344CB8AC3E}">
-        <p14:creationId xmlns:p14="http://schemas.microsoft.com/office/powerpoint/2010/main" val="4038225779"/>
+        <p14:creationId xmlns:p14="http://schemas.microsoft.com/office/powerpoint/2010/main" val="1024086991"/>
       </p:ext>
     </p:extLst>
   </p:cSld>
@@ -2825,15 +2832,31 @@
           <a:p>
             <a:r>
               <a:rPr lang="en-US" dirty="0"/>
-              <a:t>Los tres escenarios modifican la tasa de </a:t>
+              <a:t>Cierre. Recapitular los 4 puntos. Subrayar la limitación honesta: el análisis es una versión simplificada de un fenómeno complejo. Para predecir con más precisión se </a:t>
             </a:r>
             <a:r>
               <a:rPr lang="en-US" dirty="0" err="1"/>
-              <a:t>migración</a:t>
+              <a:t>necesitarían</a:t>
             </a:r>
             <a:r>
               <a:rPr lang="en-US" dirty="0"/>
-              <a:t> y </a:t>
+              <a:t> </a:t>
+            </a:r>
+            <a:r>
+              <a:rPr lang="en-US" dirty="0" err="1"/>
+              <a:t>más</a:t>
+            </a:r>
+            <a:r>
+              <a:rPr lang="en-US" dirty="0"/>
+              <a:t> </a:t>
+            </a:r>
+            <a:r>
+              <a:rPr lang="en-US" dirty="0" err="1"/>
+              <a:t>modelos</a:t>
+            </a:r>
+            <a:r>
+              <a:rPr lang="en-US" dirty="0"/>
+              <a:t>, datos de educación, políticas de </a:t>
             </a:r>
             <a:r>
               <a:rPr lang="en-US" dirty="0" err="1"/>
@@ -2841,15 +2864,7 @@
             </a:r>
             <a:r>
               <a:rPr lang="en-US" dirty="0"/>
-              <a:t> futura. Ninguno predice una reducción absoluta de población pero la desaceleración es clara. La pregunta ya no es si llegamos al pico sino </a:t>
-            </a:r>
-            <a:r>
-              <a:rPr lang="en-US" dirty="0" err="1"/>
-              <a:t>cuándo</a:t>
-            </a:r>
-            <a:r>
-              <a:rPr lang="en-US" dirty="0"/>
-              <a:t>.</a:t>
+              <a:t>, etc. </a:t>
             </a:r>
           </a:p>
         </p:txBody>
@@ -2872,132 +2887,6 @@
             <a:fld id="{F7021451-1387-4CA6-816F-3879F97B5CBC}" type="slidenum">
               <a:rPr lang="en-US"/>
               <a:t>13</a:t>
-            </a:fld>
-            <a:endParaRPr lang="en-US"/>
-          </a:p>
-        </p:txBody>
-      </p:sp>
-    </p:spTree>
-    <p:extLst>
-      <p:ext uri="{BB962C8B-B14F-4D97-AF65-F5344CB8AC3E}">
-        <p14:creationId xmlns:p14="http://schemas.microsoft.com/office/powerpoint/2010/main" val="1024086991"/>
-      </p:ext>
-    </p:extLst>
-  </p:cSld>
-  <p:clrMapOvr>
-    <a:masterClrMapping/>
-  </p:clrMapOvr>
-</p:notes>
-</file>
-
-<file path=ppt/notesSlides/notesSlide14.xml><?xml version="1.0" encoding="utf-8"?>
-<p:notes xmlns:a="http://schemas.openxmlformats.org/drawingml/2006/main" xmlns:r="http://schemas.openxmlformats.org/officeDocument/2006/relationships" xmlns:p="http://schemas.openxmlformats.org/presentationml/2006/main">
-  <p:cSld>
-    <p:spTree>
-      <p:nvGrpSpPr>
-        <p:cNvPr id="1" name=""/>
-        <p:cNvGrpSpPr/>
-        <p:nvPr/>
-      </p:nvGrpSpPr>
-      <p:grpSpPr>
-        <a:xfrm>
-          <a:off x="0" y="0"/>
-          <a:ext cx="0" cy="0"/>
-          <a:chOff x="0" y="0"/>
-          <a:chExt cx="0" cy="0"/>
-        </a:xfrm>
-      </p:grpSpPr>
-      <p:sp>
-        <p:nvSpPr>
-          <p:cNvPr id="2" name="Slide Image Placeholder 1"/>
-          <p:cNvSpPr>
-            <a:spLocks noGrp="1" noRot="1" noChangeAspect="1"/>
-          </p:cNvSpPr>
-          <p:nvPr>
-            <p:ph type="sldImg"/>
-          </p:nvPr>
-        </p:nvSpPr>
-        <p:spPr/>
-        <p:txBody>
-          <a:bodyPr/>
-          <a:lstStyle/>
-          <a:p>
-            <a:endParaRPr lang="es-AR"/>
-          </a:p>
-        </p:txBody>
-      </p:sp>
-      <p:sp>
-        <p:nvSpPr>
-          <p:cNvPr id="3" name="Notes Placeholder 2"/>
-          <p:cNvSpPr>
-            <a:spLocks noGrp="1"/>
-          </p:cNvSpPr>
-          <p:nvPr>
-            <p:ph type="body" idx="1"/>
-          </p:nvPr>
-        </p:nvSpPr>
-        <p:spPr/>
-        <p:txBody>
-          <a:bodyPr/>
-          <a:lstStyle/>
-          <a:p>
-            <a:r>
-              <a:rPr lang="en-US" dirty="0"/>
-              <a:t>Cierre. Recapitular los 4 puntos. Subrayar la limitación honesta: el análisis es una versión simplificada de un fenómeno complejo. Para predecir con más precisión se </a:t>
-            </a:r>
-            <a:r>
-              <a:rPr lang="en-US" dirty="0" err="1"/>
-              <a:t>necesitarían</a:t>
-            </a:r>
-            <a:r>
-              <a:rPr lang="en-US" dirty="0"/>
-              <a:t> </a:t>
-            </a:r>
-            <a:r>
-              <a:rPr lang="en-US" dirty="0" err="1"/>
-              <a:t>más</a:t>
-            </a:r>
-            <a:r>
-              <a:rPr lang="en-US" dirty="0"/>
-              <a:t> </a:t>
-            </a:r>
-            <a:r>
-              <a:rPr lang="en-US" dirty="0" err="1"/>
-              <a:t>modelos</a:t>
-            </a:r>
-            <a:r>
-              <a:rPr lang="en-US" dirty="0"/>
-              <a:t>, datos de educación, políticas de </a:t>
-            </a:r>
-            <a:r>
-              <a:rPr lang="en-US" dirty="0" err="1"/>
-              <a:t>natalidad</a:t>
-            </a:r>
-            <a:r>
-              <a:rPr lang="en-US" dirty="0"/>
-              <a:t>, etc. </a:t>
-            </a:r>
-          </a:p>
-        </p:txBody>
-      </p:sp>
-      <p:sp>
-        <p:nvSpPr>
-          <p:cNvPr id="4" name="Slide Number Placeholder 3"/>
-          <p:cNvSpPr>
-            <a:spLocks noGrp="1"/>
-          </p:cNvSpPr>
-          <p:nvPr>
-            <p:ph type="sldNum" sz="quarter" idx="10"/>
-          </p:nvPr>
-        </p:nvSpPr>
-        <p:spPr/>
-        <p:txBody>
-          <a:bodyPr/>
-          <a:lstStyle/>
-          <a:p>
-            <a:fld id="{F7021451-1387-4CA6-816F-3879F97B5CBC}" type="slidenum">
-              <a:rPr lang="en-US"/>
-              <a:t>14</a:t>
             </a:fld>
             <a:endParaRPr lang="en-US"/>
           </a:p>
@@ -3377,7 +3266,23 @@
           <a:p>
             <a:r>
               <a:rPr lang="en-US" dirty="0"/>
-              <a:t>La TGF es el indicador más revelador. La caída de 2.65 en 2014 a 1.45 en 2022 es brutal. Subrayar que llevar 7 años en sub-reemplazo tiene consecuencias de largo plazo que ya son inevitables. </a:t>
+              <a:t>El crecimiento vegetativo es la consecuencia directa de la tijera anterior. 430k→70k en 10 años. El COVID genera un salto adicional en 2020-2021, pero la caída ya </a:t>
+            </a:r>
+            <a:r>
+              <a:rPr lang="en-US" dirty="0" err="1"/>
+              <a:t>venía</a:t>
+            </a:r>
+            <a:r>
+              <a:rPr lang="en-US" dirty="0"/>
+              <a:t> antes, </a:t>
+            </a:r>
+            <a:r>
+              <a:rPr lang="en-US" dirty="0" err="1"/>
+              <a:t>el</a:t>
+            </a:r>
+            <a:r>
+              <a:rPr lang="en-US" dirty="0"/>
+              <a:t> COVID solo aceleró lo inevitable. </a:t>
             </a:r>
           </a:p>
         </p:txBody>
@@ -3471,23 +3376,7 @@
           <a:p>
             <a:r>
               <a:rPr lang="en-US" dirty="0"/>
-              <a:t>El crecimiento vegetativo es la consecuencia directa de la tijera anterior. 430k→70k en 10 años. El COVID genera un salto adicional en 2020-2021, pero la caída ya </a:t>
-            </a:r>
-            <a:r>
-              <a:rPr lang="en-US" dirty="0" err="1"/>
-              <a:t>venía</a:t>
-            </a:r>
-            <a:r>
-              <a:rPr lang="en-US" dirty="0"/>
-              <a:t> antes, </a:t>
-            </a:r>
-            <a:r>
-              <a:rPr lang="en-US" dirty="0" err="1"/>
-              <a:t>el</a:t>
-            </a:r>
-            <a:r>
-              <a:rPr lang="en-US" dirty="0"/>
-              <a:t> COVID solo aceleró lo inevitable. </a:t>
+              <a:t>La TGF es el indicador más revelador. La caída de 2.65 en 2014 a 1.45 en 2022 es brutal. Subrayar que llevar 7 años en sub-reemplazo tiene consecuencias de largo plazo que ya son inevitables. </a:t>
             </a:r>
           </a:p>
         </p:txBody>
@@ -5416,605 +5305,6 @@
 
 <file path=ppt/slides/slide11.xml><?xml version="1.0" encoding="utf-8"?>
 <p:sld xmlns:a="http://schemas.openxmlformats.org/drawingml/2006/main" xmlns:r="http://schemas.openxmlformats.org/officeDocument/2006/relationships" xmlns:p="http://schemas.openxmlformats.org/presentationml/2006/main">
-  <p:cSld name="Slide 10">
-    <p:bg>
-      <p:bgPr>
-        <a:solidFill>
-          <a:srgbClr val="FFFFFF"/>
-        </a:solidFill>
-        <a:effectLst/>
-      </p:bgPr>
-    </p:bg>
-    <p:spTree>
-      <p:nvGrpSpPr>
-        <p:cNvPr id="1" name=""/>
-        <p:cNvGrpSpPr/>
-        <p:nvPr/>
-      </p:nvGrpSpPr>
-      <p:grpSpPr>
-        <a:xfrm>
-          <a:off x="0" y="0"/>
-          <a:ext cx="0" cy="0"/>
-          <a:chOff x="0" y="0"/>
-          <a:chExt cx="0" cy="0"/>
-        </a:xfrm>
-      </p:grpSpPr>
-      <p:sp>
-        <p:nvSpPr>
-          <p:cNvPr id="2" name="Text 0"/>
-          <p:cNvSpPr/>
-          <p:nvPr/>
-        </p:nvSpPr>
-        <p:spPr>
-          <a:xfrm>
-            <a:off x="457200" y="164592"/>
-            <a:ext cx="8229600" cy="594360"/>
-          </a:xfrm>
-          <a:prstGeom prst="rect">
-            <a:avLst/>
-          </a:prstGeom>
-          <a:noFill/>
-          <a:ln/>
-        </p:spPr>
-        <p:txBody>
-          <a:bodyPr wrap="square" lIns="0" tIns="0" rIns="0" bIns="0" rtlCol="0" anchor="ctr"/>
-          <a:lstStyle/>
-          <a:p>
-            <a:pPr marL="0" indent="0" algn="l">
-              <a:buNone/>
-            </a:pPr>
-            <a:r>
-              <a:rPr lang="en-US" sz="2600" b="1" dirty="0">
-                <a:solidFill>
-                  <a:srgbClr val="1B2A4A"/>
-                </a:solidFill>
-                <a:latin typeface="Calibri" pitchFamily="34" charset="0"/>
-                <a:ea typeface="Calibri" pitchFamily="34" charset="-122"/>
-                <a:cs typeface="Calibri" pitchFamily="34" charset="-120"/>
-              </a:rPr>
-              <a:t>Resultados — Entrenamiento de la UDE</a:t>
-            </a:r>
-            <a:endParaRPr lang="en-US" sz="2600" dirty="0"/>
-          </a:p>
-        </p:txBody>
-      </p:sp>
-      <p:sp>
-        <p:nvSpPr>
-          <p:cNvPr id="3" name="Shape 1"/>
-          <p:cNvSpPr/>
-          <p:nvPr/>
-        </p:nvSpPr>
-        <p:spPr>
-          <a:xfrm>
-            <a:off x="457200" y="804672"/>
-            <a:ext cx="8229600" cy="18288"/>
-          </a:xfrm>
-          <a:prstGeom prst="rect">
-            <a:avLst/>
-          </a:prstGeom>
-          <a:solidFill>
-            <a:srgbClr val="1D7A8C"/>
-          </a:solidFill>
-          <a:ln w="12700">
-            <a:solidFill>
-              <a:srgbClr val="1D7A8C"/>
-            </a:solidFill>
-            <a:prstDash val="solid"/>
-          </a:ln>
-        </p:spPr>
-        <p:txBody>
-          <a:bodyPr/>
-          <a:lstStyle/>
-          <a:p>
-            <a:endParaRPr lang="es-AR"/>
-          </a:p>
-        </p:txBody>
-      </p:sp>
-      <p:sp>
-        <p:nvSpPr>
-          <p:cNvPr id="4" name="Shape 2"/>
-          <p:cNvSpPr/>
-          <p:nvPr/>
-        </p:nvSpPr>
-        <p:spPr>
-          <a:xfrm>
-            <a:off x="365760" y="960120"/>
-            <a:ext cx="2651760" cy="3977640"/>
-          </a:xfrm>
-          <a:prstGeom prst="roundRect">
-            <a:avLst>
-              <a:gd name="adj" fmla="val 3448"/>
-            </a:avLst>
-          </a:prstGeom>
-          <a:solidFill>
-            <a:srgbClr val="F1F5F9"/>
-          </a:solidFill>
-          <a:ln w="12700">
-            <a:solidFill>
-              <a:srgbClr val="D1E9F0"/>
-            </a:solidFill>
-            <a:prstDash val="solid"/>
-          </a:ln>
-          <a:effectLst>
-            <a:outerShdw blurRad="101600" dist="25400" dir="2700000" algn="bl" rotWithShape="0">
-              <a:srgbClr val="000000">
-                <a:alpha val="10000"/>
-              </a:srgbClr>
-            </a:outerShdw>
-          </a:effectLst>
-        </p:spPr>
-        <p:txBody>
-          <a:bodyPr/>
-          <a:lstStyle/>
-          <a:p>
-            <a:endParaRPr lang="es-AR"/>
-          </a:p>
-        </p:txBody>
-      </p:sp>
-      <p:pic>
-        <p:nvPicPr>
-          <p:cNvPr id="5" name="Image 0" descr="preencoded.png"/>
-          <p:cNvPicPr>
-            <a:picLocks noChangeAspect="1"/>
-          </p:cNvPicPr>
-          <p:nvPr/>
-        </p:nvPicPr>
-        <p:blipFill>
-          <a:blip r:embed="rId3"/>
-          <a:stretch>
-            <a:fillRect/>
-          </a:stretch>
-        </p:blipFill>
-        <p:spPr>
-          <a:xfrm>
-            <a:off x="1371600" y="1097280"/>
-            <a:ext cx="640080" cy="640080"/>
-          </a:xfrm>
-          <a:prstGeom prst="rect">
-            <a:avLst/>
-          </a:prstGeom>
-        </p:spPr>
-      </p:pic>
-      <p:sp>
-        <p:nvSpPr>
-          <p:cNvPr id="6" name="Text 3"/>
-          <p:cNvSpPr/>
-          <p:nvPr/>
-        </p:nvSpPr>
-        <p:spPr>
-          <a:xfrm>
-            <a:off x="502920" y="1828800"/>
-            <a:ext cx="2377440" cy="502920"/>
-          </a:xfrm>
-          <a:prstGeom prst="rect">
-            <a:avLst/>
-          </a:prstGeom>
-          <a:noFill/>
-          <a:ln/>
-        </p:spPr>
-        <p:txBody>
-          <a:bodyPr wrap="square" lIns="0" tIns="0" rIns="0" bIns="0" rtlCol="0" anchor="ctr"/>
-          <a:lstStyle/>
-          <a:p>
-            <a:pPr marL="0" indent="0" algn="ctr">
-              <a:buNone/>
-            </a:pPr>
-            <a:r>
-              <a:rPr lang="en-US" sz="1400" b="1" dirty="0">
-                <a:solidFill>
-                  <a:srgbClr val="2E8B57"/>
-                </a:solidFill>
-                <a:latin typeface="Calibri" pitchFamily="34" charset="0"/>
-                <a:ea typeface="Calibri" pitchFamily="34" charset="-122"/>
-                <a:cs typeface="Calibri" pitchFamily="34" charset="-120"/>
-              </a:rPr>
-              <a:t>Ajuste histórico</a:t>
-            </a:r>
-            <a:endParaRPr lang="en-US" sz="1400" dirty="0"/>
-          </a:p>
-        </p:txBody>
-      </p:sp>
-      <p:sp>
-        <p:nvSpPr>
-          <p:cNvPr id="7" name="Text 4"/>
-          <p:cNvSpPr/>
-          <p:nvPr/>
-        </p:nvSpPr>
-        <p:spPr>
-          <a:xfrm>
-            <a:off x="548640" y="2395728"/>
-            <a:ext cx="2286000" cy="2423160"/>
-          </a:xfrm>
-          <a:prstGeom prst="rect">
-            <a:avLst/>
-          </a:prstGeom>
-          <a:noFill/>
-          <a:ln/>
-        </p:spPr>
-        <p:txBody>
-          <a:bodyPr wrap="square" lIns="0" tIns="0" rIns="0" bIns="0" rtlCol="0" anchor="t"/>
-          <a:lstStyle/>
-          <a:p>
-            <a:pPr marL="0" indent="0" algn="l">
-              <a:buNone/>
-            </a:pPr>
-            <a:r>
-              <a:rPr lang="en-US" sz="1200" dirty="0">
-                <a:solidFill>
-                  <a:srgbClr val="1B2A4A"/>
-                </a:solidFill>
-                <a:latin typeface="Calibri" pitchFamily="34" charset="0"/>
-                <a:ea typeface="Calibri" pitchFamily="34" charset="-122"/>
-                <a:cs typeface="Calibri" pitchFamily="34" charset="-120"/>
-              </a:rPr>
-              <a:t>La UDE (verde) se superpone casi perfectamente con los 11 puntos del INDEC. La ODE clásica (sin red) no logra seguir la dinámica real.</a:t>
-            </a:r>
-            <a:endParaRPr lang="en-US" sz="1200" dirty="0"/>
-          </a:p>
-        </p:txBody>
-      </p:sp>
-      <p:sp>
-        <p:nvSpPr>
-          <p:cNvPr id="8" name="Shape 5"/>
-          <p:cNvSpPr/>
-          <p:nvPr/>
-        </p:nvSpPr>
-        <p:spPr>
-          <a:xfrm>
-            <a:off x="3227832" y="960120"/>
-            <a:ext cx="2651760" cy="3977640"/>
-          </a:xfrm>
-          <a:prstGeom prst="roundRect">
-            <a:avLst>
-              <a:gd name="adj" fmla="val 3448"/>
-            </a:avLst>
-          </a:prstGeom>
-          <a:solidFill>
-            <a:srgbClr val="F1F5F9"/>
-          </a:solidFill>
-          <a:ln w="12700">
-            <a:solidFill>
-              <a:srgbClr val="D1E9F0"/>
-            </a:solidFill>
-            <a:prstDash val="solid"/>
-          </a:ln>
-          <a:effectLst>
-            <a:outerShdw blurRad="101600" dist="25400" dir="2700000" algn="bl" rotWithShape="0">
-              <a:srgbClr val="000000">
-                <a:alpha val="10000"/>
-              </a:srgbClr>
-            </a:outerShdw>
-          </a:effectLst>
-        </p:spPr>
-        <p:txBody>
-          <a:bodyPr/>
-          <a:lstStyle/>
-          <a:p>
-            <a:endParaRPr lang="es-AR"/>
-          </a:p>
-        </p:txBody>
-      </p:sp>
-      <p:pic>
-        <p:nvPicPr>
-          <p:cNvPr id="9" name="Image 1" descr="preencoded.png"/>
-          <p:cNvPicPr>
-            <a:picLocks noChangeAspect="1"/>
-          </p:cNvPicPr>
-          <p:nvPr/>
-        </p:nvPicPr>
-        <p:blipFill>
-          <a:blip r:embed="rId4"/>
-          <a:stretch>
-            <a:fillRect/>
-          </a:stretch>
-        </p:blipFill>
-        <p:spPr>
-          <a:xfrm>
-            <a:off x="4233672" y="1097280"/>
-            <a:ext cx="640080" cy="640080"/>
-          </a:xfrm>
-          <a:prstGeom prst="rect">
-            <a:avLst/>
-          </a:prstGeom>
-        </p:spPr>
-      </p:pic>
-      <p:sp>
-        <p:nvSpPr>
-          <p:cNvPr id="10" name="Text 6"/>
-          <p:cNvSpPr/>
-          <p:nvPr/>
-        </p:nvSpPr>
-        <p:spPr>
-          <a:xfrm>
-            <a:off x="3364992" y="1828800"/>
-            <a:ext cx="2377440" cy="502920"/>
-          </a:xfrm>
-          <a:prstGeom prst="rect">
-            <a:avLst/>
-          </a:prstGeom>
-          <a:noFill/>
-          <a:ln/>
-        </p:spPr>
-        <p:txBody>
-          <a:bodyPr wrap="square" lIns="0" tIns="0" rIns="0" bIns="0" rtlCol="0" anchor="ctr"/>
-          <a:lstStyle/>
-          <a:p>
-            <a:pPr marL="0" indent="0" algn="ctr">
-              <a:buNone/>
-            </a:pPr>
-            <a:r>
-              <a:rPr lang="en-US" sz="1400" b="1" dirty="0">
-                <a:solidFill>
-                  <a:srgbClr val="1D7A8C"/>
-                </a:solidFill>
-                <a:latin typeface="Calibri" pitchFamily="34" charset="0"/>
-                <a:ea typeface="Calibri" pitchFamily="34" charset="-122"/>
-                <a:cs typeface="Calibri" pitchFamily="34" charset="-120"/>
-              </a:rPr>
-              <a:t>Convergencia</a:t>
-            </a:r>
-            <a:endParaRPr lang="en-US" sz="1400" dirty="0"/>
-          </a:p>
-        </p:txBody>
-      </p:sp>
-      <p:sp>
-        <p:nvSpPr>
-          <p:cNvPr id="11" name="Text 7"/>
-          <p:cNvSpPr/>
-          <p:nvPr/>
-        </p:nvSpPr>
-        <p:spPr>
-          <a:xfrm>
-            <a:off x="3410712" y="2395728"/>
-            <a:ext cx="2286000" cy="2423160"/>
-          </a:xfrm>
-          <a:prstGeom prst="rect">
-            <a:avLst/>
-          </a:prstGeom>
-          <a:noFill/>
-          <a:ln/>
-        </p:spPr>
-        <p:txBody>
-          <a:bodyPr wrap="square" lIns="0" tIns="0" rIns="0" bIns="0" rtlCol="0" anchor="t"/>
-          <a:lstStyle/>
-          <a:p>
-            <a:pPr marL="0" indent="0" algn="l">
-              <a:buNone/>
-            </a:pPr>
-            <a:r>
-              <a:rPr lang="en-US" sz="1200" dirty="0">
-                <a:solidFill>
-                  <a:srgbClr val="1B2A4A"/>
-                </a:solidFill>
-                <a:latin typeface="Calibri" pitchFamily="34" charset="0"/>
-                <a:ea typeface="Calibri" pitchFamily="34" charset="-122"/>
-                <a:cs typeface="Calibri" pitchFamily="34" charset="-120"/>
-              </a:rPr>
-              <a:t>La loss cae de ~10⁻² a ~10⁻⁸ en 3.000 épocas. El entrenamiento es </a:t>
-            </a:r>
-            <a:r>
-              <a:rPr lang="en-US" sz="1200" dirty="0" err="1">
-                <a:solidFill>
-                  <a:srgbClr val="1B2A4A"/>
-                </a:solidFill>
-                <a:latin typeface="Calibri" pitchFamily="34" charset="0"/>
-                <a:ea typeface="Calibri" pitchFamily="34" charset="-122"/>
-                <a:cs typeface="Calibri" pitchFamily="34" charset="-120"/>
-              </a:rPr>
-              <a:t>estable</a:t>
-            </a:r>
-            <a:r>
-              <a:rPr lang="en-US" sz="1200" dirty="0">
-                <a:solidFill>
-                  <a:srgbClr val="1B2A4A"/>
-                </a:solidFill>
-                <a:latin typeface="Calibri" pitchFamily="34" charset="0"/>
-                <a:ea typeface="Calibri" pitchFamily="34" charset="-122"/>
-                <a:cs typeface="Calibri" pitchFamily="34" charset="-120"/>
-              </a:rPr>
-              <a:t>.</a:t>
-            </a:r>
-            <a:endParaRPr lang="en-US" sz="1200" dirty="0"/>
-          </a:p>
-        </p:txBody>
-      </p:sp>
-      <p:sp>
-        <p:nvSpPr>
-          <p:cNvPr id="12" name="Shape 8"/>
-          <p:cNvSpPr/>
-          <p:nvPr/>
-        </p:nvSpPr>
-        <p:spPr>
-          <a:xfrm>
-            <a:off x="6089904" y="960120"/>
-            <a:ext cx="2651760" cy="3977640"/>
-          </a:xfrm>
-          <a:prstGeom prst="roundRect">
-            <a:avLst>
-              <a:gd name="adj" fmla="val 3448"/>
-            </a:avLst>
-          </a:prstGeom>
-          <a:solidFill>
-            <a:srgbClr val="F1F5F9"/>
-          </a:solidFill>
-          <a:ln w="12700">
-            <a:solidFill>
-              <a:srgbClr val="D1E9F0"/>
-            </a:solidFill>
-            <a:prstDash val="solid"/>
-          </a:ln>
-          <a:effectLst>
-            <a:outerShdw blurRad="101600" dist="25400" dir="2700000" algn="bl" rotWithShape="0">
-              <a:srgbClr val="000000">
-                <a:alpha val="10000"/>
-              </a:srgbClr>
-            </a:outerShdw>
-          </a:effectLst>
-        </p:spPr>
-        <p:txBody>
-          <a:bodyPr/>
-          <a:lstStyle/>
-          <a:p>
-            <a:endParaRPr lang="es-AR"/>
-          </a:p>
-        </p:txBody>
-      </p:sp>
-      <p:pic>
-        <p:nvPicPr>
-          <p:cNvPr id="13" name="Image 2" descr="preencoded.png"/>
-          <p:cNvPicPr>
-            <a:picLocks noChangeAspect="1"/>
-          </p:cNvPicPr>
-          <p:nvPr/>
-        </p:nvPicPr>
-        <p:blipFill>
-          <a:blip r:embed="rId5"/>
-          <a:stretch>
-            <a:fillRect/>
-          </a:stretch>
-        </p:blipFill>
-        <p:spPr>
-          <a:xfrm>
-            <a:off x="7095744" y="1097280"/>
-            <a:ext cx="640080" cy="640080"/>
-          </a:xfrm>
-          <a:prstGeom prst="rect">
-            <a:avLst/>
-          </a:prstGeom>
-        </p:spPr>
-      </p:pic>
-      <p:sp>
-        <p:nvSpPr>
-          <p:cNvPr id="14" name="Text 9"/>
-          <p:cNvSpPr/>
-          <p:nvPr/>
-        </p:nvSpPr>
-        <p:spPr>
-          <a:xfrm>
-            <a:off x="6227064" y="1828800"/>
-            <a:ext cx="2377440" cy="502920"/>
-          </a:xfrm>
-          <a:prstGeom prst="rect">
-            <a:avLst/>
-          </a:prstGeom>
-          <a:noFill/>
-          <a:ln/>
-        </p:spPr>
-        <p:txBody>
-          <a:bodyPr wrap="square" lIns="0" tIns="0" rIns="0" bIns="0" rtlCol="0" anchor="ctr"/>
-          <a:lstStyle/>
-          <a:p>
-            <a:pPr marL="0" indent="0" algn="ctr">
-              <a:buNone/>
-            </a:pPr>
-            <a:r>
-              <a:rPr lang="en-US" sz="1400" b="1" dirty="0">
-                <a:solidFill>
-                  <a:srgbClr val="7B2D8B"/>
-                </a:solidFill>
-                <a:latin typeface="Calibri" pitchFamily="34" charset="0"/>
-                <a:ea typeface="Calibri" pitchFamily="34" charset="-122"/>
-                <a:cs typeface="Calibri" pitchFamily="34" charset="-120"/>
-              </a:rPr>
-              <a:t>Corrección nn(τ)</a:t>
-            </a:r>
-            <a:endParaRPr lang="en-US" sz="1400" dirty="0"/>
-          </a:p>
-        </p:txBody>
-      </p:sp>
-      <p:sp>
-        <p:nvSpPr>
-          <p:cNvPr id="15" name="Text 10"/>
-          <p:cNvSpPr/>
-          <p:nvPr/>
-        </p:nvSpPr>
-        <p:spPr>
-          <a:xfrm>
-            <a:off x="6272784" y="2395728"/>
-            <a:ext cx="2286000" cy="2423160"/>
-          </a:xfrm>
-          <a:prstGeom prst="rect">
-            <a:avLst/>
-          </a:prstGeom>
-          <a:noFill/>
-          <a:ln/>
-        </p:spPr>
-        <p:txBody>
-          <a:bodyPr wrap="square" lIns="0" tIns="0" rIns="0" bIns="0" rtlCol="0" anchor="t"/>
-          <a:lstStyle/>
-          <a:p>
-            <a:pPr marL="0" indent="0" algn="l">
-              <a:buNone/>
-            </a:pPr>
-            <a:r>
-              <a:rPr lang="en-US" sz="1200" dirty="0">
-                <a:solidFill>
-                  <a:srgbClr val="1B2A4A"/>
-                </a:solidFill>
-                <a:latin typeface="Calibri" pitchFamily="34" charset="0"/>
-                <a:ea typeface="Calibri" pitchFamily="34" charset="-122"/>
-                <a:cs typeface="Calibri" pitchFamily="34" charset="-120"/>
-              </a:rPr>
-              <a:t>La red aprende una corrección decreciente en el tiempo, capturando la </a:t>
-            </a:r>
-            <a:r>
-              <a:rPr lang="en-US" sz="1200" dirty="0" err="1">
-                <a:solidFill>
-                  <a:srgbClr val="1B2A4A"/>
-                </a:solidFill>
-                <a:latin typeface="Calibri" pitchFamily="34" charset="0"/>
-                <a:ea typeface="Calibri" pitchFamily="34" charset="-122"/>
-                <a:cs typeface="Calibri" pitchFamily="34" charset="-120"/>
-              </a:rPr>
-              <a:t>caída</a:t>
-            </a:r>
-            <a:r>
-              <a:rPr lang="en-US" sz="1200" dirty="0">
-                <a:solidFill>
-                  <a:srgbClr val="1B2A4A"/>
-                </a:solidFill>
-                <a:latin typeface="Calibri" pitchFamily="34" charset="0"/>
-                <a:ea typeface="Calibri" pitchFamily="34" charset="-122"/>
-                <a:cs typeface="Calibri" pitchFamily="34" charset="-120"/>
-              </a:rPr>
-              <a:t> de la </a:t>
-            </a:r>
-            <a:r>
-              <a:rPr lang="en-US" sz="1200" dirty="0" err="1">
-                <a:solidFill>
-                  <a:srgbClr val="1B2A4A"/>
-                </a:solidFill>
-                <a:latin typeface="Calibri" pitchFamily="34" charset="0"/>
-                <a:ea typeface="Calibri" pitchFamily="34" charset="-122"/>
-                <a:cs typeface="Calibri" pitchFamily="34" charset="-120"/>
-              </a:rPr>
-              <a:t>natalidad</a:t>
-            </a:r>
-            <a:r>
-              <a:rPr lang="en-US" sz="1200" dirty="0">
-                <a:solidFill>
-                  <a:srgbClr val="1B2A4A"/>
-                </a:solidFill>
-                <a:latin typeface="Calibri" pitchFamily="34" charset="0"/>
-                <a:ea typeface="Calibri" pitchFamily="34" charset="-122"/>
-                <a:cs typeface="Calibri" pitchFamily="34" charset="-120"/>
-              </a:rPr>
-              <a:t> que Malthus puro no puede modelar.</a:t>
-            </a:r>
-            <a:endParaRPr lang="en-US" sz="1200" dirty="0"/>
-          </a:p>
-        </p:txBody>
-      </p:sp>
-    </p:spTree>
-  </p:cSld>
-  <p:clrMapOvr>
-    <a:masterClrMapping/>
-  </p:clrMapOvr>
-</p:sld>
-</file>
-
-<file path=ppt/slides/slide12.xml><?xml version="1.0" encoding="utf-8"?>
-<p:sld xmlns:a="http://schemas.openxmlformats.org/drawingml/2006/main" xmlns:r="http://schemas.openxmlformats.org/officeDocument/2006/relationships" xmlns:p="http://schemas.openxmlformats.org/presentationml/2006/main">
   <p:cSld>
     <p:spTree>
       <p:nvGrpSpPr>
@@ -6204,7 +5494,7 @@
         </p:nvSpPr>
         <p:spPr>
           <a:xfrm>
-            <a:off x="548640" y="3646349"/>
+            <a:off x="548640" y="3613097"/>
             <a:ext cx="457200" cy="0"/>
           </a:xfrm>
           <a:prstGeom prst="line">
@@ -6240,7 +5530,7 @@
         </p:nvSpPr>
         <p:spPr>
           <a:xfrm>
-            <a:off x="1051560" y="3521242"/>
+            <a:off x="1051560" y="3487990"/>
             <a:ext cx="1737360" cy="274320"/>
           </a:xfrm>
           <a:prstGeom prst="rect">
@@ -6285,7 +5575,7 @@
         </p:nvSpPr>
         <p:spPr>
           <a:xfrm>
-            <a:off x="548640" y="3938957"/>
+            <a:off x="548640" y="4013772"/>
             <a:ext cx="457200" cy="0"/>
           </a:xfrm>
           <a:prstGeom prst="line">
@@ -6321,7 +5611,7 @@
         </p:nvSpPr>
         <p:spPr>
           <a:xfrm>
-            <a:off x="1051560" y="3813850"/>
+            <a:off x="1051560" y="3888665"/>
             <a:ext cx="1737360" cy="274320"/>
           </a:xfrm>
           <a:prstGeom prst="rect">
@@ -7142,6 +6432,106 @@
           </a:p>
         </p:txBody>
       </p:sp>
+      <p:sp>
+        <p:nvSpPr>
+          <p:cNvPr id="23" name="Text 6">
+            <a:extLst>
+              <a:ext uri="{FF2B5EF4-FFF2-40B4-BE49-F238E27FC236}">
+                <a16:creationId xmlns:a16="http://schemas.microsoft.com/office/drawing/2014/main" id="{DEA65074-31B0-290D-3086-86F035EB596F}"/>
+              </a:ext>
+            </a:extLst>
+          </p:cNvPr>
+          <p:cNvSpPr/>
+          <p:nvPr/>
+        </p:nvSpPr>
+        <p:spPr>
+          <a:xfrm>
+            <a:off x="1051560" y="3682509"/>
+            <a:ext cx="1737360" cy="274320"/>
+          </a:xfrm>
+          <a:prstGeom prst="rect">
+            <a:avLst/>
+          </a:prstGeom>
+          <a:noFill/>
+          <a:ln/>
+        </p:spPr>
+        <p:txBody>
+          <a:bodyPr wrap="square" lIns="0" tIns="0" rIns="0" bIns="0" rtlCol="0" anchor="ctr"/>
+          <a:lstStyle/>
+          <a:p>
+            <a:pPr marL="0" indent="0" algn="l">
+              <a:buNone/>
+            </a:pPr>
+            <a:r>
+              <a:rPr lang="en-US" sz="1000" b="1" dirty="0">
+                <a:solidFill>
+                  <a:srgbClr val="800000"/>
+                </a:solidFill>
+                <a:latin typeface="Calibri" pitchFamily="34" charset="0"/>
+                <a:ea typeface="Calibri" pitchFamily="34" charset="-122"/>
+                <a:cs typeface="Calibri" pitchFamily="34" charset="-120"/>
+              </a:rPr>
+              <a:t>UDE pre-</a:t>
+            </a:r>
+            <a:r>
+              <a:rPr lang="en-US" sz="1000" b="1" dirty="0" err="1">
+                <a:solidFill>
+                  <a:srgbClr val="800000"/>
+                </a:solidFill>
+                <a:latin typeface="Calibri" pitchFamily="34" charset="0"/>
+                <a:ea typeface="Calibri" pitchFamily="34" charset="-122"/>
+                <a:cs typeface="Calibri" pitchFamily="34" charset="-120"/>
+              </a:rPr>
+              <a:t>entrenada</a:t>
+            </a:r>
+            <a:endParaRPr lang="en-US" sz="1000" dirty="0">
+              <a:solidFill>
+                <a:srgbClr val="800000"/>
+              </a:solidFill>
+            </a:endParaRPr>
+          </a:p>
+        </p:txBody>
+      </p:sp>
+      <p:sp>
+        <p:nvSpPr>
+          <p:cNvPr id="30" name="Shape 3">
+            <a:extLst>
+              <a:ext uri="{FF2B5EF4-FFF2-40B4-BE49-F238E27FC236}">
+                <a16:creationId xmlns:a16="http://schemas.microsoft.com/office/drawing/2014/main" id="{B770C7A5-66F8-D7C6-75B1-E58AD202A3E0}"/>
+              </a:ext>
+            </a:extLst>
+          </p:cNvPr>
+          <p:cNvSpPr/>
+          <p:nvPr/>
+        </p:nvSpPr>
+        <p:spPr>
+          <a:xfrm>
+            <a:off x="559725" y="3807060"/>
+            <a:ext cx="457200" cy="0"/>
+          </a:xfrm>
+          <a:prstGeom prst="line">
+            <a:avLst/>
+          </a:prstGeom>
+          <a:noFill/>
+          <a:ln w="25400">
+            <a:solidFill>
+              <a:srgbClr val="800000"/>
+            </a:solidFill>
+            <a:prstDash val="dash"/>
+          </a:ln>
+        </p:spPr>
+        <p:txBody>
+          <a:bodyPr/>
+          <a:lstStyle/>
+          <a:p>
+            <a:endParaRPr lang="es-AR">
+              <a:solidFill>
+                <a:srgbClr val="800000"/>
+              </a:solidFill>
+            </a:endParaRPr>
+          </a:p>
+        </p:txBody>
+      </p:sp>
     </p:spTree>
     <p:extLst>
       <p:ext uri="{BB962C8B-B14F-4D97-AF65-F5344CB8AC3E}">
@@ -7155,7 +6545,7 @@
 </p:sld>
 </file>
 
-<file path=ppt/slides/slide13.xml><?xml version="1.0" encoding="utf-8"?>
+<file path=ppt/slides/slide12.xml><?xml version="1.0" encoding="utf-8"?>
 <p:sld xmlns:a="http://schemas.openxmlformats.org/drawingml/2006/main" xmlns:r="http://schemas.openxmlformats.org/officeDocument/2006/relationships" xmlns:p="http://schemas.openxmlformats.org/presentationml/2006/main">
   <p:cSld name="Slide 11">
     <p:bg>
@@ -7258,7 +6648,7 @@
           <p:nvPr>
             <p:extLst>
               <p:ext uri="{D42A27DB-BD31-4B8C-83A1-F6EECF244321}">
-                <p14:modId xmlns:p14="http://schemas.microsoft.com/office/powerpoint/2010/main" val="1071072282"/>
+                <p14:modId xmlns:p14="http://schemas.microsoft.com/office/powerpoint/2010/main" val="278994971"/>
               </p:ext>
             </p:extLst>
           </p:nvPr>
@@ -7583,7 +6973,7 @@
                 <a:ea typeface="Calibri" pitchFamily="34" charset="-122"/>
                 <a:cs typeface="Calibri" pitchFamily="34" charset="-120"/>
               </a:rPr>
-              <a:t>58 M</a:t>
+              <a:t>59 M</a:t>
             </a:r>
             <a:endParaRPr lang="en-US" sz="2400" dirty="0"/>
           </a:p>
@@ -7850,7 +7240,7 @@
 </p:sld>
 </file>
 
-<file path=ppt/slides/slide14.xml><?xml version="1.0" encoding="utf-8"?>
+<file path=ppt/slides/slide13.xml><?xml version="1.0" encoding="utf-8"?>
 <p:sld xmlns:a="http://schemas.openxmlformats.org/drawingml/2006/main" xmlns:r="http://schemas.openxmlformats.org/officeDocument/2006/relationships" xmlns:p="http://schemas.openxmlformats.org/presentationml/2006/main">
   <p:cSld name="Slide 12">
     <p:bg>
@@ -9399,14 +8789,14 @@
           <p:nvPr>
             <p:extLst>
               <p:ext uri="{D42A27DB-BD31-4B8C-83A1-F6EECF244321}">
-                <p14:modId xmlns:p14="http://schemas.microsoft.com/office/powerpoint/2010/main" val="1579011935"/>
+                <p14:modId xmlns:p14="http://schemas.microsoft.com/office/powerpoint/2010/main" val="2247737652"/>
               </p:ext>
             </p:extLst>
           </p:nvPr>
         </p:nvGraphicFramePr>
         <p:xfrm>
           <a:off x="365760" y="960120"/>
-          <a:ext cx="8412480" cy="3017520"/>
+          <a:ext cx="8412480" cy="3566160"/>
         </p:xfrm>
         <a:graphic>
           <a:graphicData uri="http://schemas.openxmlformats.org/drawingml/2006/table">
@@ -10068,7 +9458,7 @@
                   </a:ext>
                 </a:extLst>
               </a:tr>
-              <a:tr h="502920">
+              <a:tr h="548640">
                 <a:tc>
                   <a:txBody>
                     <a:bodyPr/>
@@ -10701,6 +10091,303 @@
                   </a:ext>
                 </a:extLst>
               </a:tr>
+              <a:tr h="502920">
+                <a:tc>
+                  <a:txBody>
+                    <a:bodyPr/>
+                    <a:lstStyle/>
+                    <a:p>
+                      <a:pPr marL="0" indent="0" algn="l">
+                        <a:buNone/>
+                      </a:pPr>
+                      <a:r>
+                        <a:rPr lang="en-US" sz="1300" kern="1200" dirty="0">
+                          <a:solidFill>
+                            <a:srgbClr val="1B2A4A"/>
+                          </a:solidFill>
+                          <a:latin typeface="Calibri" pitchFamily="34" charset="0"/>
+                          <a:ea typeface="Calibri" charset="0"/>
+                          <a:cs typeface="Calibri" pitchFamily="34" charset="-120"/>
+                        </a:rPr>
+                        <a:t>TBM – Tasa Bruta de </a:t>
+                      </a:r>
+                      <a:r>
+                        <a:rPr lang="en-US" sz="1300" kern="1200" dirty="0" err="1">
+                          <a:solidFill>
+                            <a:srgbClr val="1B2A4A"/>
+                          </a:solidFill>
+                          <a:latin typeface="Calibri" pitchFamily="34" charset="0"/>
+                          <a:ea typeface="Calibri" charset="0"/>
+                          <a:cs typeface="Calibri" pitchFamily="34" charset="-120"/>
+                        </a:rPr>
+                        <a:t>Migración</a:t>
+                      </a:r>
+                      <a:endParaRPr lang="en-US" sz="1300" kern="1200" dirty="0">
+                        <a:solidFill>
+                          <a:srgbClr val="1B2A4A"/>
+                        </a:solidFill>
+                        <a:latin typeface="Calibri" pitchFamily="34" charset="0"/>
+                        <a:ea typeface="Calibri" charset="0"/>
+                        <a:cs typeface="Calibri" pitchFamily="34" charset="-120"/>
+                      </a:endParaRPr>
+                    </a:p>
+                  </a:txBody>
+                  <a:tcPr marL="101600" marR="101600" marT="63500" marB="63500" anchor="ctr">
+                    <a:lnL w="6350" cap="flat" cmpd="sng" algn="ctr">
+                      <a:solidFill>
+                        <a:srgbClr val="D1E9F0"/>
+                      </a:solidFill>
+                      <a:prstDash val="solid"/>
+                      <a:round/>
+                      <a:headEnd type="none" w="med" len="med"/>
+                      <a:tailEnd type="none" w="med" len="med"/>
+                    </a:lnL>
+                    <a:lnR w="6350" cap="flat" cmpd="sng" algn="ctr">
+                      <a:solidFill>
+                        <a:srgbClr val="D1E9F0"/>
+                      </a:solidFill>
+                      <a:prstDash val="solid"/>
+                      <a:round/>
+                      <a:headEnd type="none" w="med" len="med"/>
+                      <a:tailEnd type="none" w="med" len="med"/>
+                    </a:lnR>
+                    <a:lnT w="6350" cap="flat" cmpd="sng" algn="ctr">
+                      <a:solidFill>
+                        <a:srgbClr val="D1E9F0"/>
+                      </a:solidFill>
+                      <a:prstDash val="solid"/>
+                      <a:round/>
+                      <a:headEnd type="none" w="med" len="med"/>
+                      <a:tailEnd type="none" w="med" len="med"/>
+                    </a:lnT>
+                    <a:lnB w="6350" cap="flat" cmpd="sng" algn="ctr">
+                      <a:solidFill>
+                        <a:srgbClr val="D1E9F0"/>
+                      </a:solidFill>
+                      <a:prstDash val="solid"/>
+                      <a:round/>
+                      <a:headEnd type="none" w="med" len="med"/>
+                      <a:tailEnd type="none" w="med" len="med"/>
+                    </a:lnB>
+                    <a:solidFill>
+                      <a:srgbClr val="FFFFFF"/>
+                    </a:solidFill>
+                  </a:tcPr>
+                </a:tc>
+                <a:tc>
+                  <a:txBody>
+                    <a:bodyPr/>
+                    <a:lstStyle/>
+                    <a:p>
+                      <a:pPr marL="0" indent="0" algn="l">
+                        <a:buNone/>
+                      </a:pPr>
+                      <a:r>
+                        <a:rPr lang="en-US" sz="1300" dirty="0">
+                          <a:solidFill>
+                            <a:srgbClr val="1B2A4A"/>
+                          </a:solidFill>
+                          <a:latin typeface="Calibri" pitchFamily="34" charset="0"/>
+                          <a:ea typeface="Calibri" pitchFamily="34" charset="-122"/>
+                          <a:cs typeface="Calibri" pitchFamily="34" charset="-120"/>
+                        </a:rPr>
+                        <a:t>(</a:t>
+                      </a:r>
+                      <a:r>
+                        <a:rPr lang="en-US" sz="1300" dirty="0" err="1">
+                          <a:solidFill>
+                            <a:srgbClr val="1B2A4A"/>
+                          </a:solidFill>
+                          <a:latin typeface="Calibri" pitchFamily="34" charset="0"/>
+                          <a:ea typeface="Calibri" pitchFamily="34" charset="-122"/>
+                          <a:cs typeface="Calibri" pitchFamily="34" charset="-120"/>
+                        </a:rPr>
+                        <a:t>migraciones</a:t>
+                      </a:r>
+                      <a:r>
+                        <a:rPr lang="en-US" sz="1300" dirty="0">
+                          <a:solidFill>
+                            <a:srgbClr val="1B2A4A"/>
+                          </a:solidFill>
+                          <a:latin typeface="Calibri" pitchFamily="34" charset="0"/>
+                          <a:ea typeface="Calibri" pitchFamily="34" charset="-122"/>
+                          <a:cs typeface="Calibri" pitchFamily="34" charset="-120"/>
+                        </a:rPr>
+                        <a:t> / P) x 1000</a:t>
+                      </a:r>
+                      <a:endParaRPr lang="en-US" sz="1300" dirty="0">
+                        <a:latin typeface="Calibri" charset="0"/>
+                        <a:ea typeface="Calibri" charset="0"/>
+                        <a:cs typeface="Calibri" charset="0"/>
+                      </a:endParaRPr>
+                    </a:p>
+                  </a:txBody>
+                  <a:tcPr marL="101600" marR="101600" marT="63500" marB="63500" anchor="ctr">
+                    <a:lnL w="6350" cap="flat" cmpd="sng" algn="ctr">
+                      <a:solidFill>
+                        <a:srgbClr val="D1E9F0"/>
+                      </a:solidFill>
+                      <a:prstDash val="solid"/>
+                      <a:round/>
+                      <a:headEnd type="none" w="med" len="med"/>
+                      <a:tailEnd type="none" w="med" len="med"/>
+                    </a:lnL>
+                    <a:lnR w="6350" cap="flat" cmpd="sng" algn="ctr">
+                      <a:solidFill>
+                        <a:srgbClr val="D1E9F0"/>
+                      </a:solidFill>
+                      <a:prstDash val="solid"/>
+                      <a:round/>
+                      <a:headEnd type="none" w="med" len="med"/>
+                      <a:tailEnd type="none" w="med" len="med"/>
+                    </a:lnR>
+                    <a:lnT w="6350" cap="flat" cmpd="sng" algn="ctr">
+                      <a:solidFill>
+                        <a:srgbClr val="D1E9F0"/>
+                      </a:solidFill>
+                      <a:prstDash val="solid"/>
+                      <a:round/>
+                      <a:headEnd type="none" w="med" len="med"/>
+                      <a:tailEnd type="none" w="med" len="med"/>
+                    </a:lnT>
+                    <a:lnB w="6350" cap="flat" cmpd="sng" algn="ctr">
+                      <a:solidFill>
+                        <a:srgbClr val="D1E9F0"/>
+                      </a:solidFill>
+                      <a:prstDash val="solid"/>
+                      <a:round/>
+                      <a:headEnd type="none" w="med" len="med"/>
+                      <a:tailEnd type="none" w="med" len="med"/>
+                    </a:lnB>
+                    <a:solidFill>
+                      <a:srgbClr val="FFFFFF"/>
+                    </a:solidFill>
+                  </a:tcPr>
+                </a:tc>
+                <a:tc>
+                  <a:txBody>
+                    <a:bodyPr/>
+                    <a:lstStyle/>
+                    <a:p>
+                      <a:pPr marL="0" indent="0" algn="l">
+                        <a:buNone/>
+                      </a:pPr>
+                      <a:r>
+                        <a:rPr lang="en-US" sz="1300" kern="1200" dirty="0" err="1">
+                          <a:solidFill>
+                            <a:srgbClr val="1B2A4A"/>
+                          </a:solidFill>
+                          <a:latin typeface="Calibri" pitchFamily="34" charset="0"/>
+                          <a:ea typeface="Calibri" charset="0"/>
+                          <a:cs typeface="Calibri" pitchFamily="34" charset="-120"/>
+                        </a:rPr>
+                        <a:t>Migraciones</a:t>
+                      </a:r>
+                      <a:r>
+                        <a:rPr lang="en-US" sz="1300" kern="1200" dirty="0">
+                          <a:solidFill>
+                            <a:srgbClr val="1B2A4A"/>
+                          </a:solidFill>
+                          <a:latin typeface="Calibri" pitchFamily="34" charset="0"/>
+                          <a:ea typeface="Calibri" charset="0"/>
+                          <a:cs typeface="Calibri" pitchFamily="34" charset="-120"/>
+                        </a:rPr>
+                        <a:t> </a:t>
+                      </a:r>
+                      <a:r>
+                        <a:rPr lang="en-US" sz="1300" kern="1200" dirty="0" err="1">
+                          <a:solidFill>
+                            <a:srgbClr val="1B2A4A"/>
+                          </a:solidFill>
+                          <a:latin typeface="Calibri" pitchFamily="34" charset="0"/>
+                          <a:ea typeface="Calibri" charset="0"/>
+                          <a:cs typeface="Calibri" pitchFamily="34" charset="-120"/>
+                        </a:rPr>
+                        <a:t>por</a:t>
+                      </a:r>
+                      <a:r>
+                        <a:rPr lang="en-US" sz="1300" kern="1200" dirty="0">
+                          <a:solidFill>
+                            <a:srgbClr val="1B2A4A"/>
+                          </a:solidFill>
+                          <a:latin typeface="Calibri" pitchFamily="34" charset="0"/>
+                          <a:ea typeface="Calibri" charset="0"/>
+                          <a:cs typeface="Calibri" pitchFamily="34" charset="-120"/>
+                        </a:rPr>
+                        <a:t> </a:t>
+                      </a:r>
+                      <a:r>
+                        <a:rPr lang="en-US" sz="1300" kern="1200" dirty="0" err="1">
+                          <a:solidFill>
+                            <a:srgbClr val="1B2A4A"/>
+                          </a:solidFill>
+                          <a:latin typeface="Calibri" pitchFamily="34" charset="0"/>
+                          <a:ea typeface="Calibri" charset="0"/>
+                          <a:cs typeface="Calibri" pitchFamily="34" charset="-120"/>
+                        </a:rPr>
+                        <a:t>cada</a:t>
+                      </a:r>
+                      <a:r>
+                        <a:rPr lang="en-US" sz="1300" kern="1200" dirty="0">
+                          <a:solidFill>
+                            <a:srgbClr val="1B2A4A"/>
+                          </a:solidFill>
+                          <a:latin typeface="Calibri" pitchFamily="34" charset="0"/>
+                          <a:ea typeface="Calibri" charset="0"/>
+                          <a:cs typeface="Calibri" pitchFamily="34" charset="-120"/>
+                        </a:rPr>
+                        <a:t> 1.000 hab.</a:t>
+                      </a:r>
+                    </a:p>
+                  </a:txBody>
+                  <a:tcPr marL="101600" marR="101600" marT="63500" marB="63500" anchor="ctr">
+                    <a:lnL w="6350" cap="flat" cmpd="sng" algn="ctr">
+                      <a:solidFill>
+                        <a:srgbClr val="D1E9F0"/>
+                      </a:solidFill>
+                      <a:prstDash val="solid"/>
+                      <a:round/>
+                      <a:headEnd type="none" w="med" len="med"/>
+                      <a:tailEnd type="none" w="med" len="med"/>
+                    </a:lnL>
+                    <a:lnR w="6350" cap="flat" cmpd="sng" algn="ctr">
+                      <a:solidFill>
+                        <a:srgbClr val="D1E9F0"/>
+                      </a:solidFill>
+                      <a:prstDash val="solid"/>
+                      <a:round/>
+                      <a:headEnd type="none" w="med" len="med"/>
+                      <a:tailEnd type="none" w="med" len="med"/>
+                    </a:lnR>
+                    <a:lnT w="6350" cap="flat" cmpd="sng" algn="ctr">
+                      <a:solidFill>
+                        <a:srgbClr val="D1E9F0"/>
+                      </a:solidFill>
+                      <a:prstDash val="solid"/>
+                      <a:round/>
+                      <a:headEnd type="none" w="med" len="med"/>
+                      <a:tailEnd type="none" w="med" len="med"/>
+                    </a:lnT>
+                    <a:lnB w="6350" cap="flat" cmpd="sng" algn="ctr">
+                      <a:solidFill>
+                        <a:srgbClr val="D1E9F0"/>
+                      </a:solidFill>
+                      <a:prstDash val="solid"/>
+                      <a:round/>
+                      <a:headEnd type="none" w="med" len="med"/>
+                      <a:tailEnd type="none" w="med" len="med"/>
+                    </a:lnB>
+                    <a:solidFill>
+                      <a:srgbClr val="FFFFFF"/>
+                    </a:solidFill>
+                  </a:tcPr>
+                </a:tc>
+                <a:extLst>
+                  <a:ext uri="{0D108BD9-81ED-4DB2-BD59-A6C34878D82A}">
+                    <a16:rowId xmlns:a16="http://schemas.microsoft.com/office/drawing/2014/main" val="3875183239"/>
+                  </a:ext>
+                </a:extLst>
+              </a:tr>
             </a:tbl>
           </a:graphicData>
         </a:graphic>
@@ -11001,7 +10688,13 @@
         <p:nvGraphicFramePr>
           <p:cNvPr id="4" name="Chart 0"/>
           <p:cNvGraphicFramePr/>
-          <p:nvPr/>
+          <p:nvPr>
+            <p:extLst>
+              <p:ext uri="{D42A27DB-BD31-4B8C-83A1-F6EECF244321}">
+                <p14:modId xmlns:p14="http://schemas.microsoft.com/office/powerpoint/2010/main" val="4097676869"/>
+              </p:ext>
+            </p:extLst>
+          </p:nvPr>
         </p:nvGraphicFramePr>
         <p:xfrm>
           <a:off x="365760" y="914400"/>
@@ -11387,6 +11080,165 @@
 </file>
 
 <file path=ppt/slides/slide5.xml><?xml version="1.0" encoding="utf-8"?>
+<p:sld xmlns:a="http://schemas.openxmlformats.org/drawingml/2006/main" xmlns:r="http://schemas.openxmlformats.org/officeDocument/2006/relationships" xmlns:p="http://schemas.openxmlformats.org/presentationml/2006/main">
+  <p:cSld name="Slide 6">
+    <p:bg>
+      <p:bgPr>
+        <a:solidFill>
+          <a:srgbClr val="FFFFFF"/>
+        </a:solidFill>
+        <a:effectLst/>
+      </p:bgPr>
+    </p:bg>
+    <p:spTree>
+      <p:nvGrpSpPr>
+        <p:cNvPr id="1" name=""/>
+        <p:cNvGrpSpPr/>
+        <p:nvPr/>
+      </p:nvGrpSpPr>
+      <p:grpSpPr>
+        <a:xfrm>
+          <a:off x="0" y="0"/>
+          <a:ext cx="0" cy="0"/>
+          <a:chOff x="0" y="0"/>
+          <a:chExt cx="0" cy="0"/>
+        </a:xfrm>
+      </p:grpSpPr>
+      <p:sp>
+        <p:nvSpPr>
+          <p:cNvPr id="2" name="Text 0"/>
+          <p:cNvSpPr/>
+          <p:nvPr/>
+        </p:nvSpPr>
+        <p:spPr>
+          <a:xfrm>
+            <a:off x="457200" y="164592"/>
+            <a:ext cx="8229600" cy="594360"/>
+          </a:xfrm>
+          <a:prstGeom prst="rect">
+            <a:avLst/>
+          </a:prstGeom>
+          <a:noFill/>
+          <a:ln/>
+        </p:spPr>
+        <p:txBody>
+          <a:bodyPr wrap="square" lIns="0" tIns="0" rIns="0" bIns="0" rtlCol="0" anchor="ctr"/>
+          <a:lstStyle/>
+          <a:p>
+            <a:pPr marL="0" indent="0" algn="l">
+              <a:buNone/>
+            </a:pPr>
+            <a:r>
+              <a:rPr lang="en-US" sz="2600" b="1" dirty="0">
+                <a:solidFill>
+                  <a:srgbClr val="1B2A4A"/>
+                </a:solidFill>
+                <a:latin typeface="Calibri" pitchFamily="34" charset="0"/>
+                <a:ea typeface="Calibri" pitchFamily="34" charset="-122"/>
+                <a:cs typeface="Calibri" pitchFamily="34" charset="-120"/>
+              </a:rPr>
+              <a:t>Crecimiento Vegetativo — Caída estructural</a:t>
+            </a:r>
+            <a:endParaRPr lang="en-US" sz="2600" dirty="0"/>
+          </a:p>
+        </p:txBody>
+      </p:sp>
+      <p:sp>
+        <p:nvSpPr>
+          <p:cNvPr id="3" name="Shape 1"/>
+          <p:cNvSpPr/>
+          <p:nvPr/>
+        </p:nvSpPr>
+        <p:spPr>
+          <a:xfrm>
+            <a:off x="457200" y="804672"/>
+            <a:ext cx="8229600" cy="18288"/>
+          </a:xfrm>
+          <a:prstGeom prst="rect">
+            <a:avLst/>
+          </a:prstGeom>
+          <a:solidFill>
+            <a:srgbClr val="1D7A8C"/>
+          </a:solidFill>
+          <a:ln w="12700">
+            <a:solidFill>
+              <a:srgbClr val="1D7A8C"/>
+            </a:solidFill>
+            <a:prstDash val="solid"/>
+          </a:ln>
+        </p:spPr>
+        <p:txBody>
+          <a:bodyPr/>
+          <a:lstStyle/>
+          <a:p>
+            <a:endParaRPr lang="es-AR"/>
+          </a:p>
+        </p:txBody>
+      </p:sp>
+      <p:graphicFrame>
+        <p:nvGraphicFramePr>
+          <p:cNvPr id="4" name="Chart 0"/>
+          <p:cNvGraphicFramePr/>
+          <p:nvPr/>
+        </p:nvGraphicFramePr>
+        <p:xfrm>
+          <a:off x="365760" y="914400"/>
+          <a:ext cx="8412480" cy="3657600"/>
+        </p:xfrm>
+        <a:graphic>
+          <a:graphicData uri="http://schemas.openxmlformats.org/drawingml/2006/chart">
+            <c:chart xmlns:c="http://schemas.openxmlformats.org/drawingml/2006/chart" xmlns:r="http://schemas.openxmlformats.org/officeDocument/2006/relationships" r:id="rId3"/>
+          </a:graphicData>
+        </a:graphic>
+      </p:graphicFrame>
+      <p:sp>
+        <p:nvSpPr>
+          <p:cNvPr id="5" name="Text 2"/>
+          <p:cNvSpPr/>
+          <p:nvPr/>
+        </p:nvSpPr>
+        <p:spPr>
+          <a:xfrm>
+            <a:off x="365760" y="4617720"/>
+            <a:ext cx="8412480" cy="320040"/>
+          </a:xfrm>
+          <a:prstGeom prst="rect">
+            <a:avLst/>
+          </a:prstGeom>
+          <a:noFill/>
+          <a:ln/>
+        </p:spPr>
+        <p:txBody>
+          <a:bodyPr wrap="square" lIns="0" tIns="0" rIns="0" bIns="0" rtlCol="0" anchor="ctr"/>
+          <a:lstStyle/>
+          <a:p>
+            <a:pPr marL="0" indent="0" algn="ctr">
+              <a:buNone/>
+            </a:pPr>
+            <a:r>
+              <a:rPr lang="en-US" sz="1100" i="1" dirty="0">
+                <a:solidFill>
+                  <a:srgbClr val="64748B"/>
+                </a:solidFill>
+                <a:latin typeface="Calibri" pitchFamily="34" charset="0"/>
+                <a:ea typeface="Calibri" pitchFamily="34" charset="-122"/>
+                <a:cs typeface="Calibri" pitchFamily="34" charset="-120"/>
+              </a:rPr>
+              <a:t>▼ 85% en 10 años  ·  COVID acelera pero no causa la caída</a:t>
+            </a:r>
+            <a:endParaRPr lang="en-US" sz="1100" dirty="0"/>
+          </a:p>
+        </p:txBody>
+      </p:sp>
+    </p:spTree>
+  </p:cSld>
+  <p:clrMapOvr>
+    <a:masterClrMapping/>
+  </p:clrMapOvr>
+</p:sld>
+</file>
+
+<file path=ppt/slides/slide6.xml><?xml version="1.0" encoding="utf-8"?>
 <p:sld xmlns:a="http://schemas.openxmlformats.org/drawingml/2006/main" xmlns:r="http://schemas.openxmlformats.org/officeDocument/2006/relationships" xmlns:p="http://schemas.openxmlformats.org/presentationml/2006/main">
   <p:cSld name="Slide 5">
     <p:bg>
@@ -11486,7 +11338,13 @@
         <p:nvGraphicFramePr>
           <p:cNvPr id="4" name="Chart 0"/>
           <p:cNvGraphicFramePr/>
-          <p:nvPr/>
+          <p:nvPr>
+            <p:extLst>
+              <p:ext uri="{D42A27DB-BD31-4B8C-83A1-F6EECF244321}">
+                <p14:modId xmlns:p14="http://schemas.microsoft.com/office/powerpoint/2010/main" val="2037931281"/>
+              </p:ext>
+            </p:extLst>
+          </p:nvPr>
         </p:nvGraphicFramePr>
         <p:xfrm>
           <a:off x="365760" y="914400"/>
@@ -11700,165 +11558,6 @@
                 <a:cs typeface="Calibri" pitchFamily="34" charset="-120"/>
               </a:rPr>
               <a:t>Argentina cruzó ese umbral en 2019 y lleva 7 años en sub-reemplazo, sin señales de reversión.</a:t>
-            </a:r>
-            <a:endParaRPr lang="en-US" sz="1100" dirty="0"/>
-          </a:p>
-        </p:txBody>
-      </p:sp>
-    </p:spTree>
-  </p:cSld>
-  <p:clrMapOvr>
-    <a:masterClrMapping/>
-  </p:clrMapOvr>
-</p:sld>
-</file>
-
-<file path=ppt/slides/slide6.xml><?xml version="1.0" encoding="utf-8"?>
-<p:sld xmlns:a="http://schemas.openxmlformats.org/drawingml/2006/main" xmlns:r="http://schemas.openxmlformats.org/officeDocument/2006/relationships" xmlns:p="http://schemas.openxmlformats.org/presentationml/2006/main">
-  <p:cSld name="Slide 6">
-    <p:bg>
-      <p:bgPr>
-        <a:solidFill>
-          <a:srgbClr val="FFFFFF"/>
-        </a:solidFill>
-        <a:effectLst/>
-      </p:bgPr>
-    </p:bg>
-    <p:spTree>
-      <p:nvGrpSpPr>
-        <p:cNvPr id="1" name=""/>
-        <p:cNvGrpSpPr/>
-        <p:nvPr/>
-      </p:nvGrpSpPr>
-      <p:grpSpPr>
-        <a:xfrm>
-          <a:off x="0" y="0"/>
-          <a:ext cx="0" cy="0"/>
-          <a:chOff x="0" y="0"/>
-          <a:chExt cx="0" cy="0"/>
-        </a:xfrm>
-      </p:grpSpPr>
-      <p:sp>
-        <p:nvSpPr>
-          <p:cNvPr id="2" name="Text 0"/>
-          <p:cNvSpPr/>
-          <p:nvPr/>
-        </p:nvSpPr>
-        <p:spPr>
-          <a:xfrm>
-            <a:off x="457200" y="164592"/>
-            <a:ext cx="8229600" cy="594360"/>
-          </a:xfrm>
-          <a:prstGeom prst="rect">
-            <a:avLst/>
-          </a:prstGeom>
-          <a:noFill/>
-          <a:ln/>
-        </p:spPr>
-        <p:txBody>
-          <a:bodyPr wrap="square" lIns="0" tIns="0" rIns="0" bIns="0" rtlCol="0" anchor="ctr"/>
-          <a:lstStyle/>
-          <a:p>
-            <a:pPr marL="0" indent="0" algn="l">
-              <a:buNone/>
-            </a:pPr>
-            <a:r>
-              <a:rPr lang="en-US" sz="2600" b="1" dirty="0">
-                <a:solidFill>
-                  <a:srgbClr val="1B2A4A"/>
-                </a:solidFill>
-                <a:latin typeface="Calibri" pitchFamily="34" charset="0"/>
-                <a:ea typeface="Calibri" pitchFamily="34" charset="-122"/>
-                <a:cs typeface="Calibri" pitchFamily="34" charset="-120"/>
-              </a:rPr>
-              <a:t>Crecimiento Vegetativo — Caída estructural</a:t>
-            </a:r>
-            <a:endParaRPr lang="en-US" sz="2600" dirty="0"/>
-          </a:p>
-        </p:txBody>
-      </p:sp>
-      <p:sp>
-        <p:nvSpPr>
-          <p:cNvPr id="3" name="Shape 1"/>
-          <p:cNvSpPr/>
-          <p:nvPr/>
-        </p:nvSpPr>
-        <p:spPr>
-          <a:xfrm>
-            <a:off x="457200" y="804672"/>
-            <a:ext cx="8229600" cy="18288"/>
-          </a:xfrm>
-          <a:prstGeom prst="rect">
-            <a:avLst/>
-          </a:prstGeom>
-          <a:solidFill>
-            <a:srgbClr val="1D7A8C"/>
-          </a:solidFill>
-          <a:ln w="12700">
-            <a:solidFill>
-              <a:srgbClr val="1D7A8C"/>
-            </a:solidFill>
-            <a:prstDash val="solid"/>
-          </a:ln>
-        </p:spPr>
-        <p:txBody>
-          <a:bodyPr/>
-          <a:lstStyle/>
-          <a:p>
-            <a:endParaRPr lang="es-AR"/>
-          </a:p>
-        </p:txBody>
-      </p:sp>
-      <p:graphicFrame>
-        <p:nvGraphicFramePr>
-          <p:cNvPr id="4" name="Chart 0"/>
-          <p:cNvGraphicFramePr/>
-          <p:nvPr/>
-        </p:nvGraphicFramePr>
-        <p:xfrm>
-          <a:off x="365760" y="914400"/>
-          <a:ext cx="8412480" cy="3657600"/>
-        </p:xfrm>
-        <a:graphic>
-          <a:graphicData uri="http://schemas.openxmlformats.org/drawingml/2006/chart">
-            <c:chart xmlns:c="http://schemas.openxmlformats.org/drawingml/2006/chart" xmlns:r="http://schemas.openxmlformats.org/officeDocument/2006/relationships" r:id="rId3"/>
-          </a:graphicData>
-        </a:graphic>
-      </p:graphicFrame>
-      <p:sp>
-        <p:nvSpPr>
-          <p:cNvPr id="5" name="Text 2"/>
-          <p:cNvSpPr/>
-          <p:nvPr/>
-        </p:nvSpPr>
-        <p:spPr>
-          <a:xfrm>
-            <a:off x="365760" y="4617720"/>
-            <a:ext cx="8412480" cy="320040"/>
-          </a:xfrm>
-          <a:prstGeom prst="rect">
-            <a:avLst/>
-          </a:prstGeom>
-          <a:noFill/>
-          <a:ln/>
-        </p:spPr>
-        <p:txBody>
-          <a:bodyPr wrap="square" lIns="0" tIns="0" rIns="0" bIns="0" rtlCol="0" anchor="ctr"/>
-          <a:lstStyle/>
-          <a:p>
-            <a:pPr marL="0" indent="0" algn="ctr">
-              <a:buNone/>
-            </a:pPr>
-            <a:r>
-              <a:rPr lang="en-US" sz="1100" i="1" dirty="0">
-                <a:solidFill>
-                  <a:srgbClr val="64748B"/>
-                </a:solidFill>
-                <a:latin typeface="Calibri" pitchFamily="34" charset="0"/>
-                <a:ea typeface="Calibri" pitchFamily="34" charset="-122"/>
-                <a:cs typeface="Calibri" pitchFamily="34" charset="-120"/>
-              </a:rPr>
-              <a:t>▼ 85% en 10 años  ·  COVID acelera pero no causa la caída</a:t>
             </a:r>
             <a:endParaRPr lang="en-US" sz="1100" dirty="0"/>
           </a:p>

--- a/UDE_Argentina_2050.pptx
+++ b/UDE_Argentina_2050.pptx
@@ -5,7 +5,7 @@
     <p:sldMasterId id="2147483648" r:id="rId1"/>
   </p:sldMasterIdLst>
   <p:notesMasterIdLst>
-    <p:notesMasterId r:id="rId15"/>
+    <p:notesMasterId r:id="rId16"/>
   </p:notesMasterIdLst>
   <p:sldIdLst>
     <p:sldId id="256" r:id="rId2"/>
@@ -19,8 +19,9 @@
     <p:sldId id="263" r:id="rId10"/>
     <p:sldId id="269" r:id="rId11"/>
     <p:sldId id="270" r:id="rId12"/>
-    <p:sldId id="266" r:id="rId13"/>
-    <p:sldId id="267" r:id="rId14"/>
+    <p:sldId id="271" r:id="rId13"/>
+    <p:sldId id="266" r:id="rId14"/>
+    <p:sldId id="267" r:id="rId15"/>
   </p:sldIdLst>
   <p:sldSz cx="9144000" cy="5143500" type="screen16x9"/>
   <p:notesSz cx="5143500" cy="9144000"/>
@@ -146,7 +147,7 @@
               </a:defRPr>
             </a:pPr>
             <a:r>
-              <a:rPr lang="es-AR" sz="1100" b="0" i="0" u="none" strike="noStrike">
+              <a:rPr lang="es-AR" sz="1100" b="0" i="0" u="none" strike="noStrike" noProof="0" dirty="0">
                 <a:solidFill>
                   <a:srgbClr val="64748B"/>
                 </a:solidFill>
@@ -597,7 +598,7 @@
               </a:defRPr>
             </a:pPr>
             <a:r>
-              <a:rPr lang="es-AR" sz="1100" b="0" i="0" u="none" strike="noStrike">
+              <a:rPr lang="es-AR" sz="1100" b="0" i="0" u="none" strike="noStrike" noProof="0" dirty="0">
                 <a:solidFill>
                   <a:srgbClr val="64748B"/>
                 </a:solidFill>
@@ -919,7 +920,7 @@
               </a:defRPr>
             </a:pPr>
             <a:r>
-              <a:rPr lang="es-AR" sz="1100" b="0" i="0" u="none" strike="noStrike">
+              <a:rPr lang="es-AR" sz="1100" b="0" i="0" u="none" strike="noStrike" noProof="0" dirty="0">
                 <a:solidFill>
                   <a:srgbClr val="64748B"/>
                 </a:solidFill>
@@ -1370,7 +1371,7 @@
               </a:defRPr>
             </a:pPr>
             <a:r>
-              <a:rPr lang="es-AR" sz="1100" b="0" i="0" u="none" strike="noStrike">
+              <a:rPr lang="es-AR" sz="1100" b="0" i="0" u="none" strike="noStrike" noProof="0" dirty="0">
                 <a:solidFill>
                   <a:srgbClr val="64748B"/>
                 </a:solidFill>
@@ -1675,7 +1676,7 @@
               </a:defRPr>
             </a:pPr>
             <a:r>
-              <a:rPr lang="es-AR" sz="1100" b="0" i="0" u="none" strike="noStrike">
+              <a:rPr lang="es-AR" sz="1100" b="0" i="0" u="none" strike="noStrike" noProof="0" dirty="0">
                 <a:solidFill>
                   <a:srgbClr val="A8C8D8"/>
                 </a:solidFill>
@@ -1777,19 +1778,19 @@
                   <c:v>48</c:v>
                 </c:pt>
                 <c:pt idx="2">
-                  <c:v>51</c:v>
+                  <c:v>50.7</c:v>
                 </c:pt>
                 <c:pt idx="3">
-                  <c:v>54</c:v>
+                  <c:v>53.1</c:v>
                 </c:pt>
                 <c:pt idx="4">
-                  <c:v>56.5</c:v>
+                  <c:v>55.1</c:v>
                 </c:pt>
                 <c:pt idx="5">
-                  <c:v>59</c:v>
+                  <c:v>56.1</c:v>
                 </c:pt>
                 <c:pt idx="6">
-                  <c:v>61.3</c:v>
+                  <c:v>57</c:v>
                 </c:pt>
               </c:numCache>
             </c:numRef>
@@ -1881,22 +1882,22 @@
                   <c:v>46.2</c:v>
                 </c:pt>
                 <c:pt idx="1">
-                  <c:v>47.5</c:v>
+                  <c:v>47.7</c:v>
                 </c:pt>
                 <c:pt idx="2">
-                  <c:v>49.8</c:v>
+                  <c:v>49.6</c:v>
                 </c:pt>
                 <c:pt idx="3">
-                  <c:v>52.4</c:v>
+                  <c:v>51</c:v>
                 </c:pt>
                 <c:pt idx="4">
-                  <c:v>54.8</c:v>
+                  <c:v>51.7</c:v>
                 </c:pt>
                 <c:pt idx="5">
-                  <c:v>57.2</c:v>
+                  <c:v>52</c:v>
                 </c:pt>
                 <c:pt idx="6">
-                  <c:v>59.4</c:v>
+                  <c:v>52.1</c:v>
                 </c:pt>
               </c:numCache>
             </c:numRef>
@@ -1988,22 +1989,22 @@
                   <c:v>46.2</c:v>
                 </c:pt>
                 <c:pt idx="1">
-                  <c:v>46.8</c:v>
+                  <c:v>47.3</c:v>
                 </c:pt>
                 <c:pt idx="2">
                   <c:v>48.2</c:v>
                 </c:pt>
                 <c:pt idx="3">
-                  <c:v>49.9</c:v>
+                  <c:v>48.8</c:v>
                 </c:pt>
                 <c:pt idx="4">
-                  <c:v>51.5</c:v>
+                  <c:v>49.1</c:v>
                 </c:pt>
                 <c:pt idx="5">
-                  <c:v>53.2</c:v>
+                  <c:v>49.3</c:v>
                 </c:pt>
                 <c:pt idx="6">
-                  <c:v>54.7</c:v>
+                  <c:v>49.4</c:v>
                 </c:pt>
               </c:numCache>
             </c:numRef>
@@ -2760,7 +2761,7 @@
           <a:p>
             <a:fld id="{F7021451-1387-4CA6-816F-3879F97B5CBC}" type="slidenum">
               <a:rPr lang="en-US"/>
-              <a:t>12</a:t>
+              <a:t>13</a:t>
             </a:fld>
             <a:endParaRPr lang="en-US"/>
           </a:p>
@@ -2886,7 +2887,7 @@
           <a:p>
             <a:fld id="{F7021451-1387-4CA6-816F-3879F97B5CBC}" type="slidenum">
               <a:rPr lang="en-US"/>
-              <a:t>13</a:t>
+              <a:t>14</a:t>
             </a:fld>
             <a:endParaRPr lang="en-US"/>
           </a:p>
@@ -4087,7 +4088,7 @@
           <a:bodyPr/>
           <a:lstStyle/>
           <a:p>
-            <a:endParaRPr lang="es-AR"/>
+            <a:endParaRPr lang="es-AR" noProof="0" dirty="0"/>
           </a:p>
         </p:txBody>
       </p:sp>
@@ -4116,7 +4117,7 @@
               <a:buNone/>
             </a:pPr>
             <a:r>
-              <a:rPr lang="en-US" sz="3600" b="1" dirty="0">
+              <a:rPr lang="es-AR" sz="3600" b="1" noProof="0" dirty="0">
                 <a:solidFill>
                   <a:srgbClr val="FFFFFF"/>
                 </a:solidFill>
@@ -4126,7 +4127,7 @@
               </a:rPr>
               <a:t>Dinámica Poblacional Argentina</a:t>
             </a:r>
-            <a:endParaRPr lang="en-US" sz="3600" dirty="0"/>
+            <a:endParaRPr lang="es-AR" sz="3600" noProof="0" dirty="0"/>
           </a:p>
         </p:txBody>
       </p:sp>
@@ -4155,7 +4156,7 @@
               <a:buNone/>
             </a:pPr>
             <a:r>
-              <a:rPr lang="en-US" sz="3600" b="1" dirty="0">
+              <a:rPr lang="es-AR" sz="3600" b="1" noProof="0" dirty="0">
                 <a:solidFill>
                   <a:srgbClr val="2AA8BF"/>
                 </a:solidFill>
@@ -4165,7 +4166,7 @@
               </a:rPr>
               <a:t>al 2050</a:t>
             </a:r>
-            <a:endParaRPr lang="en-US" sz="3600" dirty="0"/>
+            <a:endParaRPr lang="es-AR" sz="3600" noProof="0" dirty="0"/>
           </a:p>
         </p:txBody>
       </p:sp>
@@ -4194,7 +4195,7 @@
               <a:buNone/>
             </a:pPr>
             <a:r>
-              <a:rPr lang="en-US" sz="1600" dirty="0">
+              <a:rPr lang="es-AR" sz="1600" noProof="0" dirty="0">
                 <a:solidFill>
                   <a:srgbClr val="A8C8D8"/>
                 </a:solidFill>
@@ -4204,7 +4205,7 @@
               </a:rPr>
               <a:t>Predicción con Ecuaciones Diferenciales Universales (UDE)</a:t>
             </a:r>
-            <a:endParaRPr lang="en-US" sz="1600" dirty="0"/>
+            <a:endParaRPr lang="es-AR" sz="1600" noProof="0" dirty="0"/>
           </a:p>
         </p:txBody>
       </p:sp>
@@ -4236,7 +4237,7 @@
           <a:bodyPr/>
           <a:lstStyle/>
           <a:p>
-            <a:endParaRPr lang="es-AR"/>
+            <a:endParaRPr lang="es-AR" noProof="0" dirty="0"/>
           </a:p>
         </p:txBody>
       </p:sp>
@@ -4265,7 +4266,7 @@
               <a:buNone/>
             </a:pPr>
             <a:r>
-              <a:rPr lang="en-US" sz="1400" b="1" dirty="0">
+              <a:rPr lang="es-AR" sz="1400" b="1" noProof="0" dirty="0">
                 <a:solidFill>
                   <a:srgbClr val="FFFFFF"/>
                 </a:solidFill>
@@ -4275,7 +4276,7 @@
               </a:rPr>
               <a:t>Gangui Matías</a:t>
             </a:r>
-            <a:endParaRPr lang="en-US" sz="1400" dirty="0"/>
+            <a:endParaRPr lang="es-AR" sz="1400" noProof="0" dirty="0"/>
           </a:p>
         </p:txBody>
       </p:sp>
@@ -4304,7 +4305,7 @@
               <a:buNone/>
             </a:pPr>
             <a:r>
-              <a:rPr lang="en-US" sz="1100" dirty="0">
+              <a:rPr lang="es-AR" sz="1100" noProof="0" dirty="0">
                 <a:solidFill>
                   <a:srgbClr val="A8C8D8"/>
                 </a:solidFill>
@@ -4314,7 +4315,7 @@
               </a:rPr>
               <a:t>Trabajo Práctico · Dinámicas poblacionales y escenarios al 2050</a:t>
             </a:r>
-            <a:endParaRPr lang="en-US" sz="1100" dirty="0"/>
+            <a:endParaRPr lang="es-AR" sz="1100" noProof="0" dirty="0"/>
           </a:p>
         </p:txBody>
       </p:sp>
@@ -4388,7 +4389,7 @@
               <a:buNone/>
             </a:pPr>
             <a:r>
-              <a:rPr lang="en-US" sz="2600" b="1" dirty="0">
+              <a:rPr lang="es-AR" sz="2600" b="1" noProof="0" dirty="0">
                 <a:solidFill>
                   <a:srgbClr val="1B2A4A"/>
                 </a:solidFill>
@@ -4398,7 +4399,7 @@
               </a:rPr>
               <a:t>Función de Costo — MSE</a:t>
             </a:r>
-            <a:endParaRPr lang="en-US" sz="2600" dirty="0"/>
+            <a:endParaRPr lang="es-AR" sz="2600" noProof="0" dirty="0"/>
           </a:p>
         </p:txBody>
       </p:sp>
@@ -4436,7 +4437,7 @@
           <a:bodyPr/>
           <a:lstStyle/>
           <a:p>
-            <a:endParaRPr lang="es-AR"/>
+            <a:endParaRPr lang="es-AR" noProof="0" dirty="0"/>
           </a:p>
         </p:txBody>
       </p:sp>
@@ -4483,7 +4484,7 @@
           <a:bodyPr/>
           <a:lstStyle/>
           <a:p>
-            <a:endParaRPr lang="es-AR"/>
+            <a:endParaRPr lang="es-AR" noProof="0" dirty="0"/>
           </a:p>
         </p:txBody>
       </p:sp>
@@ -4518,7 +4519,7 @@
               <a:buNone/>
             </a:pPr>
             <a:r>
-              <a:rPr lang="en-US" sz="2000" b="1" dirty="0">
+              <a:rPr lang="es-AR" sz="2000" b="1" noProof="0" dirty="0">
                 <a:solidFill>
                   <a:srgbClr val="1B2A4A"/>
                 </a:solidFill>
@@ -4526,9 +4527,31 @@
                 <a:ea typeface="Courier New" pitchFamily="34" charset="-122"/>
                 <a:cs typeface="Courier New" pitchFamily="34" charset="-120"/>
               </a:rPr>
-              <a:t>ℒ(θ) = (1/N) · Σᵢ ( Yobs(tᵢ) − Ŷ(tᵢ ; θ) )²</a:t>
-            </a:r>
-            <a:endParaRPr lang="en-US" sz="2000" dirty="0"/>
+              <a:t>ℒ(θ) = (1/N) · Σᵢ ( </a:t>
+            </a:r>
+            <a:r>
+              <a:rPr lang="es-AR" sz="2000" b="1" noProof="0" dirty="0" err="1">
+                <a:solidFill>
+                  <a:srgbClr val="1B2A4A"/>
+                </a:solidFill>
+                <a:latin typeface="Courier New" pitchFamily="34" charset="0"/>
+                <a:ea typeface="Courier New" pitchFamily="34" charset="-122"/>
+                <a:cs typeface="Courier New" pitchFamily="34" charset="-120"/>
+              </a:rPr>
+              <a:t>Yobs</a:t>
+            </a:r>
+            <a:r>
+              <a:rPr lang="es-AR" sz="2000" b="1" noProof="0" dirty="0">
+                <a:solidFill>
+                  <a:srgbClr val="1B2A4A"/>
+                </a:solidFill>
+                <a:latin typeface="Courier New" pitchFamily="34" charset="0"/>
+                <a:ea typeface="Courier New" pitchFamily="34" charset="-122"/>
+                <a:cs typeface="Courier New" pitchFamily="34" charset="-120"/>
+              </a:rPr>
+              <a:t>(tᵢ) − Ŷ(tᵢ ; θ) )²</a:t>
+            </a:r>
+            <a:endParaRPr lang="es-AR" sz="2000" noProof="0" dirty="0"/>
           </a:p>
         </p:txBody>
       </p:sp>
@@ -4575,7 +4598,7 @@
           <a:bodyPr/>
           <a:lstStyle/>
           <a:p>
-            <a:endParaRPr lang="es-AR"/>
+            <a:endParaRPr lang="es-AR" noProof="0" dirty="0"/>
           </a:p>
         </p:txBody>
       </p:sp>
@@ -4610,7 +4633,7 @@
               <a:buNone/>
             </a:pPr>
             <a:r>
-              <a:rPr lang="en-US" sz="1800" b="1" dirty="0">
+              <a:rPr lang="es-AR" sz="1800" b="1" noProof="0" dirty="0">
                 <a:solidFill>
                   <a:srgbClr val="7B2D8B"/>
                 </a:solidFill>
@@ -4620,7 +4643,7 @@
               </a:rPr>
               <a:t>θ</a:t>
             </a:r>
-            <a:endParaRPr lang="en-US" sz="1800" dirty="0"/>
+            <a:endParaRPr lang="es-AR" sz="1800" noProof="0" dirty="0"/>
           </a:p>
         </p:txBody>
       </p:sp>
@@ -4655,7 +4678,7 @@
               <a:buNone/>
             </a:pPr>
             <a:r>
-              <a:rPr lang="en-US" sz="1300" b="1" dirty="0">
+              <a:rPr lang="es-AR" sz="1300" b="1" noProof="0" dirty="0">
                 <a:solidFill>
                   <a:srgbClr val="1B2A4A"/>
                 </a:solidFill>
@@ -4665,7 +4688,7 @@
               </a:rPr>
               <a:t>Parámetros del modelo</a:t>
             </a:r>
-            <a:endParaRPr lang="en-US" sz="1300" dirty="0"/>
+            <a:endParaRPr lang="es-AR" sz="1300" noProof="0" dirty="0"/>
           </a:p>
         </p:txBody>
       </p:sp>
@@ -4700,7 +4723,7 @@
               <a:buNone/>
             </a:pPr>
             <a:r>
-              <a:rPr lang="en-US" sz="1100" dirty="0">
+              <a:rPr lang="es-AR" sz="1100" noProof="0" dirty="0">
                 <a:solidFill>
                   <a:srgbClr val="64748B"/>
                 </a:solidFill>
@@ -4716,7 +4739,7 @@
               <a:buNone/>
             </a:pPr>
             <a:r>
-              <a:rPr lang="en-US" sz="1100" dirty="0">
+              <a:rPr lang="es-AR" sz="1100" noProof="0" dirty="0">
                 <a:solidFill>
                   <a:srgbClr val="64748B"/>
                 </a:solidFill>
@@ -4731,7 +4754,7 @@
               <a:buNone/>
             </a:pPr>
             <a:r>
-              <a:rPr lang="en-US" sz="1100" dirty="0">
+              <a:rPr lang="es-AR" sz="1100" noProof="0" dirty="0">
                 <a:solidFill>
                   <a:srgbClr val="64748B"/>
                 </a:solidFill>
@@ -4740,7 +4763,7 @@
               </a:rPr>
               <a:t>Tasa de Migración</a:t>
             </a:r>
-            <a:endParaRPr lang="en-US" sz="1100" dirty="0"/>
+            <a:endParaRPr lang="es-AR" sz="1100" noProof="0" dirty="0"/>
           </a:p>
         </p:txBody>
       </p:sp>
@@ -4787,7 +4810,7 @@
           <a:bodyPr/>
           <a:lstStyle/>
           <a:p>
-            <a:endParaRPr lang="es-AR"/>
+            <a:endParaRPr lang="es-AR" noProof="0" dirty="0"/>
           </a:p>
         </p:txBody>
       </p:sp>
@@ -4822,7 +4845,7 @@
               <a:buNone/>
             </a:pPr>
             <a:r>
-              <a:rPr lang="en-US" sz="1800" b="1" dirty="0">
+              <a:rPr lang="es-AR" sz="1800" b="1" noProof="0" dirty="0">
                 <a:solidFill>
                   <a:srgbClr val="1D7A8C"/>
                 </a:solidFill>
@@ -4832,7 +4855,7 @@
               </a:rPr>
               <a:t>N</a:t>
             </a:r>
-            <a:endParaRPr lang="en-US" sz="1800" dirty="0"/>
+            <a:endParaRPr lang="es-AR" sz="1800" noProof="0" dirty="0"/>
           </a:p>
         </p:txBody>
       </p:sp>
@@ -4867,7 +4890,7 @@
               <a:buNone/>
             </a:pPr>
             <a:r>
-              <a:rPr lang="en-US" sz="1300" b="1" dirty="0">
+              <a:rPr lang="es-AR" sz="1300" b="1" noProof="0" dirty="0">
                 <a:solidFill>
                   <a:srgbClr val="1B2A4A"/>
                 </a:solidFill>
@@ -4877,7 +4900,7 @@
               </a:rPr>
               <a:t>Número de observaciones</a:t>
             </a:r>
-            <a:endParaRPr lang="en-US" sz="1300" dirty="0"/>
+            <a:endParaRPr lang="es-AR" sz="1300" noProof="0" dirty="0"/>
           </a:p>
         </p:txBody>
       </p:sp>
@@ -4912,7 +4935,7 @@
               <a:buNone/>
             </a:pPr>
             <a:r>
-              <a:rPr lang="en-US" sz="1100" dirty="0">
+              <a:rPr lang="es-AR" sz="1100" noProof="0" dirty="0">
                 <a:solidFill>
                   <a:srgbClr val="64748B"/>
                 </a:solidFill>
@@ -4922,7 +4945,7 @@
               </a:rPr>
               <a:t>11 años (2012 – 2022)</a:t>
             </a:r>
-            <a:endParaRPr lang="en-US" sz="1100" dirty="0"/>
+            <a:endParaRPr lang="es-AR" sz="1100" noProof="0" dirty="0"/>
           </a:p>
         </p:txBody>
       </p:sp>
@@ -4969,7 +4992,7 @@
           <a:bodyPr/>
           <a:lstStyle/>
           <a:p>
-            <a:endParaRPr lang="es-AR"/>
+            <a:endParaRPr lang="es-AR" noProof="0" dirty="0"/>
           </a:p>
         </p:txBody>
       </p:sp>
@@ -5004,7 +5027,7 @@
               <a:buNone/>
             </a:pPr>
             <a:r>
-              <a:rPr lang="en-US" sz="1800" b="1" dirty="0">
+              <a:rPr lang="es-AR" sz="1800" b="1" noProof="0" dirty="0" err="1">
                 <a:solidFill>
                   <a:srgbClr val="D95F3B"/>
                 </a:solidFill>
@@ -5012,9 +5035,20 @@
                 <a:ea typeface="Courier New" pitchFamily="34" charset="-122"/>
                 <a:cs typeface="Courier New" pitchFamily="34" charset="-120"/>
               </a:rPr>
-              <a:t>Yobs(tᵢ)</a:t>
-            </a:r>
-            <a:endParaRPr lang="en-US" sz="1800" dirty="0"/>
+              <a:t>Yobs</a:t>
+            </a:r>
+            <a:r>
+              <a:rPr lang="es-AR" sz="1800" b="1" noProof="0" dirty="0">
+                <a:solidFill>
+                  <a:srgbClr val="D95F3B"/>
+                </a:solidFill>
+                <a:latin typeface="Courier New" pitchFamily="34" charset="0"/>
+                <a:ea typeface="Courier New" pitchFamily="34" charset="-122"/>
+                <a:cs typeface="Courier New" pitchFamily="34" charset="-120"/>
+              </a:rPr>
+              <a:t>(tᵢ)</a:t>
+            </a:r>
+            <a:endParaRPr lang="es-AR" sz="1800" noProof="0" dirty="0"/>
           </a:p>
         </p:txBody>
       </p:sp>
@@ -5049,7 +5083,7 @@
               <a:buNone/>
             </a:pPr>
             <a:r>
-              <a:rPr lang="en-US" sz="1300" b="1" dirty="0">
+              <a:rPr lang="es-AR" sz="1300" b="1" noProof="0" dirty="0">
                 <a:solidFill>
                   <a:srgbClr val="1B2A4A"/>
                 </a:solidFill>
@@ -5059,7 +5093,7 @@
               </a:rPr>
               <a:t>Dato real observado</a:t>
             </a:r>
-            <a:endParaRPr lang="en-US" sz="1300" dirty="0"/>
+            <a:endParaRPr lang="es-AR" sz="1300" noProof="0" dirty="0"/>
           </a:p>
         </p:txBody>
       </p:sp>
@@ -5094,7 +5128,7 @@
               <a:buNone/>
             </a:pPr>
             <a:r>
-              <a:rPr lang="en-US" sz="1100" dirty="0">
+              <a:rPr lang="es-AR" sz="1100" noProof="0" dirty="0">
                 <a:solidFill>
                   <a:srgbClr val="64748B"/>
                 </a:solidFill>
@@ -5104,7 +5138,7 @@
               </a:rPr>
               <a:t>Población INDEC normalizada</a:t>
             </a:r>
-            <a:endParaRPr lang="en-US" sz="1100" dirty="0"/>
+            <a:endParaRPr lang="es-AR" sz="1100" noProof="0" dirty="0"/>
           </a:p>
         </p:txBody>
       </p:sp>
@@ -5151,7 +5185,7 @@
           <a:bodyPr/>
           <a:lstStyle/>
           <a:p>
-            <a:endParaRPr lang="es-AR"/>
+            <a:endParaRPr lang="es-AR" noProof="0" dirty="0"/>
           </a:p>
         </p:txBody>
       </p:sp>
@@ -5186,7 +5220,7 @@
               <a:buNone/>
             </a:pPr>
             <a:r>
-              <a:rPr lang="en-US" sz="1800" b="1" dirty="0">
+              <a:rPr lang="es-AR" sz="1800" b="1" noProof="0" dirty="0">
                 <a:solidFill>
                   <a:srgbClr val="2E8B57"/>
                 </a:solidFill>
@@ -5196,7 +5230,7 @@
               </a:rPr>
               <a:t>Ŷ(tᵢ; θ)</a:t>
             </a:r>
-            <a:endParaRPr lang="en-US" sz="1800" dirty="0"/>
+            <a:endParaRPr lang="es-AR" sz="1800" noProof="0" dirty="0"/>
           </a:p>
         </p:txBody>
       </p:sp>
@@ -5231,7 +5265,7 @@
               <a:buNone/>
             </a:pPr>
             <a:r>
-              <a:rPr lang="en-US" sz="1300" b="1" dirty="0">
+              <a:rPr lang="es-AR" sz="1300" b="1" noProof="0" dirty="0">
                 <a:solidFill>
                   <a:srgbClr val="1B2A4A"/>
                 </a:solidFill>
@@ -5241,7 +5275,7 @@
               </a:rPr>
               <a:t>Predicción del modelo</a:t>
             </a:r>
-            <a:endParaRPr lang="en-US" sz="1300" dirty="0"/>
+            <a:endParaRPr lang="es-AR" sz="1300" noProof="0" dirty="0"/>
           </a:p>
         </p:txBody>
       </p:sp>
@@ -5276,7 +5310,7 @@
               <a:buNone/>
             </a:pPr>
             <a:r>
-              <a:rPr lang="en-US" sz="1100" dirty="0">
+              <a:rPr lang="es-AR" sz="1100" noProof="0" dirty="0">
                 <a:solidFill>
                   <a:srgbClr val="64748B"/>
                 </a:solidFill>
@@ -5284,9 +5318,31 @@
                 <a:ea typeface="Calibri" pitchFamily="34" charset="-122"/>
                 <a:cs typeface="Calibri" pitchFamily="34" charset="-120"/>
               </a:rPr>
-              <a:t>Salida del solver ODE</a:t>
-            </a:r>
-            <a:endParaRPr lang="en-US" sz="1100" dirty="0"/>
+              <a:t>Salida del </a:t>
+            </a:r>
+            <a:r>
+              <a:rPr lang="es-AR" sz="1100" noProof="0" dirty="0" err="1">
+                <a:solidFill>
+                  <a:srgbClr val="64748B"/>
+                </a:solidFill>
+                <a:latin typeface="Calibri" pitchFamily="34" charset="0"/>
+                <a:ea typeface="Calibri" pitchFamily="34" charset="-122"/>
+                <a:cs typeface="Calibri" pitchFamily="34" charset="-120"/>
+              </a:rPr>
+              <a:t>solver</a:t>
+            </a:r>
+            <a:r>
+              <a:rPr lang="es-AR" sz="1100" noProof="0" dirty="0">
+                <a:solidFill>
+                  <a:srgbClr val="64748B"/>
+                </a:solidFill>
+                <a:latin typeface="Calibri" pitchFamily="34" charset="0"/>
+                <a:ea typeface="Calibri" pitchFamily="34" charset="-122"/>
+                <a:cs typeface="Calibri" pitchFamily="34" charset="-120"/>
+              </a:rPr>
+              <a:t> ODE</a:t>
+            </a:r>
+            <a:endParaRPr lang="es-AR" sz="1100" noProof="0" dirty="0"/>
           </a:p>
         </p:txBody>
       </p:sp>
@@ -5351,7 +5407,7 @@
               <a:buNone/>
             </a:pPr>
             <a:r>
-              <a:rPr lang="en-US" sz="2600" b="1" dirty="0">
+              <a:rPr lang="es-AR" sz="2600" b="1" noProof="0" dirty="0">
                 <a:solidFill>
                   <a:srgbClr val="1B2A4A"/>
                 </a:solidFill>
@@ -5361,7 +5417,7 @@
               </a:rPr>
               <a:t>Resultados — ODE Clásica vs. UDE Entrenada</a:t>
             </a:r>
-            <a:endParaRPr lang="en-US" sz="2600" dirty="0"/>
+            <a:endParaRPr lang="es-AR" sz="2600" noProof="0" dirty="0"/>
           </a:p>
         </p:txBody>
       </p:sp>
@@ -5399,7 +5455,7 @@
           <a:bodyPr/>
           <a:lstStyle/>
           <a:p>
-            <a:endParaRPr lang="es-AR"/>
+            <a:endParaRPr lang="es-AR" noProof="0" dirty="0"/>
           </a:p>
         </p:txBody>
       </p:sp>
@@ -5476,7 +5532,7 @@
           <a:bodyPr/>
           <a:lstStyle/>
           <a:p>
-            <a:endParaRPr lang="es-AR"/>
+            <a:endParaRPr lang="es-AR" noProof="0" dirty="0"/>
           </a:p>
         </p:txBody>
       </p:sp>
@@ -5512,7 +5568,7 @@
           <a:bodyPr/>
           <a:lstStyle/>
           <a:p>
-            <a:endParaRPr lang="es-AR"/>
+            <a:endParaRPr lang="es-AR" noProof="0" dirty="0"/>
           </a:p>
         </p:txBody>
       </p:sp>
@@ -5547,7 +5603,7 @@
               <a:buNone/>
             </a:pPr>
             <a:r>
-              <a:rPr lang="en-US" sz="1000" b="1" dirty="0">
+              <a:rPr lang="es-AR" sz="1000" b="1" noProof="0" dirty="0">
                 <a:solidFill>
                   <a:srgbClr val="4472C4"/>
                 </a:solidFill>
@@ -5557,7 +5613,7 @@
               </a:rPr>
               <a:t>ODE clásica</a:t>
             </a:r>
-            <a:endParaRPr lang="en-US" sz="1000" dirty="0"/>
+            <a:endParaRPr lang="es-AR" sz="1000" noProof="0" dirty="0"/>
           </a:p>
         </p:txBody>
       </p:sp>
@@ -5593,7 +5649,7 @@
           <a:bodyPr/>
           <a:lstStyle/>
           <a:p>
-            <a:endParaRPr lang="es-AR"/>
+            <a:endParaRPr lang="es-AR" noProof="0" dirty="0"/>
           </a:p>
         </p:txBody>
       </p:sp>
@@ -5628,7 +5684,7 @@
               <a:buNone/>
             </a:pPr>
             <a:r>
-              <a:rPr lang="en-US" sz="1000" b="1" dirty="0">
+              <a:rPr lang="es-AR" sz="1000" b="1" noProof="0" dirty="0">
                 <a:solidFill>
                   <a:srgbClr val="2E8B57"/>
                 </a:solidFill>
@@ -5638,7 +5694,7 @@
               </a:rPr>
               <a:t>UDE entrenada</a:t>
             </a:r>
-            <a:endParaRPr lang="en-US" sz="1000" dirty="0"/>
+            <a:endParaRPr lang="es-AR" sz="1000" noProof="0" dirty="0"/>
           </a:p>
         </p:txBody>
       </p:sp>
@@ -5676,7 +5732,7 @@
           <a:bodyPr/>
           <a:lstStyle/>
           <a:p>
-            <a:endParaRPr lang="es-AR"/>
+            <a:endParaRPr lang="es-AR" noProof="0" dirty="0"/>
           </a:p>
         </p:txBody>
       </p:sp>
@@ -5708,7 +5764,7 @@
           <a:lstStyle/>
           <a:p>
             <a:r>
-              <a:rPr lang="es-AR" sz="1000" dirty="0">
+              <a:rPr lang="es-AR" sz="1000" noProof="0" dirty="0">
                 <a:solidFill>
                   <a:srgbClr val="1B2A4A"/>
                 </a:solidFill>
@@ -5718,7 +5774,7 @@
               <a:t>La </a:t>
             </a:r>
             <a:r>
-              <a:rPr lang="en-US" sz="1000" b="1" dirty="0">
+              <a:rPr lang="es-AR" sz="1000" b="1" noProof="0" dirty="0">
                 <a:solidFill>
                   <a:srgbClr val="2E8B57"/>
                 </a:solidFill>
@@ -5729,13 +5785,13 @@
               <a:t>UDE entrenada</a:t>
             </a:r>
             <a:r>
-              <a:rPr lang="en-US" sz="1000" b="1" dirty="0">
+              <a:rPr lang="es-AR" sz="1000" b="1" noProof="0" dirty="0">
                 <a:ea typeface="Calibri" pitchFamily="34" charset="-122"/>
               </a:rPr>
               <a:t> </a:t>
             </a:r>
             <a:r>
-              <a:rPr lang="es-AR" sz="1000" dirty="0">
+              <a:rPr lang="es-AR" sz="1000" noProof="0" dirty="0">
                 <a:solidFill>
                   <a:srgbClr val="1B2A4A"/>
                 </a:solidFill>
@@ -5745,7 +5801,7 @@
               <a:t>se superpone casi perfectamente con los datos observados, mientras que la </a:t>
             </a:r>
             <a:r>
-              <a:rPr lang="en-US" sz="1000" b="1" dirty="0">
+              <a:rPr lang="es-AR" sz="1000" b="1" noProof="0" dirty="0">
                 <a:solidFill>
                   <a:srgbClr val="4472C4"/>
                 </a:solidFill>
@@ -5756,13 +5812,13 @@
               <a:t>ODE clásica</a:t>
             </a:r>
             <a:r>
-              <a:rPr lang="en-US" sz="1000" b="1" dirty="0">
+              <a:rPr lang="es-AR" sz="1000" b="1" noProof="0" dirty="0">
                 <a:ea typeface="Calibri" pitchFamily="34" charset="-122"/>
               </a:rPr>
               <a:t> </a:t>
             </a:r>
             <a:r>
-              <a:rPr lang="es-AR" sz="1000" dirty="0">
+              <a:rPr lang="es-AR" sz="1000" noProof="0" dirty="0">
                 <a:solidFill>
                   <a:srgbClr val="1B2A4A"/>
                 </a:solidFill>
@@ -5817,7 +5873,7 @@
           <a:bodyPr/>
           <a:lstStyle/>
           <a:p>
-            <a:endParaRPr lang="es-AR"/>
+            <a:endParaRPr lang="es-AR" noProof="0" dirty="0"/>
           </a:p>
         </p:txBody>
       </p:sp>
@@ -5853,7 +5909,7 @@
           <a:bodyPr/>
           <a:lstStyle/>
           <a:p>
-            <a:endParaRPr lang="es-AR"/>
+            <a:endParaRPr lang="es-AR" noProof="0" dirty="0"/>
           </a:p>
         </p:txBody>
       </p:sp>
@@ -5888,7 +5944,7 @@
               <a:buNone/>
             </a:pPr>
             <a:r>
-              <a:rPr lang="en-US" sz="1000" b="1" dirty="0">
+              <a:rPr lang="es-AR" sz="1000" b="1" noProof="0" dirty="0">
                 <a:solidFill>
                   <a:srgbClr val="7B2D8B"/>
                 </a:solidFill>
@@ -5898,7 +5954,7 @@
               </a:rPr>
               <a:t>Corrección nn(τ)</a:t>
             </a:r>
-            <a:endParaRPr lang="en-US" sz="1000" dirty="0"/>
+            <a:endParaRPr lang="es-AR" sz="1000" noProof="0" dirty="0"/>
           </a:p>
         </p:txBody>
       </p:sp>
@@ -5934,7 +5990,7 @@
           <a:bodyPr/>
           <a:lstStyle/>
           <a:p>
-            <a:endParaRPr lang="es-AR"/>
+            <a:endParaRPr lang="es-AR" noProof="0" dirty="0"/>
           </a:p>
         </p:txBody>
       </p:sp>
@@ -5969,7 +6025,7 @@
               <a:buNone/>
             </a:pPr>
             <a:r>
-              <a:rPr lang="en-US" sz="1000" b="1" dirty="0">
+              <a:rPr lang="es-AR" sz="1000" b="1" noProof="0" dirty="0" err="1">
                 <a:solidFill>
                   <a:srgbClr val="666666"/>
                 </a:solidFill>
@@ -5977,9 +6033,20 @@
                 <a:ea typeface="Calibri" pitchFamily="34" charset="-122"/>
                 <a:cs typeface="Calibri" pitchFamily="34" charset="-120"/>
               </a:rPr>
-              <a:t>Baseline (sin corrección)</a:t>
-            </a:r>
-            <a:endParaRPr lang="en-US" sz="1000" dirty="0"/>
+              <a:t>Baseline</a:t>
+            </a:r>
+            <a:r>
+              <a:rPr lang="es-AR" sz="1000" b="1" noProof="0" dirty="0">
+                <a:solidFill>
+                  <a:srgbClr val="666666"/>
+                </a:solidFill>
+                <a:latin typeface="Calibri" pitchFamily="34" charset="0"/>
+                <a:ea typeface="Calibri" pitchFamily="34" charset="-122"/>
+                <a:cs typeface="Calibri" pitchFamily="34" charset="-120"/>
+              </a:rPr>
+              <a:t> (sin corrección)</a:t>
+            </a:r>
+            <a:endParaRPr lang="es-AR" sz="1000" noProof="0" dirty="0"/>
           </a:p>
         </p:txBody>
       </p:sp>
@@ -6017,7 +6084,7 @@
           <a:bodyPr/>
           <a:lstStyle/>
           <a:p>
-            <a:endParaRPr lang="es-AR"/>
+            <a:endParaRPr lang="es-AR" noProof="0" dirty="0"/>
           </a:p>
         </p:txBody>
       </p:sp>
@@ -6049,7 +6116,7 @@
           <a:lstStyle/>
           <a:p>
             <a:r>
-              <a:rPr lang="es-AR" sz="1000" dirty="0">
+              <a:rPr lang="es-AR" sz="1000" noProof="0" dirty="0">
                 <a:solidFill>
                   <a:srgbClr val="1B2A4A"/>
                 </a:solidFill>
@@ -6058,6 +6125,25 @@
               </a:rPr>
               <a:t>La corrección es siempre positiva y decreciente.</a:t>
             </a:r>
+          </a:p>
+          <a:p>
+            <a:r>
+              <a:rPr lang="es-AR" sz="1000" dirty="0">
+                <a:solidFill>
+                  <a:srgbClr val="1B2A4A"/>
+                </a:solidFill>
+                <a:latin typeface="Calibri" pitchFamily="34" charset="0"/>
+                <a:cs typeface="Calibri" pitchFamily="34" charset="-120"/>
+              </a:rPr>
+              <a:t>Esto nos dice que la dinámica de crecimiento poblacional esta perdiendo fuerza año tras año.</a:t>
+            </a:r>
+            <a:endParaRPr lang="es-AR" sz="1000" noProof="0" dirty="0">
+              <a:solidFill>
+                <a:srgbClr val="1B2A4A"/>
+              </a:solidFill>
+              <a:latin typeface="Calibri" pitchFamily="34" charset="0"/>
+              <a:cs typeface="Calibri" pitchFamily="34" charset="-120"/>
+            </a:endParaRPr>
           </a:p>
         </p:txBody>
       </p:sp>
@@ -6104,7 +6190,7 @@
           <a:bodyPr/>
           <a:lstStyle/>
           <a:p>
-            <a:endParaRPr lang="es-AR"/>
+            <a:endParaRPr lang="es-AR" noProof="0" dirty="0"/>
           </a:p>
         </p:txBody>
       </p:sp>
@@ -6140,7 +6226,7 @@
           <a:bodyPr/>
           <a:lstStyle/>
           <a:p>
-            <a:endParaRPr lang="es-AR"/>
+            <a:endParaRPr lang="es-AR" noProof="0" dirty="0"/>
           </a:p>
         </p:txBody>
       </p:sp>
@@ -6175,7 +6261,7 @@
               <a:buNone/>
             </a:pPr>
             <a:r>
-              <a:rPr lang="en-US" sz="1000" b="1" dirty="0">
+              <a:rPr lang="es-AR" sz="1000" b="1" noProof="0" dirty="0">
                 <a:solidFill>
                   <a:srgbClr val="4472C4"/>
                 </a:solidFill>
@@ -6185,7 +6271,7 @@
               </a:rPr>
               <a:t>Loss (MSE)</a:t>
             </a:r>
-            <a:endParaRPr lang="en-US" sz="1000" dirty="0"/>
+            <a:endParaRPr lang="es-AR" sz="1000" noProof="0" dirty="0"/>
           </a:p>
         </p:txBody>
       </p:sp>
@@ -6223,7 +6309,7 @@
           <a:bodyPr/>
           <a:lstStyle/>
           <a:p>
-            <a:endParaRPr lang="es-AR"/>
+            <a:endParaRPr lang="es-AR" noProof="0" dirty="0"/>
           </a:p>
         </p:txBody>
       </p:sp>
@@ -6255,7 +6341,7 @@
           <a:lstStyle/>
           <a:p>
             <a:r>
-              <a:rPr lang="es-AR" sz="1000" dirty="0">
+              <a:rPr lang="es-AR" sz="1000" noProof="0" dirty="0">
                 <a:solidFill>
                   <a:srgbClr val="1B2A4A"/>
                 </a:solidFill>
@@ -6265,7 +6351,7 @@
               <a:t>La </a:t>
             </a:r>
             <a:r>
-              <a:rPr lang="es-AR" sz="1000" dirty="0" err="1">
+              <a:rPr lang="es-AR" sz="1000" noProof="0" dirty="0" err="1">
                 <a:solidFill>
                   <a:srgbClr val="1B2A4A"/>
                 </a:solidFill>
@@ -6275,7 +6361,7 @@
               <a:t>loss</a:t>
             </a:r>
             <a:r>
-              <a:rPr lang="es-AR" sz="1000" dirty="0">
+              <a:rPr lang="es-AR" sz="1000" noProof="0" dirty="0">
                 <a:solidFill>
                   <a:srgbClr val="1B2A4A"/>
                 </a:solidFill>
@@ -6285,7 +6371,7 @@
               <a:t> cae abruptamente en pocas épocas. La </a:t>
             </a:r>
             <a:r>
-              <a:rPr lang="es-AR" sz="1000" dirty="0" err="1">
+              <a:rPr lang="es-AR" sz="1000" noProof="0" dirty="0" err="1">
                 <a:solidFill>
                   <a:srgbClr val="1B2A4A"/>
                 </a:solidFill>
@@ -6295,7 +6381,7 @@
               <a:t>loss</a:t>
             </a:r>
             <a:r>
-              <a:rPr lang="es-AR" sz="1000" dirty="0">
+              <a:rPr lang="es-AR" sz="1000" noProof="0" dirty="0">
                 <a:solidFill>
                   <a:srgbClr val="1B2A4A"/>
                 </a:solidFill>
@@ -6310,7 +6396,7 @@
               <a:buNone/>
             </a:pPr>
             <a:r>
-              <a:rPr lang="en-US" sz="1000" dirty="0">
+              <a:rPr lang="es-AR" sz="1000" noProof="0" dirty="0">
                 <a:solidFill>
                   <a:srgbClr val="1B2A4A"/>
                 </a:solidFill>
@@ -6320,7 +6406,7 @@
               </a:rPr>
               <a:t>.</a:t>
             </a:r>
-            <a:endParaRPr lang="en-US" sz="1000" dirty="0"/>
+            <a:endParaRPr lang="es-AR" sz="1000" noProof="0" dirty="0"/>
           </a:p>
         </p:txBody>
       </p:sp>
@@ -6356,7 +6442,7 @@
           <a:bodyPr/>
           <a:lstStyle/>
           <a:p>
-            <a:endParaRPr lang="es-AR"/>
+            <a:endParaRPr lang="es-AR" noProof="0" dirty="0"/>
           </a:p>
         </p:txBody>
       </p:sp>
@@ -6392,7 +6478,7 @@
           <a:bodyPr/>
           <a:lstStyle/>
           <a:p>
-            <a:endParaRPr lang="es-AR"/>
+            <a:endParaRPr lang="es-AR" noProof="0" dirty="0"/>
           </a:p>
         </p:txBody>
       </p:sp>
@@ -6428,7 +6514,7 @@
           <a:bodyPr/>
           <a:lstStyle/>
           <a:p>
-            <a:endParaRPr lang="es-AR"/>
+            <a:endParaRPr lang="es-AR" noProof="0" dirty="0"/>
           </a:p>
         </p:txBody>
       </p:sp>
@@ -6463,7 +6549,7 @@
               <a:buNone/>
             </a:pPr>
             <a:r>
-              <a:rPr lang="en-US" sz="1000" b="1" dirty="0">
+              <a:rPr lang="es-AR" sz="1000" b="1" noProof="0" dirty="0">
                 <a:solidFill>
                   <a:srgbClr val="800000"/>
                 </a:solidFill>
@@ -6471,10 +6557,10 @@
                 <a:ea typeface="Calibri" pitchFamily="34" charset="-122"/>
                 <a:cs typeface="Calibri" pitchFamily="34" charset="-120"/>
               </a:rPr>
-              <a:t>UDE pre-</a:t>
-            </a:r>
-            <a:r>
-              <a:rPr lang="en-US" sz="1000" b="1" dirty="0" err="1">
+              <a:t>UDE </a:t>
+            </a:r>
+            <a:r>
+              <a:rPr lang="es-AR" sz="1000" b="1" noProof="0" dirty="0" err="1">
                 <a:solidFill>
                   <a:srgbClr val="800000"/>
                 </a:solidFill>
@@ -6482,9 +6568,9 @@
                 <a:ea typeface="Calibri" pitchFamily="34" charset="-122"/>
                 <a:cs typeface="Calibri" pitchFamily="34" charset="-120"/>
               </a:rPr>
-              <a:t>entrenada</a:t>
-            </a:r>
-            <a:endParaRPr lang="en-US" sz="1000" dirty="0">
+              <a:t>pre-entrenada</a:t>
+            </a:r>
+            <a:endParaRPr lang="es-AR" sz="1000" noProof="0" dirty="0">
               <a:solidFill>
                 <a:srgbClr val="800000"/>
               </a:solidFill>
@@ -6524,7 +6610,7 @@
           <a:bodyPr/>
           <a:lstStyle/>
           <a:p>
-            <a:endParaRPr lang="es-AR">
+            <a:endParaRPr lang="es-AR" noProof="0" dirty="0">
               <a:solidFill>
                 <a:srgbClr val="800000"/>
               </a:solidFill>
@@ -6546,6 +6632,573 @@
 </file>
 
 <file path=ppt/slides/slide12.xml><?xml version="1.0" encoding="utf-8"?>
+<p:sld xmlns:a="http://schemas.openxmlformats.org/drawingml/2006/main" xmlns:r="http://schemas.openxmlformats.org/officeDocument/2006/relationships" xmlns:p="http://schemas.openxmlformats.org/presentationml/2006/main">
+  <p:cSld name="Lambda">
+    <p:bg>
+      <p:bgPr>
+        <a:solidFill>
+          <a:srgbClr val="1B2A4A"/>
+        </a:solidFill>
+        <a:effectLst/>
+      </p:bgPr>
+    </p:bg>
+    <p:spTree>
+      <p:nvGrpSpPr>
+        <p:cNvPr id="1" name=""/>
+        <p:cNvGrpSpPr/>
+        <p:nvPr/>
+      </p:nvGrpSpPr>
+      <p:grpSpPr>
+        <a:xfrm>
+          <a:off x="0" y="0"/>
+          <a:ext cx="0" cy="0"/>
+          <a:chOff x="0" y="0"/>
+          <a:chExt cx="0" cy="0"/>
+        </a:xfrm>
+      </p:grpSpPr>
+      <p:sp>
+        <p:nvSpPr>
+          <p:cNvPr id="2" name="Title"/>
+          <p:cNvSpPr/>
+          <p:nvPr/>
+        </p:nvSpPr>
+        <p:spPr>
+          <a:xfrm>
+            <a:off x="457200" y="164592"/>
+            <a:ext cx="8229600" cy="594360"/>
+          </a:xfrm>
+          <a:prstGeom prst="rect">
+            <a:avLst/>
+          </a:prstGeom>
+          <a:noFill/>
+          <a:ln/>
+        </p:spPr>
+        <p:txBody>
+          <a:bodyPr wrap="square" lIns="0" tIns="0" rIns="0" bIns="0" rtlCol="0" anchor="ctr"/>
+          <a:lstStyle/>
+          <a:p>
+            <a:pPr marL="0" indent="0" algn="l">
+              <a:buNone/>
+            </a:pPr>
+            <a:r>
+              <a:rPr lang="es-AR" sz="2600" b="1" noProof="0" dirty="0">
+                <a:solidFill>
+                  <a:srgbClr val="FFFFFF"/>
+                </a:solidFill>
+                <a:latin typeface="Calibri" pitchFamily="34" charset="0"/>
+              </a:rPr>
+              <a:t>λ — La tasa de desaceleración</a:t>
+            </a:r>
+          </a:p>
+        </p:txBody>
+      </p:sp>
+      <p:sp>
+        <p:nvSpPr>
+          <p:cNvPr id="3" name="Teal line"/>
+          <p:cNvSpPr/>
+          <p:nvPr/>
+        </p:nvSpPr>
+        <p:spPr>
+          <a:xfrm>
+            <a:off x="457200" y="804672"/>
+            <a:ext cx="8229600" cy="18288"/>
+          </a:xfrm>
+          <a:prstGeom prst="rect">
+            <a:avLst/>
+          </a:prstGeom>
+          <a:solidFill>
+            <a:srgbClr val="2AA8BF"/>
+          </a:solidFill>
+          <a:ln w="12700">
+            <a:solidFill>
+              <a:srgbClr val="2AA8BF"/>
+            </a:solidFill>
+          </a:ln>
+        </p:spPr>
+        <p:txBody>
+          <a:bodyPr/>
+          <a:lstStyle/>
+          <a:p>
+            <a:endParaRPr lang="es-AR" noProof="0" dirty="0"/>
+          </a:p>
+        </p:txBody>
+      </p:sp>
+      <p:sp>
+        <p:nvSpPr>
+          <p:cNvPr id="4" name="Subtitle"/>
+          <p:cNvSpPr/>
+          <p:nvPr/>
+        </p:nvSpPr>
+        <p:spPr>
+          <a:xfrm>
+            <a:off x="457200" y="868680"/>
+            <a:ext cx="8229600" cy="548640"/>
+          </a:xfrm>
+          <a:prstGeom prst="rect">
+            <a:avLst/>
+          </a:prstGeom>
+          <a:noFill/>
+          <a:ln/>
+        </p:spPr>
+        <p:txBody>
+          <a:bodyPr wrap="square" lIns="0" tIns="0" rIns="0" bIns="0" rtlCol="0" anchor="ctr"/>
+          <a:lstStyle/>
+          <a:p>
+            <a:r>
+              <a:rPr lang="es-AR" sz="1200" noProof="0" dirty="0">
+                <a:solidFill>
+                  <a:srgbClr val="A8C8D8"/>
+                </a:solidFill>
+                <a:latin typeface="Calibri" pitchFamily="34" charset="0"/>
+              </a:rPr>
+              <a:t>Debido a que la red aprendió una corrección nn(τ) positiva en 2012–2022, la red neuronal termina sobreestimando a la población. Necesitamos entonces modelar el decaimiento de la tasa de natalidad. λ será la tasa de desaceleración anual de la corrección aprendida.</a:t>
+            </a:r>
+          </a:p>
+        </p:txBody>
+      </p:sp>
+      <p:sp>
+        <p:nvSpPr>
+          <p:cNvPr id="5" name="Formula box"/>
+          <p:cNvSpPr/>
+          <p:nvPr/>
+        </p:nvSpPr>
+        <p:spPr>
+          <a:xfrm>
+            <a:off x="1371600" y="1508760"/>
+            <a:ext cx="5943600" cy="548640"/>
+          </a:xfrm>
+          <a:prstGeom prst="roundRect">
+            <a:avLst>
+              <a:gd name="adj" fmla="val 8333"/>
+            </a:avLst>
+          </a:prstGeom>
+          <a:solidFill>
+            <a:srgbClr val="0F1E35"/>
+          </a:solidFill>
+          <a:ln w="19050">
+            <a:solidFill>
+              <a:srgbClr val="2AA8BF"/>
+            </a:solidFill>
+          </a:ln>
+        </p:spPr>
+        <p:txBody>
+          <a:bodyPr wrap="square" lIns="91440" tIns="45720" rIns="91440" bIns="45720" rtlCol="0" anchor="ctr"/>
+          <a:lstStyle/>
+          <a:p>
+            <a:pPr marL="0" indent="0" algn="ctr">
+              <a:buNone/>
+            </a:pPr>
+            <a:r>
+              <a:rPr lang="es-AR" sz="1600" b="1" noProof="0" dirty="0">
+                <a:solidFill>
+                  <a:srgbClr val="2AA8BF"/>
+                </a:solidFill>
+                <a:latin typeface="Calibri" pitchFamily="34" charset="0"/>
+              </a:rPr>
+              <a:t>nn</a:t>
+            </a:r>
+            <a:r>
+              <a:rPr lang="es-AR" sz="1600" noProof="0" dirty="0">
+                <a:solidFill>
+                  <a:srgbClr val="FFFFFF"/>
+                </a:solidFill>
+                <a:latin typeface="Calibri" pitchFamily="34" charset="0"/>
+              </a:rPr>
+              <a:t>ₐₜₑₙ(τ) = nn(τ</a:t>
+            </a:r>
+            <a:r>
+              <a:rPr lang="es-AR" sz="1100" noProof="0" dirty="0">
+                <a:solidFill>
+                  <a:srgbClr val="FFFFFF"/>
+                </a:solidFill>
+                <a:latin typeface="Calibri" pitchFamily="34" charset="0"/>
+              </a:rPr>
+              <a:t>₂₀₂₂</a:t>
+            </a:r>
+            <a:r>
+              <a:rPr lang="es-AR" sz="1600" noProof="0" dirty="0">
+                <a:solidFill>
+                  <a:srgbClr val="FFFFFF"/>
+                </a:solidFill>
+                <a:latin typeface="Calibri" pitchFamily="34" charset="0"/>
+              </a:rPr>
+              <a:t>) · e</a:t>
+            </a:r>
+            <a:r>
+              <a:rPr lang="es-AR" sz="1100" baseline="30000" noProof="0" dirty="0">
+                <a:solidFill>
+                  <a:srgbClr val="E8A838"/>
+                </a:solidFill>
+                <a:latin typeface="Calibri" pitchFamily="34" charset="0"/>
+              </a:rPr>
+              <a:t>−λ·(t−t</a:t>
+            </a:r>
+            <a:r>
+              <a:rPr lang="es-AR" sz="900" baseline="30000" noProof="0" dirty="0">
+                <a:solidFill>
+                  <a:srgbClr val="E8A838"/>
+                </a:solidFill>
+                <a:latin typeface="Calibri" pitchFamily="34" charset="0"/>
+              </a:rPr>
+              <a:t>max</a:t>
+            </a:r>
+            <a:r>
+              <a:rPr lang="es-AR" sz="1100" baseline="30000" noProof="0" dirty="0">
+                <a:solidFill>
+                  <a:srgbClr val="E8A838"/>
+                </a:solidFill>
+                <a:latin typeface="Calibri" pitchFamily="34" charset="0"/>
+              </a:rPr>
+              <a:t>)</a:t>
+            </a:r>
+          </a:p>
+        </p:txBody>
+      </p:sp>
+      <p:sp>
+        <p:nvSpPr>
+          <p:cNvPr id="6" name="Opt box"/>
+          <p:cNvSpPr/>
+          <p:nvPr/>
+        </p:nvSpPr>
+        <p:spPr>
+          <a:xfrm>
+            <a:off x="365760" y="2377440"/>
+            <a:ext cx="2697480" cy="1554480"/>
+          </a:xfrm>
+          <a:prstGeom prst="roundRect">
+            <a:avLst>
+              <a:gd name="adj" fmla="val 8333"/>
+            </a:avLst>
+          </a:prstGeom>
+          <a:solidFill>
+            <a:srgbClr val="1A3D28"/>
+          </a:solidFill>
+          <a:ln w="12700">
+            <a:solidFill>
+              <a:srgbClr val="2E7D52"/>
+            </a:solidFill>
+          </a:ln>
+        </p:spPr>
+        <p:txBody>
+          <a:bodyPr wrap="square" lIns="182880" tIns="91440" rIns="182880" bIns="91440" rtlCol="0" anchor="t"/>
+          <a:lstStyle/>
+          <a:p>
+            <a:pPr marL="0" indent="0" algn="ctr">
+              <a:buNone/>
+            </a:pPr>
+            <a:r>
+              <a:rPr lang="es-AR" sz="1400" b="1" noProof="0" dirty="0">
+                <a:solidFill>
+                  <a:srgbClr val="4CAF80"/>
+                </a:solidFill>
+                <a:latin typeface="Calibri" pitchFamily="34" charset="0"/>
+              </a:rPr>
+              <a:t>Optimista</a:t>
+            </a:r>
+          </a:p>
+          <a:p>
+            <a:pPr marL="0" indent="0" algn="ctr">
+              <a:buNone/>
+            </a:pPr>
+            <a:r>
+              <a:rPr lang="es-AR" sz="2800" b="1" noProof="0" dirty="0">
+                <a:solidFill>
+                  <a:srgbClr val="4CAF80"/>
+                </a:solidFill>
+                <a:latin typeface="Calibri" pitchFamily="34" charset="0"/>
+              </a:rPr>
+              <a:t>λ = 0.02</a:t>
+            </a:r>
+          </a:p>
+          <a:p>
+            <a:pPr marL="0" indent="0" algn="ctr">
+              <a:buNone/>
+            </a:pPr>
+            <a:r>
+              <a:rPr lang="es-AR" sz="1000" noProof="0" dirty="0">
+                <a:solidFill>
+                  <a:srgbClr val="A8D8B8"/>
+                </a:solidFill>
+                <a:latin typeface="Calibri" pitchFamily="34" charset="0"/>
+              </a:rPr>
+              <a:t>Desaceleración muy lenta</a:t>
+            </a:r>
+          </a:p>
+          <a:p>
+            <a:pPr marL="0" indent="0" algn="ctr">
+              <a:buNone/>
+            </a:pPr>
+            <a:r>
+              <a:rPr lang="es-AR" sz="1000" noProof="0" dirty="0">
+                <a:solidFill>
+                  <a:srgbClr val="A8D8B8"/>
+                </a:solidFill>
+                <a:latin typeface="Calibri" pitchFamily="34" charset="0"/>
+              </a:rPr>
+              <a:t>Natalidad se estabiliza</a:t>
+            </a:r>
+          </a:p>
+          <a:p>
+            <a:pPr marL="0" indent="0" algn="ctr">
+              <a:buNone/>
+            </a:pPr>
+            <a:r>
+              <a:rPr lang="es-AR" sz="1000" noProof="0" dirty="0">
+                <a:solidFill>
+                  <a:srgbClr val="A8D8B8"/>
+                </a:solidFill>
+                <a:latin typeface="Calibri" pitchFamily="34" charset="0"/>
+              </a:rPr>
+              <a:t>cerca del nivel actual</a:t>
+            </a:r>
+          </a:p>
+        </p:txBody>
+      </p:sp>
+      <p:sp>
+        <p:nvSpPr>
+          <p:cNvPr id="7" name="Base box"/>
+          <p:cNvSpPr/>
+          <p:nvPr/>
+        </p:nvSpPr>
+        <p:spPr>
+          <a:xfrm>
+            <a:off x="3200400" y="2377440"/>
+            <a:ext cx="2697480" cy="1554480"/>
+          </a:xfrm>
+          <a:prstGeom prst="roundRect">
+            <a:avLst>
+              <a:gd name="adj" fmla="val 8333"/>
+            </a:avLst>
+          </a:prstGeom>
+          <a:solidFill>
+            <a:srgbClr val="1A2A4A"/>
+          </a:solidFill>
+          <a:ln w="12700">
+            <a:solidFill>
+              <a:srgbClr val="2AA8BF"/>
+            </a:solidFill>
+          </a:ln>
+        </p:spPr>
+        <p:txBody>
+          <a:bodyPr wrap="square" lIns="182880" tIns="91440" rIns="182880" bIns="91440" rtlCol="0" anchor="t"/>
+          <a:lstStyle/>
+          <a:p>
+            <a:pPr marL="0" indent="0" algn="ctr">
+              <a:buNone/>
+            </a:pPr>
+            <a:r>
+              <a:rPr lang="es-AR" sz="1400" b="1" noProof="0" dirty="0">
+                <a:solidFill>
+                  <a:srgbClr val="2AA8BF"/>
+                </a:solidFill>
+                <a:latin typeface="Calibri" pitchFamily="34" charset="0"/>
+              </a:rPr>
+              <a:t>Base</a:t>
+            </a:r>
+          </a:p>
+          <a:p>
+            <a:pPr marL="0" indent="0" algn="ctr">
+              <a:buNone/>
+            </a:pPr>
+            <a:r>
+              <a:rPr lang="es-AR" sz="2800" b="1" noProof="0" dirty="0">
+                <a:solidFill>
+                  <a:srgbClr val="2AA8BF"/>
+                </a:solidFill>
+                <a:latin typeface="Calibri" pitchFamily="34" charset="0"/>
+              </a:rPr>
+              <a:t>λ = 0.08</a:t>
+            </a:r>
+          </a:p>
+          <a:p>
+            <a:pPr marL="0" indent="0" algn="ctr">
+              <a:buNone/>
+            </a:pPr>
+            <a:r>
+              <a:rPr lang="es-AR" sz="1000" noProof="0" dirty="0">
+                <a:solidFill>
+                  <a:srgbClr val="A8C8D8"/>
+                </a:solidFill>
+                <a:latin typeface="Calibri" pitchFamily="34" charset="0"/>
+              </a:rPr>
+              <a:t>Desaceleración moderada</a:t>
+            </a:r>
+          </a:p>
+          <a:p>
+            <a:pPr marL="0" indent="0" algn="ctr">
+              <a:buNone/>
+            </a:pPr>
+            <a:r>
+              <a:rPr lang="es-AR" sz="1000" noProof="0" dirty="0">
+                <a:solidFill>
+                  <a:srgbClr val="A8C8D8"/>
+                </a:solidFill>
+                <a:latin typeface="Calibri" pitchFamily="34" charset="0"/>
+              </a:rPr>
+              <a:t>Corrección cae a la</a:t>
+            </a:r>
+          </a:p>
+          <a:p>
+            <a:pPr marL="0" indent="0" algn="ctr">
+              <a:buNone/>
+            </a:pPr>
+            <a:r>
+              <a:rPr lang="es-AR" sz="1000" noProof="0" dirty="0">
+                <a:solidFill>
+                  <a:srgbClr val="A8C8D8"/>
+                </a:solidFill>
+                <a:latin typeface="Calibri" pitchFamily="34" charset="0"/>
+              </a:rPr>
+              <a:t>mitad en ~9 años</a:t>
+            </a:r>
+          </a:p>
+        </p:txBody>
+      </p:sp>
+      <p:sp>
+        <p:nvSpPr>
+          <p:cNvPr id="8" name="Pes box"/>
+          <p:cNvSpPr/>
+          <p:nvPr/>
+        </p:nvSpPr>
+        <p:spPr>
+          <a:xfrm>
+            <a:off x="6035040" y="2377440"/>
+            <a:ext cx="2697480" cy="1554480"/>
+          </a:xfrm>
+          <a:prstGeom prst="roundRect">
+            <a:avLst>
+              <a:gd name="adj" fmla="val 8333"/>
+            </a:avLst>
+          </a:prstGeom>
+          <a:solidFill>
+            <a:srgbClr val="3D1A1A"/>
+          </a:solidFill>
+          <a:ln w="12700">
+            <a:solidFill>
+              <a:srgbClr val="D95F3B"/>
+            </a:solidFill>
+          </a:ln>
+        </p:spPr>
+        <p:txBody>
+          <a:bodyPr wrap="square" lIns="182880" tIns="91440" rIns="182880" bIns="91440" rtlCol="0" anchor="t"/>
+          <a:lstStyle/>
+          <a:p>
+            <a:pPr marL="0" indent="0" algn="ctr">
+              <a:buNone/>
+            </a:pPr>
+            <a:r>
+              <a:rPr lang="es-AR" sz="1400" b="1" noProof="0" dirty="0">
+                <a:solidFill>
+                  <a:srgbClr val="D95F3B"/>
+                </a:solidFill>
+                <a:latin typeface="Calibri" pitchFamily="34" charset="0"/>
+              </a:rPr>
+              <a:t>Pesimista</a:t>
+            </a:r>
+          </a:p>
+          <a:p>
+            <a:pPr marL="0" indent="0" algn="ctr">
+              <a:buNone/>
+            </a:pPr>
+            <a:r>
+              <a:rPr lang="es-AR" sz="2800" b="1" noProof="0" dirty="0">
+                <a:solidFill>
+                  <a:srgbClr val="D95F3B"/>
+                </a:solidFill>
+                <a:latin typeface="Calibri" pitchFamily="34" charset="0"/>
+              </a:rPr>
+              <a:t>λ = 0.20</a:t>
+            </a:r>
+          </a:p>
+          <a:p>
+            <a:pPr marL="0" indent="0" algn="ctr">
+              <a:buNone/>
+            </a:pPr>
+            <a:r>
+              <a:rPr lang="es-AR" sz="1000" noProof="0" dirty="0">
+                <a:solidFill>
+                  <a:srgbClr val="E8B8A8"/>
+                </a:solidFill>
+                <a:latin typeface="Calibri" pitchFamily="34" charset="0"/>
+              </a:rPr>
+              <a:t>Desaceleración rápida</a:t>
+            </a:r>
+          </a:p>
+          <a:p>
+            <a:pPr marL="0" indent="0" algn="ctr">
+              <a:buNone/>
+            </a:pPr>
+            <a:r>
+              <a:rPr lang="es-AR" sz="1000" noProof="0" dirty="0">
+                <a:solidFill>
+                  <a:srgbClr val="E8B8A8"/>
+                </a:solidFill>
+                <a:latin typeface="Calibri" pitchFamily="34" charset="0"/>
+              </a:rPr>
+              <a:t>Corrección casi</a:t>
+            </a:r>
+          </a:p>
+          <a:p>
+            <a:pPr marL="0" indent="0" algn="ctr">
+              <a:buNone/>
+            </a:pPr>
+            <a:r>
+              <a:rPr lang="es-AR" sz="1000" noProof="0" dirty="0">
+                <a:solidFill>
+                  <a:srgbClr val="E8B8A8"/>
+                </a:solidFill>
+                <a:latin typeface="Calibri" pitchFamily="34" charset="0"/>
+              </a:rPr>
+              <a:t>desaparece en ~15 años</a:t>
+            </a:r>
+          </a:p>
+        </p:txBody>
+      </p:sp>
+      <p:sp>
+        <p:nvSpPr>
+          <p:cNvPr id="9" name="Note"/>
+          <p:cNvSpPr/>
+          <p:nvPr/>
+        </p:nvSpPr>
+        <p:spPr>
+          <a:xfrm>
+            <a:off x="457200" y="4115040"/>
+            <a:ext cx="8229600" cy="365760"/>
+          </a:xfrm>
+          <a:prstGeom prst="rect">
+            <a:avLst/>
+          </a:prstGeom>
+          <a:noFill/>
+          <a:ln/>
+        </p:spPr>
+        <p:txBody>
+          <a:bodyPr wrap="square" lIns="0" tIns="0" rIns="0" bIns="0" rtlCol="0" anchor="ctr"/>
+          <a:lstStyle/>
+          <a:p>
+            <a:pPr marL="0" indent="0" algn="ctr">
+              <a:buNone/>
+            </a:pPr>
+            <a:r>
+              <a:rPr lang="es-AR" sz="900" noProof="0" dirty="0">
+                <a:solidFill>
+                  <a:srgbClr val="6B8CAE"/>
+                </a:solidFill>
+                <a:latin typeface="Calibri" pitchFamily="34" charset="0"/>
+              </a:rPr>
+              <a:t>Con λ → 0 se recupera la UDE original. </a:t>
+            </a:r>
+          </a:p>
+        </p:txBody>
+      </p:sp>
+    </p:spTree>
+  </p:cSld>
+  <p:clrMapOvr>
+    <a:masterClrMapping/>
+  </p:clrMapOvr>
+</p:sld>
+</file>
+
+<file path=ppt/slides/slide13.xml><?xml version="1.0" encoding="utf-8"?>
 <p:sld xmlns:a="http://schemas.openxmlformats.org/drawingml/2006/main" xmlns:r="http://schemas.openxmlformats.org/officeDocument/2006/relationships" xmlns:p="http://schemas.openxmlformats.org/presentationml/2006/main">
   <p:cSld name="Slide 11">
     <p:bg>
@@ -6595,7 +7248,7 @@
               <a:buNone/>
             </a:pPr>
             <a:r>
-              <a:rPr lang="en-US" sz="2600" b="1" dirty="0">
+              <a:rPr lang="es-AR" sz="2600" b="1" noProof="0" dirty="0">
                 <a:solidFill>
                   <a:srgbClr val="FFFFFF"/>
                 </a:solidFill>
@@ -6603,9 +7256,9 @@
                 <a:ea typeface="Calibri" pitchFamily="34" charset="-122"/>
                 <a:cs typeface="Calibri" pitchFamily="34" charset="-120"/>
               </a:rPr>
-              <a:t>Proyección al 2050 — Tres Escenarios</a:t>
-            </a:r>
-            <a:endParaRPr lang="en-US" sz="2600" dirty="0"/>
+              <a:t>Proyección al 2050 — Tres Escenarios con λ</a:t>
+            </a:r>
+            <a:endParaRPr lang="es-AR" sz="2600" noProof="0" dirty="0"/>
           </a:p>
         </p:txBody>
       </p:sp>
@@ -6637,7 +7290,7 @@
           <a:bodyPr/>
           <a:lstStyle/>
           <a:p>
-            <a:endParaRPr lang="es-AR"/>
+            <a:endParaRPr lang="es-AR" noProof="0" dirty="0"/>
           </a:p>
         </p:txBody>
       </p:sp>
@@ -6648,7 +7301,7 @@
           <p:nvPr>
             <p:extLst>
               <p:ext uri="{D42A27DB-BD31-4B8C-83A1-F6EECF244321}">
-                <p14:modId xmlns:p14="http://schemas.microsoft.com/office/powerpoint/2010/main" val="278994971"/>
+                <p14:modId xmlns:p14="http://schemas.microsoft.com/office/powerpoint/2010/main" val="1373411468"/>
               </p:ext>
             </p:extLst>
           </p:nvPr>
@@ -6700,7 +7353,7 @@
           <a:bodyPr/>
           <a:lstStyle/>
           <a:p>
-            <a:endParaRPr lang="es-AR"/>
+            <a:endParaRPr lang="es-AR" noProof="0" dirty="0"/>
           </a:p>
         </p:txBody>
       </p:sp>
@@ -6729,7 +7382,7 @@
               <a:buNone/>
             </a:pPr>
             <a:r>
-              <a:rPr lang="en-US" sz="1200" b="1" dirty="0">
+              <a:rPr lang="es-AR" sz="1200" b="1" noProof="0" dirty="0">
                 <a:solidFill>
                   <a:srgbClr val="2AA8BF"/>
                 </a:solidFill>
@@ -6737,9 +7390,9 @@
                 <a:ea typeface="Calibri" pitchFamily="34" charset="-122"/>
                 <a:cs typeface="Calibri" pitchFamily="34" charset="-120"/>
               </a:rPr>
-              <a:t>Optimista</a:t>
-            </a:r>
-            <a:endParaRPr lang="en-US" sz="1200" dirty="0"/>
+              <a:t>Optimista (λ=0.02)</a:t>
+            </a:r>
+            <a:endParaRPr lang="es-AR" sz="1200" noProof="0" dirty="0"/>
           </a:p>
         </p:txBody>
       </p:sp>
@@ -6768,7 +7421,7 @@
               <a:buNone/>
             </a:pPr>
             <a:r>
-              <a:rPr lang="en-US" sz="2400" b="1" dirty="0">
+              <a:rPr lang="es-AR" sz="2400" b="1" dirty="0">
                 <a:solidFill>
                   <a:srgbClr val="2AA8BF"/>
                 </a:solidFill>
@@ -6776,49 +7429,49 @@
                 <a:ea typeface="Calibri" pitchFamily="34" charset="-122"/>
                 <a:cs typeface="Calibri" pitchFamily="34" charset="-120"/>
               </a:rPr>
-              <a:t>60 M</a:t>
-            </a:r>
-            <a:endParaRPr lang="en-US" sz="2400" dirty="0"/>
-          </a:p>
-        </p:txBody>
-      </p:sp>
-      <p:sp>
-        <p:nvSpPr>
-          <p:cNvPr id="8" name="Text 5"/>
-          <p:cNvSpPr/>
-          <p:nvPr/>
-        </p:nvSpPr>
-        <p:spPr>
-          <a:xfrm>
-            <a:off x="7589520" y="1371600"/>
-            <a:ext cx="1097280" cy="685800"/>
-          </a:xfrm>
-          <a:prstGeom prst="rect">
-            <a:avLst/>
-          </a:prstGeom>
-          <a:noFill/>
-          <a:ln/>
-        </p:spPr>
-        <p:txBody>
-          <a:bodyPr wrap="square" lIns="0" tIns="0" rIns="0" bIns="0" rtlCol="0" anchor="ctr"/>
-          <a:lstStyle/>
-          <a:p>
-            <a:pPr marL="0" indent="0" algn="l">
-              <a:buNone/>
-            </a:pPr>
-            <a:r>
-              <a:rPr lang="en-US" sz="1000" dirty="0">
-                <a:solidFill>
-                  <a:srgbClr val="A8C8D8"/>
+              <a:t>57</a:t>
+            </a:r>
+            <a:r>
+              <a:rPr lang="es-AR" sz="2400" b="1" noProof="0" dirty="0">
+                <a:solidFill>
+                  <a:srgbClr val="2AA8BF"/>
                 </a:solidFill>
                 <a:latin typeface="Calibri" pitchFamily="34" charset="0"/>
                 <a:ea typeface="Calibri" pitchFamily="34" charset="-122"/>
                 <a:cs typeface="Calibri" pitchFamily="34" charset="-120"/>
               </a:rPr>
-              <a:t>+</a:t>
-            </a:r>
-            <a:r>
-              <a:rPr lang="en-US" sz="1000" dirty="0" err="1">
+              <a:t> M</a:t>
+            </a:r>
+            <a:endParaRPr lang="es-AR" sz="2400" noProof="0" dirty="0"/>
+          </a:p>
+        </p:txBody>
+      </p:sp>
+      <p:sp>
+        <p:nvSpPr>
+          <p:cNvPr id="8" name="Text 5"/>
+          <p:cNvSpPr/>
+          <p:nvPr/>
+        </p:nvSpPr>
+        <p:spPr>
+          <a:xfrm>
+            <a:off x="7589520" y="1371600"/>
+            <a:ext cx="1097280" cy="685800"/>
+          </a:xfrm>
+          <a:prstGeom prst="rect">
+            <a:avLst/>
+          </a:prstGeom>
+          <a:noFill/>
+          <a:ln/>
+        </p:spPr>
+        <p:txBody>
+          <a:bodyPr wrap="square" lIns="0" tIns="0" rIns="0" bIns="0" rtlCol="0" anchor="ctr"/>
+          <a:lstStyle/>
+          <a:p>
+            <a:pPr marL="0" indent="0" algn="l">
+              <a:buNone/>
+            </a:pPr>
+            <a:r>
+              <a:rPr lang="es-AR" sz="1000" noProof="0" dirty="0" err="1">
                 <a:solidFill>
                   <a:srgbClr val="A8C8D8"/>
                 </a:solidFill>
@@ -6826,16 +7479,10 @@
                 <a:ea typeface="Calibri" pitchFamily="34" charset="-122"/>
                 <a:cs typeface="Calibri" pitchFamily="34" charset="-120"/>
               </a:rPr>
-              <a:t>migración</a:t>
-            </a:r>
-            <a:endParaRPr lang="en-US" sz="1000" dirty="0"/>
-          </a:p>
-          <a:p>
-            <a:pPr marL="0" indent="0" algn="l">
-              <a:buNone/>
-            </a:pPr>
-            <a:r>
-              <a:rPr lang="en-US" sz="1000" dirty="0">
+              <a:t>desacel</a:t>
+            </a:r>
+            <a:r>
+              <a:rPr lang="es-AR" sz="1000" noProof="0" dirty="0">
                 <a:solidFill>
                   <a:srgbClr val="A8C8D8"/>
                 </a:solidFill>
@@ -6843,10 +7490,16 @@
                 <a:ea typeface="Calibri" pitchFamily="34" charset="-122"/>
                 <a:cs typeface="Calibri" pitchFamily="34" charset="-120"/>
               </a:rPr>
-              <a:t>+</a:t>
-            </a:r>
-            <a:r>
-              <a:rPr lang="en-US" sz="1000" dirty="0" err="1">
+              <a:t>.</a:t>
+            </a:r>
+            <a:endParaRPr lang="es-AR" sz="1000" noProof="0" dirty="0"/>
+          </a:p>
+          <a:p>
+            <a:pPr marL="0" indent="0" algn="l">
+              <a:buNone/>
+            </a:pPr>
+            <a:r>
+              <a:rPr lang="es-AR" sz="1000" noProof="0" dirty="0">
                 <a:solidFill>
                   <a:srgbClr val="A8C8D8"/>
                 </a:solidFill>
@@ -6854,9 +7507,9 @@
                 <a:ea typeface="Calibri" pitchFamily="34" charset="-122"/>
                 <a:cs typeface="Calibri" pitchFamily="34" charset="-120"/>
               </a:rPr>
-              <a:t>natalidad</a:t>
-            </a:r>
-            <a:endParaRPr lang="en-US" sz="1000" dirty="0"/>
+              <a:t>muy lenta</a:t>
+            </a:r>
+            <a:endParaRPr lang="es-AR" sz="1000" noProof="0" dirty="0"/>
           </a:p>
         </p:txBody>
       </p:sp>
@@ -6897,7 +7550,7 @@
           <a:bodyPr/>
           <a:lstStyle/>
           <a:p>
-            <a:endParaRPr lang="es-AR"/>
+            <a:endParaRPr lang="es-AR" noProof="0" dirty="0"/>
           </a:p>
         </p:txBody>
       </p:sp>
@@ -6926,7 +7579,7 @@
               <a:buNone/>
             </a:pPr>
             <a:r>
-              <a:rPr lang="en-US" sz="1200" b="1" dirty="0">
+              <a:rPr lang="es-AR" sz="1200" b="1" noProof="0" dirty="0">
                 <a:solidFill>
                   <a:srgbClr val="FFFFFF"/>
                 </a:solidFill>
@@ -6934,9 +7587,9 @@
                 <a:ea typeface="Calibri" pitchFamily="34" charset="-122"/>
                 <a:cs typeface="Calibri" pitchFamily="34" charset="-120"/>
               </a:rPr>
-              <a:t>Base</a:t>
-            </a:r>
-            <a:endParaRPr lang="en-US" sz="1200" dirty="0"/>
+              <a:t>Base (λ=0.08)</a:t>
+            </a:r>
+            <a:endParaRPr lang="es-AR" sz="1200" noProof="0" dirty="0"/>
           </a:p>
         </p:txBody>
       </p:sp>
@@ -6965,7 +7618,7 @@
               <a:buNone/>
             </a:pPr>
             <a:r>
-              <a:rPr lang="en-US" sz="2400" b="1" dirty="0">
+              <a:rPr lang="es-AR" sz="2400" b="1" dirty="0">
                 <a:solidFill>
                   <a:srgbClr val="FFFFFF"/>
                 </a:solidFill>
@@ -6973,55 +7626,49 @@
                 <a:ea typeface="Calibri" pitchFamily="34" charset="-122"/>
                 <a:cs typeface="Calibri" pitchFamily="34" charset="-120"/>
               </a:rPr>
-              <a:t>59 M</a:t>
-            </a:r>
-            <a:endParaRPr lang="en-US" sz="2400" dirty="0"/>
-          </a:p>
-        </p:txBody>
-      </p:sp>
-      <p:sp>
-        <p:nvSpPr>
-          <p:cNvPr id="12" name="Text 9"/>
-          <p:cNvSpPr/>
-          <p:nvPr/>
-        </p:nvSpPr>
-        <p:spPr>
-          <a:xfrm>
-            <a:off x="7589520" y="2606040"/>
-            <a:ext cx="1097280" cy="685800"/>
-          </a:xfrm>
-          <a:prstGeom prst="rect">
-            <a:avLst/>
-          </a:prstGeom>
-          <a:noFill/>
-          <a:ln/>
-        </p:spPr>
-        <p:txBody>
-          <a:bodyPr wrap="square" lIns="0" tIns="0" rIns="0" bIns="0" rtlCol="0" anchor="ctr"/>
-          <a:lstStyle/>
-          <a:p>
-            <a:pPr marL="0" indent="0" algn="l">
-              <a:buNone/>
-            </a:pPr>
-            <a:r>
-              <a:rPr lang="en-US" sz="1000" dirty="0">
-                <a:solidFill>
-                  <a:srgbClr val="A8C8D8"/>
+              <a:t>52</a:t>
+            </a:r>
+            <a:r>
+              <a:rPr lang="es-AR" sz="2400" b="1" noProof="0" dirty="0">
+                <a:solidFill>
+                  <a:srgbClr val="FFFFFF"/>
                 </a:solidFill>
                 <a:latin typeface="Calibri" pitchFamily="34" charset="0"/>
                 <a:ea typeface="Calibri" pitchFamily="34" charset="-122"/>
                 <a:cs typeface="Calibri" pitchFamily="34" charset="-120"/>
               </a:rPr>
-              <a:t>tendencia</a:t>
-            </a:r>
-            <a:endParaRPr lang="en-US" sz="1000" dirty="0"/>
-          </a:p>
+              <a:t> M</a:t>
+            </a:r>
+            <a:endParaRPr lang="es-AR" sz="2400" noProof="0" dirty="0"/>
+          </a:p>
+        </p:txBody>
+      </p:sp>
+      <p:sp>
+        <p:nvSpPr>
+          <p:cNvPr id="12" name="Text 9"/>
+          <p:cNvSpPr/>
+          <p:nvPr/>
+        </p:nvSpPr>
+        <p:spPr>
+          <a:xfrm>
+            <a:off x="7589520" y="2606040"/>
+            <a:ext cx="1097280" cy="685800"/>
+          </a:xfrm>
+          <a:prstGeom prst="rect">
+            <a:avLst/>
+          </a:prstGeom>
+          <a:noFill/>
+          <a:ln/>
+        </p:spPr>
+        <p:txBody>
+          <a:bodyPr wrap="square" lIns="0" tIns="0" rIns="0" bIns="0" rtlCol="0" anchor="ctr"/>
+          <a:lstStyle/>
           <a:p>
             <a:pPr marL="0" indent="0" algn="l">
               <a:buNone/>
             </a:pPr>
             <a:r>
-              <a:rPr lang="en-US" sz="1000" dirty="0">
+              <a:rPr lang="es-AR" sz="1000" noProof="0" dirty="0" err="1">
                 <a:solidFill>
                   <a:srgbClr val="A8C8D8"/>
                 </a:solidFill>
@@ -7029,9 +7676,37 @@
                 <a:ea typeface="Calibri" pitchFamily="34" charset="-122"/>
                 <a:cs typeface="Calibri" pitchFamily="34" charset="-120"/>
               </a:rPr>
-              <a:t>actual</a:t>
-            </a:r>
-            <a:endParaRPr lang="en-US" sz="1000" dirty="0"/>
+              <a:t>desacel</a:t>
+            </a:r>
+            <a:r>
+              <a:rPr lang="es-AR" sz="1000" noProof="0" dirty="0">
+                <a:solidFill>
+                  <a:srgbClr val="A8C8D8"/>
+                </a:solidFill>
+                <a:latin typeface="Calibri" pitchFamily="34" charset="0"/>
+                <a:ea typeface="Calibri" pitchFamily="34" charset="-122"/>
+                <a:cs typeface="Calibri" pitchFamily="34" charset="-120"/>
+              </a:rPr>
+              <a:t>.</a:t>
+            </a:r>
+            <a:endParaRPr lang="es-AR" sz="1000" noProof="0" dirty="0"/>
+          </a:p>
+          <a:p>
+            <a:pPr marL="0" indent="0" algn="l">
+              <a:buNone/>
+            </a:pPr>
+            <a:r>
+              <a:rPr lang="es-AR" sz="1000" noProof="0" dirty="0">
+                <a:solidFill>
+                  <a:srgbClr val="A8C8D8"/>
+                </a:solidFill>
+                <a:latin typeface="Calibri" pitchFamily="34" charset="0"/>
+                <a:ea typeface="Calibri" pitchFamily="34" charset="-122"/>
+                <a:cs typeface="Calibri" pitchFamily="34" charset="-120"/>
+              </a:rPr>
+              <a:t>moderada</a:t>
+            </a:r>
+            <a:endParaRPr lang="es-AR" sz="1000" noProof="0" dirty="0"/>
           </a:p>
         </p:txBody>
       </p:sp>
@@ -7072,7 +7747,7 @@
           <a:bodyPr/>
           <a:lstStyle/>
           <a:p>
-            <a:endParaRPr lang="es-AR"/>
+            <a:endParaRPr lang="es-AR" noProof="0" dirty="0"/>
           </a:p>
         </p:txBody>
       </p:sp>
@@ -7101,7 +7776,7 @@
               <a:buNone/>
             </a:pPr>
             <a:r>
-              <a:rPr lang="en-US" sz="1200" b="1" dirty="0">
+              <a:rPr lang="es-AR" sz="1200" b="1" noProof="0" dirty="0">
                 <a:solidFill>
                   <a:srgbClr val="D95F3B"/>
                 </a:solidFill>
@@ -7109,9 +7784,9 @@
                 <a:ea typeface="Calibri" pitchFamily="34" charset="-122"/>
                 <a:cs typeface="Calibri" pitchFamily="34" charset="-120"/>
               </a:rPr>
-              <a:t>Pesimista</a:t>
-            </a:r>
-            <a:endParaRPr lang="en-US" sz="1200" dirty="0"/>
+              <a:t>Pesimista (λ=0.20)</a:t>
+            </a:r>
+            <a:endParaRPr lang="es-AR" sz="1200" noProof="0" dirty="0"/>
           </a:p>
         </p:txBody>
       </p:sp>
@@ -7140,7 +7815,7 @@
               <a:buNone/>
             </a:pPr>
             <a:r>
-              <a:rPr lang="en-US" sz="2400" b="1" dirty="0">
+              <a:rPr lang="es-AR" sz="2400" b="1" dirty="0">
                 <a:solidFill>
                   <a:srgbClr val="D95F3B"/>
                 </a:solidFill>
@@ -7148,49 +7823,49 @@
                 <a:ea typeface="Calibri" pitchFamily="34" charset="-122"/>
                 <a:cs typeface="Calibri" pitchFamily="34" charset="-120"/>
               </a:rPr>
-              <a:t>54 M</a:t>
-            </a:r>
-            <a:endParaRPr lang="en-US" sz="2400" dirty="0"/>
-          </a:p>
-        </p:txBody>
-      </p:sp>
-      <p:sp>
-        <p:nvSpPr>
-          <p:cNvPr id="16" name="Text 13"/>
-          <p:cNvSpPr/>
-          <p:nvPr/>
-        </p:nvSpPr>
-        <p:spPr>
-          <a:xfrm>
-            <a:off x="7589520" y="3840480"/>
-            <a:ext cx="1097280" cy="685800"/>
-          </a:xfrm>
-          <a:prstGeom prst="rect">
-            <a:avLst/>
-          </a:prstGeom>
-          <a:noFill/>
-          <a:ln/>
-        </p:spPr>
-        <p:txBody>
-          <a:bodyPr wrap="square" lIns="0" tIns="0" rIns="0" bIns="0" rtlCol="0" anchor="ctr"/>
-          <a:lstStyle/>
-          <a:p>
-            <a:pPr marL="0" indent="0" algn="l">
-              <a:buNone/>
-            </a:pPr>
-            <a:r>
-              <a:rPr lang="en-US" sz="1000" dirty="0">
-                <a:solidFill>
-                  <a:srgbClr val="A8C8D8"/>
+              <a:t>49</a:t>
+            </a:r>
+            <a:r>
+              <a:rPr lang="es-AR" sz="2400" b="1" noProof="0" dirty="0">
+                <a:solidFill>
+                  <a:srgbClr val="D95F3B"/>
                 </a:solidFill>
                 <a:latin typeface="Calibri" pitchFamily="34" charset="0"/>
                 <a:ea typeface="Calibri" pitchFamily="34" charset="-122"/>
                 <a:cs typeface="Calibri" pitchFamily="34" charset="-120"/>
               </a:rPr>
-              <a:t>−</a:t>
-            </a:r>
-            <a:r>
-              <a:rPr lang="en-US" sz="1000" dirty="0" err="1">
+              <a:t> M</a:t>
+            </a:r>
+            <a:endParaRPr lang="es-AR" sz="2400" noProof="0" dirty="0"/>
+          </a:p>
+        </p:txBody>
+      </p:sp>
+      <p:sp>
+        <p:nvSpPr>
+          <p:cNvPr id="16" name="Text 13"/>
+          <p:cNvSpPr/>
+          <p:nvPr/>
+        </p:nvSpPr>
+        <p:spPr>
+          <a:xfrm>
+            <a:off x="7589520" y="3840480"/>
+            <a:ext cx="1097280" cy="685800"/>
+          </a:xfrm>
+          <a:prstGeom prst="rect">
+            <a:avLst/>
+          </a:prstGeom>
+          <a:noFill/>
+          <a:ln/>
+        </p:spPr>
+        <p:txBody>
+          <a:bodyPr wrap="square" lIns="0" tIns="0" rIns="0" bIns="0" rtlCol="0" anchor="ctr"/>
+          <a:lstStyle/>
+          <a:p>
+            <a:pPr marL="0" indent="0" algn="l">
+              <a:buNone/>
+            </a:pPr>
+            <a:r>
+              <a:rPr lang="es-AR" sz="1000" noProof="0" dirty="0" err="1">
                 <a:solidFill>
                   <a:srgbClr val="A8C8D8"/>
                 </a:solidFill>
@@ -7198,16 +7873,10 @@
                 <a:ea typeface="Calibri" pitchFamily="34" charset="-122"/>
                 <a:cs typeface="Calibri" pitchFamily="34" charset="-120"/>
               </a:rPr>
-              <a:t>migración</a:t>
-            </a:r>
-            <a:endParaRPr lang="en-US" sz="1000" dirty="0"/>
-          </a:p>
-          <a:p>
-            <a:pPr marL="0" indent="0" algn="l">
-              <a:buNone/>
-            </a:pPr>
-            <a:r>
-              <a:rPr lang="en-US" sz="1000" dirty="0">
+              <a:t>desacel</a:t>
+            </a:r>
+            <a:r>
+              <a:rPr lang="es-AR" sz="1000" noProof="0" dirty="0">
                 <a:solidFill>
                   <a:srgbClr val="A8C8D8"/>
                 </a:solidFill>
@@ -7215,10 +7884,16 @@
                 <a:ea typeface="Calibri" pitchFamily="34" charset="-122"/>
                 <a:cs typeface="Calibri" pitchFamily="34" charset="-120"/>
               </a:rPr>
-              <a:t>−</a:t>
-            </a:r>
-            <a:r>
-              <a:rPr lang="en-US" sz="1000" dirty="0" err="1">
+              <a:t>.</a:t>
+            </a:r>
+            <a:endParaRPr lang="es-AR" sz="1000" noProof="0" dirty="0"/>
+          </a:p>
+          <a:p>
+            <a:pPr marL="0" indent="0" algn="l">
+              <a:buNone/>
+            </a:pPr>
+            <a:r>
+              <a:rPr lang="es-AR" sz="1000" noProof="0" dirty="0">
                 <a:solidFill>
                   <a:srgbClr val="A8C8D8"/>
                 </a:solidFill>
@@ -7226,9 +7901,9 @@
                 <a:ea typeface="Calibri" pitchFamily="34" charset="-122"/>
                 <a:cs typeface="Calibri" pitchFamily="34" charset="-120"/>
               </a:rPr>
-              <a:t>natalidad</a:t>
-            </a:r>
-            <a:endParaRPr lang="en-US" sz="1000" dirty="0"/>
+              <a:t>rápida</a:t>
+            </a:r>
+            <a:endParaRPr lang="es-AR" sz="1000" noProof="0" dirty="0"/>
           </a:p>
         </p:txBody>
       </p:sp>
@@ -7240,7 +7915,7 @@
 </p:sld>
 </file>
 
-<file path=ppt/slides/slide13.xml><?xml version="1.0" encoding="utf-8"?>
+<file path=ppt/slides/slide14.xml><?xml version="1.0" encoding="utf-8"?>
 <p:sld xmlns:a="http://schemas.openxmlformats.org/drawingml/2006/main" xmlns:r="http://schemas.openxmlformats.org/officeDocument/2006/relationships" xmlns:p="http://schemas.openxmlformats.org/presentationml/2006/main">
   <p:cSld name="Slide 12">
     <p:bg>
@@ -7290,7 +7965,7 @@
               <a:buNone/>
             </a:pPr>
             <a:r>
-              <a:rPr lang="en-US" sz="2600" b="1" dirty="0">
+              <a:rPr lang="es-AR" sz="2600" b="1" noProof="0" dirty="0">
                 <a:solidFill>
                   <a:srgbClr val="FFFFFF"/>
                 </a:solidFill>
@@ -7300,7 +7975,7 @@
               </a:rPr>
               <a:t>Conclusiones</a:t>
             </a:r>
-            <a:endParaRPr lang="en-US" sz="2600" dirty="0"/>
+            <a:endParaRPr lang="es-AR" sz="2600" noProof="0" dirty="0"/>
           </a:p>
         </p:txBody>
       </p:sp>
@@ -7332,7 +8007,7 @@
           <a:bodyPr/>
           <a:lstStyle/>
           <a:p>
-            <a:endParaRPr lang="es-AR"/>
+            <a:endParaRPr lang="es-AR" noProof="0" dirty="0"/>
           </a:p>
         </p:txBody>
       </p:sp>
@@ -7373,7 +8048,7 @@
           <a:bodyPr/>
           <a:lstStyle/>
           <a:p>
-            <a:endParaRPr lang="es-AR"/>
+            <a:endParaRPr lang="es-AR" noProof="0" dirty="0"/>
           </a:p>
         </p:txBody>
       </p:sp>
@@ -7402,7 +8077,7 @@
               <a:buNone/>
             </a:pPr>
             <a:r>
-              <a:rPr lang="en-US" sz="2200" b="1" dirty="0">
+              <a:rPr lang="es-AR" sz="2200" b="1" noProof="0" dirty="0">
                 <a:solidFill>
                   <a:srgbClr val="2AA8BF"/>
                 </a:solidFill>
@@ -7412,7 +8087,7 @@
               </a:rPr>
               <a:t>01</a:t>
             </a:r>
-            <a:endParaRPr lang="en-US" sz="2200" dirty="0"/>
+            <a:endParaRPr lang="es-AR" sz="2200" noProof="0" dirty="0"/>
           </a:p>
         </p:txBody>
       </p:sp>
@@ -7444,7 +8119,7 @@
           <a:bodyPr/>
           <a:lstStyle/>
           <a:p>
-            <a:endParaRPr lang="es-AR"/>
+            <a:endParaRPr lang="es-AR" noProof="0" dirty="0"/>
           </a:p>
         </p:txBody>
       </p:sp>
@@ -7473,7 +8148,7 @@
               <a:buNone/>
             </a:pPr>
             <a:r>
-              <a:rPr lang="en-US" sz="1300" dirty="0">
+              <a:rPr lang="es-AR" sz="1300" noProof="0" dirty="0">
                 <a:solidFill>
                   <a:srgbClr val="FFFFFF"/>
                 </a:solidFill>
@@ -7481,9 +8156,9 @@
                 <a:ea typeface="Calibri" pitchFamily="34" charset="-122"/>
                 <a:cs typeface="Calibri" pitchFamily="34" charset="-120"/>
               </a:rPr>
-              <a:t>Argentina está en sub-reemplazo desde 2019 y el crecimiento vegetativo cayó un 85% en 10 años.</a:t>
-            </a:r>
-            <a:endParaRPr lang="en-US" sz="1300" dirty="0"/>
+              <a:t>Argentina está en sub-reemplazo desde 2019 y el crecimiento vegetativo cayó un 85% en 10 años. Estos son valores preocupantes a nivel nacional pero también a nivel mundial</a:t>
+            </a:r>
+            <a:endParaRPr lang="es-AR" sz="1300" noProof="0" dirty="0"/>
           </a:p>
         </p:txBody>
       </p:sp>
@@ -7524,7 +8199,7 @@
           <a:bodyPr/>
           <a:lstStyle/>
           <a:p>
-            <a:endParaRPr lang="es-AR"/>
+            <a:endParaRPr lang="es-AR" noProof="0" dirty="0"/>
           </a:p>
         </p:txBody>
       </p:sp>
@@ -7553,7 +8228,7 @@
               <a:buNone/>
             </a:pPr>
             <a:r>
-              <a:rPr lang="en-US" sz="2200" b="1" dirty="0">
+              <a:rPr lang="es-AR" sz="2200" b="1" noProof="0" dirty="0">
                 <a:solidFill>
                   <a:srgbClr val="E8A838"/>
                 </a:solidFill>
@@ -7563,7 +8238,7 @@
               </a:rPr>
               <a:t>02</a:t>
             </a:r>
-            <a:endParaRPr lang="en-US" sz="2200" dirty="0"/>
+            <a:endParaRPr lang="es-AR" sz="2200" noProof="0" dirty="0"/>
           </a:p>
         </p:txBody>
       </p:sp>
@@ -7595,7 +8270,7 @@
           <a:bodyPr/>
           <a:lstStyle/>
           <a:p>
-            <a:endParaRPr lang="es-AR"/>
+            <a:endParaRPr lang="es-AR" noProof="0" dirty="0"/>
           </a:p>
         </p:txBody>
       </p:sp>
@@ -7624,7 +8299,7 @@
               <a:buNone/>
             </a:pPr>
             <a:r>
-              <a:rPr lang="en-US" sz="1300" dirty="0">
+              <a:rPr lang="es-AR" sz="1300" noProof="0" dirty="0">
                 <a:solidFill>
                   <a:srgbClr val="FFFFFF"/>
                 </a:solidFill>
@@ -7632,10 +8307,10 @@
                 <a:ea typeface="Calibri" pitchFamily="34" charset="-122"/>
                 <a:cs typeface="Calibri" pitchFamily="34" charset="-120"/>
               </a:rPr>
-              <a:t>La UDE captura la dinámica real donde la ODE clásica falla. La red neuronal aprende la </a:t>
-            </a:r>
-            <a:r>
-              <a:rPr lang="en-US" sz="1300" dirty="0" err="1">
+              <a:t>La UDE captura la dinámica real donde la ODE clásica falla. La red neuronal logra predecir correctamente la población para </a:t>
+            </a:r>
+            <a:r>
+              <a:rPr lang="es-AR" sz="1300" dirty="0">
                 <a:solidFill>
                   <a:srgbClr val="FFFFFF"/>
                 </a:solidFill>
@@ -7643,10 +8318,10 @@
                 <a:ea typeface="Calibri" pitchFamily="34" charset="-122"/>
                 <a:cs typeface="Calibri" pitchFamily="34" charset="-120"/>
               </a:rPr>
-              <a:t>caída</a:t>
-            </a:r>
-            <a:r>
-              <a:rPr lang="en-US" sz="1300" dirty="0">
+              <a:t>nuestros datos, </a:t>
+            </a:r>
+            <a:r>
+              <a:rPr lang="es-AR" sz="1300" noProof="0" dirty="0">
                 <a:solidFill>
                   <a:srgbClr val="FFFFFF"/>
                 </a:solidFill>
@@ -7654,31 +8329,9 @@
                 <a:ea typeface="Calibri" pitchFamily="34" charset="-122"/>
                 <a:cs typeface="Calibri" pitchFamily="34" charset="-120"/>
               </a:rPr>
-              <a:t> de la </a:t>
-            </a:r>
-            <a:r>
-              <a:rPr lang="en-US" sz="1300" dirty="0" err="1">
-                <a:solidFill>
-                  <a:srgbClr val="FFFFFF"/>
-                </a:solidFill>
-                <a:latin typeface="Calibri" pitchFamily="34" charset="0"/>
-                <a:ea typeface="Calibri" pitchFamily="34" charset="-122"/>
-                <a:cs typeface="Calibri" pitchFamily="34" charset="-120"/>
-              </a:rPr>
-              <a:t>natalidad</a:t>
-            </a:r>
-            <a:r>
-              <a:rPr lang="en-US" sz="1300" dirty="0">
-                <a:solidFill>
-                  <a:srgbClr val="FFFFFF"/>
-                </a:solidFill>
-                <a:latin typeface="Calibri" pitchFamily="34" charset="0"/>
-                <a:ea typeface="Calibri" pitchFamily="34" charset="-122"/>
-                <a:cs typeface="Calibri" pitchFamily="34" charset="-120"/>
-              </a:rPr>
-              <a:t>.</a:t>
-            </a:r>
-            <a:endParaRPr lang="en-US" sz="1300" dirty="0"/>
+              <a:t>pero no logra capturar los cambios de la tasa de natalidad.</a:t>
+            </a:r>
+            <a:endParaRPr lang="es-AR" sz="1300" noProof="0" dirty="0"/>
           </a:p>
         </p:txBody>
       </p:sp>
@@ -7719,7 +8372,7 @@
           <a:bodyPr/>
           <a:lstStyle/>
           <a:p>
-            <a:endParaRPr lang="es-AR"/>
+            <a:endParaRPr lang="es-AR" noProof="0" dirty="0"/>
           </a:p>
         </p:txBody>
       </p:sp>
@@ -7748,7 +8401,7 @@
               <a:buNone/>
             </a:pPr>
             <a:r>
-              <a:rPr lang="en-US" sz="2200" b="1" dirty="0">
+              <a:rPr lang="es-AR" sz="2200" b="1" noProof="0" dirty="0">
                 <a:solidFill>
                   <a:srgbClr val="D95F3B"/>
                 </a:solidFill>
@@ -7758,7 +8411,7 @@
               </a:rPr>
               <a:t>03</a:t>
             </a:r>
-            <a:endParaRPr lang="en-US" sz="2200" dirty="0"/>
+            <a:endParaRPr lang="es-AR" sz="2200" noProof="0" dirty="0"/>
           </a:p>
         </p:txBody>
       </p:sp>
@@ -7790,7 +8443,7 @@
           <a:bodyPr/>
           <a:lstStyle/>
           <a:p>
-            <a:endParaRPr lang="es-AR"/>
+            <a:endParaRPr lang="es-AR" noProof="0" dirty="0"/>
           </a:p>
         </p:txBody>
       </p:sp>
@@ -7819,7 +8472,7 @@
               <a:buNone/>
             </a:pPr>
             <a:r>
-              <a:rPr lang="en-US" sz="1300" dirty="0">
+              <a:rPr lang="es-AR" sz="1300" noProof="0" dirty="0">
                 <a:solidFill>
                   <a:srgbClr val="FFFFFF"/>
                 </a:solidFill>
@@ -7827,9 +8480,31 @@
                 <a:ea typeface="Calibri" pitchFamily="34" charset="-122"/>
                 <a:cs typeface="Calibri" pitchFamily="34" charset="-120"/>
               </a:rPr>
-              <a:t>El modelo proyecta crecimiento moderado hasta 2050 (54–60 M según escenario), sin pico poblacional visible aún.</a:t>
-            </a:r>
-            <a:endParaRPr lang="en-US" sz="1300" dirty="0"/>
+              <a:t>El modelo con decaimiento λ logra </a:t>
+            </a:r>
+            <a:r>
+              <a:rPr lang="es-AR" sz="1300" dirty="0">
+                <a:solidFill>
+                  <a:srgbClr val="FFFFFF"/>
+                </a:solidFill>
+                <a:latin typeface="Calibri" pitchFamily="34" charset="0"/>
+                <a:ea typeface="Calibri" pitchFamily="34" charset="-122"/>
+                <a:cs typeface="Calibri" pitchFamily="34" charset="-120"/>
+              </a:rPr>
+              <a:t>modelar </a:t>
+            </a:r>
+            <a:r>
+              <a:rPr lang="es-AR" sz="1300" noProof="0" dirty="0">
+                <a:solidFill>
+                  <a:srgbClr val="FFFFFF"/>
+                </a:solidFill>
+                <a:latin typeface="Calibri" pitchFamily="34" charset="0"/>
+                <a:ea typeface="Calibri" pitchFamily="34" charset="-122"/>
+                <a:cs typeface="Calibri" pitchFamily="34" charset="-120"/>
+              </a:rPr>
+              <a:t>un crecimiento desacelerado hasta 2050, convergiendo hacia un pico poblacional dentro del siglo.</a:t>
+            </a:r>
+            <a:endParaRPr lang="es-AR" sz="1300" noProof="0" dirty="0"/>
           </a:p>
         </p:txBody>
       </p:sp>
@@ -7870,7 +8545,7 @@
           <a:bodyPr/>
           <a:lstStyle/>
           <a:p>
-            <a:endParaRPr lang="es-AR"/>
+            <a:endParaRPr lang="es-AR" noProof="0" dirty="0"/>
           </a:p>
         </p:txBody>
       </p:sp>
@@ -7899,7 +8574,7 @@
               <a:buNone/>
             </a:pPr>
             <a:r>
-              <a:rPr lang="en-US" sz="2200" b="1" dirty="0">
+              <a:rPr lang="es-AR" sz="2200" b="1" noProof="0" dirty="0">
                 <a:solidFill>
                   <a:srgbClr val="7B8EBF"/>
                 </a:solidFill>
@@ -7909,7 +8584,7 @@
               </a:rPr>
               <a:t>04</a:t>
             </a:r>
-            <a:endParaRPr lang="en-US" sz="2200" dirty="0"/>
+            <a:endParaRPr lang="es-AR" sz="2200" noProof="0" dirty="0"/>
           </a:p>
         </p:txBody>
       </p:sp>
@@ -7941,7 +8616,7 @@
           <a:bodyPr/>
           <a:lstStyle/>
           <a:p>
-            <a:endParaRPr lang="es-AR"/>
+            <a:endParaRPr lang="es-AR" noProof="0" dirty="0"/>
           </a:p>
         </p:txBody>
       </p:sp>
@@ -7970,7 +8645,7 @@
               <a:buNone/>
             </a:pPr>
             <a:r>
-              <a:rPr lang="en-US" sz="1300" dirty="0" err="1">
+              <a:rPr lang="es-AR" sz="1300" noProof="0" dirty="0">
                 <a:solidFill>
                   <a:srgbClr val="FFFFFF"/>
                 </a:solidFill>
@@ -7978,10 +8653,10 @@
                 <a:ea typeface="Calibri" pitchFamily="34" charset="-122"/>
                 <a:cs typeface="Calibri" pitchFamily="34" charset="-120"/>
               </a:rPr>
-              <a:t>Basándonos</a:t>
-            </a:r>
-            <a:r>
-              <a:rPr lang="en-US" sz="1300" dirty="0">
+              <a:t>Basándonos en nuestro análisis histórico </a:t>
+            </a:r>
+            <a:r>
+              <a:rPr lang="es-AR" sz="1300" dirty="0">
                 <a:solidFill>
                   <a:srgbClr val="FFFFFF"/>
                 </a:solidFill>
@@ -7989,10 +8664,10 @@
                 <a:ea typeface="Calibri" pitchFamily="34" charset="-122"/>
                 <a:cs typeface="Calibri" pitchFamily="34" charset="-120"/>
               </a:rPr>
-              <a:t> </a:t>
-            </a:r>
-            <a:r>
-              <a:rPr lang="en-US" sz="1300" dirty="0" err="1">
+              <a:t>y predictivo, l</a:t>
+            </a:r>
+            <a:r>
+              <a:rPr lang="es-AR" sz="1300" noProof="0" dirty="0">
                 <a:solidFill>
                   <a:srgbClr val="FFFFFF"/>
                 </a:solidFill>
@@ -8000,196 +8675,9 @@
                 <a:ea typeface="Calibri" pitchFamily="34" charset="-122"/>
                 <a:cs typeface="Calibri" pitchFamily="34" charset="-120"/>
               </a:rPr>
-              <a:t>en</a:t>
-            </a:r>
-            <a:r>
-              <a:rPr lang="en-US" sz="1300" dirty="0">
-                <a:solidFill>
-                  <a:srgbClr val="FFFFFF"/>
-                </a:solidFill>
-                <a:latin typeface="Calibri" pitchFamily="34" charset="0"/>
-                <a:ea typeface="Calibri" pitchFamily="34" charset="-122"/>
-                <a:cs typeface="Calibri" pitchFamily="34" charset="-120"/>
-              </a:rPr>
-              <a:t> </a:t>
-            </a:r>
-            <a:r>
-              <a:rPr lang="en-US" sz="1300" dirty="0" err="1">
-                <a:solidFill>
-                  <a:srgbClr val="FFFFFF"/>
-                </a:solidFill>
-                <a:latin typeface="Calibri" pitchFamily="34" charset="0"/>
-                <a:ea typeface="Calibri" pitchFamily="34" charset="-122"/>
-                <a:cs typeface="Calibri" pitchFamily="34" charset="-120"/>
-              </a:rPr>
-              <a:t>el</a:t>
-            </a:r>
-            <a:r>
-              <a:rPr lang="en-US" sz="1300" dirty="0">
-                <a:solidFill>
-                  <a:srgbClr val="FFFFFF"/>
-                </a:solidFill>
-                <a:latin typeface="Calibri" pitchFamily="34" charset="0"/>
-                <a:ea typeface="Calibri" pitchFamily="34" charset="-122"/>
-                <a:cs typeface="Calibri" pitchFamily="34" charset="-120"/>
-              </a:rPr>
-              <a:t> </a:t>
-            </a:r>
-            <a:r>
-              <a:rPr lang="en-US" sz="1300" dirty="0" err="1">
-                <a:solidFill>
-                  <a:srgbClr val="FFFFFF"/>
-                </a:solidFill>
-                <a:latin typeface="Calibri" pitchFamily="34" charset="0"/>
-                <a:ea typeface="Calibri" pitchFamily="34" charset="-122"/>
-                <a:cs typeface="Calibri" pitchFamily="34" charset="-120"/>
-              </a:rPr>
-              <a:t>análisis</a:t>
-            </a:r>
-            <a:r>
-              <a:rPr lang="en-US" sz="1300" dirty="0">
-                <a:solidFill>
-                  <a:srgbClr val="FFFFFF"/>
-                </a:solidFill>
-                <a:latin typeface="Calibri" pitchFamily="34" charset="0"/>
-                <a:ea typeface="Calibri" pitchFamily="34" charset="-122"/>
-                <a:cs typeface="Calibri" pitchFamily="34" charset="-120"/>
-              </a:rPr>
-              <a:t> histórico, la pregunta ya no es si Argentina llega al pico poblacional, sino cuándo. La TGF es la variable </a:t>
-            </a:r>
-            <a:r>
-              <a:rPr lang="en-US" sz="1300" dirty="0" err="1">
-                <a:solidFill>
-                  <a:srgbClr val="FFFFFF"/>
-                </a:solidFill>
-                <a:latin typeface="Calibri" pitchFamily="34" charset="0"/>
-                <a:ea typeface="Calibri" pitchFamily="34" charset="-122"/>
-                <a:cs typeface="Calibri" pitchFamily="34" charset="-120"/>
-              </a:rPr>
-              <a:t>decisiva</a:t>
-            </a:r>
-            <a:r>
-              <a:rPr lang="en-US" sz="1300" dirty="0">
-                <a:solidFill>
-                  <a:srgbClr val="FFFFFF"/>
-                </a:solidFill>
-                <a:latin typeface="Calibri" pitchFamily="34" charset="0"/>
-                <a:ea typeface="Calibri" pitchFamily="34" charset="-122"/>
-                <a:cs typeface="Calibri" pitchFamily="34" charset="-120"/>
-              </a:rPr>
-              <a:t> y no </a:t>
-            </a:r>
-            <a:r>
-              <a:rPr lang="en-US" sz="1300" dirty="0" err="1">
-                <a:solidFill>
-                  <a:srgbClr val="FFFFFF"/>
-                </a:solidFill>
-                <a:latin typeface="Calibri" pitchFamily="34" charset="0"/>
-                <a:ea typeface="Calibri" pitchFamily="34" charset="-122"/>
-                <a:cs typeface="Calibri" pitchFamily="34" charset="-120"/>
-              </a:rPr>
-              <a:t>parece</a:t>
-            </a:r>
-            <a:r>
-              <a:rPr lang="en-US" sz="1300" dirty="0">
-                <a:solidFill>
-                  <a:srgbClr val="FFFFFF"/>
-                </a:solidFill>
-                <a:latin typeface="Calibri" pitchFamily="34" charset="0"/>
-                <a:ea typeface="Calibri" pitchFamily="34" charset="-122"/>
-                <a:cs typeface="Calibri" pitchFamily="34" charset="-120"/>
-              </a:rPr>
-              <a:t> </a:t>
-            </a:r>
-            <a:r>
-              <a:rPr lang="en-US" sz="1300" dirty="0" err="1">
-                <a:solidFill>
-                  <a:srgbClr val="FFFFFF"/>
-                </a:solidFill>
-                <a:latin typeface="Calibri" pitchFamily="34" charset="0"/>
-                <a:ea typeface="Calibri" pitchFamily="34" charset="-122"/>
-                <a:cs typeface="Calibri" pitchFamily="34" charset="-120"/>
-              </a:rPr>
-              <a:t>que</a:t>
-            </a:r>
-            <a:r>
-              <a:rPr lang="en-US" sz="1300" dirty="0">
-                <a:solidFill>
-                  <a:srgbClr val="FFFFFF"/>
-                </a:solidFill>
-                <a:latin typeface="Calibri" pitchFamily="34" charset="0"/>
-                <a:ea typeface="Calibri" pitchFamily="34" charset="-122"/>
-                <a:cs typeface="Calibri" pitchFamily="34" charset="-120"/>
-              </a:rPr>
-              <a:t> se </a:t>
-            </a:r>
-            <a:r>
-              <a:rPr lang="en-US" sz="1300" dirty="0" err="1">
-                <a:solidFill>
-                  <a:srgbClr val="FFFFFF"/>
-                </a:solidFill>
-                <a:latin typeface="Calibri" pitchFamily="34" charset="0"/>
-                <a:ea typeface="Calibri" pitchFamily="34" charset="-122"/>
-                <a:cs typeface="Calibri" pitchFamily="34" charset="-120"/>
-              </a:rPr>
-              <a:t>vaya</a:t>
-            </a:r>
-            <a:r>
-              <a:rPr lang="en-US" sz="1300" dirty="0">
-                <a:solidFill>
-                  <a:srgbClr val="FFFFFF"/>
-                </a:solidFill>
-                <a:latin typeface="Calibri" pitchFamily="34" charset="0"/>
-                <a:ea typeface="Calibri" pitchFamily="34" charset="-122"/>
-                <a:cs typeface="Calibri" pitchFamily="34" charset="-120"/>
-              </a:rPr>
-              <a:t> a </a:t>
-            </a:r>
-            <a:r>
-              <a:rPr lang="en-US" sz="1300" dirty="0" err="1">
-                <a:solidFill>
-                  <a:srgbClr val="FFFFFF"/>
-                </a:solidFill>
-                <a:latin typeface="Calibri" pitchFamily="34" charset="0"/>
-                <a:ea typeface="Calibri" pitchFamily="34" charset="-122"/>
-                <a:cs typeface="Calibri" pitchFamily="34" charset="-120"/>
-              </a:rPr>
-              <a:t>recuperar</a:t>
-            </a:r>
-            <a:r>
-              <a:rPr lang="en-US" sz="1300" dirty="0">
-                <a:solidFill>
-                  <a:srgbClr val="FFFFFF"/>
-                </a:solidFill>
-                <a:latin typeface="Calibri" pitchFamily="34" charset="0"/>
-                <a:ea typeface="Calibri" pitchFamily="34" charset="-122"/>
-                <a:cs typeface="Calibri" pitchFamily="34" charset="-120"/>
-              </a:rPr>
-              <a:t> </a:t>
-            </a:r>
-            <a:r>
-              <a:rPr lang="en-US" sz="1300" dirty="0" err="1">
-                <a:solidFill>
-                  <a:srgbClr val="FFFFFF"/>
-                </a:solidFill>
-                <a:latin typeface="Calibri" pitchFamily="34" charset="0"/>
-                <a:ea typeface="Calibri" pitchFamily="34" charset="-122"/>
-                <a:cs typeface="Calibri" pitchFamily="34" charset="-120"/>
-              </a:rPr>
-              <a:t>dentro</a:t>
-            </a:r>
-            <a:r>
-              <a:rPr lang="en-US" sz="1300" dirty="0">
-                <a:solidFill>
-                  <a:srgbClr val="FFFFFF"/>
-                </a:solidFill>
-                <a:latin typeface="Calibri" pitchFamily="34" charset="0"/>
-                <a:ea typeface="Calibri" pitchFamily="34" charset="-122"/>
-                <a:cs typeface="Calibri" pitchFamily="34" charset="-120"/>
-              </a:rPr>
-              <a:t> de poco.</a:t>
-            </a:r>
-            <a:endParaRPr lang="en-US" sz="1300" dirty="0"/>
+              <a:t>a pregunta ya no es si Argentina llega al pico poblacional, sino cuándo. </a:t>
+            </a:r>
+            <a:endParaRPr lang="es-AR" sz="1300" noProof="0" dirty="0"/>
           </a:p>
         </p:txBody>
       </p:sp>
@@ -8251,7 +8739,7 @@
               <a:buNone/>
             </a:pPr>
             <a:r>
-              <a:rPr lang="en-US" sz="2600" b="1" dirty="0">
+              <a:rPr lang="es-AR" sz="2600" b="1" noProof="0" dirty="0">
                 <a:solidFill>
                   <a:srgbClr val="1B2A4A"/>
                 </a:solidFill>
@@ -8261,7 +8749,7 @@
               </a:rPr>
               <a:t>Contexto y Motivación</a:t>
             </a:r>
-            <a:endParaRPr lang="en-US" sz="2600" dirty="0"/>
+            <a:endParaRPr lang="es-AR" sz="2600" noProof="0" dirty="0"/>
           </a:p>
         </p:txBody>
       </p:sp>
@@ -8293,7 +8781,7 @@
           <a:bodyPr/>
           <a:lstStyle/>
           <a:p>
-            <a:endParaRPr lang="es-AR"/>
+            <a:endParaRPr lang="es-AR" noProof="0" dirty="0"/>
           </a:p>
         </p:txBody>
       </p:sp>
@@ -8334,7 +8822,7 @@
           <a:bodyPr/>
           <a:lstStyle/>
           <a:p>
-            <a:endParaRPr lang="es-AR"/>
+            <a:endParaRPr lang="es-AR" noProof="0" dirty="0"/>
           </a:p>
         </p:txBody>
       </p:sp>
@@ -8387,7 +8875,7 @@
               <a:buNone/>
             </a:pPr>
             <a:r>
-              <a:rPr lang="en-US" sz="1500" b="1" dirty="0">
+              <a:rPr lang="es-AR" sz="1500" b="1" noProof="0" dirty="0">
                 <a:solidFill>
                   <a:srgbClr val="1B2A4A"/>
                 </a:solidFill>
@@ -8397,7 +8885,7 @@
               </a:rPr>
               <a:t>El problema global</a:t>
             </a:r>
-            <a:endParaRPr lang="en-US" sz="1500" dirty="0"/>
+            <a:endParaRPr lang="es-AR" sz="1500" noProof="0" dirty="0"/>
           </a:p>
         </p:txBody>
       </p:sp>
@@ -8426,7 +8914,7 @@
               <a:buNone/>
             </a:pPr>
             <a:r>
-              <a:rPr lang="en-US" sz="1300" dirty="0">
+              <a:rPr lang="es-AR" sz="1300" noProof="0" dirty="0">
                 <a:solidFill>
                   <a:srgbClr val="1B2A4A"/>
                 </a:solidFill>
@@ -8434,10 +8922,16 @@
                 <a:ea typeface="Calibri" pitchFamily="34" charset="-122"/>
                 <a:cs typeface="Calibri" pitchFamily="34" charset="-120"/>
               </a:rPr>
-              <a:t>La mayoría de los países desarrollados no alcanzan la tasa de </a:t>
-            </a:r>
-            <a:r>
-              <a:rPr lang="en-US" sz="1300" dirty="0" err="1">
+              <a:t>La mayoría de los países desarrollados no alcanzan la tasa de natalidad necesaria para el reemplazo generacional (2,1 hijos por mujer).</a:t>
+            </a:r>
+            <a:endParaRPr lang="es-AR" sz="1300" noProof="0" dirty="0"/>
+          </a:p>
+          <a:p>
+            <a:pPr marL="0" indent="0" algn="l">
+              <a:buNone/>
+            </a:pPr>
+            <a:r>
+              <a:rPr lang="es-AR" sz="1300" noProof="0" dirty="0">
                 <a:solidFill>
                   <a:srgbClr val="1B2A4A"/>
                 </a:solidFill>
@@ -8445,10 +8939,16 @@
                 <a:ea typeface="Calibri" pitchFamily="34" charset="-122"/>
                 <a:cs typeface="Calibri" pitchFamily="34" charset="-120"/>
               </a:rPr>
-              <a:t>natalidad</a:t>
-            </a:r>
-            <a:r>
-              <a:rPr lang="en-US" sz="1300" dirty="0">
+              <a:t> </a:t>
+            </a:r>
+            <a:endParaRPr lang="es-AR" sz="1300" noProof="0" dirty="0"/>
+          </a:p>
+          <a:p>
+            <a:pPr marL="0" indent="0" algn="l">
+              <a:buNone/>
+            </a:pPr>
+            <a:r>
+              <a:rPr lang="es-AR" sz="1300" noProof="0" dirty="0">
                 <a:solidFill>
                   <a:srgbClr val="1B2A4A"/>
                 </a:solidFill>
@@ -8456,43 +8956,9 @@
                 <a:ea typeface="Calibri" pitchFamily="34" charset="-122"/>
                 <a:cs typeface="Calibri" pitchFamily="34" charset="-120"/>
               </a:rPr>
-              <a:t> necesaria para el reemplazo generacional (2,1 hijos por mujer).</a:t>
-            </a:r>
-            <a:endParaRPr lang="en-US" sz="1300" dirty="0"/>
-          </a:p>
-          <a:p>
-            <a:pPr marL="0" indent="0" algn="l">
-              <a:buNone/>
-            </a:pPr>
-            <a:r>
-              <a:rPr lang="en-US" sz="1300" dirty="0">
-                <a:solidFill>
-                  <a:srgbClr val="1B2A4A"/>
-                </a:solidFill>
-                <a:latin typeface="Calibri" pitchFamily="34" charset="0"/>
-                <a:ea typeface="Calibri" pitchFamily="34" charset="-122"/>
-                <a:cs typeface="Calibri" pitchFamily="34" charset="-120"/>
-              </a:rPr>
-              <a:t> </a:t>
-            </a:r>
-            <a:endParaRPr lang="en-US" sz="1300" dirty="0"/>
-          </a:p>
-          <a:p>
-            <a:pPr marL="0" indent="0" algn="l">
-              <a:buNone/>
-            </a:pPr>
-            <a:r>
-              <a:rPr lang="en-US" sz="1300" dirty="0">
-                <a:solidFill>
-                  <a:srgbClr val="1B2A4A"/>
-                </a:solidFill>
-                <a:latin typeface="Calibri" pitchFamily="34" charset="0"/>
-                <a:ea typeface="Calibri" pitchFamily="34" charset="-122"/>
-                <a:cs typeface="Calibri" pitchFamily="34" charset="-120"/>
-              </a:rPr>
               <a:t>Los medios predicen consecuencias económicas y sociales, pero sin precisión sobre tiempos, causas ni magnitudes.</a:t>
             </a:r>
-            <a:endParaRPr lang="en-US" sz="1300" dirty="0"/>
+            <a:endParaRPr lang="es-AR" sz="1300" noProof="0" dirty="0"/>
           </a:p>
         </p:txBody>
       </p:sp>
@@ -8533,7 +8999,7 @@
           <a:bodyPr/>
           <a:lstStyle/>
           <a:p>
-            <a:endParaRPr lang="es-AR"/>
+            <a:endParaRPr lang="es-AR" noProof="0" dirty="0"/>
           </a:p>
         </p:txBody>
       </p:sp>
@@ -8586,7 +9052,7 @@
               <a:buNone/>
             </a:pPr>
             <a:r>
-              <a:rPr lang="en-US" sz="1500" b="1" dirty="0">
+              <a:rPr lang="es-AR" sz="1500" b="1" noProof="0" dirty="0">
                 <a:solidFill>
                   <a:srgbClr val="1B2A4A"/>
                 </a:solidFill>
@@ -8596,7 +9062,7 @@
               </a:rPr>
               <a:t>Este trabajo responde</a:t>
             </a:r>
-            <a:endParaRPr lang="en-US" sz="1500" dirty="0"/>
+            <a:endParaRPr lang="es-AR" sz="1500" noProof="0" dirty="0"/>
           </a:p>
         </p:txBody>
       </p:sp>
@@ -8626,7 +9092,7 @@
               <a:buChar char="•"/>
             </a:pPr>
             <a:r>
-              <a:rPr lang="en-US" sz="1300" dirty="0">
+              <a:rPr lang="es-AR" sz="1300" noProof="0" dirty="0">
                 <a:solidFill>
                   <a:srgbClr val="1B2A4A"/>
                 </a:solidFill>
@@ -8636,7 +9102,7 @@
               </a:rPr>
               <a:t>¿Qué variables son fundamentales para la dinámica poblacional de Argentina?</a:t>
             </a:r>
-            <a:endParaRPr lang="en-US" sz="1300" dirty="0"/>
+            <a:endParaRPr lang="es-AR" sz="1300" noProof="0" dirty="0"/>
           </a:p>
           <a:p>
             <a:pPr marL="342900" indent="-342900" algn="l">
@@ -8644,7 +9110,7 @@
               <a:buChar char="•"/>
             </a:pPr>
             <a:r>
-              <a:rPr lang="en-US" sz="1300" dirty="0">
+              <a:rPr lang="es-AR" sz="1300" noProof="0" dirty="0">
                 <a:solidFill>
                   <a:srgbClr val="1B2A4A"/>
                 </a:solidFill>
@@ -8654,7 +9120,7 @@
               </a:rPr>
               <a:t>¿Dónde estamos parados hoy?</a:t>
             </a:r>
-            <a:endParaRPr lang="en-US" sz="1300" dirty="0"/>
+            <a:endParaRPr lang="es-AR" sz="1300" noProof="0" dirty="0"/>
           </a:p>
           <a:p>
             <a:pPr marL="342900" indent="-342900" algn="l">
@@ -8662,7 +9128,7 @@
               <a:buChar char="•"/>
             </a:pPr>
             <a:r>
-              <a:rPr lang="en-US" sz="1300" dirty="0">
+              <a:rPr lang="es-AR" sz="1300" noProof="0" dirty="0">
                 <a:solidFill>
                   <a:srgbClr val="1B2A4A"/>
                 </a:solidFill>
@@ -8672,7 +9138,7 @@
               </a:rPr>
               <a:t>¿Hacia dónde vamos al 2050?</a:t>
             </a:r>
-            <a:endParaRPr lang="en-US" sz="1300" dirty="0"/>
+            <a:endParaRPr lang="es-AR" sz="1300" noProof="0" dirty="0"/>
           </a:p>
         </p:txBody>
       </p:sp>
@@ -8734,7 +9200,7 @@
               <a:buNone/>
             </a:pPr>
             <a:r>
-              <a:rPr lang="en-US" sz="2600" b="1" dirty="0">
+              <a:rPr lang="es-AR" sz="2600" b="1" noProof="0" dirty="0">
                 <a:solidFill>
                   <a:srgbClr val="1B2A4A"/>
                 </a:solidFill>
@@ -8744,7 +9210,7 @@
               </a:rPr>
               <a:t>Datos y Métricas Utilizadas</a:t>
             </a:r>
-            <a:endParaRPr lang="en-US" sz="2600" dirty="0"/>
+            <a:endParaRPr lang="es-AR" sz="2600" noProof="0" dirty="0"/>
           </a:p>
         </p:txBody>
       </p:sp>
@@ -8776,7 +9242,7 @@
           <a:bodyPr/>
           <a:lstStyle/>
           <a:p>
-            <a:endParaRPr lang="es-AR"/>
+            <a:endParaRPr lang="es-AR" noProof="0" dirty="0"/>
           </a:p>
         </p:txBody>
       </p:sp>
@@ -8789,7 +9255,7 @@
           <p:nvPr>
             <p:extLst>
               <p:ext uri="{D42A27DB-BD31-4B8C-83A1-F6EECF244321}">
-                <p14:modId xmlns:p14="http://schemas.microsoft.com/office/powerpoint/2010/main" val="2247737652"/>
+                <p14:modId xmlns:p14="http://schemas.microsoft.com/office/powerpoint/2010/main" val="3716067846"/>
               </p:ext>
             </p:extLst>
           </p:nvPr>
@@ -8835,7 +9301,7 @@
                         <a:buNone/>
                       </a:pPr>
                       <a:r>
-                        <a:rPr lang="en-US" sz="1300" b="1" dirty="0">
+                        <a:rPr lang="es-AR" sz="1300" b="1" noProof="0" dirty="0">
                           <a:solidFill>
                             <a:srgbClr val="FFFFFF"/>
                           </a:solidFill>
@@ -8845,7 +9311,7 @@
                         </a:rPr>
                         <a:t>Métrica</a:t>
                       </a:r>
-                      <a:endParaRPr lang="en-US" sz="1300" dirty="0">
+                      <a:endParaRPr lang="es-AR" sz="1300" noProof="0" dirty="0">
                         <a:latin typeface="Calibri" charset="0"/>
                         <a:ea typeface="Calibri" charset="0"/>
                         <a:cs typeface="Calibri" charset="0"/>
@@ -8903,7 +9369,7 @@
                         <a:buNone/>
                       </a:pPr>
                       <a:r>
-                        <a:rPr lang="en-US" sz="1300" b="1" dirty="0">
+                        <a:rPr lang="es-AR" sz="1300" b="1" noProof="0" dirty="0">
                           <a:solidFill>
                             <a:srgbClr val="FFFFFF"/>
                           </a:solidFill>
@@ -8913,7 +9379,7 @@
                         </a:rPr>
                         <a:t>Fórmula</a:t>
                       </a:r>
-                      <a:endParaRPr lang="en-US" sz="1300" dirty="0">
+                      <a:endParaRPr lang="es-AR" sz="1300" noProof="0" dirty="0">
                         <a:latin typeface="Calibri" charset="0"/>
                         <a:ea typeface="Calibri" charset="0"/>
                         <a:cs typeface="Calibri" charset="0"/>
@@ -8971,7 +9437,7 @@
                         <a:buNone/>
                       </a:pPr>
                       <a:r>
-                        <a:rPr lang="en-US" sz="1300" b="1" dirty="0">
+                        <a:rPr lang="es-AR" sz="1300" b="1" noProof="0" dirty="0">
                           <a:solidFill>
                             <a:srgbClr val="FFFFFF"/>
                           </a:solidFill>
@@ -8981,7 +9447,7 @@
                         </a:rPr>
                         <a:t>Interpretación</a:t>
                       </a:r>
-                      <a:endParaRPr lang="en-US" sz="1300" dirty="0">
+                      <a:endParaRPr lang="es-AR" sz="1300" noProof="0" dirty="0">
                         <a:latin typeface="Calibri" charset="0"/>
                         <a:ea typeface="Calibri" charset="0"/>
                         <a:cs typeface="Calibri" charset="0"/>
@@ -9046,7 +9512,7 @@
                         <a:buNone/>
                       </a:pPr>
                       <a:r>
-                        <a:rPr lang="en-US" sz="1300" dirty="0">
+                        <a:rPr lang="es-AR" sz="1300" noProof="0" dirty="0">
                           <a:solidFill>
                             <a:srgbClr val="1B2A4A"/>
                           </a:solidFill>
@@ -9056,7 +9522,7 @@
                         </a:rPr>
                         <a:t>TBN — Tasa Bruta de Natalidad</a:t>
                       </a:r>
-                      <a:endParaRPr lang="en-US" sz="1300" dirty="0">
+                      <a:endParaRPr lang="es-AR" sz="1300" noProof="0" dirty="0">
                         <a:latin typeface="Calibri" charset="0"/>
                         <a:ea typeface="Calibri" charset="0"/>
                         <a:cs typeface="Calibri" charset="0"/>
@@ -9114,7 +9580,7 @@
                         <a:buNone/>
                       </a:pPr>
                       <a:r>
-                        <a:rPr lang="en-US" sz="1300" dirty="0">
+                        <a:rPr lang="es-AR" sz="1300" noProof="0" dirty="0">
                           <a:solidFill>
                             <a:srgbClr val="1B2A4A"/>
                           </a:solidFill>
@@ -9124,7 +9590,7 @@
                         </a:rPr>
                         <a:t>(nacimientos / P) × 1000</a:t>
                       </a:r>
-                      <a:endParaRPr lang="en-US" sz="1300" dirty="0">
+                      <a:endParaRPr lang="es-AR" sz="1300" noProof="0" dirty="0">
                         <a:latin typeface="Calibri" charset="0"/>
                         <a:ea typeface="Calibri" charset="0"/>
                         <a:cs typeface="Calibri" charset="0"/>
@@ -9182,7 +9648,7 @@
                         <a:buNone/>
                       </a:pPr>
                       <a:r>
-                        <a:rPr lang="en-US" sz="1300" dirty="0">
+                        <a:rPr lang="es-AR" sz="1300" noProof="0" dirty="0">
                           <a:solidFill>
                             <a:srgbClr val="1B2A4A"/>
                           </a:solidFill>
@@ -9192,7 +9658,7 @@
                         </a:rPr>
                         <a:t>Nacidos vivos por cada 1.000 hab.</a:t>
                       </a:r>
-                      <a:endParaRPr lang="en-US" sz="1300" dirty="0">
+                      <a:endParaRPr lang="es-AR" sz="1300" noProof="0" dirty="0">
                         <a:latin typeface="Calibri" charset="0"/>
                         <a:ea typeface="Calibri" charset="0"/>
                         <a:cs typeface="Calibri" charset="0"/>
@@ -9257,7 +9723,7 @@
                         <a:buNone/>
                       </a:pPr>
                       <a:r>
-                        <a:rPr lang="en-US" sz="1300" dirty="0">
+                        <a:rPr lang="es-AR" sz="1300" noProof="0" dirty="0">
                           <a:solidFill>
                             <a:srgbClr val="1B2A4A"/>
                           </a:solidFill>
@@ -9267,7 +9733,7 @@
                         </a:rPr>
                         <a:t>TBM — Tasa Bruta de Mortalidad</a:t>
                       </a:r>
-                      <a:endParaRPr lang="en-US" sz="1300" dirty="0">
+                      <a:endParaRPr lang="es-AR" sz="1300" noProof="0" dirty="0">
                         <a:latin typeface="Calibri" charset="0"/>
                         <a:ea typeface="Calibri" charset="0"/>
                         <a:cs typeface="Calibri" charset="0"/>
@@ -9325,7 +9791,7 @@
                         <a:buNone/>
                       </a:pPr>
                       <a:r>
-                        <a:rPr lang="en-US" sz="1300" dirty="0">
+                        <a:rPr lang="es-AR" sz="1300" noProof="0" dirty="0">
                           <a:solidFill>
                             <a:srgbClr val="1B2A4A"/>
                           </a:solidFill>
@@ -9335,7 +9801,7 @@
                         </a:rPr>
                         <a:t>(defunciones / P) × 1000</a:t>
                       </a:r>
-                      <a:endParaRPr lang="en-US" sz="1300" dirty="0">
+                      <a:endParaRPr lang="es-AR" sz="1300" noProof="0" dirty="0">
                         <a:latin typeface="Calibri" charset="0"/>
                         <a:ea typeface="Calibri" charset="0"/>
                         <a:cs typeface="Calibri" charset="0"/>
@@ -9393,7 +9859,7 @@
                         <a:buNone/>
                       </a:pPr>
                       <a:r>
-                        <a:rPr lang="en-US" sz="1300" dirty="0">
+                        <a:rPr lang="es-AR" sz="1300" noProof="0" dirty="0">
                           <a:solidFill>
                             <a:srgbClr val="1B2A4A"/>
                           </a:solidFill>
@@ -9403,7 +9869,7 @@
                         </a:rPr>
                         <a:t>Defunciones por cada 1.000 hab.</a:t>
                       </a:r>
-                      <a:endParaRPr lang="en-US" sz="1300" dirty="0">
+                      <a:endParaRPr lang="es-AR" sz="1300" noProof="0" dirty="0">
                         <a:latin typeface="Calibri" charset="0"/>
                         <a:ea typeface="Calibri" charset="0"/>
                         <a:cs typeface="Calibri" charset="0"/>
@@ -9468,7 +9934,7 @@
                         <a:buNone/>
                       </a:pPr>
                       <a:r>
-                        <a:rPr lang="en-US" sz="1300" dirty="0">
+                        <a:rPr lang="es-AR" sz="1300" noProof="0" dirty="0">
                           <a:solidFill>
                             <a:srgbClr val="1B2A4A"/>
                           </a:solidFill>
@@ -9478,7 +9944,7 @@
                         </a:rPr>
                         <a:t>Crecimiento Vegetativo</a:t>
                       </a:r>
-                      <a:endParaRPr lang="en-US" sz="1300" dirty="0">
+                      <a:endParaRPr lang="es-AR" sz="1300" noProof="0" dirty="0">
                         <a:latin typeface="Calibri" charset="0"/>
                         <a:ea typeface="Calibri" charset="0"/>
                         <a:cs typeface="Calibri" charset="0"/>
@@ -9536,7 +10002,7 @@
                         <a:buNone/>
                       </a:pPr>
                       <a:r>
-                        <a:rPr lang="en-US" sz="1300" dirty="0">
+                        <a:rPr lang="es-AR" sz="1300" noProof="0" dirty="0">
                           <a:solidFill>
                             <a:srgbClr val="1B2A4A"/>
                           </a:solidFill>
@@ -9546,7 +10012,7 @@
                         </a:rPr>
                         <a:t>nacimientos − defunciones</a:t>
                       </a:r>
-                      <a:endParaRPr lang="en-US" sz="1300" dirty="0">
+                      <a:endParaRPr lang="es-AR" sz="1300" noProof="0" dirty="0">
                         <a:latin typeface="Calibri" charset="0"/>
                         <a:ea typeface="Calibri" charset="0"/>
                         <a:cs typeface="Calibri" charset="0"/>
@@ -9604,7 +10070,7 @@
                         <a:buNone/>
                       </a:pPr>
                       <a:r>
-                        <a:rPr lang="en-US" sz="1300" dirty="0">
+                        <a:rPr lang="es-AR" sz="1300" noProof="0" dirty="0">
                           <a:solidFill>
                             <a:srgbClr val="1B2A4A"/>
                           </a:solidFill>
@@ -9614,7 +10080,7 @@
                         </a:rPr>
                         <a:t>Saldo natural absoluto</a:t>
                       </a:r>
-                      <a:endParaRPr lang="en-US" sz="1300" dirty="0">
+                      <a:endParaRPr lang="es-AR" sz="1300" noProof="0" dirty="0">
                         <a:latin typeface="Calibri" charset="0"/>
                         <a:ea typeface="Calibri" charset="0"/>
                         <a:cs typeface="Calibri" charset="0"/>
@@ -9679,7 +10145,7 @@
                         <a:buNone/>
                       </a:pPr>
                       <a:r>
-                        <a:rPr lang="en-US" sz="1300" dirty="0">
+                        <a:rPr lang="es-AR" sz="1300" noProof="0" dirty="0">
                           <a:solidFill>
                             <a:srgbClr val="1B2A4A"/>
                           </a:solidFill>
@@ -9689,7 +10155,7 @@
                         </a:rPr>
                         <a:t>Tasa Crec. Vegetativo</a:t>
                       </a:r>
-                      <a:endParaRPr lang="en-US" sz="1300" dirty="0">
+                      <a:endParaRPr lang="es-AR" sz="1300" noProof="0" dirty="0">
                         <a:latin typeface="Calibri" charset="0"/>
                         <a:ea typeface="Calibri" charset="0"/>
                         <a:cs typeface="Calibri" charset="0"/>
@@ -9747,7 +10213,7 @@
                         <a:buNone/>
                       </a:pPr>
                       <a:r>
-                        <a:rPr lang="en-US" sz="1300" dirty="0">
+                        <a:rPr lang="es-AR" sz="1300" noProof="0" dirty="0">
                           <a:solidFill>
                             <a:srgbClr val="1B2A4A"/>
                           </a:solidFill>
@@ -9757,7 +10223,7 @@
                         </a:rPr>
                         <a:t>TBN − TBM</a:t>
                       </a:r>
-                      <a:endParaRPr lang="en-US" sz="1300" dirty="0">
+                      <a:endParaRPr lang="es-AR" sz="1300" noProof="0" dirty="0">
                         <a:latin typeface="Calibri" charset="0"/>
                         <a:ea typeface="Calibri" charset="0"/>
                         <a:cs typeface="Calibri" charset="0"/>
@@ -9815,7 +10281,7 @@
                         <a:buNone/>
                       </a:pPr>
                       <a:r>
-                        <a:rPr lang="en-US" sz="1300" dirty="0">
+                        <a:rPr lang="es-AR" sz="1300" noProof="0" dirty="0">
                           <a:solidFill>
                             <a:srgbClr val="1B2A4A"/>
                           </a:solidFill>
@@ -9825,7 +10291,7 @@
                         </a:rPr>
                         <a:t>Saldo natural por 1.000 hab.</a:t>
                       </a:r>
-                      <a:endParaRPr lang="en-US" sz="1300" dirty="0">
+                      <a:endParaRPr lang="es-AR" sz="1300" noProof="0" dirty="0">
                         <a:latin typeface="Calibri" charset="0"/>
                         <a:ea typeface="Calibri" charset="0"/>
                         <a:cs typeface="Calibri" charset="0"/>
@@ -9890,7 +10356,7 @@
                         <a:buNone/>
                       </a:pPr>
                       <a:r>
-                        <a:rPr lang="en-US" sz="1300" dirty="0">
+                        <a:rPr lang="es-AR" sz="1300" noProof="0" dirty="0">
                           <a:solidFill>
                             <a:srgbClr val="1B2A4A"/>
                           </a:solidFill>
@@ -9900,7 +10366,7 @@
                         </a:rPr>
                         <a:t>TGF — Tasa Global de Fecundidad</a:t>
                       </a:r>
-                      <a:endParaRPr lang="en-US" sz="1300" dirty="0">
+                      <a:endParaRPr lang="es-AR" sz="1300" noProof="0" dirty="0">
                         <a:latin typeface="Calibri" charset="0"/>
                         <a:ea typeface="Calibri" charset="0"/>
                         <a:cs typeface="Calibri" charset="0"/>
@@ -9958,7 +10424,7 @@
                         <a:buNone/>
                       </a:pPr>
                       <a:r>
-                        <a:rPr lang="en-US" sz="1300" dirty="0">
+                        <a:rPr lang="es-AR" sz="1300" noProof="0" dirty="0">
                           <a:solidFill>
                             <a:srgbClr val="1B2A4A"/>
                           </a:solidFill>
@@ -9966,9 +10432,31 @@
                           <a:ea typeface="Calibri" pitchFamily="34" charset="-122"/>
                           <a:cs typeface="Calibri" pitchFamily="34" charset="-120"/>
                         </a:rPr>
-                        <a:t>(precalculada)</a:t>
+                        <a:t>(</a:t>
                       </a:r>
-                      <a:endParaRPr lang="en-US" sz="1300" dirty="0">
+                      <a:r>
+                        <a:rPr lang="es-AR" sz="1300" noProof="0" dirty="0" err="1">
+                          <a:solidFill>
+                            <a:srgbClr val="1B2A4A"/>
+                          </a:solidFill>
+                          <a:latin typeface="Calibri" pitchFamily="34" charset="0"/>
+                          <a:ea typeface="Calibri" pitchFamily="34" charset="-122"/>
+                          <a:cs typeface="Calibri" pitchFamily="34" charset="-120"/>
+                        </a:rPr>
+                        <a:t>precalculada</a:t>
+                      </a:r>
+                      <a:r>
+                        <a:rPr lang="es-AR" sz="1300" noProof="0" dirty="0">
+                          <a:solidFill>
+                            <a:srgbClr val="1B2A4A"/>
+                          </a:solidFill>
+                          <a:latin typeface="Calibri" pitchFamily="34" charset="0"/>
+                          <a:ea typeface="Calibri" pitchFamily="34" charset="-122"/>
+                          <a:cs typeface="Calibri" pitchFamily="34" charset="-120"/>
+                        </a:rPr>
+                        <a:t>)</a:t>
+                      </a:r>
+                      <a:endParaRPr lang="es-AR" sz="1300" noProof="0" dirty="0">
                         <a:latin typeface="Calibri" charset="0"/>
                         <a:ea typeface="Calibri" charset="0"/>
                         <a:cs typeface="Calibri" charset="0"/>
@@ -10026,7 +10514,7 @@
                         <a:buNone/>
                       </a:pPr>
                       <a:r>
-                        <a:rPr lang="en-US" sz="1300" dirty="0">
+                        <a:rPr lang="es-AR" sz="1300" noProof="0" dirty="0">
                           <a:solidFill>
                             <a:srgbClr val="1B2A4A"/>
                           </a:solidFill>
@@ -10036,7 +10524,7 @@
                         </a:rPr>
                         <a:t>Hijos esperados por mujer en edad fértil</a:t>
                       </a:r>
-                      <a:endParaRPr lang="en-US" sz="1300" dirty="0">
+                      <a:endParaRPr lang="es-AR" sz="1300" noProof="0" dirty="0">
                         <a:latin typeface="Calibri" charset="0"/>
                         <a:ea typeface="Calibri" charset="0"/>
                         <a:cs typeface="Calibri" charset="0"/>
@@ -10101,7 +10589,7 @@
                         <a:buNone/>
                       </a:pPr>
                       <a:r>
-                        <a:rPr lang="en-US" sz="1300" kern="1200" dirty="0">
+                        <a:rPr lang="es-AR" sz="1300" kern="1200" noProof="0" dirty="0">
                           <a:solidFill>
                             <a:srgbClr val="1B2A4A"/>
                           </a:solidFill>
@@ -10109,27 +10597,8 @@
                           <a:ea typeface="Calibri" charset="0"/>
                           <a:cs typeface="Calibri" pitchFamily="34" charset="-120"/>
                         </a:rPr>
-                        <a:t>TBM – Tasa Bruta de </a:t>
+                        <a:t>TBM – Tasa Bruta de Migración</a:t>
                       </a:r>
-                      <a:r>
-                        <a:rPr lang="en-US" sz="1300" kern="1200" dirty="0" err="1">
-                          <a:solidFill>
-                            <a:srgbClr val="1B2A4A"/>
-                          </a:solidFill>
-                          <a:latin typeface="Calibri" pitchFamily="34" charset="0"/>
-                          <a:ea typeface="Calibri" charset="0"/>
-                          <a:cs typeface="Calibri" pitchFamily="34" charset="-120"/>
-                        </a:rPr>
-                        <a:t>Migración</a:t>
-                      </a:r>
-                      <a:endParaRPr lang="en-US" sz="1300" kern="1200" dirty="0">
-                        <a:solidFill>
-                          <a:srgbClr val="1B2A4A"/>
-                        </a:solidFill>
-                        <a:latin typeface="Calibri" pitchFamily="34" charset="0"/>
-                        <a:ea typeface="Calibri" charset="0"/>
-                        <a:cs typeface="Calibri" pitchFamily="34" charset="-120"/>
-                      </a:endParaRPr>
                     </a:p>
                   </a:txBody>
                   <a:tcPr marL="101600" marR="101600" marT="63500" marB="63500" anchor="ctr">
@@ -10183,7 +10652,7 @@
                         <a:buNone/>
                       </a:pPr>
                       <a:r>
-                        <a:rPr lang="en-US" sz="1300" dirty="0">
+                        <a:rPr lang="es-AR" sz="1300" noProof="0" dirty="0">
                           <a:solidFill>
                             <a:srgbClr val="1B2A4A"/>
                           </a:solidFill>
@@ -10191,31 +10660,9 @@
                           <a:ea typeface="Calibri" pitchFamily="34" charset="-122"/>
                           <a:cs typeface="Calibri" pitchFamily="34" charset="-120"/>
                         </a:rPr>
-                        <a:t>(</a:t>
+                        <a:t>(migraciones / P) x 1000</a:t>
                       </a:r>
-                      <a:r>
-                        <a:rPr lang="en-US" sz="1300" dirty="0" err="1">
-                          <a:solidFill>
-                            <a:srgbClr val="1B2A4A"/>
-                          </a:solidFill>
-                          <a:latin typeface="Calibri" pitchFamily="34" charset="0"/>
-                          <a:ea typeface="Calibri" pitchFamily="34" charset="-122"/>
-                          <a:cs typeface="Calibri" pitchFamily="34" charset="-120"/>
-                        </a:rPr>
-                        <a:t>migraciones</a:t>
-                      </a:r>
-                      <a:r>
-                        <a:rPr lang="en-US" sz="1300" dirty="0">
-                          <a:solidFill>
-                            <a:srgbClr val="1B2A4A"/>
-                          </a:solidFill>
-                          <a:latin typeface="Calibri" pitchFamily="34" charset="0"/>
-                          <a:ea typeface="Calibri" pitchFamily="34" charset="-122"/>
-                          <a:cs typeface="Calibri" pitchFamily="34" charset="-120"/>
-                        </a:rPr>
-                        <a:t> / P) x 1000</a:t>
-                      </a:r>
-                      <a:endParaRPr lang="en-US" sz="1300" dirty="0">
+                      <a:endParaRPr lang="es-AR" sz="1300" noProof="0" dirty="0">
                         <a:latin typeface="Calibri" charset="0"/>
                         <a:ea typeface="Calibri" charset="0"/>
                         <a:cs typeface="Calibri" charset="0"/>
@@ -10273,7 +10720,7 @@
                         <a:buNone/>
                       </a:pPr>
                       <a:r>
-                        <a:rPr lang="en-US" sz="1300" kern="1200" dirty="0" err="1">
+                        <a:rPr lang="es-AR" sz="1300" kern="1200" noProof="0" dirty="0">
                           <a:solidFill>
                             <a:srgbClr val="1B2A4A"/>
                           </a:solidFill>
@@ -10281,62 +10728,7 @@
                           <a:ea typeface="Calibri" charset="0"/>
                           <a:cs typeface="Calibri" pitchFamily="34" charset="-120"/>
                         </a:rPr>
-                        <a:t>Migraciones</a:t>
-                      </a:r>
-                      <a:r>
-                        <a:rPr lang="en-US" sz="1300" kern="1200" dirty="0">
-                          <a:solidFill>
-                            <a:srgbClr val="1B2A4A"/>
-                          </a:solidFill>
-                          <a:latin typeface="Calibri" pitchFamily="34" charset="0"/>
-                          <a:ea typeface="Calibri" charset="0"/>
-                          <a:cs typeface="Calibri" pitchFamily="34" charset="-120"/>
-                        </a:rPr>
-                        <a:t> </a:t>
-                      </a:r>
-                      <a:r>
-                        <a:rPr lang="en-US" sz="1300" kern="1200" dirty="0" err="1">
-                          <a:solidFill>
-                            <a:srgbClr val="1B2A4A"/>
-                          </a:solidFill>
-                          <a:latin typeface="Calibri" pitchFamily="34" charset="0"/>
-                          <a:ea typeface="Calibri" charset="0"/>
-                          <a:cs typeface="Calibri" pitchFamily="34" charset="-120"/>
-                        </a:rPr>
-                        <a:t>por</a:t>
-                      </a:r>
-                      <a:r>
-                        <a:rPr lang="en-US" sz="1300" kern="1200" dirty="0">
-                          <a:solidFill>
-                            <a:srgbClr val="1B2A4A"/>
-                          </a:solidFill>
-                          <a:latin typeface="Calibri" pitchFamily="34" charset="0"/>
-                          <a:ea typeface="Calibri" charset="0"/>
-                          <a:cs typeface="Calibri" pitchFamily="34" charset="-120"/>
-                        </a:rPr>
-                        <a:t> </a:t>
-                      </a:r>
-                      <a:r>
-                        <a:rPr lang="en-US" sz="1300" kern="1200" dirty="0" err="1">
-                          <a:solidFill>
-                            <a:srgbClr val="1B2A4A"/>
-                          </a:solidFill>
-                          <a:latin typeface="Calibri" pitchFamily="34" charset="0"/>
-                          <a:ea typeface="Calibri" charset="0"/>
-                          <a:cs typeface="Calibri" pitchFamily="34" charset="-120"/>
-                        </a:rPr>
-                        <a:t>cada</a:t>
-                      </a:r>
-                      <a:r>
-                        <a:rPr lang="en-US" sz="1300" kern="1200" dirty="0">
-                          <a:solidFill>
-                            <a:srgbClr val="1B2A4A"/>
-                          </a:solidFill>
-                          <a:latin typeface="Calibri" pitchFamily="34" charset="0"/>
-                          <a:ea typeface="Calibri" charset="0"/>
-                          <a:cs typeface="Calibri" pitchFamily="34" charset="-120"/>
-                        </a:rPr>
-                        <a:t> 1.000 hab.</a:t>
+                        <a:t>Migraciones por cada 1.000 hab.</a:t>
                       </a:r>
                     </a:p>
                   </a:txBody>
@@ -10420,7 +10812,7 @@
           <a:bodyPr/>
           <a:lstStyle/>
           <a:p>
-            <a:endParaRPr lang="es-AR"/>
+            <a:endParaRPr lang="es-AR" noProof="0" dirty="0"/>
           </a:p>
         </p:txBody>
       </p:sp>
@@ -10449,7 +10841,7 @@
               <a:buNone/>
             </a:pPr>
             <a:r>
-              <a:rPr lang="en-US" sz="1300" b="1" dirty="0">
+              <a:rPr lang="es-AR" sz="1300" b="1" noProof="0" dirty="0">
                 <a:solidFill>
                   <a:srgbClr val="FFFFFF"/>
                 </a:solidFill>
@@ -10459,7 +10851,7 @@
               </a:rPr>
               <a:t>Métrica</a:t>
             </a:r>
-            <a:endParaRPr lang="en-US" sz="1300" dirty="0"/>
+            <a:endParaRPr lang="es-AR" sz="1300" noProof="0" dirty="0"/>
           </a:p>
         </p:txBody>
       </p:sp>
@@ -10488,7 +10880,7 @@
               <a:buNone/>
             </a:pPr>
             <a:r>
-              <a:rPr lang="en-US" sz="1300" b="1" dirty="0">
+              <a:rPr lang="es-AR" sz="1300" b="1" noProof="0" dirty="0">
                 <a:solidFill>
                   <a:srgbClr val="FFFFFF"/>
                 </a:solidFill>
@@ -10498,7 +10890,7 @@
               </a:rPr>
               <a:t>Fórmula</a:t>
             </a:r>
-            <a:endParaRPr lang="en-US" sz="1300" dirty="0"/>
+            <a:endParaRPr lang="es-AR" sz="1300" noProof="0" dirty="0"/>
           </a:p>
         </p:txBody>
       </p:sp>
@@ -10527,7 +10919,7 @@
               <a:buNone/>
             </a:pPr>
             <a:r>
-              <a:rPr lang="en-US" sz="1300" b="1" dirty="0">
+              <a:rPr lang="es-AR" sz="1300" b="1" noProof="0" dirty="0">
                 <a:solidFill>
                   <a:srgbClr val="FFFFFF"/>
                 </a:solidFill>
@@ -10537,7 +10929,7 @@
               </a:rPr>
               <a:t>Interpretación</a:t>
             </a:r>
-            <a:endParaRPr lang="en-US" sz="1300" dirty="0"/>
+            <a:endParaRPr lang="es-AR" sz="1300" noProof="0" dirty="0"/>
           </a:p>
         </p:txBody>
       </p:sp>
@@ -10566,7 +10958,7 @@
               <a:buNone/>
             </a:pPr>
             <a:r>
-              <a:rPr lang="en-US" sz="1000" i="1" dirty="0">
+              <a:rPr lang="es-AR" sz="1000" i="1" noProof="0" dirty="0">
                 <a:solidFill>
                   <a:srgbClr val="64748B"/>
                 </a:solidFill>
@@ -10576,7 +10968,7 @@
               </a:rPr>
               <a:t>Fuente: INDEC · RENAPER · CEPALSTAT (2012–2022)</a:t>
             </a:r>
-            <a:endParaRPr lang="en-US" sz="1000" dirty="0"/>
+            <a:endParaRPr lang="es-AR" sz="1000" noProof="0" dirty="0"/>
           </a:p>
         </p:txBody>
       </p:sp>
@@ -10638,7 +11030,7 @@
               <a:buNone/>
             </a:pPr>
             <a:r>
-              <a:rPr lang="en-US" sz="2600" b="1" dirty="0">
+              <a:rPr lang="es-AR" sz="2600" b="1" noProof="0" dirty="0">
                 <a:solidFill>
                   <a:srgbClr val="1B2A4A"/>
                 </a:solidFill>
@@ -10648,7 +11040,7 @@
               </a:rPr>
               <a:t>Natalidad y Mortalidad — La tijera que se cierra</a:t>
             </a:r>
-            <a:endParaRPr lang="en-US" sz="2600" dirty="0"/>
+            <a:endParaRPr lang="es-AR" sz="2600" noProof="0" dirty="0"/>
           </a:p>
         </p:txBody>
       </p:sp>
@@ -10680,7 +11072,7 @@
           <a:bodyPr/>
           <a:lstStyle/>
           <a:p>
-            <a:endParaRPr lang="es-AR"/>
+            <a:endParaRPr lang="es-AR" noProof="0" dirty="0"/>
           </a:p>
         </p:txBody>
       </p:sp>
@@ -10691,7 +11083,7 @@
           <p:nvPr>
             <p:extLst>
               <p:ext uri="{D42A27DB-BD31-4B8C-83A1-F6EECF244321}">
-                <p14:modId xmlns:p14="http://schemas.microsoft.com/office/powerpoint/2010/main" val="4097676869"/>
+                <p14:modId xmlns:p14="http://schemas.microsoft.com/office/powerpoint/2010/main" val="2037864306"/>
               </p:ext>
             </p:extLst>
           </p:nvPr>
@@ -10743,7 +11135,7 @@
           <a:bodyPr/>
           <a:lstStyle/>
           <a:p>
-            <a:endParaRPr lang="es-AR"/>
+            <a:endParaRPr lang="es-AR" noProof="0" dirty="0"/>
           </a:p>
         </p:txBody>
       </p:sp>
@@ -10772,7 +11164,7 @@
               <a:buNone/>
             </a:pPr>
             <a:r>
-              <a:rPr lang="en-US" sz="1300" b="1" dirty="0">
+              <a:rPr lang="es-AR" sz="1300" b="1" noProof="0" dirty="0">
                 <a:solidFill>
                   <a:srgbClr val="1B2A4A"/>
                 </a:solidFill>
@@ -10782,7 +11174,7 @@
               </a:rPr>
               <a:t>Hallazgos clave</a:t>
             </a:r>
-            <a:endParaRPr lang="en-US" sz="1300" dirty="0"/>
+            <a:endParaRPr lang="es-AR" sz="1300" noProof="0" dirty="0"/>
           </a:p>
         </p:txBody>
       </p:sp>
@@ -10811,7 +11203,7 @@
               <a:buNone/>
             </a:pPr>
             <a:r>
-              <a:rPr lang="en-US" sz="2600" b="1" dirty="0">
+              <a:rPr lang="es-AR" sz="2600" b="1" noProof="0" dirty="0">
                 <a:solidFill>
                   <a:srgbClr val="D95F3B"/>
                 </a:solidFill>
@@ -10821,7 +11213,7 @@
               </a:rPr>
               <a:t>−44%</a:t>
             </a:r>
-            <a:endParaRPr lang="en-US" sz="2600" dirty="0"/>
+            <a:endParaRPr lang="es-AR" sz="2600" noProof="0" dirty="0"/>
           </a:p>
         </p:txBody>
       </p:sp>
@@ -10850,7 +11242,7 @@
               <a:buNone/>
             </a:pPr>
             <a:r>
-              <a:rPr lang="en-US" sz="1100" dirty="0">
+              <a:rPr lang="es-AR" sz="1100" noProof="0" dirty="0">
                 <a:solidFill>
                   <a:srgbClr val="64748B"/>
                 </a:solidFill>
@@ -10860,14 +11252,14 @@
               </a:rPr>
               <a:t>caída de TBN</a:t>
             </a:r>
-            <a:endParaRPr lang="en-US" sz="1100" dirty="0"/>
+            <a:endParaRPr lang="es-AR" sz="1100" noProof="0" dirty="0"/>
           </a:p>
           <a:p>
             <a:pPr marL="0" indent="0" algn="l">
               <a:buNone/>
             </a:pPr>
             <a:r>
-              <a:rPr lang="en-US" sz="1100" dirty="0">
+              <a:rPr lang="es-AR" sz="1100" noProof="0" dirty="0">
                 <a:solidFill>
                   <a:srgbClr val="64748B"/>
                 </a:solidFill>
@@ -10877,7 +11269,7 @@
               </a:rPr>
               <a:t>2012 → 2022</a:t>
             </a:r>
-            <a:endParaRPr lang="en-US" sz="1100" dirty="0"/>
+            <a:endParaRPr lang="es-AR" sz="1100" noProof="0" dirty="0"/>
           </a:p>
         </p:txBody>
       </p:sp>
@@ -10906,7 +11298,7 @@
               <a:buNone/>
             </a:pPr>
             <a:r>
-              <a:rPr lang="en-US" sz="2600" b="1" dirty="0">
+              <a:rPr lang="es-AR" sz="2600" b="1" noProof="0" dirty="0">
                 <a:solidFill>
                   <a:srgbClr val="1D7A8C"/>
                 </a:solidFill>
@@ -10916,7 +11308,7 @@
               </a:rPr>
               <a:t>2019</a:t>
             </a:r>
-            <a:endParaRPr lang="en-US" sz="2600" dirty="0"/>
+            <a:endParaRPr lang="es-AR" sz="2600" noProof="0" dirty="0"/>
           </a:p>
         </p:txBody>
       </p:sp>
@@ -10945,7 +11337,7 @@
               <a:buNone/>
             </a:pPr>
             <a:r>
-              <a:rPr lang="en-US" sz="1100" dirty="0">
+              <a:rPr lang="es-AR" sz="1100" noProof="0" dirty="0">
                 <a:solidFill>
                   <a:srgbClr val="64748B"/>
                 </a:solidFill>
@@ -10955,14 +11347,14 @@
               </a:rPr>
               <a:t>Argentina cruza</a:t>
             </a:r>
-            <a:endParaRPr lang="en-US" sz="1100" dirty="0"/>
+            <a:endParaRPr lang="es-AR" sz="1100" noProof="0" dirty="0"/>
           </a:p>
           <a:p>
             <a:pPr marL="0" indent="0" algn="l">
               <a:buNone/>
             </a:pPr>
             <a:r>
-              <a:rPr lang="en-US" sz="1100" dirty="0">
+              <a:rPr lang="es-AR" sz="1100" noProof="0" dirty="0">
                 <a:solidFill>
                   <a:srgbClr val="64748B"/>
                 </a:solidFill>
@@ -10972,7 +11364,7 @@
               </a:rPr>
               <a:t>el sub-reemplazo</a:t>
             </a:r>
-            <a:endParaRPr lang="en-US" sz="1100" dirty="0"/>
+            <a:endParaRPr lang="es-AR" sz="1100" noProof="0" dirty="0"/>
           </a:p>
         </p:txBody>
       </p:sp>
@@ -11001,7 +11393,7 @@
               <a:buNone/>
             </a:pPr>
             <a:r>
-              <a:rPr lang="en-US" sz="2600" b="1" dirty="0">
+              <a:rPr lang="es-AR" sz="2600" b="1" noProof="0" dirty="0">
                 <a:solidFill>
                   <a:srgbClr val="E8A838"/>
                 </a:solidFill>
@@ -11011,7 +11403,7 @@
               </a:rPr>
               <a:t>~1,5‰</a:t>
             </a:r>
-            <a:endParaRPr lang="en-US" sz="2600" dirty="0"/>
+            <a:endParaRPr lang="es-AR" sz="2600" noProof="0" dirty="0"/>
           </a:p>
         </p:txBody>
       </p:sp>
@@ -11040,7 +11432,7 @@
               <a:buNone/>
             </a:pPr>
             <a:r>
-              <a:rPr lang="en-US" sz="1100" dirty="0">
+              <a:rPr lang="es-AR" sz="1100" noProof="0" dirty="0">
                 <a:solidFill>
                   <a:srgbClr val="64748B"/>
                 </a:solidFill>
@@ -11050,14 +11442,14 @@
               </a:rPr>
               <a:t>brecha restante</a:t>
             </a:r>
-            <a:endParaRPr lang="en-US" sz="1100" dirty="0"/>
+            <a:endParaRPr lang="es-AR" sz="1100" noProof="0" dirty="0"/>
           </a:p>
           <a:p>
             <a:pPr marL="0" indent="0" algn="l">
               <a:buNone/>
             </a:pPr>
             <a:r>
-              <a:rPr lang="en-US" sz="1100" dirty="0">
+              <a:rPr lang="es-AR" sz="1100" noProof="0" dirty="0">
                 <a:solidFill>
                   <a:srgbClr val="64748B"/>
                 </a:solidFill>
@@ -11067,7 +11459,7 @@
               </a:rPr>
               <a:t>en 2022</a:t>
             </a:r>
-            <a:endParaRPr lang="en-US" sz="1100" dirty="0"/>
+            <a:endParaRPr lang="es-AR" sz="1100" noProof="0" dirty="0"/>
           </a:p>
         </p:txBody>
       </p:sp>
@@ -11129,7 +11521,7 @@
               <a:buNone/>
             </a:pPr>
             <a:r>
-              <a:rPr lang="en-US" sz="2600" b="1" dirty="0">
+              <a:rPr lang="es-AR" sz="2600" b="1" noProof="0" dirty="0">
                 <a:solidFill>
                   <a:srgbClr val="1B2A4A"/>
                 </a:solidFill>
@@ -11139,7 +11531,7 @@
               </a:rPr>
               <a:t>Crecimiento Vegetativo — Caída estructural</a:t>
             </a:r>
-            <a:endParaRPr lang="en-US" sz="2600" dirty="0"/>
+            <a:endParaRPr lang="es-AR" sz="2600" noProof="0" dirty="0"/>
           </a:p>
         </p:txBody>
       </p:sp>
@@ -11171,7 +11563,7 @@
           <a:bodyPr/>
           <a:lstStyle/>
           <a:p>
-            <a:endParaRPr lang="es-AR"/>
+            <a:endParaRPr lang="es-AR" noProof="0" dirty="0"/>
           </a:p>
         </p:txBody>
       </p:sp>
@@ -11179,7 +11571,13 @@
         <p:nvGraphicFramePr>
           <p:cNvPr id="4" name="Chart 0"/>
           <p:cNvGraphicFramePr/>
-          <p:nvPr/>
+          <p:nvPr>
+            <p:extLst>
+              <p:ext uri="{D42A27DB-BD31-4B8C-83A1-F6EECF244321}">
+                <p14:modId xmlns:p14="http://schemas.microsoft.com/office/powerpoint/2010/main" val="1518511801"/>
+              </p:ext>
+            </p:extLst>
+          </p:nvPr>
         </p:nvGraphicFramePr>
         <p:xfrm>
           <a:off x="365760" y="914400"/>
@@ -11216,7 +11614,7 @@
               <a:buNone/>
             </a:pPr>
             <a:r>
-              <a:rPr lang="en-US" sz="1100" i="1" dirty="0">
+              <a:rPr lang="es-AR" sz="1100" i="1" noProof="0" dirty="0">
                 <a:solidFill>
                   <a:srgbClr val="64748B"/>
                 </a:solidFill>
@@ -11226,7 +11624,7 @@
               </a:rPr>
               <a:t>▼ 85% en 10 años  ·  COVID acelera pero no causa la caída</a:t>
             </a:r>
-            <a:endParaRPr lang="en-US" sz="1100" dirty="0"/>
+            <a:endParaRPr lang="es-AR" sz="1100" noProof="0" dirty="0"/>
           </a:p>
         </p:txBody>
       </p:sp>
@@ -11288,7 +11686,7 @@
               <a:buNone/>
             </a:pPr>
             <a:r>
-              <a:rPr lang="en-US" sz="2600" b="1" dirty="0">
+              <a:rPr lang="es-AR" sz="2600" b="1" noProof="0" dirty="0">
                 <a:solidFill>
                   <a:srgbClr val="1B2A4A"/>
                 </a:solidFill>
@@ -11298,7 +11696,7 @@
               </a:rPr>
               <a:t>Tasa de Fecundidad — Argentina en sub-reemplazo</a:t>
             </a:r>
-            <a:endParaRPr lang="en-US" sz="2600" dirty="0"/>
+            <a:endParaRPr lang="es-AR" sz="2600" noProof="0" dirty="0"/>
           </a:p>
         </p:txBody>
       </p:sp>
@@ -11330,7 +11728,7 @@
           <a:bodyPr/>
           <a:lstStyle/>
           <a:p>
-            <a:endParaRPr lang="es-AR"/>
+            <a:endParaRPr lang="es-AR" noProof="0" dirty="0"/>
           </a:p>
         </p:txBody>
       </p:sp>
@@ -11341,7 +11739,7 @@
           <p:nvPr>
             <p:extLst>
               <p:ext uri="{D42A27DB-BD31-4B8C-83A1-F6EECF244321}">
-                <p14:modId xmlns:p14="http://schemas.microsoft.com/office/powerpoint/2010/main" val="2037931281"/>
+                <p14:modId xmlns:p14="http://schemas.microsoft.com/office/powerpoint/2010/main" val="2236419636"/>
               </p:ext>
             </p:extLst>
           </p:nvPr>
@@ -11393,7 +11791,7 @@
           <a:bodyPr/>
           <a:lstStyle/>
           <a:p>
-            <a:endParaRPr lang="es-AR"/>
+            <a:endParaRPr lang="es-AR" noProof="0" dirty="0"/>
           </a:p>
         </p:txBody>
       </p:sp>
@@ -11422,7 +11820,7 @@
               <a:buNone/>
             </a:pPr>
             <a:r>
-              <a:rPr lang="en-US" sz="1300" b="1" dirty="0">
+              <a:rPr lang="es-AR" sz="1300" b="1" noProof="0" dirty="0">
                 <a:solidFill>
                   <a:srgbClr val="1B2A4A"/>
                 </a:solidFill>
@@ -11432,14 +11830,14 @@
               </a:rPr>
               <a:t>¿Qué es el</a:t>
             </a:r>
-            <a:endParaRPr lang="en-US" sz="1300" dirty="0"/>
+            <a:endParaRPr lang="es-AR" sz="1300" noProof="0" dirty="0"/>
           </a:p>
           <a:p>
             <a:pPr marL="0" indent="0" algn="l">
               <a:buNone/>
             </a:pPr>
             <a:r>
-              <a:rPr lang="en-US" sz="1300" b="1" dirty="0">
+              <a:rPr lang="es-AR" sz="1300" b="1" noProof="0" dirty="0">
                 <a:solidFill>
                   <a:srgbClr val="1B2A4A"/>
                 </a:solidFill>
@@ -11449,7 +11847,7 @@
               </a:rPr>
               <a:t>sub-reemplazo?</a:t>
             </a:r>
-            <a:endParaRPr lang="en-US" sz="1300" dirty="0"/>
+            <a:endParaRPr lang="es-AR" sz="1300" noProof="0" dirty="0"/>
           </a:p>
         </p:txBody>
       </p:sp>
@@ -11478,7 +11876,7 @@
               <a:buNone/>
             </a:pPr>
             <a:r>
-              <a:rPr lang="en-US" sz="1100" dirty="0">
+              <a:rPr lang="es-AR" sz="1100" noProof="0" dirty="0">
                 <a:solidFill>
                   <a:srgbClr val="1B2A4A"/>
                 </a:solidFill>
@@ -11488,7 +11886,7 @@
               </a:rPr>
               <a:t>Cuando la TGF cae por debajo de 2,1, cada generación no se reemplaza completamente a sí misma.</a:t>
             </a:r>
-            <a:endParaRPr lang="en-US" sz="1100" dirty="0"/>
+            <a:endParaRPr lang="es-AR" sz="1100" noProof="0" dirty="0"/>
           </a:p>
         </p:txBody>
       </p:sp>
@@ -11520,7 +11918,7 @@
           <a:bodyPr/>
           <a:lstStyle/>
           <a:p>
-            <a:endParaRPr lang="es-AR"/>
+            <a:endParaRPr lang="es-AR" noProof="0" dirty="0"/>
           </a:p>
         </p:txBody>
       </p:sp>
@@ -11549,7 +11947,7 @@
               <a:buNone/>
             </a:pPr>
             <a:r>
-              <a:rPr lang="en-US" sz="1100" dirty="0">
+              <a:rPr lang="es-AR" sz="1100" noProof="0" dirty="0">
                 <a:solidFill>
                   <a:srgbClr val="1B2A4A"/>
                 </a:solidFill>
@@ -11559,7 +11957,7 @@
               </a:rPr>
               <a:t>Argentina cruzó ese umbral en 2019 y lleva 7 años en sub-reemplazo, sin señales de reversión.</a:t>
             </a:r>
-            <a:endParaRPr lang="en-US" sz="1100" dirty="0"/>
+            <a:endParaRPr lang="es-AR" sz="1100" noProof="0" dirty="0"/>
           </a:p>
         </p:txBody>
       </p:sp>
@@ -11621,7 +12019,7 @@
               <a:buNone/>
             </a:pPr>
             <a:r>
-              <a:rPr lang="en-US" sz="2600" b="1" dirty="0">
+              <a:rPr lang="es-AR" sz="2600" b="1" noProof="0" dirty="0">
                 <a:solidFill>
                   <a:srgbClr val="1B2A4A"/>
                 </a:solidFill>
@@ -11631,7 +12029,7 @@
               </a:rPr>
               <a:t>Tasa de Migración Neta — Un parámetro estable</a:t>
             </a:r>
-            <a:endParaRPr lang="en-US" sz="2600" dirty="0"/>
+            <a:endParaRPr lang="es-AR" sz="2600" noProof="0" dirty="0"/>
           </a:p>
         </p:txBody>
       </p:sp>
@@ -11663,7 +12061,7 @@
           <a:bodyPr/>
           <a:lstStyle/>
           <a:p>
-            <a:endParaRPr lang="es-AR"/>
+            <a:endParaRPr lang="es-AR" noProof="0" dirty="0"/>
           </a:p>
         </p:txBody>
       </p:sp>
@@ -11671,7 +12069,13 @@
         <p:nvGraphicFramePr>
           <p:cNvPr id="4" name="Chart 0"/>
           <p:cNvGraphicFramePr/>
-          <p:nvPr/>
+          <p:nvPr>
+            <p:extLst>
+              <p:ext uri="{D42A27DB-BD31-4B8C-83A1-F6EECF244321}">
+                <p14:modId xmlns:p14="http://schemas.microsoft.com/office/powerpoint/2010/main" val="446933655"/>
+              </p:ext>
+            </p:extLst>
+          </p:nvPr>
         </p:nvGraphicFramePr>
         <p:xfrm>
           <a:off x="365760" y="914400"/>
@@ -11720,7 +12124,7 @@
           <a:bodyPr/>
           <a:lstStyle/>
           <a:p>
-            <a:endParaRPr lang="es-AR"/>
+            <a:endParaRPr lang="es-AR" noProof="0" dirty="0"/>
           </a:p>
         </p:txBody>
       </p:sp>
@@ -11749,7 +12153,7 @@
               <a:buNone/>
             </a:pPr>
             <a:r>
-              <a:rPr lang="en-US" sz="2000" b="1" dirty="0">
+              <a:rPr lang="es-AR" sz="2000" b="1" noProof="0" dirty="0">
                 <a:solidFill>
                   <a:srgbClr val="1D7A8C"/>
                 </a:solidFill>
@@ -11759,7 +12163,7 @@
               </a:rPr>
               <a:t>50–100× menor</a:t>
             </a:r>
-            <a:endParaRPr lang="en-US" sz="2000" dirty="0"/>
+            <a:endParaRPr lang="es-AR" sz="2000" noProof="0" dirty="0"/>
           </a:p>
         </p:txBody>
       </p:sp>
@@ -11788,7 +12192,7 @@
               <a:buNone/>
             </a:pPr>
             <a:r>
-              <a:rPr lang="en-US" sz="1100" dirty="0">
+              <a:rPr lang="es-AR" sz="1100" noProof="0" dirty="0">
                 <a:solidFill>
                   <a:srgbClr val="1B2A4A"/>
                 </a:solidFill>
@@ -11798,14 +12202,14 @@
               </a:rPr>
               <a:t>que TBN y TBM</a:t>
             </a:r>
-            <a:endParaRPr lang="en-US" sz="1100" dirty="0"/>
+            <a:endParaRPr lang="es-AR" sz="1100" noProof="0" dirty="0"/>
           </a:p>
           <a:p>
             <a:pPr marL="0" indent="0" algn="l">
               <a:buNone/>
             </a:pPr>
             <a:r>
-              <a:rPr lang="en-US" sz="1100" dirty="0">
+              <a:rPr lang="es-AR" sz="1100" noProof="0" dirty="0">
                 <a:solidFill>
                   <a:srgbClr val="1B2A4A"/>
                 </a:solidFill>
@@ -11815,7 +12219,7 @@
               </a:rPr>
               <a:t>→ peso estructural mínimo</a:t>
             </a:r>
-            <a:endParaRPr lang="en-US" sz="1100" dirty="0"/>
+            <a:endParaRPr lang="es-AR" sz="1100" noProof="0" dirty="0"/>
           </a:p>
         </p:txBody>
       </p:sp>
@@ -11856,7 +12260,7 @@
           <a:bodyPr/>
           <a:lstStyle/>
           <a:p>
-            <a:endParaRPr lang="es-AR"/>
+            <a:endParaRPr lang="es-AR" noProof="0" dirty="0"/>
           </a:p>
         </p:txBody>
       </p:sp>
@@ -11885,7 +12289,7 @@
               <a:buNone/>
             </a:pPr>
             <a:r>
-              <a:rPr lang="en-US" sz="1400" b="1" dirty="0">
+              <a:rPr lang="es-AR" sz="1400" b="1" noProof="0" dirty="0">
                 <a:solidFill>
                   <a:srgbClr val="D95F3B"/>
                 </a:solidFill>
@@ -11895,7 +12299,7 @@
               </a:rPr>
               <a:t>Colapso 2020-21</a:t>
             </a:r>
-            <a:endParaRPr lang="en-US" sz="1400" dirty="0"/>
+            <a:endParaRPr lang="es-AR" sz="1400" noProof="0" dirty="0"/>
           </a:p>
         </p:txBody>
       </p:sp>
@@ -11924,7 +12328,7 @@
               <a:buNone/>
             </a:pPr>
             <a:r>
-              <a:rPr lang="en-US" sz="1100" dirty="0">
+              <a:rPr lang="es-AR" sz="1100" noProof="0" dirty="0">
                 <a:solidFill>
                   <a:srgbClr val="1B2A4A"/>
                 </a:solidFill>
@@ -11934,7 +12338,7 @@
               </a:rPr>
               <a:t>Por cierre de fronteras COVID. Rebota en 2022 a niveles históricos → evento puntual, no tendencia.</a:t>
             </a:r>
-            <a:endParaRPr lang="en-US" sz="1100" dirty="0"/>
+            <a:endParaRPr lang="es-AR" sz="1100" noProof="0" dirty="0"/>
           </a:p>
         </p:txBody>
       </p:sp>
@@ -11996,7 +12400,7 @@
               <a:buNone/>
             </a:pPr>
             <a:r>
-              <a:rPr lang="en-US" sz="2600" b="1" dirty="0">
+              <a:rPr lang="es-AR" sz="2600" b="1" noProof="0" dirty="0">
                 <a:solidFill>
                   <a:srgbClr val="1B2A4A"/>
                 </a:solidFill>
@@ -12006,7 +12410,7 @@
               </a:rPr>
               <a:t>¿Por qué Malthus, ODE y luego UDE?</a:t>
             </a:r>
-            <a:endParaRPr lang="en-US" sz="2600" dirty="0"/>
+            <a:endParaRPr lang="es-AR" sz="2600" noProof="0" dirty="0"/>
           </a:p>
         </p:txBody>
       </p:sp>
@@ -12038,7 +12442,7 @@
           <a:bodyPr/>
           <a:lstStyle/>
           <a:p>
-            <a:endParaRPr lang="es-AR"/>
+            <a:endParaRPr lang="es-AR" noProof="0" dirty="0"/>
           </a:p>
         </p:txBody>
       </p:sp>
@@ -12057,7 +12461,7 @@
         <p:spPr>
           <a:xfrm>
             <a:off x="942975" y="897826"/>
-            <a:ext cx="6915150" cy="1015663"/>
+            <a:ext cx="6915150" cy="461665"/>
           </a:xfrm>
           <a:prstGeom prst="rect">
             <a:avLst/>
@@ -12074,7 +12478,7 @@
               <a:buNone/>
             </a:pPr>
             <a:r>
-              <a:rPr lang="es-AR" sz="1200" b="0" i="0" u="none" strike="noStrike" dirty="0">
+              <a:rPr lang="es-AR" sz="1200" b="0" i="0" u="none" strike="noStrike" noProof="0" dirty="0">
                 <a:solidFill>
                   <a:srgbClr val="475569"/>
                 </a:solidFill>
@@ -12083,18 +12487,7 @@
               </a:rPr>
               <a:t>Para modelar la población de una nación, la estructura del modelo debe reflejar la lógica del sistema. Aquí el porqué de nuestra transición metodológica:</a:t>
             </a:r>
-            <a:endParaRPr lang="es-AR" sz="1200" b="0" dirty="0">
-              <a:effectLst/>
-            </a:endParaRPr>
-          </a:p>
-          <a:p>
-            <a:pPr>
-              <a:buNone/>
-            </a:pPr>
-            <a:br>
-              <a:rPr lang="es-AR" dirty="0"/>
-            </a:br>
-            <a:endParaRPr lang="es-AR" dirty="0"/>
+            <a:endParaRPr lang="es-AR" noProof="0" dirty="0"/>
           </a:p>
         </p:txBody>
       </p:sp>
@@ -12120,8 +12513,8 @@
         </p:blipFill>
         <p:spPr>
           <a:xfrm>
-            <a:off x="457200" y="1500443"/>
-            <a:ext cx="2400299" cy="3478465"/>
+            <a:off x="141316" y="1500443"/>
+            <a:ext cx="2286000" cy="3478465"/>
           </a:xfrm>
           <a:prstGeom prst="rect">
             <a:avLst/>
@@ -12142,7 +12535,7 @@
         </p:nvSpPr>
         <p:spPr>
           <a:xfrm>
-            <a:off x="514349" y="1588245"/>
+            <a:off x="198464" y="1588245"/>
             <a:ext cx="2286000" cy="861774"/>
           </a:xfrm>
           <a:prstGeom prst="rect">
@@ -12160,7 +12553,7 @@
               <a:buNone/>
             </a:pPr>
             <a:r>
-              <a:rPr lang="es-AR" sz="1400" b="1" i="0" u="none" strike="noStrike" dirty="0">
+              <a:rPr lang="es-AR" sz="1400" b="1" i="0" u="none" strike="noStrike" noProof="0" dirty="0">
                 <a:solidFill>
                   <a:srgbClr val="005088"/>
                 </a:solidFill>
@@ -12169,7 +12562,7 @@
               </a:rPr>
               <a:t>1. Malthus vs. L-V</a:t>
             </a:r>
-            <a:endParaRPr lang="es-AR" sz="1400" b="0" dirty="0">
+            <a:endParaRPr lang="es-AR" sz="1400" b="0" noProof="0" dirty="0">
               <a:effectLst/>
             </a:endParaRPr>
           </a:p>
@@ -12178,9 +12571,9 @@
               <a:buNone/>
             </a:pPr>
             <a:br>
-              <a:rPr lang="es-AR" dirty="0"/>
+              <a:rPr lang="es-AR" noProof="0" dirty="0"/>
             </a:br>
-            <a:endParaRPr lang="es-AR" dirty="0"/>
+            <a:endParaRPr lang="es-AR" noProof="0" dirty="0"/>
           </a:p>
         </p:txBody>
       </p:sp>
@@ -12198,7 +12591,7 @@
         </p:nvSpPr>
         <p:spPr>
           <a:xfrm>
-            <a:off x="685799" y="1982344"/>
+            <a:off x="369914" y="1982344"/>
             <a:ext cx="2019301" cy="2677656"/>
           </a:xfrm>
           <a:prstGeom prst="rect">
@@ -12216,7 +12609,7 @@
               <a:buNone/>
             </a:pPr>
             <a:r>
-              <a:rPr lang="es-AR" sz="1200" b="1" i="0" u="none" strike="noStrike" dirty="0">
+              <a:rPr lang="es-AR" sz="1200" b="1" i="0" u="none" strike="noStrike" noProof="0" dirty="0">
                 <a:solidFill>
                   <a:srgbClr val="475569"/>
                 </a:solidFill>
@@ -12226,7 +12619,7 @@
               <a:t>Lotka-Volterra</a:t>
             </a:r>
             <a:r>
-              <a:rPr lang="es-AR" sz="1200" b="0" i="0" u="none" strike="noStrike" dirty="0">
+              <a:rPr lang="es-AR" sz="1200" b="0" i="0" u="none" strike="noStrike" noProof="0" dirty="0">
                 <a:solidFill>
                   <a:srgbClr val="475569"/>
                 </a:solidFill>
@@ -12236,7 +12629,7 @@
               <a:t> requiere interacción entre </a:t>
             </a:r>
             <a:r>
-              <a:rPr lang="es-AR" sz="1200" b="0" u="none" strike="noStrike" dirty="0">
+              <a:rPr lang="es-AR" sz="1200" b="0" u="none" strike="noStrike" noProof="0" dirty="0">
                 <a:solidFill>
                   <a:srgbClr val="475569"/>
                 </a:solidFill>
@@ -12246,7 +12639,7 @@
               <a:t>dos</a:t>
             </a:r>
             <a:r>
-              <a:rPr lang="es-AR" sz="1200" b="0" i="0" u="none" strike="noStrike" dirty="0">
+              <a:rPr lang="es-AR" sz="1200" b="0" i="0" u="none" strike="noStrike" noProof="0" dirty="0">
                 <a:solidFill>
                   <a:srgbClr val="475569"/>
                 </a:solidFill>
@@ -12255,7 +12648,7 @@
               </a:rPr>
               <a:t> poblaciones (presa-depredador). En una nación única, natalidad y mortalidad son tasas internas, no una competencia entre especies.</a:t>
             </a:r>
-            <a:endParaRPr lang="es-AR" sz="1200" dirty="0">
+            <a:endParaRPr lang="es-AR" sz="1200" noProof="0" dirty="0">
               <a:solidFill>
                 <a:srgbClr val="475569"/>
               </a:solidFill>
@@ -12267,7 +12660,7 @@
               <a:buNone/>
             </a:pPr>
             <a:r>
-              <a:rPr lang="es-AR" sz="1200" b="0" dirty="0">
+              <a:rPr lang="es-AR" sz="1200" b="0" noProof="0" dirty="0">
                 <a:solidFill>
                   <a:srgbClr val="475569"/>
                 </a:solidFill>
@@ -12277,7 +12670,7 @@
               <a:t>Usamos un </a:t>
             </a:r>
             <a:r>
-              <a:rPr lang="es-AR" sz="1200" b="1" dirty="0">
+              <a:rPr lang="es-AR" sz="1200" b="1" noProof="0" dirty="0">
                 <a:solidFill>
                   <a:srgbClr val="475569"/>
                 </a:solidFill>
@@ -12291,7 +12684,7 @@
             <a:pPr rtl="0">
               <a:buNone/>
             </a:pPr>
-            <a:endParaRPr lang="es-AR" sz="1200" b="1" dirty="0">
+            <a:endParaRPr lang="es-AR" sz="1200" b="1" noProof="0" dirty="0">
               <a:effectLst/>
             </a:endParaRPr>
           </a:p>
@@ -12300,9 +12693,9 @@
               <a:buNone/>
             </a:pPr>
             <a:br>
-              <a:rPr lang="es-AR" sz="1200" dirty="0"/>
+              <a:rPr lang="es-AR" sz="1200" noProof="0" dirty="0"/>
             </a:br>
-            <a:endParaRPr lang="es-AR" sz="1200" dirty="0"/>
+            <a:endParaRPr lang="es-AR" sz="1200" noProof="0" dirty="0"/>
           </a:p>
         </p:txBody>
       </p:sp>
@@ -12320,7 +12713,7 @@
         </p:nvSpPr>
         <p:spPr>
           <a:xfrm>
-            <a:off x="571499" y="4471076"/>
+            <a:off x="236564" y="4357771"/>
             <a:ext cx="2286000" cy="1015663"/>
           </a:xfrm>
           <a:prstGeom prst="rect">
@@ -12338,7 +12731,7 @@
               <a:buNone/>
             </a:pPr>
             <a:r>
-              <a:rPr lang="es-AR" sz="1200" b="0" i="0" u="none" strike="noStrike" dirty="0">
+              <a:rPr lang="es-AR" sz="1200" b="0" i="0" u="none" strike="noStrike" noProof="0" dirty="0">
                 <a:solidFill>
                   <a:srgbClr val="475569"/>
                 </a:solidFill>
@@ -12347,7 +12740,7 @@
               </a:rPr>
               <a:t>El crecimiento es proporcional a la población existente.</a:t>
             </a:r>
-            <a:endParaRPr lang="es-AR" sz="1200" b="0" dirty="0">
+            <a:endParaRPr lang="es-AR" sz="1200" b="0" noProof="0" dirty="0">
               <a:effectLst/>
             </a:endParaRPr>
           </a:p>
@@ -12356,9 +12749,9 @@
               <a:buNone/>
             </a:pPr>
             <a:br>
-              <a:rPr lang="es-AR" dirty="0"/>
+              <a:rPr lang="es-AR" noProof="0" dirty="0"/>
             </a:br>
-            <a:endParaRPr lang="es-AR" dirty="0"/>
+            <a:endParaRPr lang="es-AR" noProof="0" dirty="0"/>
           </a:p>
         </p:txBody>
       </p:sp>
@@ -12384,7 +12777,7 @@
         </p:blipFill>
         <p:spPr>
           <a:xfrm>
-            <a:off x="919161" y="4149692"/>
+            <a:off x="603276" y="4149692"/>
             <a:ext cx="1476375" cy="171450"/>
           </a:xfrm>
           <a:prstGeom prst="rect">
@@ -12414,8 +12807,8 @@
         </p:blipFill>
         <p:spPr>
           <a:xfrm>
-            <a:off x="3286126" y="1476886"/>
-            <a:ext cx="2400299" cy="3478465"/>
+            <a:off x="2533477" y="1476886"/>
+            <a:ext cx="2060776" cy="3478465"/>
           </a:xfrm>
           <a:prstGeom prst="rect">
             <a:avLst/>
@@ -12436,7 +12829,7 @@
         </p:nvSpPr>
         <p:spPr>
           <a:xfrm>
-            <a:off x="3343275" y="1564688"/>
+            <a:off x="2467539" y="1527900"/>
             <a:ext cx="2286000" cy="861774"/>
           </a:xfrm>
           <a:prstGeom prst="rect">
@@ -12454,7 +12847,7 @@
               <a:buNone/>
             </a:pPr>
             <a:r>
-              <a:rPr lang="es-AR" sz="1400" b="1" i="0" u="none" strike="noStrike" dirty="0">
+              <a:rPr lang="es-AR" sz="1400" b="1" i="0" u="none" strike="noStrike" noProof="0" dirty="0">
                 <a:solidFill>
                   <a:srgbClr val="005088"/>
                 </a:solidFill>
@@ -12463,7 +12856,7 @@
               </a:rPr>
               <a:t>2. ¿Por qué ODE?</a:t>
             </a:r>
-            <a:endParaRPr lang="es-AR" sz="1400" b="0" dirty="0">
+            <a:endParaRPr lang="es-AR" sz="1400" b="0" noProof="0" dirty="0">
               <a:effectLst/>
             </a:endParaRPr>
           </a:p>
@@ -12472,9 +12865,9 @@
               <a:buNone/>
             </a:pPr>
             <a:br>
-              <a:rPr lang="es-AR" dirty="0"/>
+              <a:rPr lang="es-AR" noProof="0" dirty="0"/>
             </a:br>
-            <a:endParaRPr lang="es-AR" dirty="0"/>
+            <a:endParaRPr lang="es-AR" noProof="0" dirty="0"/>
           </a:p>
         </p:txBody>
       </p:sp>
@@ -12492,7 +12885,7 @@
         </p:nvSpPr>
         <p:spPr>
           <a:xfrm>
-            <a:off x="3514725" y="1958787"/>
+            <a:off x="2617812" y="1958787"/>
             <a:ext cx="2019301" cy="2862322"/>
           </a:xfrm>
           <a:prstGeom prst="rect">
@@ -12507,7 +12900,7 @@
           <a:lstStyle/>
           <a:p>
             <a:r>
-              <a:rPr lang="es-AR" sz="1200" dirty="0">
+              <a:rPr lang="es-AR" sz="1200" noProof="0" dirty="0">
                 <a:solidFill>
                   <a:srgbClr val="475569"/>
                 </a:solidFill>
@@ -12517,7 +12910,7 @@
             </a:r>
           </a:p>
           <a:p>
-            <a:endParaRPr lang="es-AR" sz="1200" dirty="0">
+            <a:endParaRPr lang="es-AR" sz="1200" noProof="0" dirty="0">
               <a:solidFill>
                 <a:srgbClr val="475569"/>
               </a:solidFill>
@@ -12530,7 +12923,7 @@
               <a:buChar char="•"/>
             </a:pPr>
             <a:r>
-              <a:rPr lang="es-AR" sz="1200" dirty="0">
+              <a:rPr lang="es-AR" sz="1200" noProof="0" dirty="0">
                 <a:solidFill>
                   <a:srgbClr val="475569"/>
                 </a:solidFill>
@@ -12540,7 +12933,7 @@
               <a:t>Respetan la causalidad</a:t>
             </a:r>
             <a:r>
-              <a:rPr lang="es-AR" sz="1200" dirty="0">
+              <a:rPr lang="es-AR" sz="1200" noProof="0" dirty="0">
                 <a:solidFill>
                   <a:srgbClr val="475569"/>
                 </a:solidFill>
@@ -12550,7 +12943,7 @@
             </a:r>
           </a:p>
           <a:p>
-            <a:endParaRPr lang="es-AR" sz="1200" dirty="0">
+            <a:endParaRPr lang="es-AR" sz="1200" noProof="0" dirty="0">
               <a:solidFill>
                 <a:srgbClr val="475569"/>
               </a:solidFill>
@@ -12563,7 +12956,7 @@
               <a:buChar char="•"/>
             </a:pPr>
             <a:r>
-              <a:rPr lang="es-AR" sz="1200" dirty="0">
+              <a:rPr lang="es-AR" sz="1200" noProof="0" dirty="0">
                 <a:solidFill>
                   <a:srgbClr val="475569"/>
                 </a:solidFill>
@@ -12573,7 +12966,7 @@
               <a:t>P</a:t>
             </a:r>
             <a:r>
-              <a:rPr lang="es-AR" sz="1200" dirty="0">
+              <a:rPr lang="es-AR" sz="1200" noProof="0" dirty="0">
                 <a:solidFill>
                   <a:srgbClr val="475569"/>
                 </a:solidFill>
@@ -12581,7 +12974,7 @@
               </a:rPr>
               <a:t>ermiten integrar flujos (migración) y tasas (natalidad) de forma natural.</a:t>
             </a:r>
-            <a:endParaRPr lang="es-AR" sz="1200" dirty="0">
+            <a:endParaRPr lang="es-AR" sz="1200" noProof="0" dirty="0">
               <a:effectLst/>
             </a:endParaRPr>
           </a:p>
@@ -12590,9 +12983,9 @@
               <a:buNone/>
             </a:pPr>
             <a:br>
-              <a:rPr lang="es-AR" sz="1200" dirty="0"/>
+              <a:rPr lang="es-AR" sz="1200" noProof="0" dirty="0"/>
             </a:br>
-            <a:endParaRPr lang="es-AR" sz="1200" dirty="0"/>
+            <a:endParaRPr lang="es-AR" sz="1200" noProof="0" dirty="0"/>
           </a:p>
         </p:txBody>
       </p:sp>
@@ -12618,8 +13011,8 @@
         </p:blipFill>
         <p:spPr>
           <a:xfrm>
-            <a:off x="6172202" y="1476886"/>
-            <a:ext cx="2400299" cy="3478465"/>
+            <a:off x="4675910" y="1476886"/>
+            <a:ext cx="2060776" cy="3478465"/>
           </a:xfrm>
           <a:prstGeom prst="rect">
             <a:avLst/>
@@ -12640,7 +13033,7 @@
         </p:nvSpPr>
         <p:spPr>
           <a:xfrm>
-            <a:off x="6229351" y="1564688"/>
+            <a:off x="4479837" y="1517945"/>
             <a:ext cx="2286000" cy="861774"/>
           </a:xfrm>
           <a:prstGeom prst="rect">
@@ -12658,7 +13051,7 @@
               <a:buNone/>
             </a:pPr>
             <a:r>
-              <a:rPr lang="es-AR" sz="1400" b="1" i="0" u="none" strike="noStrike" dirty="0">
+              <a:rPr lang="es-AR" sz="1400" b="1" i="0" u="none" strike="noStrike" noProof="0" dirty="0">
                 <a:solidFill>
                   <a:srgbClr val="005088"/>
                 </a:solidFill>
@@ -12667,7 +13060,7 @@
               </a:rPr>
               <a:t>3. El salto a UDE</a:t>
             </a:r>
-            <a:endParaRPr lang="es-AR" sz="1400" b="0" dirty="0">
+            <a:endParaRPr lang="es-AR" sz="1400" b="0" noProof="0" dirty="0">
               <a:effectLst/>
             </a:endParaRPr>
           </a:p>
@@ -12676,9 +13069,9 @@
               <a:buNone/>
             </a:pPr>
             <a:br>
-              <a:rPr lang="es-AR" dirty="0"/>
+              <a:rPr lang="es-AR" noProof="0" dirty="0"/>
             </a:br>
-            <a:endParaRPr lang="es-AR" dirty="0"/>
+            <a:endParaRPr lang="es-AR" noProof="0" dirty="0"/>
           </a:p>
         </p:txBody>
       </p:sp>
@@ -12696,8 +13089,8 @@
         </p:nvSpPr>
         <p:spPr>
           <a:xfrm>
-            <a:off x="6400801" y="1958787"/>
-            <a:ext cx="2019301" cy="3046988"/>
+            <a:off x="4717385" y="1958787"/>
+            <a:ext cx="2019301" cy="2492990"/>
           </a:xfrm>
           <a:prstGeom prst="rect">
             <a:avLst/>
@@ -12711,19 +13104,112 @@
           <a:lstStyle/>
           <a:p>
             <a:r>
+              <a:rPr lang="es-AR" sz="1200" noProof="0" dirty="0">
+                <a:solidFill>
+                  <a:srgbClr val="475569"/>
+                </a:solidFill>
+                <a:latin typeface="Lato" panose="020F0502020204030203" pitchFamily="34" charset="0"/>
+              </a:rPr>
+              <a:t>Las UDE resuelven la rigidez de las ODEs clásicas.</a:t>
+            </a:r>
+          </a:p>
+          <a:p>
+            <a:br>
+              <a:rPr lang="es-AR" sz="1200" noProof="0" dirty="0"/>
+            </a:br>
+            <a:r>
+              <a:rPr lang="es-AR" sz="1200" noProof="0" dirty="0">
+                <a:solidFill>
+                  <a:srgbClr val="475569"/>
+                </a:solidFill>
+                <a:latin typeface="Lato" panose="020F0502020204030203" pitchFamily="34" charset="0"/>
+              </a:rPr>
+              <a:t>Donde la ODE usa parámetros fijos, la UDE inserta una red neuronal para aprender desviaciones complejas (como la caída post-2019 o el shock COVID) que una fórmula simple no puede predecir.</a:t>
+            </a:r>
+            <a:br>
+              <a:rPr lang="es-AR" sz="1200" noProof="0" dirty="0"/>
+            </a:br>
+            <a:endParaRPr lang="es-AR" sz="1200" noProof="0" dirty="0"/>
+          </a:p>
+        </p:txBody>
+      </p:sp>
+      <p:pic>
+        <p:nvPicPr>
+          <p:cNvPr id="4" name="Imagen 3" descr="image.png">
+            <a:extLst>
+              <a:ext uri="{FF2B5EF4-FFF2-40B4-BE49-F238E27FC236}">
+                <a16:creationId xmlns:a16="http://schemas.microsoft.com/office/drawing/2014/main" id="{0EC0BABC-BC9C-29EF-9D6C-7870F52B1CF1}"/>
+              </a:ext>
+            </a:extLst>
+          </p:cNvPr>
+          <p:cNvPicPr>
+            <a:picLocks noChangeAspect="1"/>
+          </p:cNvPicPr>
+          <p:nvPr/>
+        </p:nvPicPr>
+        <p:blipFill>
+          <a:blip r:embed="rId3"/>
+          <a:stretch>
+            <a:fillRect/>
+          </a:stretch>
+        </p:blipFill>
+        <p:spPr>
+          <a:xfrm>
+            <a:off x="6815445" y="1476886"/>
+            <a:ext cx="2165466" cy="3478465"/>
+          </a:xfrm>
+          <a:prstGeom prst="rect">
+            <a:avLst/>
+          </a:prstGeom>
+        </p:spPr>
+      </p:pic>
+      <p:sp>
+        <p:nvSpPr>
+          <p:cNvPr id="5" name="CuadroTexto 4">
+            <a:extLst>
+              <a:ext uri="{FF2B5EF4-FFF2-40B4-BE49-F238E27FC236}">
+                <a16:creationId xmlns:a16="http://schemas.microsoft.com/office/drawing/2014/main" id="{DCF01CB9-EF33-A3DD-78E4-3ED958782244}"/>
+              </a:ext>
+            </a:extLst>
+          </p:cNvPr>
+          <p:cNvSpPr txBox="1"/>
+          <p:nvPr/>
+        </p:nvSpPr>
+        <p:spPr>
+          <a:xfrm>
+            <a:off x="6927342" y="1964083"/>
+            <a:ext cx="2019301" cy="3046988"/>
+          </a:xfrm>
+          <a:prstGeom prst="rect">
+            <a:avLst/>
+          </a:prstGeom>
+          <a:noFill/>
+        </p:spPr>
+        <p:txBody>
+          <a:bodyPr wrap="square">
+            <a:spAutoFit/>
+          </a:bodyPr>
+          <a:lstStyle/>
+          <a:p>
+            <a:r>
               <a:rPr lang="es-AR" sz="1200" dirty="0">
                 <a:solidFill>
                   <a:srgbClr val="475569"/>
                 </a:solidFill>
                 <a:latin typeface="Lato" panose="020F0502020204030203" pitchFamily="34" charset="0"/>
               </a:rPr>
-              <a:t>Las UDE resuelven la rigidez de las ODEs clásicas.</a:t>
-            </a:r>
-          </a:p>
-          <a:p>
-            <a:br>
-              <a:rPr lang="es-AR" sz="1200" dirty="0"/>
-            </a:br>
+              <a:t>Debido a que la red neuronal de la UDE va a aprender una corrección nn(τ) positiva en 2012–2022, la red neuronal termina sobreestimando a la población. </a:t>
+            </a:r>
+          </a:p>
+          <a:p>
+            <a:endParaRPr lang="es-AR" sz="1200" dirty="0">
+              <a:solidFill>
+                <a:srgbClr val="475569"/>
+              </a:solidFill>
+              <a:latin typeface="Lato" panose="020F0502020204030203" pitchFamily="34" charset="0"/>
+            </a:endParaRPr>
+          </a:p>
+          <a:p>
             <a:r>
               <a:rPr lang="es-AR" sz="1200" dirty="0">
                 <a:solidFill>
@@ -12731,25 +13217,95 @@
                 </a:solidFill>
                 <a:latin typeface="Lato" panose="020F0502020204030203" pitchFamily="34" charset="0"/>
               </a:rPr>
-              <a:t>Donde la ODE usa parámetros fijos, la UDE inserta una red neuronal para aprender desviaciones complejas (como la caída post-2019 o el shock COVID) que una fórmula simple no puede predecir.</a:t>
-            </a:r>
-          </a:p>
-          <a:p>
-            <a:br>
-              <a:rPr lang="es-AR" sz="1200" dirty="0"/>
-            </a:br>
-            <a:endParaRPr lang="es-AR" sz="1200" b="1" dirty="0">
-              <a:effectLst/>
-            </a:endParaRPr>
+              <a:t>Necesitaremos entonces modelar el agotamiento de este crecimiento extra mediante un factor de decaimiento exponencial λ</a:t>
+            </a:r>
+            <a:r>
+              <a:rPr lang="es-AR" sz="1200" b="1" dirty="0">
+                <a:solidFill>
+                  <a:srgbClr val="005088"/>
+                </a:solidFill>
+                <a:latin typeface="Poppins" panose="00000500000000000000" pitchFamily="2" charset="0"/>
+              </a:rPr>
+              <a:t> </a:t>
+            </a:r>
+            <a:r>
+              <a:rPr lang="es-AR" sz="1200" dirty="0">
+                <a:solidFill>
+                  <a:srgbClr val="475569"/>
+                </a:solidFill>
+                <a:latin typeface="Lato" panose="020F0502020204030203" pitchFamily="34" charset="0"/>
+              </a:rPr>
+              <a:t>que representa la tasa de desaceleración anual de dicha corrección.</a:t>
+            </a:r>
+          </a:p>
+        </p:txBody>
+      </p:sp>
+      <p:sp>
+        <p:nvSpPr>
+          <p:cNvPr id="6" name="CuadroTexto 5">
+            <a:extLst>
+              <a:ext uri="{FF2B5EF4-FFF2-40B4-BE49-F238E27FC236}">
+                <a16:creationId xmlns:a16="http://schemas.microsoft.com/office/drawing/2014/main" id="{5C7BF152-A0CC-CF57-3CF0-E4DDC29557AF}"/>
+              </a:ext>
+            </a:extLst>
+          </p:cNvPr>
+          <p:cNvSpPr txBox="1"/>
+          <p:nvPr/>
+        </p:nvSpPr>
+        <p:spPr>
+          <a:xfrm>
+            <a:off x="6715125" y="1494136"/>
+            <a:ext cx="2286000" cy="861774"/>
+          </a:xfrm>
+          <a:prstGeom prst="rect">
+            <a:avLst/>
+          </a:prstGeom>
+          <a:noFill/>
+        </p:spPr>
+        <p:txBody>
+          <a:bodyPr wrap="square">
+            <a:spAutoFit/>
+          </a:bodyPr>
+          <a:lstStyle/>
+          <a:p>
+            <a:pPr algn="ctr"/>
+            <a:r>
+              <a:rPr lang="es-AR" sz="1400" b="1" dirty="0">
+                <a:solidFill>
+                  <a:srgbClr val="005088"/>
+                </a:solidFill>
+                <a:latin typeface="Poppins" panose="00000500000000000000" pitchFamily="2" charset="0"/>
+              </a:rPr>
+              <a:t>4</a:t>
+            </a:r>
+            <a:r>
+              <a:rPr lang="es-AR" sz="1400" b="1" i="0" u="none" strike="noStrike" noProof="0" dirty="0">
+                <a:solidFill>
+                  <a:srgbClr val="005088"/>
+                </a:solidFill>
+                <a:effectLst/>
+                <a:latin typeface="Poppins" panose="00000500000000000000" pitchFamily="2" charset="0"/>
+              </a:rPr>
+              <a:t>. </a:t>
+            </a:r>
+            <a:r>
+              <a:rPr lang="es-AR" sz="1400" b="1" dirty="0">
+                <a:solidFill>
+                  <a:srgbClr val="005088"/>
+                </a:solidFill>
+                <a:latin typeface="Poppins" panose="00000500000000000000" pitchFamily="2" charset="0"/>
+              </a:rPr>
+              <a:t>Mejorar con λ </a:t>
+            </a:r>
           </a:p>
           <a:p>
             <a:pPr>
               <a:buNone/>
             </a:pPr>
             <a:br>
-              <a:rPr lang="es-AR" sz="1200" dirty="0"/>
+              <a:rPr lang="es-AR" noProof="0" dirty="0"/>
             </a:br>
-            <a:endParaRPr lang="es-AR" sz="1200" dirty="0"/>
+            <a:endParaRPr lang="es-AR" noProof="0" dirty="0"/>
           </a:p>
         </p:txBody>
       </p:sp>
@@ -12811,7 +13367,7 @@
               <a:buNone/>
             </a:pPr>
             <a:r>
-              <a:rPr lang="en-US" sz="2600" b="1" dirty="0">
+              <a:rPr lang="es-AR" sz="2600" b="1" noProof="0" dirty="0">
                 <a:solidFill>
                   <a:srgbClr val="FFFFFF"/>
                 </a:solidFill>
@@ -12821,7 +13377,7 @@
               </a:rPr>
               <a:t>Metodología</a:t>
             </a:r>
-            <a:endParaRPr lang="en-US" sz="2600" dirty="0"/>
+            <a:endParaRPr lang="es-AR" sz="2600" noProof="0" dirty="0"/>
           </a:p>
         </p:txBody>
       </p:sp>
@@ -12853,7 +13409,7 @@
           <a:bodyPr/>
           <a:lstStyle/>
           <a:p>
-            <a:endParaRPr lang="es-AR"/>
+            <a:endParaRPr lang="es-AR" noProof="0" dirty="0"/>
           </a:p>
         </p:txBody>
       </p:sp>
@@ -12894,7 +13450,7 @@
           <a:bodyPr/>
           <a:lstStyle/>
           <a:p>
-            <a:endParaRPr lang="es-AR"/>
+            <a:endParaRPr lang="es-AR" noProof="0" dirty="0"/>
           </a:p>
         </p:txBody>
       </p:sp>
@@ -12923,7 +13479,7 @@
               <a:buNone/>
             </a:pPr>
             <a:r>
-              <a:rPr lang="en-US" sz="1300" b="1" dirty="0">
+              <a:rPr lang="es-AR" sz="1300" b="1" noProof="0" dirty="0">
                 <a:solidFill>
                   <a:srgbClr val="2AA8BF"/>
                 </a:solidFill>
@@ -12933,7 +13489,7 @@
               </a:rPr>
               <a:t>Ecuación de Malthus (UDE)</a:t>
             </a:r>
-            <a:endParaRPr lang="en-US" sz="1300" dirty="0"/>
+            <a:endParaRPr lang="es-AR" sz="1300" noProof="0" dirty="0"/>
           </a:p>
         </p:txBody>
       </p:sp>
@@ -12962,7 +13518,7 @@
               <a:buNone/>
             </a:pPr>
             <a:r>
-              <a:rPr lang="en-US" sz="1800" b="1" dirty="0">
+              <a:rPr lang="es-AR" sz="1800" b="1" noProof="0" dirty="0" err="1">
                 <a:solidFill>
                   <a:srgbClr val="FFFFFF"/>
                 </a:solidFill>
@@ -12970,9 +13526,42 @@
                 <a:ea typeface="Courier New" pitchFamily="34" charset="-122"/>
                 <a:cs typeface="Courier New" pitchFamily="34" charset="-120"/>
               </a:rPr>
-              <a:t>dP/dt = P(t) · [ b(t) − d(t) + m(t) + nn(τ) ]</a:t>
-            </a:r>
-            <a:endParaRPr lang="en-US" sz="1800" dirty="0"/>
+              <a:t>dP</a:t>
+            </a:r>
+            <a:r>
+              <a:rPr lang="es-AR" sz="1800" b="1" noProof="0" dirty="0">
+                <a:solidFill>
+                  <a:srgbClr val="FFFFFF"/>
+                </a:solidFill>
+                <a:latin typeface="Courier New" pitchFamily="34" charset="0"/>
+                <a:ea typeface="Courier New" pitchFamily="34" charset="-122"/>
+                <a:cs typeface="Courier New" pitchFamily="34" charset="-120"/>
+              </a:rPr>
+              <a:t>/</a:t>
+            </a:r>
+            <a:r>
+              <a:rPr lang="es-AR" sz="1800" b="1" noProof="0" dirty="0" err="1">
+                <a:solidFill>
+                  <a:srgbClr val="FFFFFF"/>
+                </a:solidFill>
+                <a:latin typeface="Courier New" pitchFamily="34" charset="0"/>
+                <a:ea typeface="Courier New" pitchFamily="34" charset="-122"/>
+                <a:cs typeface="Courier New" pitchFamily="34" charset="-120"/>
+              </a:rPr>
+              <a:t>dt</a:t>
+            </a:r>
+            <a:r>
+              <a:rPr lang="es-AR" sz="1800" b="1" noProof="0" dirty="0">
+                <a:solidFill>
+                  <a:srgbClr val="FFFFFF"/>
+                </a:solidFill>
+                <a:latin typeface="Courier New" pitchFamily="34" charset="0"/>
+                <a:ea typeface="Courier New" pitchFamily="34" charset="-122"/>
+                <a:cs typeface="Courier New" pitchFamily="34" charset="-120"/>
+              </a:rPr>
+              <a:t> = P(t) · [ b(t) − d(t) + m(t) + nn(τ) ]</a:t>
+            </a:r>
+            <a:endParaRPr lang="es-AR" sz="1800" noProof="0" dirty="0"/>
           </a:p>
         </p:txBody>
       </p:sp>
@@ -13013,7 +13602,7 @@
           <a:bodyPr/>
           <a:lstStyle/>
           <a:p>
-            <a:endParaRPr lang="es-AR"/>
+            <a:endParaRPr lang="es-AR" noProof="0" dirty="0"/>
           </a:p>
         </p:txBody>
       </p:sp>
@@ -13042,7 +13631,7 @@
               <a:buNone/>
             </a:pPr>
             <a:r>
-              <a:rPr lang="en-US" sz="2200" b="1" dirty="0">
+              <a:rPr lang="es-AR" sz="2200" b="1" noProof="0" dirty="0">
                 <a:solidFill>
                   <a:srgbClr val="4472C4"/>
                 </a:solidFill>
@@ -13052,7 +13641,7 @@
               </a:rPr>
               <a:t>b(t)</a:t>
             </a:r>
-            <a:endParaRPr lang="en-US" sz="2200" dirty="0"/>
+            <a:endParaRPr lang="es-AR" sz="2200" noProof="0" dirty="0"/>
           </a:p>
         </p:txBody>
       </p:sp>
@@ -13081,7 +13670,7 @@
               <a:buNone/>
             </a:pPr>
             <a:r>
-              <a:rPr lang="en-US" sz="1200" dirty="0">
+              <a:rPr lang="es-AR" sz="1200" noProof="0" dirty="0">
                 <a:solidFill>
                   <a:srgbClr val="FFFFFF"/>
                 </a:solidFill>
@@ -13091,7 +13680,7 @@
               </a:rPr>
               <a:t>Tasa de Natalidad</a:t>
             </a:r>
-            <a:endParaRPr lang="en-US" sz="1200" dirty="0"/>
+            <a:endParaRPr lang="es-AR" sz="1200" noProof="0" dirty="0"/>
           </a:p>
         </p:txBody>
       </p:sp>
@@ -13120,7 +13709,7 @@
               <a:buNone/>
             </a:pPr>
             <a:r>
-              <a:rPr lang="en-US" sz="1000" i="1" dirty="0">
+              <a:rPr lang="es-AR" sz="1000" i="1" noProof="0" dirty="0">
                 <a:solidFill>
                   <a:srgbClr val="A8C8D8"/>
                 </a:solidFill>
@@ -13130,7 +13719,7 @@
               </a:rPr>
               <a:t>media histórica α</a:t>
             </a:r>
-            <a:endParaRPr lang="en-US" sz="1000" dirty="0"/>
+            <a:endParaRPr lang="es-AR" sz="1000" noProof="0" dirty="0"/>
           </a:p>
         </p:txBody>
       </p:sp>
@@ -13171,7 +13760,7 @@
           <a:bodyPr/>
           <a:lstStyle/>
           <a:p>
-            <a:endParaRPr lang="es-AR"/>
+            <a:endParaRPr lang="es-AR" noProof="0" dirty="0"/>
           </a:p>
         </p:txBody>
       </p:sp>
@@ -13200,7 +13789,7 @@
               <a:buNone/>
             </a:pPr>
             <a:r>
-              <a:rPr lang="en-US" sz="2200" b="1" dirty="0">
+              <a:rPr lang="es-AR" sz="2200" b="1" noProof="0" dirty="0">
                 <a:solidFill>
                   <a:srgbClr val="D95F3B"/>
                 </a:solidFill>
@@ -13210,7 +13799,7 @@
               </a:rPr>
               <a:t>d(t)</a:t>
             </a:r>
-            <a:endParaRPr lang="en-US" sz="2200" dirty="0"/>
+            <a:endParaRPr lang="es-AR" sz="2200" noProof="0" dirty="0"/>
           </a:p>
         </p:txBody>
       </p:sp>
@@ -13239,7 +13828,7 @@
               <a:buNone/>
             </a:pPr>
             <a:r>
-              <a:rPr lang="en-US" sz="1200" dirty="0">
+              <a:rPr lang="es-AR" sz="1200" noProof="0" dirty="0">
                 <a:solidFill>
                   <a:srgbClr val="FFFFFF"/>
                 </a:solidFill>
@@ -13249,7 +13838,7 @@
               </a:rPr>
               <a:t>Tasa de Mortalidad</a:t>
             </a:r>
-            <a:endParaRPr lang="en-US" sz="1200" dirty="0"/>
+            <a:endParaRPr lang="es-AR" sz="1200" noProof="0" dirty="0"/>
           </a:p>
         </p:txBody>
       </p:sp>
@@ -13278,7 +13867,7 @@
               <a:buNone/>
             </a:pPr>
             <a:r>
-              <a:rPr lang="en-US" sz="1000" i="1" dirty="0">
+              <a:rPr lang="es-AR" sz="1000" i="1" noProof="0" dirty="0">
                 <a:solidFill>
                   <a:srgbClr val="A8C8D8"/>
                 </a:solidFill>
@@ -13288,7 +13877,7 @@
               </a:rPr>
               <a:t>media histórica γ</a:t>
             </a:r>
-            <a:endParaRPr lang="en-US" sz="1000" dirty="0"/>
+            <a:endParaRPr lang="es-AR" sz="1000" noProof="0" dirty="0"/>
           </a:p>
         </p:txBody>
       </p:sp>
@@ -13329,7 +13918,7 @@
           <a:bodyPr/>
           <a:lstStyle/>
           <a:p>
-            <a:endParaRPr lang="es-AR"/>
+            <a:endParaRPr lang="es-AR" noProof="0" dirty="0"/>
           </a:p>
         </p:txBody>
       </p:sp>
@@ -13358,7 +13947,7 @@
               <a:buNone/>
             </a:pPr>
             <a:r>
-              <a:rPr lang="en-US" sz="2200" b="1" dirty="0">
+              <a:rPr lang="es-AR" sz="2200" b="1" noProof="0" dirty="0">
                 <a:solidFill>
                   <a:srgbClr val="E8A838"/>
                 </a:solidFill>
@@ -13368,7 +13957,7 @@
               </a:rPr>
               <a:t>m(t)</a:t>
             </a:r>
-            <a:endParaRPr lang="en-US" sz="2200" dirty="0"/>
+            <a:endParaRPr lang="es-AR" sz="2200" noProof="0" dirty="0"/>
           </a:p>
         </p:txBody>
       </p:sp>
@@ -13397,7 +13986,7 @@
               <a:buNone/>
             </a:pPr>
             <a:r>
-              <a:rPr lang="en-US" sz="1200" dirty="0">
+              <a:rPr lang="es-AR" sz="1200" noProof="0" dirty="0">
                 <a:solidFill>
                   <a:srgbClr val="FFFFFF"/>
                 </a:solidFill>
@@ -13407,7 +13996,7 @@
               </a:rPr>
               <a:t>Migración Neta</a:t>
             </a:r>
-            <a:endParaRPr lang="en-US" sz="1200" dirty="0"/>
+            <a:endParaRPr lang="es-AR" sz="1200" noProof="0" dirty="0"/>
           </a:p>
         </p:txBody>
       </p:sp>
@@ -13436,7 +14025,7 @@
               <a:buNone/>
             </a:pPr>
             <a:r>
-              <a:rPr lang="en-US" sz="1000" i="1" dirty="0">
+              <a:rPr lang="es-AR" sz="1000" i="1" noProof="0" dirty="0">
                 <a:solidFill>
                   <a:srgbClr val="A8C8D8"/>
                 </a:solidFill>
@@ -13446,7 +14035,7 @@
               </a:rPr>
               <a:t>media histórica μ</a:t>
             </a:r>
-            <a:endParaRPr lang="en-US" sz="1000" dirty="0"/>
+            <a:endParaRPr lang="es-AR" sz="1000" noProof="0" dirty="0"/>
           </a:p>
         </p:txBody>
       </p:sp>
@@ -13487,7 +14076,7 @@
           <a:bodyPr/>
           <a:lstStyle/>
           <a:p>
-            <a:endParaRPr lang="es-AR"/>
+            <a:endParaRPr lang="es-AR" noProof="0" dirty="0"/>
           </a:p>
         </p:txBody>
       </p:sp>
@@ -13521,7 +14110,7 @@
           <a:bodyPr/>
           <a:lstStyle/>
           <a:p>
-            <a:endParaRPr lang="es-AR"/>
+            <a:endParaRPr lang="es-AR" noProof="0" dirty="0"/>
           </a:p>
         </p:txBody>
       </p:sp>
@@ -13550,7 +14139,7 @@
               <a:buNone/>
             </a:pPr>
             <a:r>
-              <a:rPr lang="en-US" sz="2200" b="1" dirty="0">
+              <a:rPr lang="es-AR" sz="2200" b="1" noProof="0" dirty="0">
                 <a:solidFill>
                   <a:srgbClr val="2AA8BF"/>
                 </a:solidFill>
@@ -13560,7 +14149,7 @@
               </a:rPr>
               <a:t>nn(τ)</a:t>
             </a:r>
-            <a:endParaRPr lang="en-US" sz="2200" dirty="0"/>
+            <a:endParaRPr lang="es-AR" sz="2200" noProof="0" dirty="0"/>
           </a:p>
         </p:txBody>
       </p:sp>
@@ -13589,7 +14178,7 @@
               <a:buNone/>
             </a:pPr>
             <a:r>
-              <a:rPr lang="en-US" sz="1200" dirty="0">
+              <a:rPr lang="es-AR" sz="1200" noProof="0" dirty="0">
                 <a:solidFill>
                   <a:srgbClr val="FFFFFF"/>
                 </a:solidFill>
@@ -13597,53 +14186,9 @@
                 <a:ea typeface="Calibri" pitchFamily="34" charset="-122"/>
                 <a:cs typeface="Calibri" pitchFamily="34" charset="-120"/>
               </a:rPr>
-              <a:t>Red neuronal: aprende las desviaciones temporales que los parámetros constantes no capturan (caída de </a:t>
-            </a:r>
-            <a:r>
-              <a:rPr lang="en-US" sz="1200" dirty="0" err="1">
-                <a:solidFill>
-                  <a:srgbClr val="FFFFFF"/>
-                </a:solidFill>
-                <a:latin typeface="Calibri" pitchFamily="34" charset="0"/>
-                <a:ea typeface="Calibri" pitchFamily="34" charset="-122"/>
-                <a:cs typeface="Calibri" pitchFamily="34" charset="-120"/>
-              </a:rPr>
-              <a:t>natalidad</a:t>
-            </a:r>
-            <a:r>
-              <a:rPr lang="en-US" sz="1200" dirty="0">
-                <a:solidFill>
-                  <a:srgbClr val="FFFFFF"/>
-                </a:solidFill>
-                <a:latin typeface="Calibri" pitchFamily="34" charset="0"/>
-                <a:ea typeface="Calibri" pitchFamily="34" charset="-122"/>
-                <a:cs typeface="Calibri" pitchFamily="34" charset="-120"/>
-              </a:rPr>
-              <a:t> post-2019, shock COVID, cambios en </a:t>
-            </a:r>
-            <a:r>
-              <a:rPr lang="en-US" sz="1200" dirty="0" err="1">
-                <a:solidFill>
-                  <a:srgbClr val="FFFFFF"/>
-                </a:solidFill>
-                <a:latin typeface="Calibri" pitchFamily="34" charset="0"/>
-                <a:ea typeface="Calibri" pitchFamily="34" charset="-122"/>
-                <a:cs typeface="Calibri" pitchFamily="34" charset="-120"/>
-              </a:rPr>
-              <a:t>migración</a:t>
-            </a:r>
-            <a:r>
-              <a:rPr lang="en-US" sz="1200" dirty="0">
-                <a:solidFill>
-                  <a:srgbClr val="FFFFFF"/>
-                </a:solidFill>
-                <a:latin typeface="Calibri" pitchFamily="34" charset="0"/>
-                <a:ea typeface="Calibri" pitchFamily="34" charset="-122"/>
-                <a:cs typeface="Calibri" pitchFamily="34" charset="-120"/>
-              </a:rPr>
-              <a:t>). </a:t>
-            </a:r>
-            <a:endParaRPr lang="en-US" sz="1200" dirty="0"/>
+              <a:t>Red neuronal: aprende las desviaciones temporales que los parámetros constantes no capturan (caída de natalidad post-2019, shock COVID, cambios en migración). </a:t>
+            </a:r>
+            <a:endParaRPr lang="es-AR" sz="1200" noProof="0" dirty="0"/>
           </a:p>
         </p:txBody>
       </p:sp>

--- a/UDE_Argentina_2050.pptx
+++ b/UDE_Argentina_2050.pptx
@@ -125,10 +125,18 @@
 </p:presentation>
 </file>
 
+<file path=ppt/revisionInfo.xml><?xml version="1.0" encoding="utf-8"?>
+<p1510:revInfo xmlns:a="http://schemas.openxmlformats.org/drawingml/2006/main" xmlns:r="http://schemas.openxmlformats.org/officeDocument/2006/relationships" xmlns:p1510="http://schemas.microsoft.com/office/powerpoint/2015/10/main">
+  <p1510:revLst>
+    <p1510:client id="{41D0C360-C476-F8CA-13D0-1EE525859F86}" v="37" dt="2026-07-08T19:38:11.658"/>
+  </p1510:revLst>
+</p1510:revInfo>
+</file>
+
 <file path=ppt/charts/chart1.xml><?xml version="1.0" encoding="utf-8"?>
 <c:chartSpace xmlns:c="http://schemas.openxmlformats.org/drawingml/2006/chart" xmlns:a="http://schemas.openxmlformats.org/drawingml/2006/main" xmlns:r="http://schemas.openxmlformats.org/officeDocument/2006/relationships" xmlns:c16r2="http://schemas.microsoft.com/office/drawing/2015/06/chart">
   <c:date1904 val="0"/>
-  <c:lang val="es-MX"/>
+  <c:lang val="en-US"/>
   <c:roundedCorners val="0"/>
   <c:style val="2"/>
   <c:chart>
@@ -579,7 +587,7 @@
 <file path=ppt/charts/chart2.xml><?xml version="1.0" encoding="utf-8"?>
 <c:chartSpace xmlns:c="http://schemas.openxmlformats.org/drawingml/2006/chart" xmlns:a="http://schemas.openxmlformats.org/drawingml/2006/main" xmlns:r="http://schemas.openxmlformats.org/officeDocument/2006/relationships" xmlns:c16r2="http://schemas.microsoft.com/office/drawing/2015/06/chart">
   <c:date1904 val="0"/>
-  <c:lang val="es-MX"/>
+  <c:lang val="en-US"/>
   <c:roundedCorners val="0"/>
   <c:style val="2"/>
   <c:chart>
@@ -901,7 +909,7 @@
 <file path=ppt/charts/chart3.xml><?xml version="1.0" encoding="utf-8"?>
 <c:chartSpace xmlns:c="http://schemas.openxmlformats.org/drawingml/2006/chart" xmlns:a="http://schemas.openxmlformats.org/drawingml/2006/main" xmlns:r="http://schemas.openxmlformats.org/officeDocument/2006/relationships" xmlns:c16r2="http://schemas.microsoft.com/office/drawing/2015/06/chart">
   <c:date1904 val="0"/>
-  <c:lang val="es-MX"/>
+  <c:lang val="en-US"/>
   <c:roundedCorners val="0"/>
   <c:style val="2"/>
   <c:chart>
@@ -1352,7 +1360,7 @@
 <file path=ppt/charts/chart4.xml><?xml version="1.0" encoding="utf-8"?>
 <c:chartSpace xmlns:c="http://schemas.openxmlformats.org/drawingml/2006/chart" xmlns:a="http://schemas.openxmlformats.org/drawingml/2006/main" xmlns:r="http://schemas.openxmlformats.org/officeDocument/2006/relationships" xmlns:c16r2="http://schemas.microsoft.com/office/drawing/2015/06/chart">
   <c:date1904 val="0"/>
-  <c:lang val="es-MX"/>
+  <c:lang val="en-US"/>
   <c:roundedCorners val="0"/>
   <c:style val="2"/>
   <c:chart>
@@ -1657,7 +1665,7 @@
 <file path=ppt/charts/chart5.xml><?xml version="1.0" encoding="utf-8"?>
 <c:chartSpace xmlns:c="http://schemas.openxmlformats.org/drawingml/2006/chart" xmlns:a="http://schemas.openxmlformats.org/drawingml/2006/main" xmlns:r="http://schemas.openxmlformats.org/officeDocument/2006/relationships" xmlns:c16r2="http://schemas.microsoft.com/office/drawing/2015/06/chart">
   <c:date1904 val="0"/>
-  <c:lang val="es-MX"/>
+  <c:lang val="en-US"/>
   <c:roundedCorners val="0"/>
   <c:style val="2"/>
   <c:chart>
@@ -9255,14 +9263,14 @@
           <p:nvPr>
             <p:extLst>
               <p:ext uri="{D42A27DB-BD31-4B8C-83A1-F6EECF244321}">
-                <p14:modId xmlns:p14="http://schemas.microsoft.com/office/powerpoint/2010/main" val="3716067846"/>
+                <p14:modId xmlns:p14="http://schemas.microsoft.com/office/powerpoint/2010/main" val="2922111334"/>
               </p:ext>
             </p:extLst>
           </p:nvPr>
         </p:nvGraphicFramePr>
         <p:xfrm>
           <a:off x="365760" y="960120"/>
-          <a:ext cx="8412480" cy="3566160"/>
+          <a:ext cx="8412480" cy="3083560"/>
         </p:xfrm>
         <a:graphic>
           <a:graphicData uri="http://schemas.openxmlformats.org/drawingml/2006/table">
@@ -9512,15 +9520,15 @@
                         <a:buNone/>
                       </a:pPr>
                       <a:r>
-                        <a:rPr lang="es-AR" sz="1300" noProof="0" dirty="0">
+                        <a:rPr lang="es-AR" sz="1300" noProof="0">
                           <a:solidFill>
                             <a:srgbClr val="1B2A4A"/>
                           </a:solidFill>
-                          <a:latin typeface="Calibri" pitchFamily="34" charset="0"/>
-                          <a:ea typeface="Calibri" pitchFamily="34" charset="-122"/>
-                          <a:cs typeface="Calibri" pitchFamily="34" charset="-120"/>
+                          <a:latin typeface="Calibri"/>
+                          <a:ea typeface="Calibri"/>
+                          <a:cs typeface="Calibri"/>
                         </a:rPr>
-                        <a:t>TBN — Tasa Bruta de Natalidad</a:t>
+                        <a:t>TBN — Tasa Bruta de Natalidad (o TGF)</a:t>
                       </a:r>
                       <a:endParaRPr lang="es-AR" sz="1300" noProof="0" dirty="0">
                         <a:latin typeface="Calibri" charset="0"/>
@@ -10356,239 +10364,6 @@
                         <a:buNone/>
                       </a:pPr>
                       <a:r>
-                        <a:rPr lang="es-AR" sz="1300" noProof="0" dirty="0">
-                          <a:solidFill>
-                            <a:srgbClr val="1B2A4A"/>
-                          </a:solidFill>
-                          <a:latin typeface="Calibri" pitchFamily="34" charset="0"/>
-                          <a:ea typeface="Calibri" pitchFamily="34" charset="-122"/>
-                          <a:cs typeface="Calibri" pitchFamily="34" charset="-120"/>
-                        </a:rPr>
-                        <a:t>TGF — Tasa Global de Fecundidad</a:t>
-                      </a:r>
-                      <a:endParaRPr lang="es-AR" sz="1300" noProof="0" dirty="0">
-                        <a:latin typeface="Calibri" charset="0"/>
-                        <a:ea typeface="Calibri" charset="0"/>
-                        <a:cs typeface="Calibri" charset="0"/>
-                      </a:endParaRPr>
-                    </a:p>
-                  </a:txBody>
-                  <a:tcPr marL="101600" marR="101600" marT="63500" marB="63500" anchor="ctr">
-                    <a:lnL w="6350" cap="flat" cmpd="sng" algn="ctr">
-                      <a:solidFill>
-                        <a:srgbClr val="D1E9F0"/>
-                      </a:solidFill>
-                      <a:prstDash val="solid"/>
-                      <a:round/>
-                      <a:headEnd type="none" w="med" len="med"/>
-                      <a:tailEnd type="none" w="med" len="med"/>
-                    </a:lnL>
-                    <a:lnR w="6350" cap="flat" cmpd="sng" algn="ctr">
-                      <a:solidFill>
-                        <a:srgbClr val="D1E9F0"/>
-                      </a:solidFill>
-                      <a:prstDash val="solid"/>
-                      <a:round/>
-                      <a:headEnd type="none" w="med" len="med"/>
-                      <a:tailEnd type="none" w="med" len="med"/>
-                    </a:lnR>
-                    <a:lnT w="6350" cap="flat" cmpd="sng" algn="ctr">
-                      <a:solidFill>
-                        <a:srgbClr val="D1E9F0"/>
-                      </a:solidFill>
-                      <a:prstDash val="solid"/>
-                      <a:round/>
-                      <a:headEnd type="none" w="med" len="med"/>
-                      <a:tailEnd type="none" w="med" len="med"/>
-                    </a:lnT>
-                    <a:lnB w="6350" cap="flat" cmpd="sng" algn="ctr">
-                      <a:solidFill>
-                        <a:srgbClr val="D1E9F0"/>
-                      </a:solidFill>
-                      <a:prstDash val="solid"/>
-                      <a:round/>
-                      <a:headEnd type="none" w="med" len="med"/>
-                      <a:tailEnd type="none" w="med" len="med"/>
-                    </a:lnB>
-                    <a:solidFill>
-                      <a:srgbClr val="FFFFFF"/>
-                    </a:solidFill>
-                  </a:tcPr>
-                </a:tc>
-                <a:tc>
-                  <a:txBody>
-                    <a:bodyPr/>
-                    <a:lstStyle/>
-                    <a:p>
-                      <a:pPr marL="0" indent="0" algn="l">
-                        <a:buNone/>
-                      </a:pPr>
-                      <a:r>
-                        <a:rPr lang="es-AR" sz="1300" noProof="0" dirty="0">
-                          <a:solidFill>
-                            <a:srgbClr val="1B2A4A"/>
-                          </a:solidFill>
-                          <a:latin typeface="Calibri" pitchFamily="34" charset="0"/>
-                          <a:ea typeface="Calibri" pitchFamily="34" charset="-122"/>
-                          <a:cs typeface="Calibri" pitchFamily="34" charset="-120"/>
-                        </a:rPr>
-                        <a:t>(</a:t>
-                      </a:r>
-                      <a:r>
-                        <a:rPr lang="es-AR" sz="1300" noProof="0" dirty="0" err="1">
-                          <a:solidFill>
-                            <a:srgbClr val="1B2A4A"/>
-                          </a:solidFill>
-                          <a:latin typeface="Calibri" pitchFamily="34" charset="0"/>
-                          <a:ea typeface="Calibri" pitchFamily="34" charset="-122"/>
-                          <a:cs typeface="Calibri" pitchFamily="34" charset="-120"/>
-                        </a:rPr>
-                        <a:t>precalculada</a:t>
-                      </a:r>
-                      <a:r>
-                        <a:rPr lang="es-AR" sz="1300" noProof="0" dirty="0">
-                          <a:solidFill>
-                            <a:srgbClr val="1B2A4A"/>
-                          </a:solidFill>
-                          <a:latin typeface="Calibri" pitchFamily="34" charset="0"/>
-                          <a:ea typeface="Calibri" pitchFamily="34" charset="-122"/>
-                          <a:cs typeface="Calibri" pitchFamily="34" charset="-120"/>
-                        </a:rPr>
-                        <a:t>)</a:t>
-                      </a:r>
-                      <a:endParaRPr lang="es-AR" sz="1300" noProof="0" dirty="0">
-                        <a:latin typeface="Calibri" charset="0"/>
-                        <a:ea typeface="Calibri" charset="0"/>
-                        <a:cs typeface="Calibri" charset="0"/>
-                      </a:endParaRPr>
-                    </a:p>
-                  </a:txBody>
-                  <a:tcPr marL="101600" marR="101600" marT="63500" marB="63500" anchor="ctr">
-                    <a:lnL w="6350" cap="flat" cmpd="sng" algn="ctr">
-                      <a:solidFill>
-                        <a:srgbClr val="D1E9F0"/>
-                      </a:solidFill>
-                      <a:prstDash val="solid"/>
-                      <a:round/>
-                      <a:headEnd type="none" w="med" len="med"/>
-                      <a:tailEnd type="none" w="med" len="med"/>
-                    </a:lnL>
-                    <a:lnR w="6350" cap="flat" cmpd="sng" algn="ctr">
-                      <a:solidFill>
-                        <a:srgbClr val="D1E9F0"/>
-                      </a:solidFill>
-                      <a:prstDash val="solid"/>
-                      <a:round/>
-                      <a:headEnd type="none" w="med" len="med"/>
-                      <a:tailEnd type="none" w="med" len="med"/>
-                    </a:lnR>
-                    <a:lnT w="6350" cap="flat" cmpd="sng" algn="ctr">
-                      <a:solidFill>
-                        <a:srgbClr val="D1E9F0"/>
-                      </a:solidFill>
-                      <a:prstDash val="solid"/>
-                      <a:round/>
-                      <a:headEnd type="none" w="med" len="med"/>
-                      <a:tailEnd type="none" w="med" len="med"/>
-                    </a:lnT>
-                    <a:lnB w="6350" cap="flat" cmpd="sng" algn="ctr">
-                      <a:solidFill>
-                        <a:srgbClr val="D1E9F0"/>
-                      </a:solidFill>
-                      <a:prstDash val="solid"/>
-                      <a:round/>
-                      <a:headEnd type="none" w="med" len="med"/>
-                      <a:tailEnd type="none" w="med" len="med"/>
-                    </a:lnB>
-                    <a:solidFill>
-                      <a:srgbClr val="FFFFFF"/>
-                    </a:solidFill>
-                  </a:tcPr>
-                </a:tc>
-                <a:tc>
-                  <a:txBody>
-                    <a:bodyPr/>
-                    <a:lstStyle/>
-                    <a:p>
-                      <a:pPr marL="0" indent="0" algn="l">
-                        <a:buNone/>
-                      </a:pPr>
-                      <a:r>
-                        <a:rPr lang="es-AR" sz="1300" noProof="0" dirty="0">
-                          <a:solidFill>
-                            <a:srgbClr val="1B2A4A"/>
-                          </a:solidFill>
-                          <a:latin typeface="Calibri" pitchFamily="34" charset="0"/>
-                          <a:ea typeface="Calibri" pitchFamily="34" charset="-122"/>
-                          <a:cs typeface="Calibri" pitchFamily="34" charset="-120"/>
-                        </a:rPr>
-                        <a:t>Hijos esperados por mujer en edad fértil</a:t>
-                      </a:r>
-                      <a:endParaRPr lang="es-AR" sz="1300" noProof="0" dirty="0">
-                        <a:latin typeface="Calibri" charset="0"/>
-                        <a:ea typeface="Calibri" charset="0"/>
-                        <a:cs typeface="Calibri" charset="0"/>
-                      </a:endParaRPr>
-                    </a:p>
-                  </a:txBody>
-                  <a:tcPr marL="101600" marR="101600" marT="63500" marB="63500" anchor="ctr">
-                    <a:lnL w="6350" cap="flat" cmpd="sng" algn="ctr">
-                      <a:solidFill>
-                        <a:srgbClr val="D1E9F0"/>
-                      </a:solidFill>
-                      <a:prstDash val="solid"/>
-                      <a:round/>
-                      <a:headEnd type="none" w="med" len="med"/>
-                      <a:tailEnd type="none" w="med" len="med"/>
-                    </a:lnL>
-                    <a:lnR w="6350" cap="flat" cmpd="sng" algn="ctr">
-                      <a:solidFill>
-                        <a:srgbClr val="D1E9F0"/>
-                      </a:solidFill>
-                      <a:prstDash val="solid"/>
-                      <a:round/>
-                      <a:headEnd type="none" w="med" len="med"/>
-                      <a:tailEnd type="none" w="med" len="med"/>
-                    </a:lnR>
-                    <a:lnT w="6350" cap="flat" cmpd="sng" algn="ctr">
-                      <a:solidFill>
-                        <a:srgbClr val="D1E9F0"/>
-                      </a:solidFill>
-                      <a:prstDash val="solid"/>
-                      <a:round/>
-                      <a:headEnd type="none" w="med" len="med"/>
-                      <a:tailEnd type="none" w="med" len="med"/>
-                    </a:lnT>
-                    <a:lnB w="6350" cap="flat" cmpd="sng" algn="ctr">
-                      <a:solidFill>
-                        <a:srgbClr val="D1E9F0"/>
-                      </a:solidFill>
-                      <a:prstDash val="solid"/>
-                      <a:round/>
-                      <a:headEnd type="none" w="med" len="med"/>
-                      <a:tailEnd type="none" w="med" len="med"/>
-                    </a:lnB>
-                    <a:solidFill>
-                      <a:srgbClr val="FFFFFF"/>
-                    </a:solidFill>
-                  </a:tcPr>
-                </a:tc>
-                <a:extLst>
-                  <a:ext uri="{0D108BD9-81ED-4DB2-BD59-A6C34878D82A}">
-                    <a16:rowId xmlns:a16="http://schemas.microsoft.com/office/drawing/2014/main" val="10005"/>
-                  </a:ext>
-                </a:extLst>
-              </a:tr>
-              <a:tr h="502920">
-                <a:tc>
-                  <a:txBody>
-                    <a:bodyPr/>
-                    <a:lstStyle/>
-                    <a:p>
-                      <a:pPr marL="0" indent="0" algn="l">
-                        <a:buNone/>
-                      </a:pPr>
-                      <a:r>
                         <a:rPr lang="es-AR" sz="1300" kern="1200" noProof="0" dirty="0">
                           <a:solidFill>
                             <a:srgbClr val="1B2A4A"/>
@@ -11397,13 +11172,28 @@
                 <a:solidFill>
                   <a:srgbClr val="E8A838"/>
                 </a:solidFill>
-                <a:latin typeface="Calibri" pitchFamily="34" charset="0"/>
-                <a:ea typeface="Calibri" pitchFamily="34" charset="-122"/>
-                <a:cs typeface="Calibri" pitchFamily="34" charset="-120"/>
-              </a:rPr>
-              <a:t>~1,5‰</a:t>
-            </a:r>
-            <a:endParaRPr lang="es-AR" sz="2600" noProof="0" dirty="0"/>
+                <a:latin typeface="Calibri"/>
+                <a:ea typeface="Calibri"/>
+                <a:cs typeface="Calibri"/>
+              </a:rPr>
+              <a:t>~1,5</a:t>
+            </a:r>
+            <a:r>
+              <a:rPr lang="es-AR" sz="2600" b="1" dirty="0">
+                <a:solidFill>
+                  <a:srgbClr val="E8A838"/>
+                </a:solidFill>
+                <a:latin typeface="Calibri"/>
+                <a:ea typeface="Calibri"/>
+                <a:cs typeface="Calibri"/>
+              </a:rPr>
+              <a:t>‰</a:t>
+            </a:r>
+            <a:endParaRPr lang="es-AR" sz="2600" noProof="0">
+              <a:latin typeface="Calibri"/>
+              <a:ea typeface="Calibri"/>
+              <a:cs typeface="Calibri"/>
+            </a:endParaRPr>
           </a:p>
         </p:txBody>
       </p:sp>
@@ -11876,17 +11666,54 @@
               <a:buNone/>
             </a:pPr>
             <a:r>
+              <a:rPr lang="es-AR" sz="1100" noProof="0">
+                <a:solidFill>
+                  <a:srgbClr val="1B2A4A"/>
+                </a:solidFill>
+                <a:latin typeface="Calibri"/>
+                <a:ea typeface="Calibri"/>
+                <a:cs typeface="Calibri"/>
+              </a:rPr>
+              <a:t>Cuando la </a:t>
+            </a:r>
+            <a:r>
+              <a:rPr lang="es-AR" sz="1100">
+                <a:solidFill>
+                  <a:srgbClr val="1B2A4A"/>
+                </a:solidFill>
+                <a:latin typeface="Calibri"/>
+                <a:ea typeface="Calibri"/>
+                <a:cs typeface="Calibri"/>
+              </a:rPr>
+              <a:t>TBN</a:t>
+            </a:r>
+            <a:r>
+              <a:rPr lang="es-AR" sz="1100" noProof="0">
+                <a:solidFill>
+                  <a:srgbClr val="1B2A4A"/>
+                </a:solidFill>
+                <a:latin typeface="Calibri"/>
+                <a:ea typeface="Calibri"/>
+                <a:cs typeface="Calibri"/>
+              </a:rPr>
+              <a:t> cae por debajo de </a:t>
+            </a:r>
+            <a:r>
               <a:rPr lang="es-AR" sz="1100" noProof="0" dirty="0">
                 <a:solidFill>
                   <a:srgbClr val="1B2A4A"/>
                 </a:solidFill>
-                <a:latin typeface="Calibri" pitchFamily="34" charset="0"/>
-                <a:ea typeface="Calibri" pitchFamily="34" charset="-122"/>
-                <a:cs typeface="Calibri" pitchFamily="34" charset="-120"/>
-              </a:rPr>
-              <a:t>Cuando la TGF cae por debajo de 2,1, cada generación no se reemplaza completamente a sí misma.</a:t>
-            </a:r>
-            <a:endParaRPr lang="es-AR" sz="1100" noProof="0" dirty="0"/>
+                <a:latin typeface="Calibri"/>
+                <a:ea typeface="Calibri"/>
+                <a:cs typeface="Calibri"/>
+              </a:rPr>
+              <a:t>2,1, cada generación no se reemplaza completamente a sí misma.</a:t>
+            </a:r>
+            <a:endParaRPr lang="es-AR" sz="1100" noProof="0" dirty="0">
+              <a:latin typeface="Calibri"/>
+              <a:ea typeface="Calibri"/>
+              <a:cs typeface="Calibri"/>
+            </a:endParaRPr>
           </a:p>
         </p:txBody>
       </p:sp>
@@ -13186,7 +13013,7 @@
           <a:noFill/>
         </p:spPr>
         <p:txBody>
-          <a:bodyPr wrap="square">
+          <a:bodyPr wrap="square" lIns="91440" tIns="45720" rIns="91440" bIns="45720" anchor="t">
             <a:spAutoFit/>
           </a:bodyPr>
           <a:lstStyle/>
@@ -13196,9 +13023,33 @@
                 <a:solidFill>
                   <a:srgbClr val="475569"/>
                 </a:solidFill>
-                <a:latin typeface="Lato" panose="020F0502020204030203" pitchFamily="34" charset="0"/>
-              </a:rPr>
-              <a:t>Debido a que la red neuronal de la UDE va a aprender una corrección nn(τ) positiva en 2012–2022, la red neuronal termina sobreestimando a la población. </a:t>
+                <a:latin typeface="Lato"/>
+                <a:ea typeface="Lato"/>
+                <a:cs typeface="Lato"/>
+              </a:rPr>
+              <a:t>Debido a que la red neuronal de la UDE va a aprender una corrección </a:t>
+            </a:r>
+            <a:r>
+              <a:rPr lang="es-AR" sz="1200" dirty="0" err="1">
+                <a:solidFill>
+                  <a:srgbClr val="475569"/>
+                </a:solidFill>
+                <a:latin typeface="Lato"/>
+                <a:ea typeface="Lato"/>
+                <a:cs typeface="Lato"/>
+              </a:rPr>
+              <a:t>nn</a:t>
+            </a:r>
+            <a:r>
+              <a:rPr lang="es-AR" sz="1200" dirty="0">
+                <a:solidFill>
+                  <a:srgbClr val="475569"/>
+                </a:solidFill>
+                <a:latin typeface="Lato"/>
+                <a:ea typeface="Lato"/>
+                <a:cs typeface="Lato"/>
+              </a:rPr>
+              <a:t>(τ) positiva en 2012–2022, la red neuronal termina sobreestimando a la población. </a:t>
             </a:r>
           </a:p>
           <a:p>
@@ -13215,16 +13066,41 @@
                 <a:solidFill>
                   <a:srgbClr val="475569"/>
                 </a:solidFill>
-                <a:latin typeface="Lato" panose="020F0502020204030203" pitchFamily="34" charset="0"/>
-              </a:rPr>
-              <a:t>Necesitaremos entonces modelar el agotamiento de este crecimiento extra mediante un factor de decaimiento exponencial λ</a:t>
+                <a:latin typeface="Lato"/>
+                <a:ea typeface="Lato"/>
+                <a:cs typeface="Lato"/>
+              </a:rPr>
+              <a:t>Necesitaremos </a:t>
+            </a:r>
+            <a:r>
+              <a:rPr lang="es-AR" sz="1200">
+                <a:solidFill>
+                  <a:srgbClr val="475569"/>
+                </a:solidFill>
+                <a:latin typeface="Lato"/>
+                <a:ea typeface="Lato"/>
+                <a:cs typeface="Lato"/>
+              </a:rPr>
+              <a:t>modelar el agotamiento de </a:t>
+            </a:r>
+            <a:r>
+              <a:rPr lang="es-AR" sz="1200" dirty="0">
+                <a:solidFill>
+                  <a:srgbClr val="475569"/>
+                </a:solidFill>
+                <a:latin typeface="Lato"/>
+                <a:ea typeface="Lato"/>
+                <a:cs typeface="Lato"/>
+              </a:rPr>
+              <a:t>este crecimiento extra mediante un factor de decaimiento exponencial λ</a:t>
             </a:r>
             <a:r>
               <a:rPr lang="es-AR" sz="1200" b="1" dirty="0">
                 <a:solidFill>
                   <a:srgbClr val="005088"/>
                 </a:solidFill>
-                <a:latin typeface="Poppins" panose="00000500000000000000" pitchFamily="2" charset="0"/>
+                <a:latin typeface="Poppins"/>
+                <a:cs typeface="Poppins"/>
               </a:rPr>
               <a:t> </a:t>
             </a:r>
@@ -13233,7 +13109,9 @@
                 <a:solidFill>
                   <a:srgbClr val="475569"/>
                 </a:solidFill>
-                <a:latin typeface="Lato" panose="020F0502020204030203" pitchFamily="34" charset="0"/>
+                <a:latin typeface="Lato"/>
+                <a:ea typeface="Lato"/>
+                <a:cs typeface="Lato"/>
               </a:rPr>
               <a:t>que representa la tasa de desaceleración anual de dicha corrección.</a:t>
             </a:r>
@@ -13263,40 +13141,50 @@
           <a:noFill/>
         </p:spPr>
         <p:txBody>
-          <a:bodyPr wrap="square">
+          <a:bodyPr wrap="square" lIns="91440" tIns="45720" rIns="91440" bIns="45720" anchor="t">
             <a:spAutoFit/>
           </a:bodyPr>
           <a:lstStyle/>
           <a:p>
             <a:pPr algn="ctr"/>
             <a:r>
-              <a:rPr lang="es-AR" sz="1400" b="1" dirty="0">
+              <a:rPr lang="es-AR" sz="1400" b="1">
                 <a:solidFill>
                   <a:srgbClr val="005088"/>
                 </a:solidFill>
-                <a:latin typeface="Poppins" panose="00000500000000000000" pitchFamily="2" charset="0"/>
+                <a:latin typeface="Poppins"/>
+                <a:cs typeface="Poppins"/>
               </a:rPr>
               <a:t>4</a:t>
             </a:r>
             <a:r>
-              <a:rPr lang="es-AR" sz="1400" b="1" i="0" u="none" strike="noStrike" noProof="0" dirty="0">
+              <a:rPr lang="es-AR" sz="1400" b="1" i="0" u="none" strike="noStrike" noProof="0">
                 <a:solidFill>
                   <a:srgbClr val="005088"/>
                 </a:solidFill>
                 <a:effectLst/>
-                <a:latin typeface="Poppins" panose="00000500000000000000" pitchFamily="2" charset="0"/>
+                <a:latin typeface="Poppins"/>
+                <a:cs typeface="Poppins"/>
               </a:rPr>
               <a:t>. </a:t>
             </a:r>
             <a:r>
-              <a:rPr lang="es-AR" sz="1400" b="1" dirty="0">
+              <a:rPr lang="es-AR" sz="1400" b="1">
                 <a:solidFill>
                   <a:srgbClr val="005088"/>
                 </a:solidFill>
-                <a:latin typeface="Poppins" panose="00000500000000000000" pitchFamily="2" charset="0"/>
-              </a:rPr>
-              <a:t>Mejorar con λ </a:t>
-            </a:r>
+                <a:latin typeface="Poppins"/>
+                <a:cs typeface="Poppins"/>
+              </a:rPr>
+              <a:t>Mejorar con λ </a:t>
+            </a:r>
+            <a:endParaRPr lang="es-AR" sz="1400" b="1" dirty="0">
+              <a:solidFill>
+                <a:srgbClr val="005088"/>
+              </a:solidFill>
+              <a:latin typeface="Poppins"/>
+              <a:cs typeface="Poppins"/>
+            </a:endParaRPr>
           </a:p>
           <a:p>
             <a:pPr>
